--- a/docs/pptx/carbo/jx-carbo-linsubhr-ratio-hosp7.pptx
+++ b/docs/pptx/carbo/jx-carbo-linsubhr-ratio-hosp7.pptx
@@ -2271,7 +2271,7 @@
           </p:nvSpPr>
           <p:spPr>
             <a:xfrm>
-              <a:off x="817517" y="5114368"/>
+              <a:off x="817517" y="5142518"/>
               <a:ext cx="7799693" cy="0"/>
             </a:xfrm>
             <a:custGeom>
@@ -2314,7 +2314,7 @@
           </p:nvSpPr>
           <p:spPr>
             <a:xfrm>
-              <a:off x="817517" y="4244691"/>
+              <a:off x="817517" y="4313054"/>
               <a:ext cx="7799693" cy="0"/>
             </a:xfrm>
             <a:custGeom>
@@ -2357,7 +2357,7 @@
           </p:nvSpPr>
           <p:spPr>
             <a:xfrm>
-              <a:off x="817517" y="3375014"/>
+              <a:off x="817517" y="3483591"/>
               <a:ext cx="7799693" cy="0"/>
             </a:xfrm>
             <a:custGeom>
@@ -2400,7 +2400,7 @@
           </p:nvSpPr>
           <p:spPr>
             <a:xfrm>
-              <a:off x="817517" y="2505337"/>
+              <a:off x="817517" y="2654127"/>
               <a:ext cx="7799693" cy="0"/>
             </a:xfrm>
             <a:custGeom>
@@ -2443,15 +2443,15 @@
           </p:nvSpPr>
           <p:spPr>
             <a:xfrm>
-              <a:off x="1615213" y="1896563"/>
-              <a:ext cx="0" cy="3826579"/>
+              <a:off x="1615213" y="2073503"/>
+              <a:ext cx="0" cy="3649639"/>
             </a:xfrm>
             <a:custGeom>
               <a:avLst/>
               <a:pathLst>
-                <a:path w="0" h="3826579">
+                <a:path w="0" h="3649639">
                   <a:moveTo>
-                    <a:pt x="0" y="3826579"/>
+                    <a:pt x="0" y="3649639"/>
                   </a:moveTo>
                   <a:lnTo>
                     <a:pt x="0" y="0"/>
@@ -2486,15 +2486,15 @@
           </p:nvSpPr>
           <p:spPr>
             <a:xfrm>
-              <a:off x="3387871" y="1896563"/>
-              <a:ext cx="0" cy="3826579"/>
+              <a:off x="3387871" y="2073503"/>
+              <a:ext cx="0" cy="3649639"/>
             </a:xfrm>
             <a:custGeom>
               <a:avLst/>
               <a:pathLst>
-                <a:path w="0" h="3826579">
+                <a:path w="0" h="3649639">
                   <a:moveTo>
-                    <a:pt x="0" y="3826579"/>
+                    <a:pt x="0" y="3649639"/>
                   </a:moveTo>
                   <a:lnTo>
                     <a:pt x="0" y="0"/>
@@ -2529,15 +2529,15 @@
           </p:nvSpPr>
           <p:spPr>
             <a:xfrm>
-              <a:off x="5160528" y="1896563"/>
-              <a:ext cx="0" cy="3826579"/>
+              <a:off x="5160528" y="2073503"/>
+              <a:ext cx="0" cy="3649639"/>
             </a:xfrm>
             <a:custGeom>
               <a:avLst/>
               <a:pathLst>
-                <a:path w="0" h="3826579">
+                <a:path w="0" h="3649639">
                   <a:moveTo>
-                    <a:pt x="0" y="3826579"/>
+                    <a:pt x="0" y="3649639"/>
                   </a:moveTo>
                   <a:lnTo>
                     <a:pt x="0" y="0"/>
@@ -2572,15 +2572,15 @@
           </p:nvSpPr>
           <p:spPr>
             <a:xfrm>
-              <a:off x="6933186" y="1896563"/>
-              <a:ext cx="0" cy="3826579"/>
+              <a:off x="6933186" y="2073503"/>
+              <a:ext cx="0" cy="3649639"/>
             </a:xfrm>
             <a:custGeom>
               <a:avLst/>
               <a:pathLst>
-                <a:path w="0" h="3826579">
+                <a:path w="0" h="3649639">
                   <a:moveTo>
-                    <a:pt x="0" y="3826579"/>
+                    <a:pt x="0" y="3649639"/>
                   </a:moveTo>
                   <a:lnTo>
                     <a:pt x="0" y="0"/>
@@ -2615,7 +2615,7 @@
           </p:nvSpPr>
           <p:spPr>
             <a:xfrm>
-              <a:off x="817517" y="5549207"/>
+              <a:off x="817517" y="5557249"/>
               <a:ext cx="7799693" cy="0"/>
             </a:xfrm>
             <a:custGeom>
@@ -2658,7 +2658,7 @@
           </p:nvSpPr>
           <p:spPr>
             <a:xfrm>
-              <a:off x="817517" y="4679530"/>
+              <a:off x="817517" y="4727786"/>
               <a:ext cx="7799693" cy="0"/>
             </a:xfrm>
             <a:custGeom>
@@ -2701,7 +2701,7 @@
           </p:nvSpPr>
           <p:spPr>
             <a:xfrm>
-              <a:off x="817517" y="3809853"/>
+              <a:off x="817517" y="3898322"/>
               <a:ext cx="7799693" cy="0"/>
             </a:xfrm>
             <a:custGeom>
@@ -2744,7 +2744,7 @@
           </p:nvSpPr>
           <p:spPr>
             <a:xfrm>
-              <a:off x="817517" y="2940175"/>
+              <a:off x="817517" y="3068859"/>
               <a:ext cx="7799693" cy="0"/>
             </a:xfrm>
             <a:custGeom>
@@ -2787,7 +2787,7 @@
           </p:nvSpPr>
           <p:spPr>
             <a:xfrm>
-              <a:off x="817517" y="2070498"/>
+              <a:off x="817517" y="2239395"/>
               <a:ext cx="7799693" cy="0"/>
             </a:xfrm>
             <a:custGeom>
@@ -2830,15 +2830,15 @@
           </p:nvSpPr>
           <p:spPr>
             <a:xfrm>
-              <a:off x="2501542" y="1896563"/>
-              <a:ext cx="0" cy="3826579"/>
+              <a:off x="2501542" y="2073503"/>
+              <a:ext cx="0" cy="3649639"/>
             </a:xfrm>
             <a:custGeom>
               <a:avLst/>
               <a:pathLst>
-                <a:path w="0" h="3826579">
+                <a:path w="0" h="3649639">
                   <a:moveTo>
-                    <a:pt x="0" y="3826579"/>
+                    <a:pt x="0" y="3649639"/>
                   </a:moveTo>
                   <a:lnTo>
                     <a:pt x="0" y="0"/>
@@ -2873,15 +2873,15 @@
           </p:nvSpPr>
           <p:spPr>
             <a:xfrm>
-              <a:off x="4274200" y="1896563"/>
-              <a:ext cx="0" cy="3826579"/>
+              <a:off x="4274200" y="2073503"/>
+              <a:ext cx="0" cy="3649639"/>
             </a:xfrm>
             <a:custGeom>
               <a:avLst/>
               <a:pathLst>
-                <a:path w="0" h="3826579">
+                <a:path w="0" h="3649639">
                   <a:moveTo>
-                    <a:pt x="0" y="3826579"/>
+                    <a:pt x="0" y="3649639"/>
                   </a:moveTo>
                   <a:lnTo>
                     <a:pt x="0" y="0"/>
@@ -2916,15 +2916,15 @@
           </p:nvSpPr>
           <p:spPr>
             <a:xfrm>
-              <a:off x="6046857" y="1896563"/>
-              <a:ext cx="0" cy="3826579"/>
+              <a:off x="6046857" y="2073503"/>
+              <a:ext cx="0" cy="3649639"/>
             </a:xfrm>
             <a:custGeom>
               <a:avLst/>
               <a:pathLst>
-                <a:path w="0" h="3826579">
+                <a:path w="0" h="3649639">
                   <a:moveTo>
-                    <a:pt x="0" y="3826579"/>
+                    <a:pt x="0" y="3649639"/>
                   </a:moveTo>
                   <a:lnTo>
                     <a:pt x="0" y="0"/>
@@ -2959,15 +2959,15 @@
           </p:nvSpPr>
           <p:spPr>
             <a:xfrm>
-              <a:off x="7819515" y="1896563"/>
-              <a:ext cx="0" cy="3826579"/>
+              <a:off x="7819515" y="2073503"/>
+              <a:ext cx="0" cy="3649639"/>
             </a:xfrm>
             <a:custGeom>
               <a:avLst/>
               <a:pathLst>
-                <a:path w="0" h="3826579">
+                <a:path w="0" h="3649639">
                   <a:moveTo>
-                    <a:pt x="0" y="3826579"/>
+                    <a:pt x="0" y="3649639"/>
                   </a:moveTo>
                   <a:lnTo>
                     <a:pt x="0" y="0"/>
@@ -3002,561 +3002,561 @@
           </p:nvSpPr>
           <p:spPr>
             <a:xfrm>
-              <a:off x="817517" y="1896563"/>
-              <a:ext cx="7403783" cy="3571255"/>
+              <a:off x="817517" y="2073503"/>
+              <a:ext cx="7403783" cy="3406122"/>
             </a:xfrm>
             <a:custGeom>
               <a:avLst/>
               <a:pathLst>
-                <a:path w="7403783" h="3571255">
+                <a:path w="7403783" h="3406122">
                   <a:moveTo>
                     <a:pt x="985647" y="0"/>
                   </a:moveTo>
                   <a:lnTo>
-                    <a:pt x="1043281" y="123333"/>
-                  </a:lnTo>
-                  <a:lnTo>
-                    <a:pt x="1119914" y="280039"/>
-                  </a:lnTo>
-                  <a:lnTo>
-                    <a:pt x="1196546" y="429787"/>
-                  </a:lnTo>
-                  <a:lnTo>
-                    <a:pt x="1273179" y="572886"/>
-                  </a:lnTo>
-                  <a:lnTo>
-                    <a:pt x="1349811" y="709631"/>
-                  </a:lnTo>
-                  <a:lnTo>
-                    <a:pt x="1426444" y="840305"/>
-                  </a:lnTo>
-                  <a:lnTo>
-                    <a:pt x="1503076" y="965176"/>
-                  </a:lnTo>
-                  <a:lnTo>
-                    <a:pt x="1579709" y="1084504"/>
-                  </a:lnTo>
-                  <a:lnTo>
-                    <a:pt x="1656342" y="1198532"/>
-                  </a:lnTo>
-                  <a:lnTo>
-                    <a:pt x="1732974" y="1307498"/>
-                  </a:lnTo>
-                  <a:lnTo>
-                    <a:pt x="1809607" y="1411626"/>
-                  </a:lnTo>
-                  <a:lnTo>
-                    <a:pt x="1886239" y="1511130"/>
-                  </a:lnTo>
-                  <a:lnTo>
-                    <a:pt x="1962872" y="1606216"/>
-                  </a:lnTo>
-                  <a:lnTo>
-                    <a:pt x="2039504" y="1697080"/>
-                  </a:lnTo>
-                  <a:lnTo>
-                    <a:pt x="2116137" y="1783910"/>
-                  </a:lnTo>
-                  <a:lnTo>
-                    <a:pt x="2192769" y="1866884"/>
-                  </a:lnTo>
-                  <a:lnTo>
-                    <a:pt x="2269402" y="1946174"/>
-                  </a:lnTo>
-                  <a:lnTo>
-                    <a:pt x="2346034" y="2021943"/>
-                  </a:lnTo>
-                  <a:lnTo>
-                    <a:pt x="2422667" y="2094349"/>
-                  </a:lnTo>
-                  <a:lnTo>
-                    <a:pt x="2499300" y="2163539"/>
-                  </a:lnTo>
-                  <a:lnTo>
-                    <a:pt x="2575932" y="2229657"/>
-                  </a:lnTo>
-                  <a:lnTo>
-                    <a:pt x="2652565" y="2292840"/>
-                  </a:lnTo>
-                  <a:lnTo>
-                    <a:pt x="2729197" y="2353217"/>
-                  </a:lnTo>
-                  <a:lnTo>
-                    <a:pt x="2805830" y="2410913"/>
-                  </a:lnTo>
-                  <a:lnTo>
-                    <a:pt x="2882462" y="2466047"/>
-                  </a:lnTo>
-                  <a:lnTo>
-                    <a:pt x="2959095" y="2518734"/>
-                  </a:lnTo>
-                  <a:lnTo>
-                    <a:pt x="3035727" y="2569081"/>
-                  </a:lnTo>
-                  <a:lnTo>
-                    <a:pt x="3112360" y="2617193"/>
-                  </a:lnTo>
-                  <a:lnTo>
-                    <a:pt x="3188993" y="2663168"/>
-                  </a:lnTo>
-                  <a:lnTo>
-                    <a:pt x="3265625" y="2707102"/>
-                  </a:lnTo>
-                  <a:lnTo>
-                    <a:pt x="3342258" y="2749085"/>
-                  </a:lnTo>
-                  <a:lnTo>
-                    <a:pt x="3418890" y="2784935"/>
-                  </a:lnTo>
-                  <a:lnTo>
-                    <a:pt x="3495523" y="2797257"/>
-                  </a:lnTo>
-                  <a:lnTo>
-                    <a:pt x="3572155" y="2809404"/>
-                  </a:lnTo>
-                  <a:lnTo>
-                    <a:pt x="3648788" y="2821378"/>
-                  </a:lnTo>
-                  <a:lnTo>
-                    <a:pt x="3725420" y="2833182"/>
-                  </a:lnTo>
-                  <a:lnTo>
-                    <a:pt x="3802053" y="2844818"/>
-                  </a:lnTo>
-                  <a:lnTo>
-                    <a:pt x="3878685" y="2856289"/>
-                  </a:lnTo>
-                  <a:lnTo>
-                    <a:pt x="3955318" y="2867598"/>
-                  </a:lnTo>
-                  <a:lnTo>
-                    <a:pt x="4031951" y="2878746"/>
-                  </a:lnTo>
-                  <a:lnTo>
-                    <a:pt x="4108583" y="2889735"/>
-                  </a:lnTo>
-                  <a:lnTo>
-                    <a:pt x="4185216" y="2900568"/>
-                  </a:lnTo>
-                  <a:lnTo>
-                    <a:pt x="4261848" y="2911248"/>
-                  </a:lnTo>
-                  <a:lnTo>
-                    <a:pt x="4338481" y="2921776"/>
-                  </a:lnTo>
-                  <a:lnTo>
-                    <a:pt x="4415113" y="2932154"/>
-                  </a:lnTo>
-                  <a:lnTo>
-                    <a:pt x="4491746" y="2942385"/>
-                  </a:lnTo>
-                  <a:lnTo>
-                    <a:pt x="4568378" y="2952471"/>
-                  </a:lnTo>
-                  <a:lnTo>
-                    <a:pt x="4645011" y="2962414"/>
-                  </a:lnTo>
-                  <a:lnTo>
-                    <a:pt x="4721644" y="2972215"/>
-                  </a:lnTo>
-                  <a:lnTo>
-                    <a:pt x="4798276" y="2981877"/>
-                  </a:lnTo>
-                  <a:lnTo>
-                    <a:pt x="4874909" y="2991402"/>
-                  </a:lnTo>
-                  <a:lnTo>
-                    <a:pt x="4951541" y="3000792"/>
-                  </a:lnTo>
-                  <a:lnTo>
-                    <a:pt x="5028174" y="3010048"/>
-                  </a:lnTo>
-                  <a:lnTo>
-                    <a:pt x="5104806" y="3019173"/>
-                  </a:lnTo>
-                  <a:lnTo>
-                    <a:pt x="5181439" y="3028168"/>
-                  </a:lnTo>
-                  <a:lnTo>
-                    <a:pt x="5258071" y="3037036"/>
-                  </a:lnTo>
-                  <a:lnTo>
-                    <a:pt x="5334704" y="3045778"/>
-                  </a:lnTo>
-                  <a:lnTo>
-                    <a:pt x="5411336" y="3054395"/>
-                  </a:lnTo>
-                  <a:lnTo>
-                    <a:pt x="5487969" y="3062891"/>
-                  </a:lnTo>
-                  <a:lnTo>
-                    <a:pt x="5564602" y="3071265"/>
-                  </a:lnTo>
-                  <a:lnTo>
-                    <a:pt x="5641234" y="3079521"/>
-                  </a:lnTo>
-                  <a:lnTo>
-                    <a:pt x="5717867" y="3087659"/>
-                  </a:lnTo>
-                  <a:lnTo>
-                    <a:pt x="5794499" y="3095682"/>
-                  </a:lnTo>
-                  <a:lnTo>
-                    <a:pt x="5871132" y="3103591"/>
-                  </a:lnTo>
-                  <a:lnTo>
-                    <a:pt x="5947764" y="3111388"/>
-                  </a:lnTo>
-                  <a:lnTo>
-                    <a:pt x="6024397" y="3119073"/>
-                  </a:lnTo>
-                  <a:lnTo>
-                    <a:pt x="6101029" y="3126650"/>
-                  </a:lnTo>
-                  <a:lnTo>
-                    <a:pt x="6177662" y="3134119"/>
-                  </a:lnTo>
-                  <a:lnTo>
-                    <a:pt x="6254294" y="3141483"/>
-                  </a:lnTo>
-                  <a:lnTo>
-                    <a:pt x="6330927" y="3148741"/>
-                  </a:lnTo>
-                  <a:lnTo>
-                    <a:pt x="6407560" y="3155897"/>
-                  </a:lnTo>
-                  <a:lnTo>
-                    <a:pt x="6484192" y="3162950"/>
-                  </a:lnTo>
-                  <a:lnTo>
-                    <a:pt x="6560825" y="3169904"/>
-                  </a:lnTo>
-                  <a:lnTo>
-                    <a:pt x="6637457" y="3176759"/>
-                  </a:lnTo>
-                  <a:lnTo>
-                    <a:pt x="6714090" y="3183517"/>
-                  </a:lnTo>
-                  <a:lnTo>
-                    <a:pt x="6790722" y="3190178"/>
-                  </a:lnTo>
-                  <a:lnTo>
-                    <a:pt x="6867355" y="3196745"/>
-                  </a:lnTo>
-                  <a:lnTo>
-                    <a:pt x="6943987" y="3203219"/>
-                  </a:lnTo>
-                  <a:lnTo>
-                    <a:pt x="7020620" y="3209601"/>
-                  </a:lnTo>
-                  <a:lnTo>
-                    <a:pt x="7097253" y="3215892"/>
-                  </a:lnTo>
-                  <a:lnTo>
-                    <a:pt x="7173885" y="3222094"/>
-                  </a:lnTo>
-                  <a:lnTo>
-                    <a:pt x="7250518" y="3228208"/>
-                  </a:lnTo>
-                  <a:lnTo>
-                    <a:pt x="7327150" y="3234235"/>
-                  </a:lnTo>
-                  <a:lnTo>
-                    <a:pt x="7403783" y="3240177"/>
-                  </a:lnTo>
-                  <a:lnTo>
-                    <a:pt x="7403783" y="3571255"/>
-                  </a:lnTo>
-                  <a:lnTo>
-                    <a:pt x="7327150" y="3567474"/>
-                  </a:lnTo>
-                  <a:lnTo>
-                    <a:pt x="7250518" y="3563516"/>
-                  </a:lnTo>
-                  <a:lnTo>
-                    <a:pt x="7173885" y="3559375"/>
-                  </a:lnTo>
-                  <a:lnTo>
-                    <a:pt x="7097253" y="3555042"/>
-                  </a:lnTo>
-                  <a:lnTo>
-                    <a:pt x="7020620" y="3550507"/>
-                  </a:lnTo>
-                  <a:lnTo>
-                    <a:pt x="6943987" y="3545761"/>
-                  </a:lnTo>
-                  <a:lnTo>
-                    <a:pt x="6867355" y="3540795"/>
-                  </a:lnTo>
-                  <a:lnTo>
-                    <a:pt x="6790722" y="3535598"/>
-                  </a:lnTo>
-                  <a:lnTo>
-                    <a:pt x="6714090" y="3530159"/>
-                  </a:lnTo>
-                  <a:lnTo>
-                    <a:pt x="6637457" y="3524468"/>
-                  </a:lnTo>
-                  <a:lnTo>
-                    <a:pt x="6560825" y="3518512"/>
-                  </a:lnTo>
-                  <a:lnTo>
-                    <a:pt x="6484192" y="3512280"/>
-                  </a:lnTo>
-                  <a:lnTo>
-                    <a:pt x="6407560" y="3505758"/>
-                  </a:lnTo>
-                  <a:lnTo>
-                    <a:pt x="6330927" y="3498933"/>
-                  </a:lnTo>
-                  <a:lnTo>
-                    <a:pt x="6254294" y="3491791"/>
-                  </a:lnTo>
-                  <a:lnTo>
-                    <a:pt x="6177662" y="3484317"/>
-                  </a:lnTo>
-                  <a:lnTo>
-                    <a:pt x="6101029" y="3476496"/>
-                  </a:lnTo>
-                  <a:lnTo>
-                    <a:pt x="6024397" y="3468312"/>
-                  </a:lnTo>
-                  <a:lnTo>
-                    <a:pt x="5947764" y="3459747"/>
-                  </a:lnTo>
-                  <a:lnTo>
-                    <a:pt x="5871132" y="3450784"/>
-                  </a:lnTo>
-                  <a:lnTo>
-                    <a:pt x="5794499" y="3441405"/>
-                  </a:lnTo>
-                  <a:lnTo>
-                    <a:pt x="5717867" y="3431590"/>
-                  </a:lnTo>
-                  <a:lnTo>
-                    <a:pt x="5641234" y="3421318"/>
-                  </a:lnTo>
-                  <a:lnTo>
-                    <a:pt x="5564602" y="3410570"/>
-                  </a:lnTo>
-                  <a:lnTo>
-                    <a:pt x="5487969" y="3399322"/>
-                  </a:lnTo>
-                  <a:lnTo>
-                    <a:pt x="5411336" y="3387552"/>
-                  </a:lnTo>
-                  <a:lnTo>
-                    <a:pt x="5334704" y="3375235"/>
-                  </a:lnTo>
-                  <a:lnTo>
-                    <a:pt x="5258071" y="3362345"/>
-                  </a:lnTo>
-                  <a:lnTo>
-                    <a:pt x="5181439" y="3348856"/>
-                  </a:lnTo>
-                  <a:lnTo>
-                    <a:pt x="5104806" y="3334741"/>
-                  </a:lnTo>
-                  <a:lnTo>
-                    <a:pt x="5028174" y="3319970"/>
-                  </a:lnTo>
-                  <a:lnTo>
-                    <a:pt x="4951541" y="3304513"/>
-                  </a:lnTo>
-                  <a:lnTo>
-                    <a:pt x="4874909" y="3288337"/>
-                  </a:lnTo>
-                  <a:lnTo>
-                    <a:pt x="4798276" y="3271410"/>
-                  </a:lnTo>
-                  <a:lnTo>
-                    <a:pt x="4721644" y="3253696"/>
-                  </a:lnTo>
-                  <a:lnTo>
-                    <a:pt x="4645011" y="3235159"/>
-                  </a:lnTo>
-                  <a:lnTo>
-                    <a:pt x="4568378" y="3215761"/>
-                  </a:lnTo>
-                  <a:lnTo>
-                    <a:pt x="4491746" y="3195461"/>
-                  </a:lnTo>
-                  <a:lnTo>
-                    <a:pt x="4415113" y="3174219"/>
-                  </a:lnTo>
-                  <a:lnTo>
-                    <a:pt x="4338481" y="3151989"/>
-                  </a:lnTo>
-                  <a:lnTo>
-                    <a:pt x="4261848" y="3128726"/>
-                  </a:lnTo>
-                  <a:lnTo>
-                    <a:pt x="4185216" y="3104383"/>
-                  </a:lnTo>
-                  <a:lnTo>
-                    <a:pt x="4108583" y="3078908"/>
-                  </a:lnTo>
-                  <a:lnTo>
-                    <a:pt x="4031951" y="3052250"/>
-                  </a:lnTo>
-                  <a:lnTo>
-                    <a:pt x="3955318" y="3024353"/>
-                  </a:lnTo>
-                  <a:lnTo>
-                    <a:pt x="3878685" y="2995160"/>
-                  </a:lnTo>
-                  <a:lnTo>
-                    <a:pt x="3802053" y="2964610"/>
-                  </a:lnTo>
-                  <a:lnTo>
-                    <a:pt x="3725420" y="2932641"/>
-                  </a:lnTo>
-                  <a:lnTo>
-                    <a:pt x="3648788" y="2899187"/>
-                  </a:lnTo>
-                  <a:lnTo>
-                    <a:pt x="3572155" y="2864178"/>
-                  </a:lnTo>
-                  <a:lnTo>
-                    <a:pt x="3495523" y="2827542"/>
-                  </a:lnTo>
-                  <a:lnTo>
-                    <a:pt x="3418890" y="2789204"/>
-                  </a:lnTo>
-                  <a:lnTo>
-                    <a:pt x="3342258" y="2772436"/>
-                  </a:lnTo>
-                  <a:lnTo>
-                    <a:pt x="3265625" y="2759757"/>
-                  </a:lnTo>
-                  <a:lnTo>
-                    <a:pt x="3188993" y="2746896"/>
-                  </a:lnTo>
-                  <a:lnTo>
-                    <a:pt x="3112360" y="2733849"/>
-                  </a:lnTo>
-                  <a:lnTo>
-                    <a:pt x="3035727" y="2720614"/>
-                  </a:lnTo>
-                  <a:lnTo>
-                    <a:pt x="2959095" y="2707188"/>
-                  </a:lnTo>
-                  <a:lnTo>
-                    <a:pt x="2882462" y="2693569"/>
-                  </a:lnTo>
-                  <a:lnTo>
-                    <a:pt x="2805830" y="2679754"/>
-                  </a:lnTo>
-                  <a:lnTo>
-                    <a:pt x="2729197" y="2665740"/>
-                  </a:lnTo>
-                  <a:lnTo>
-                    <a:pt x="2652565" y="2651524"/>
-                  </a:lnTo>
-                  <a:lnTo>
-                    <a:pt x="2575932" y="2637103"/>
-                  </a:lnTo>
-                  <a:lnTo>
-                    <a:pt x="2499300" y="2622474"/>
-                  </a:lnTo>
-                  <a:lnTo>
-                    <a:pt x="2422667" y="2607635"/>
-                  </a:lnTo>
-                  <a:lnTo>
-                    <a:pt x="2346034" y="2592582"/>
-                  </a:lnTo>
-                  <a:lnTo>
-                    <a:pt x="2269402" y="2577312"/>
-                  </a:lnTo>
-                  <a:lnTo>
-                    <a:pt x="2192769" y="2561823"/>
-                  </a:lnTo>
-                  <a:lnTo>
-                    <a:pt x="2116137" y="2546110"/>
-                  </a:lnTo>
-                  <a:lnTo>
-                    <a:pt x="2039504" y="2530170"/>
-                  </a:lnTo>
-                  <a:lnTo>
-                    <a:pt x="1962872" y="2514001"/>
-                  </a:lnTo>
-                  <a:lnTo>
-                    <a:pt x="1886239" y="2497600"/>
-                  </a:lnTo>
-                  <a:lnTo>
-                    <a:pt x="1809607" y="2480962"/>
-                  </a:lnTo>
-                  <a:lnTo>
-                    <a:pt x="1732974" y="2464084"/>
-                  </a:lnTo>
-                  <a:lnTo>
-                    <a:pt x="1656342" y="2446963"/>
-                  </a:lnTo>
-                  <a:lnTo>
-                    <a:pt x="1579709" y="2429596"/>
-                  </a:lnTo>
-                  <a:lnTo>
-                    <a:pt x="1503076" y="2411978"/>
-                  </a:lnTo>
-                  <a:lnTo>
-                    <a:pt x="1426444" y="2394107"/>
-                  </a:lnTo>
-                  <a:lnTo>
-                    <a:pt x="1349811" y="2375978"/>
-                  </a:lnTo>
-                  <a:lnTo>
-                    <a:pt x="1273179" y="2357588"/>
-                  </a:lnTo>
-                  <a:lnTo>
-                    <a:pt x="1196546" y="2338933"/>
-                  </a:lnTo>
-                  <a:lnTo>
-                    <a:pt x="1119914" y="2320010"/>
-                  </a:lnTo>
-                  <a:lnTo>
-                    <a:pt x="1043281" y="2300813"/>
-                  </a:lnTo>
-                  <a:lnTo>
-                    <a:pt x="966649" y="2281341"/>
-                  </a:lnTo>
-                  <a:lnTo>
-                    <a:pt x="890016" y="2261588"/>
-                  </a:lnTo>
-                  <a:lnTo>
-                    <a:pt x="813384" y="2241550"/>
-                  </a:lnTo>
-                  <a:lnTo>
-                    <a:pt x="736751" y="2221224"/>
-                  </a:lnTo>
-                  <a:lnTo>
-                    <a:pt x="660118" y="2200604"/>
-                  </a:lnTo>
-                  <a:lnTo>
-                    <a:pt x="583486" y="2179688"/>
-                  </a:lnTo>
-                  <a:lnTo>
-                    <a:pt x="506853" y="2158471"/>
-                  </a:lnTo>
-                  <a:lnTo>
-                    <a:pt x="430221" y="2136948"/>
-                  </a:lnTo>
-                  <a:lnTo>
-                    <a:pt x="353588" y="2115115"/>
-                  </a:lnTo>
-                  <a:lnTo>
-                    <a:pt x="276956" y="2092967"/>
-                  </a:lnTo>
-                  <a:lnTo>
-                    <a:pt x="200323" y="2070500"/>
-                  </a:lnTo>
-                  <a:lnTo>
-                    <a:pt x="123691" y="2047710"/>
-                  </a:lnTo>
-                  <a:lnTo>
-                    <a:pt x="47058" y="2024592"/>
-                  </a:lnTo>
-                  <a:lnTo>
-                    <a:pt x="0" y="2010190"/>
+                    <a:pt x="1043281" y="117630"/>
+                  </a:lnTo>
+                  <a:lnTo>
+                    <a:pt x="1119914" y="267090"/>
+                  </a:lnTo>
+                  <a:lnTo>
+                    <a:pt x="1196546" y="409914"/>
+                  </a:lnTo>
+                  <a:lnTo>
+                    <a:pt x="1273179" y="546396"/>
+                  </a:lnTo>
+                  <a:lnTo>
+                    <a:pt x="1349811" y="676818"/>
+                  </a:lnTo>
+                  <a:lnTo>
+                    <a:pt x="1426444" y="801450"/>
+                  </a:lnTo>
+                  <a:lnTo>
+                    <a:pt x="1503076" y="920547"/>
+                  </a:lnTo>
+                  <a:lnTo>
+                    <a:pt x="1579709" y="1034356"/>
+                  </a:lnTo>
+                  <a:lnTo>
+                    <a:pt x="1656342" y="1143113"/>
+                  </a:lnTo>
+                  <a:lnTo>
+                    <a:pt x="1732974" y="1247040"/>
+                  </a:lnTo>
+                  <a:lnTo>
+                    <a:pt x="1809607" y="1346353"/>
+                  </a:lnTo>
+                  <a:lnTo>
+                    <a:pt x="1886239" y="1441256"/>
+                  </a:lnTo>
+                  <a:lnTo>
+                    <a:pt x="1962872" y="1531945"/>
+                  </a:lnTo>
+                  <a:lnTo>
+                    <a:pt x="2039504" y="1618608"/>
+                  </a:lnTo>
+                  <a:lnTo>
+                    <a:pt x="2116137" y="1701422"/>
+                  </a:lnTo>
+                  <a:lnTo>
+                    <a:pt x="2192769" y="1780560"/>
+                  </a:lnTo>
+                  <a:lnTo>
+                    <a:pt x="2269402" y="1856184"/>
+                  </a:lnTo>
+                  <a:lnTo>
+                    <a:pt x="2346034" y="1928449"/>
+                  </a:lnTo>
+                  <a:lnTo>
+                    <a:pt x="2422667" y="1997507"/>
+                  </a:lnTo>
+                  <a:lnTo>
+                    <a:pt x="2499300" y="2063498"/>
+                  </a:lnTo>
+                  <a:lnTo>
+                    <a:pt x="2575932" y="2126559"/>
+                  </a:lnTo>
+                  <a:lnTo>
+                    <a:pt x="2652565" y="2186820"/>
+                  </a:lnTo>
+                  <a:lnTo>
+                    <a:pt x="2729197" y="2244405"/>
+                  </a:lnTo>
+                  <a:lnTo>
+                    <a:pt x="2805830" y="2299433"/>
+                  </a:lnTo>
+                  <a:lnTo>
+                    <a:pt x="2882462" y="2352018"/>
+                  </a:lnTo>
+                  <a:lnTo>
+                    <a:pt x="2959095" y="2402269"/>
+                  </a:lnTo>
+                  <a:lnTo>
+                    <a:pt x="3035727" y="2450288"/>
+                  </a:lnTo>
+                  <a:lnTo>
+                    <a:pt x="3112360" y="2496175"/>
+                  </a:lnTo>
+                  <a:lnTo>
+                    <a:pt x="3188993" y="2540024"/>
+                  </a:lnTo>
+                  <a:lnTo>
+                    <a:pt x="3265625" y="2581927"/>
+                  </a:lnTo>
+                  <a:lnTo>
+                    <a:pt x="3342258" y="2621969"/>
+                  </a:lnTo>
+                  <a:lnTo>
+                    <a:pt x="3418890" y="2656161"/>
+                  </a:lnTo>
+                  <a:lnTo>
+                    <a:pt x="3495523" y="2667913"/>
+                  </a:lnTo>
+                  <a:lnTo>
+                    <a:pt x="3572155" y="2679498"/>
+                  </a:lnTo>
+                  <a:lnTo>
+                    <a:pt x="3648788" y="2690918"/>
+                  </a:lnTo>
+                  <a:lnTo>
+                    <a:pt x="3725420" y="2702177"/>
+                  </a:lnTo>
+                  <a:lnTo>
+                    <a:pt x="3802053" y="2713275"/>
+                  </a:lnTo>
+                  <a:lnTo>
+                    <a:pt x="3878685" y="2724216"/>
+                  </a:lnTo>
+                  <a:lnTo>
+                    <a:pt x="3955318" y="2735001"/>
+                  </a:lnTo>
+                  <a:lnTo>
+                    <a:pt x="4031951" y="2745633"/>
+                  </a:lnTo>
+                  <a:lnTo>
+                    <a:pt x="4108583" y="2756115"/>
+                  </a:lnTo>
+                  <a:lnTo>
+                    <a:pt x="4185216" y="2766447"/>
+                  </a:lnTo>
+                  <a:lnTo>
+                    <a:pt x="4261848" y="2776633"/>
+                  </a:lnTo>
+                  <a:lnTo>
+                    <a:pt x="4338481" y="2786674"/>
+                  </a:lnTo>
+                  <a:lnTo>
+                    <a:pt x="4415113" y="2796573"/>
+                  </a:lnTo>
+                  <a:lnTo>
+                    <a:pt x="4491746" y="2806331"/>
+                  </a:lnTo>
+                  <a:lnTo>
+                    <a:pt x="4568378" y="2815950"/>
+                  </a:lnTo>
+                  <a:lnTo>
+                    <a:pt x="4645011" y="2825433"/>
+                  </a:lnTo>
+                  <a:lnTo>
+                    <a:pt x="4721644" y="2834781"/>
+                  </a:lnTo>
+                  <a:lnTo>
+                    <a:pt x="4798276" y="2843996"/>
+                  </a:lnTo>
+                  <a:lnTo>
+                    <a:pt x="4874909" y="2853081"/>
+                  </a:lnTo>
+                  <a:lnTo>
+                    <a:pt x="4951541" y="2862036"/>
+                  </a:lnTo>
+                  <a:lnTo>
+                    <a:pt x="5028174" y="2870865"/>
+                  </a:lnTo>
+                  <a:lnTo>
+                    <a:pt x="5104806" y="2879568"/>
+                  </a:lnTo>
+                  <a:lnTo>
+                    <a:pt x="5181439" y="2888147"/>
+                  </a:lnTo>
+                  <a:lnTo>
+                    <a:pt x="5258071" y="2896605"/>
+                  </a:lnTo>
+                  <a:lnTo>
+                    <a:pt x="5334704" y="2904942"/>
+                  </a:lnTo>
+                  <a:lnTo>
+                    <a:pt x="5411336" y="2913161"/>
+                  </a:lnTo>
+                  <a:lnTo>
+                    <a:pt x="5487969" y="2921264"/>
+                  </a:lnTo>
+                  <a:lnTo>
+                    <a:pt x="5564602" y="2929251"/>
+                  </a:lnTo>
+                  <a:lnTo>
+                    <a:pt x="5641234" y="2937125"/>
+                  </a:lnTo>
+                  <a:lnTo>
+                    <a:pt x="5717867" y="2944887"/>
+                  </a:lnTo>
+                  <a:lnTo>
+                    <a:pt x="5794499" y="2952539"/>
+                  </a:lnTo>
+                  <a:lnTo>
+                    <a:pt x="5871132" y="2960082"/>
+                  </a:lnTo>
+                  <a:lnTo>
+                    <a:pt x="5947764" y="2967518"/>
+                  </a:lnTo>
+                  <a:lnTo>
+                    <a:pt x="6024397" y="2974849"/>
+                  </a:lnTo>
+                  <a:lnTo>
+                    <a:pt x="6101029" y="2982075"/>
+                  </a:lnTo>
+                  <a:lnTo>
+                    <a:pt x="6177662" y="2989199"/>
+                  </a:lnTo>
+                  <a:lnTo>
+                    <a:pt x="6254294" y="2996222"/>
+                  </a:lnTo>
+                  <a:lnTo>
+                    <a:pt x="6330927" y="3003144"/>
+                  </a:lnTo>
+                  <a:lnTo>
+                    <a:pt x="6407560" y="3009969"/>
+                  </a:lnTo>
+                  <a:lnTo>
+                    <a:pt x="6484192" y="3016697"/>
+                  </a:lnTo>
+                  <a:lnTo>
+                    <a:pt x="6560825" y="3023329"/>
+                  </a:lnTo>
+                  <a:lnTo>
+                    <a:pt x="6637457" y="3029867"/>
+                  </a:lnTo>
+                  <a:lnTo>
+                    <a:pt x="6714090" y="3036312"/>
+                  </a:lnTo>
+                  <a:lnTo>
+                    <a:pt x="6790722" y="3042666"/>
+                  </a:lnTo>
+                  <a:lnTo>
+                    <a:pt x="6867355" y="3048929"/>
+                  </a:lnTo>
+                  <a:lnTo>
+                    <a:pt x="6943987" y="3055104"/>
+                  </a:lnTo>
+                  <a:lnTo>
+                    <a:pt x="7020620" y="3061190"/>
+                  </a:lnTo>
+                  <a:lnTo>
+                    <a:pt x="7097253" y="3067191"/>
+                  </a:lnTo>
+                  <a:lnTo>
+                    <a:pt x="7173885" y="3073106"/>
+                  </a:lnTo>
+                  <a:lnTo>
+                    <a:pt x="7250518" y="3078937"/>
+                  </a:lnTo>
+                  <a:lnTo>
+                    <a:pt x="7327150" y="3084685"/>
+                  </a:lnTo>
+                  <a:lnTo>
+                    <a:pt x="7403783" y="3090352"/>
+                  </a:lnTo>
+                  <a:lnTo>
+                    <a:pt x="7403783" y="3406122"/>
+                  </a:lnTo>
+                  <a:lnTo>
+                    <a:pt x="7327150" y="3402515"/>
+                  </a:lnTo>
+                  <a:lnTo>
+                    <a:pt x="7250518" y="3398741"/>
+                  </a:lnTo>
+                  <a:lnTo>
+                    <a:pt x="7173885" y="3394791"/>
+                  </a:lnTo>
+                  <a:lnTo>
+                    <a:pt x="7097253" y="3390658"/>
+                  </a:lnTo>
+                  <a:lnTo>
+                    <a:pt x="7020620" y="3386332"/>
+                  </a:lnTo>
+                  <a:lnTo>
+                    <a:pt x="6943987" y="3381806"/>
+                  </a:lnTo>
+                  <a:lnTo>
+                    <a:pt x="6867355" y="3377070"/>
+                  </a:lnTo>
+                  <a:lnTo>
+                    <a:pt x="6790722" y="3372113"/>
+                  </a:lnTo>
+                  <a:lnTo>
+                    <a:pt x="6714090" y="3366926"/>
+                  </a:lnTo>
+                  <a:lnTo>
+                    <a:pt x="6637457" y="3361498"/>
+                  </a:lnTo>
+                  <a:lnTo>
+                    <a:pt x="6560825" y="3355818"/>
+                  </a:lnTo>
+                  <a:lnTo>
+                    <a:pt x="6484192" y="3349874"/>
+                  </a:lnTo>
+                  <a:lnTo>
+                    <a:pt x="6407560" y="3343653"/>
+                  </a:lnTo>
+                  <a:lnTo>
+                    <a:pt x="6330927" y="3337144"/>
+                  </a:lnTo>
+                  <a:lnTo>
+                    <a:pt x="6254294" y="3330332"/>
+                  </a:lnTo>
+                  <a:lnTo>
+                    <a:pt x="6177662" y="3323204"/>
+                  </a:lnTo>
+                  <a:lnTo>
+                    <a:pt x="6101029" y="3315744"/>
+                  </a:lnTo>
+                  <a:lnTo>
+                    <a:pt x="6024397" y="3307938"/>
+                  </a:lnTo>
+                  <a:lnTo>
+                    <a:pt x="5947764" y="3299769"/>
+                  </a:lnTo>
+                  <a:lnTo>
+                    <a:pt x="5871132" y="3291221"/>
+                  </a:lnTo>
+                  <a:lnTo>
+                    <a:pt x="5794499" y="3282275"/>
+                  </a:lnTo>
+                  <a:lnTo>
+                    <a:pt x="5717867" y="3272914"/>
+                  </a:lnTo>
+                  <a:lnTo>
+                    <a:pt x="5641234" y="3263118"/>
+                  </a:lnTo>
+                  <a:lnTo>
+                    <a:pt x="5564602" y="3252867"/>
+                  </a:lnTo>
+                  <a:lnTo>
+                    <a:pt x="5487969" y="3242139"/>
+                  </a:lnTo>
+                  <a:lnTo>
+                    <a:pt x="5411336" y="3230913"/>
+                  </a:lnTo>
+                  <a:lnTo>
+                    <a:pt x="5334704" y="3219165"/>
+                  </a:lnTo>
+                  <a:lnTo>
+                    <a:pt x="5258071" y="3206871"/>
+                  </a:lnTo>
+                  <a:lnTo>
+                    <a:pt x="5181439" y="3194007"/>
+                  </a:lnTo>
+                  <a:lnTo>
+                    <a:pt x="5104806" y="3180544"/>
+                  </a:lnTo>
+                  <a:lnTo>
+                    <a:pt x="5028174" y="3166456"/>
+                  </a:lnTo>
+                  <a:lnTo>
+                    <a:pt x="4951541" y="3151713"/>
+                  </a:lnTo>
+                  <a:lnTo>
+                    <a:pt x="4874909" y="3136285"/>
+                  </a:lnTo>
+                  <a:lnTo>
+                    <a:pt x="4798276" y="3120141"/>
+                  </a:lnTo>
+                  <a:lnTo>
+                    <a:pt x="4721644" y="3103246"/>
+                  </a:lnTo>
+                  <a:lnTo>
+                    <a:pt x="4645011" y="3085566"/>
+                  </a:lnTo>
+                  <a:lnTo>
+                    <a:pt x="4568378" y="3067065"/>
+                  </a:lnTo>
+                  <a:lnTo>
+                    <a:pt x="4491746" y="3047704"/>
+                  </a:lnTo>
+                  <a:lnTo>
+                    <a:pt x="4415113" y="3027444"/>
+                  </a:lnTo>
+                  <a:lnTo>
+                    <a:pt x="4338481" y="3006242"/>
+                  </a:lnTo>
+                  <a:lnTo>
+                    <a:pt x="4261848" y="2984055"/>
+                  </a:lnTo>
+                  <a:lnTo>
+                    <a:pt x="4185216" y="2960837"/>
+                  </a:lnTo>
+                  <a:lnTo>
+                    <a:pt x="4108583" y="2936541"/>
+                  </a:lnTo>
+                  <a:lnTo>
+                    <a:pt x="4031951" y="2911115"/>
+                  </a:lnTo>
+                  <a:lnTo>
+                    <a:pt x="3955318" y="2884508"/>
+                  </a:lnTo>
+                  <a:lnTo>
+                    <a:pt x="3878685" y="2856665"/>
+                  </a:lnTo>
+                  <a:lnTo>
+                    <a:pt x="3802053" y="2827528"/>
+                  </a:lnTo>
+                  <a:lnTo>
+                    <a:pt x="3725420" y="2797037"/>
+                  </a:lnTo>
+                  <a:lnTo>
+                    <a:pt x="3648788" y="2765129"/>
+                  </a:lnTo>
+                  <a:lnTo>
+                    <a:pt x="3572155" y="2731739"/>
+                  </a:lnTo>
+                  <a:lnTo>
+                    <a:pt x="3495523" y="2696798"/>
+                  </a:lnTo>
+                  <a:lnTo>
+                    <a:pt x="3418890" y="2660233"/>
+                  </a:lnTo>
+                  <a:lnTo>
+                    <a:pt x="3342258" y="2644240"/>
+                  </a:lnTo>
+                  <a:lnTo>
+                    <a:pt x="3265625" y="2632147"/>
+                  </a:lnTo>
+                  <a:lnTo>
+                    <a:pt x="3188993" y="2619880"/>
+                  </a:lnTo>
+                  <a:lnTo>
+                    <a:pt x="3112360" y="2607436"/>
+                  </a:lnTo>
+                  <a:lnTo>
+                    <a:pt x="3035727" y="2594813"/>
+                  </a:lnTo>
+                  <a:lnTo>
+                    <a:pt x="2959095" y="2582009"/>
+                  </a:lnTo>
+                  <a:lnTo>
+                    <a:pt x="2882462" y="2569019"/>
+                  </a:lnTo>
+                  <a:lnTo>
+                    <a:pt x="2805830" y="2555843"/>
+                  </a:lnTo>
+                  <a:lnTo>
+                    <a:pt x="2729197" y="2542477"/>
+                  </a:lnTo>
+                  <a:lnTo>
+                    <a:pt x="2652565" y="2528918"/>
+                  </a:lnTo>
+                  <a:lnTo>
+                    <a:pt x="2575932" y="2515164"/>
+                  </a:lnTo>
+                  <a:lnTo>
+                    <a:pt x="2499300" y="2501212"/>
+                  </a:lnTo>
+                  <a:lnTo>
+                    <a:pt x="2422667" y="2487059"/>
+                  </a:lnTo>
+                  <a:lnTo>
+                    <a:pt x="2346034" y="2472702"/>
+                  </a:lnTo>
+                  <a:lnTo>
+                    <a:pt x="2269402" y="2458138"/>
+                  </a:lnTo>
+                  <a:lnTo>
+                    <a:pt x="2192769" y="2443365"/>
+                  </a:lnTo>
+                  <a:lnTo>
+                    <a:pt x="2116137" y="2428378"/>
+                  </a:lnTo>
+                  <a:lnTo>
+                    <a:pt x="2039504" y="2413176"/>
+                  </a:lnTo>
+                  <a:lnTo>
+                    <a:pt x="1962872" y="2397755"/>
+                  </a:lnTo>
+                  <a:lnTo>
+                    <a:pt x="1886239" y="2382112"/>
+                  </a:lnTo>
+                  <a:lnTo>
+                    <a:pt x="1809607" y="2366243"/>
+                  </a:lnTo>
+                  <a:lnTo>
+                    <a:pt x="1732974" y="2350146"/>
+                  </a:lnTo>
+                  <a:lnTo>
+                    <a:pt x="1656342" y="2333816"/>
+                  </a:lnTo>
+                  <a:lnTo>
+                    <a:pt x="1579709" y="2317252"/>
+                  </a:lnTo>
+                  <a:lnTo>
+                    <a:pt x="1503076" y="2300449"/>
+                  </a:lnTo>
+                  <a:lnTo>
+                    <a:pt x="1426444" y="2283404"/>
+                  </a:lnTo>
+                  <a:lnTo>
+                    <a:pt x="1349811" y="2266114"/>
+                  </a:lnTo>
+                  <a:lnTo>
+                    <a:pt x="1273179" y="2248574"/>
+                  </a:lnTo>
+                  <a:lnTo>
+                    <a:pt x="1196546" y="2230782"/>
+                  </a:lnTo>
+                  <a:lnTo>
+                    <a:pt x="1119914" y="2212733"/>
+                  </a:lnTo>
+                  <a:lnTo>
+                    <a:pt x="1043281" y="2194425"/>
+                  </a:lnTo>
+                  <a:lnTo>
+                    <a:pt x="966649" y="2175852"/>
+                  </a:lnTo>
+                  <a:lnTo>
+                    <a:pt x="890016" y="2157013"/>
+                  </a:lnTo>
+                  <a:lnTo>
+                    <a:pt x="813384" y="2137901"/>
+                  </a:lnTo>
+                  <a:lnTo>
+                    <a:pt x="736751" y="2118515"/>
+                  </a:lnTo>
+                  <a:lnTo>
+                    <a:pt x="660118" y="2098849"/>
+                  </a:lnTo>
+                  <a:lnTo>
+                    <a:pt x="583486" y="2078900"/>
+                  </a:lnTo>
+                  <a:lnTo>
+                    <a:pt x="506853" y="2058664"/>
+                  </a:lnTo>
+                  <a:lnTo>
+                    <a:pt x="430221" y="2038136"/>
+                  </a:lnTo>
+                  <a:lnTo>
+                    <a:pt x="353588" y="2017312"/>
+                  </a:lnTo>
+                  <a:lnTo>
+                    <a:pt x="276956" y="1996189"/>
+                  </a:lnTo>
+                  <a:lnTo>
+                    <a:pt x="200323" y="1974761"/>
+                  </a:lnTo>
+                  <a:lnTo>
+                    <a:pt x="123691" y="1953025"/>
+                  </a:lnTo>
+                  <a:lnTo>
+                    <a:pt x="47058" y="1930975"/>
+                  </a:lnTo>
+                  <a:lnTo>
+                    <a:pt x="0" y="1917240"/>
                   </a:lnTo>
                   <a:close/>
                 </a:path>
@@ -3582,267 +3582,267 @@
           </p:nvSpPr>
           <p:spPr>
             <a:xfrm>
-              <a:off x="1803164" y="1896563"/>
-              <a:ext cx="6418136" cy="3240177"/>
+              <a:off x="1803164" y="2073503"/>
+              <a:ext cx="6418136" cy="3090352"/>
             </a:xfrm>
             <a:custGeom>
               <a:avLst/>
               <a:pathLst>
-                <a:path w="6418136" h="3240177">
+                <a:path w="6418136" h="3090352">
                   <a:moveTo>
                     <a:pt x="0" y="0"/>
                   </a:moveTo>
                   <a:lnTo>
-                    <a:pt x="57634" y="123333"/>
-                  </a:lnTo>
-                  <a:lnTo>
-                    <a:pt x="134267" y="280039"/>
-                  </a:lnTo>
-                  <a:lnTo>
-                    <a:pt x="210899" y="429787"/>
-                  </a:lnTo>
-                  <a:lnTo>
-                    <a:pt x="287532" y="572886"/>
-                  </a:lnTo>
-                  <a:lnTo>
-                    <a:pt x="364164" y="709631"/>
-                  </a:lnTo>
-                  <a:lnTo>
-                    <a:pt x="440797" y="840305"/>
-                  </a:lnTo>
-                  <a:lnTo>
-                    <a:pt x="517429" y="965176"/>
-                  </a:lnTo>
-                  <a:lnTo>
-                    <a:pt x="594062" y="1084504"/>
-                  </a:lnTo>
-                  <a:lnTo>
-                    <a:pt x="670694" y="1198532"/>
-                  </a:lnTo>
-                  <a:lnTo>
-                    <a:pt x="747327" y="1307498"/>
-                  </a:lnTo>
-                  <a:lnTo>
-                    <a:pt x="823960" y="1411626"/>
-                  </a:lnTo>
-                  <a:lnTo>
-                    <a:pt x="900592" y="1511130"/>
-                  </a:lnTo>
-                  <a:lnTo>
-                    <a:pt x="977225" y="1606216"/>
-                  </a:lnTo>
-                  <a:lnTo>
-                    <a:pt x="1053857" y="1697080"/>
-                  </a:lnTo>
-                  <a:lnTo>
-                    <a:pt x="1130490" y="1783910"/>
-                  </a:lnTo>
-                  <a:lnTo>
-                    <a:pt x="1207122" y="1866884"/>
-                  </a:lnTo>
-                  <a:lnTo>
-                    <a:pt x="1283755" y="1946174"/>
-                  </a:lnTo>
-                  <a:lnTo>
-                    <a:pt x="1360387" y="2021943"/>
-                  </a:lnTo>
-                  <a:lnTo>
-                    <a:pt x="1437020" y="2094349"/>
-                  </a:lnTo>
-                  <a:lnTo>
-                    <a:pt x="1513652" y="2163539"/>
-                  </a:lnTo>
-                  <a:lnTo>
-                    <a:pt x="1590285" y="2229657"/>
-                  </a:lnTo>
-                  <a:lnTo>
-                    <a:pt x="1666918" y="2292840"/>
-                  </a:lnTo>
-                  <a:lnTo>
-                    <a:pt x="1743550" y="2353217"/>
-                  </a:lnTo>
-                  <a:lnTo>
-                    <a:pt x="1820183" y="2410913"/>
-                  </a:lnTo>
-                  <a:lnTo>
-                    <a:pt x="1896815" y="2466047"/>
-                  </a:lnTo>
-                  <a:lnTo>
-                    <a:pt x="1973448" y="2518734"/>
-                  </a:lnTo>
-                  <a:lnTo>
-                    <a:pt x="2050080" y="2569081"/>
-                  </a:lnTo>
-                  <a:lnTo>
-                    <a:pt x="2126713" y="2617193"/>
-                  </a:lnTo>
-                  <a:lnTo>
-                    <a:pt x="2203345" y="2663168"/>
-                  </a:lnTo>
-                  <a:lnTo>
-                    <a:pt x="2279978" y="2707102"/>
-                  </a:lnTo>
-                  <a:lnTo>
-                    <a:pt x="2356611" y="2749085"/>
-                  </a:lnTo>
-                  <a:lnTo>
-                    <a:pt x="2433243" y="2784935"/>
-                  </a:lnTo>
-                  <a:lnTo>
-                    <a:pt x="2509876" y="2797257"/>
-                  </a:lnTo>
-                  <a:lnTo>
-                    <a:pt x="2586508" y="2809404"/>
-                  </a:lnTo>
-                  <a:lnTo>
-                    <a:pt x="2663141" y="2821378"/>
-                  </a:lnTo>
-                  <a:lnTo>
-                    <a:pt x="2739773" y="2833182"/>
-                  </a:lnTo>
-                  <a:lnTo>
-                    <a:pt x="2816406" y="2844818"/>
-                  </a:lnTo>
-                  <a:lnTo>
-                    <a:pt x="2893038" y="2856289"/>
-                  </a:lnTo>
-                  <a:lnTo>
-                    <a:pt x="2969671" y="2867598"/>
-                  </a:lnTo>
-                  <a:lnTo>
-                    <a:pt x="3046303" y="2878746"/>
-                  </a:lnTo>
-                  <a:lnTo>
-                    <a:pt x="3122936" y="2889735"/>
-                  </a:lnTo>
-                  <a:lnTo>
-                    <a:pt x="3199569" y="2900568"/>
-                  </a:lnTo>
-                  <a:lnTo>
-                    <a:pt x="3276201" y="2911248"/>
-                  </a:lnTo>
-                  <a:lnTo>
-                    <a:pt x="3352834" y="2921776"/>
-                  </a:lnTo>
-                  <a:lnTo>
-                    <a:pt x="3429466" y="2932154"/>
-                  </a:lnTo>
-                  <a:lnTo>
-                    <a:pt x="3506099" y="2942385"/>
-                  </a:lnTo>
-                  <a:lnTo>
-                    <a:pt x="3582731" y="2952471"/>
-                  </a:lnTo>
-                  <a:lnTo>
-                    <a:pt x="3659364" y="2962414"/>
-                  </a:lnTo>
-                  <a:lnTo>
-                    <a:pt x="3735996" y="2972215"/>
-                  </a:lnTo>
-                  <a:lnTo>
-                    <a:pt x="3812629" y="2981877"/>
-                  </a:lnTo>
-                  <a:lnTo>
-                    <a:pt x="3889262" y="2991402"/>
-                  </a:lnTo>
-                  <a:lnTo>
-                    <a:pt x="3965894" y="3000792"/>
-                  </a:lnTo>
-                  <a:lnTo>
-                    <a:pt x="4042527" y="3010048"/>
-                  </a:lnTo>
-                  <a:lnTo>
-                    <a:pt x="4119159" y="3019173"/>
-                  </a:lnTo>
-                  <a:lnTo>
-                    <a:pt x="4195792" y="3028168"/>
-                  </a:lnTo>
-                  <a:lnTo>
-                    <a:pt x="4272424" y="3037036"/>
-                  </a:lnTo>
-                  <a:lnTo>
-                    <a:pt x="4349057" y="3045778"/>
-                  </a:lnTo>
-                  <a:lnTo>
-                    <a:pt x="4425689" y="3054395"/>
-                  </a:lnTo>
-                  <a:lnTo>
-                    <a:pt x="4502322" y="3062891"/>
-                  </a:lnTo>
-                  <a:lnTo>
-                    <a:pt x="4578954" y="3071265"/>
-                  </a:lnTo>
-                  <a:lnTo>
-                    <a:pt x="4655587" y="3079521"/>
-                  </a:lnTo>
-                  <a:lnTo>
-                    <a:pt x="4732220" y="3087659"/>
-                  </a:lnTo>
-                  <a:lnTo>
-                    <a:pt x="4808852" y="3095682"/>
-                  </a:lnTo>
-                  <a:lnTo>
-                    <a:pt x="4885485" y="3103591"/>
-                  </a:lnTo>
-                  <a:lnTo>
-                    <a:pt x="4962117" y="3111388"/>
-                  </a:lnTo>
-                  <a:lnTo>
-                    <a:pt x="5038750" y="3119073"/>
-                  </a:lnTo>
-                  <a:lnTo>
-                    <a:pt x="5115382" y="3126650"/>
-                  </a:lnTo>
-                  <a:lnTo>
-                    <a:pt x="5192015" y="3134119"/>
-                  </a:lnTo>
-                  <a:lnTo>
-                    <a:pt x="5268647" y="3141483"/>
-                  </a:lnTo>
-                  <a:lnTo>
-                    <a:pt x="5345280" y="3148741"/>
-                  </a:lnTo>
-                  <a:lnTo>
-                    <a:pt x="5421912" y="3155897"/>
-                  </a:lnTo>
-                  <a:lnTo>
-                    <a:pt x="5498545" y="3162950"/>
-                  </a:lnTo>
-                  <a:lnTo>
-                    <a:pt x="5575178" y="3169904"/>
-                  </a:lnTo>
-                  <a:lnTo>
-                    <a:pt x="5651810" y="3176759"/>
-                  </a:lnTo>
-                  <a:lnTo>
-                    <a:pt x="5728443" y="3183517"/>
-                  </a:lnTo>
-                  <a:lnTo>
-                    <a:pt x="5805075" y="3190178"/>
-                  </a:lnTo>
-                  <a:lnTo>
-                    <a:pt x="5881708" y="3196745"/>
-                  </a:lnTo>
-                  <a:lnTo>
-                    <a:pt x="5958340" y="3203219"/>
-                  </a:lnTo>
-                  <a:lnTo>
-                    <a:pt x="6034973" y="3209601"/>
-                  </a:lnTo>
-                  <a:lnTo>
-                    <a:pt x="6111605" y="3215892"/>
-                  </a:lnTo>
-                  <a:lnTo>
-                    <a:pt x="6188238" y="3222094"/>
-                  </a:lnTo>
-                  <a:lnTo>
-                    <a:pt x="6264871" y="3228208"/>
-                  </a:lnTo>
-                  <a:lnTo>
-                    <a:pt x="6341503" y="3234235"/>
-                  </a:lnTo>
-                  <a:lnTo>
-                    <a:pt x="6418136" y="3240177"/>
+                    <a:pt x="57634" y="117630"/>
+                  </a:lnTo>
+                  <a:lnTo>
+                    <a:pt x="134267" y="267090"/>
+                  </a:lnTo>
+                  <a:lnTo>
+                    <a:pt x="210899" y="409914"/>
+                  </a:lnTo>
+                  <a:lnTo>
+                    <a:pt x="287532" y="546396"/>
+                  </a:lnTo>
+                  <a:lnTo>
+                    <a:pt x="364164" y="676818"/>
+                  </a:lnTo>
+                  <a:lnTo>
+                    <a:pt x="440797" y="801450"/>
+                  </a:lnTo>
+                  <a:lnTo>
+                    <a:pt x="517429" y="920547"/>
+                  </a:lnTo>
+                  <a:lnTo>
+                    <a:pt x="594062" y="1034356"/>
+                  </a:lnTo>
+                  <a:lnTo>
+                    <a:pt x="670694" y="1143113"/>
+                  </a:lnTo>
+                  <a:lnTo>
+                    <a:pt x="747327" y="1247040"/>
+                  </a:lnTo>
+                  <a:lnTo>
+                    <a:pt x="823960" y="1346353"/>
+                  </a:lnTo>
+                  <a:lnTo>
+                    <a:pt x="900592" y="1441256"/>
+                  </a:lnTo>
+                  <a:lnTo>
+                    <a:pt x="977225" y="1531945"/>
+                  </a:lnTo>
+                  <a:lnTo>
+                    <a:pt x="1053857" y="1618608"/>
+                  </a:lnTo>
+                  <a:lnTo>
+                    <a:pt x="1130490" y="1701422"/>
+                  </a:lnTo>
+                  <a:lnTo>
+                    <a:pt x="1207122" y="1780560"/>
+                  </a:lnTo>
+                  <a:lnTo>
+                    <a:pt x="1283755" y="1856184"/>
+                  </a:lnTo>
+                  <a:lnTo>
+                    <a:pt x="1360387" y="1928449"/>
+                  </a:lnTo>
+                  <a:lnTo>
+                    <a:pt x="1437020" y="1997507"/>
+                  </a:lnTo>
+                  <a:lnTo>
+                    <a:pt x="1513652" y="2063498"/>
+                  </a:lnTo>
+                  <a:lnTo>
+                    <a:pt x="1590285" y="2126559"/>
+                  </a:lnTo>
+                  <a:lnTo>
+                    <a:pt x="1666918" y="2186820"/>
+                  </a:lnTo>
+                  <a:lnTo>
+                    <a:pt x="1743550" y="2244405"/>
+                  </a:lnTo>
+                  <a:lnTo>
+                    <a:pt x="1820183" y="2299433"/>
+                  </a:lnTo>
+                  <a:lnTo>
+                    <a:pt x="1896815" y="2352018"/>
+                  </a:lnTo>
+                  <a:lnTo>
+                    <a:pt x="1973448" y="2402269"/>
+                  </a:lnTo>
+                  <a:lnTo>
+                    <a:pt x="2050080" y="2450288"/>
+                  </a:lnTo>
+                  <a:lnTo>
+                    <a:pt x="2126713" y="2496175"/>
+                  </a:lnTo>
+                  <a:lnTo>
+                    <a:pt x="2203345" y="2540024"/>
+                  </a:lnTo>
+                  <a:lnTo>
+                    <a:pt x="2279978" y="2581927"/>
+                  </a:lnTo>
+                  <a:lnTo>
+                    <a:pt x="2356611" y="2621969"/>
+                  </a:lnTo>
+                  <a:lnTo>
+                    <a:pt x="2433243" y="2656161"/>
+                  </a:lnTo>
+                  <a:lnTo>
+                    <a:pt x="2509876" y="2667913"/>
+                  </a:lnTo>
+                  <a:lnTo>
+                    <a:pt x="2586508" y="2679498"/>
+                  </a:lnTo>
+                  <a:lnTo>
+                    <a:pt x="2663141" y="2690918"/>
+                  </a:lnTo>
+                  <a:lnTo>
+                    <a:pt x="2739773" y="2702177"/>
+                  </a:lnTo>
+                  <a:lnTo>
+                    <a:pt x="2816406" y="2713275"/>
+                  </a:lnTo>
+                  <a:lnTo>
+                    <a:pt x="2893038" y="2724216"/>
+                  </a:lnTo>
+                  <a:lnTo>
+                    <a:pt x="2969671" y="2735001"/>
+                  </a:lnTo>
+                  <a:lnTo>
+                    <a:pt x="3046303" y="2745633"/>
+                  </a:lnTo>
+                  <a:lnTo>
+                    <a:pt x="3122936" y="2756115"/>
+                  </a:lnTo>
+                  <a:lnTo>
+                    <a:pt x="3199569" y="2766447"/>
+                  </a:lnTo>
+                  <a:lnTo>
+                    <a:pt x="3276201" y="2776633"/>
+                  </a:lnTo>
+                  <a:lnTo>
+                    <a:pt x="3352834" y="2786674"/>
+                  </a:lnTo>
+                  <a:lnTo>
+                    <a:pt x="3429466" y="2796573"/>
+                  </a:lnTo>
+                  <a:lnTo>
+                    <a:pt x="3506099" y="2806331"/>
+                  </a:lnTo>
+                  <a:lnTo>
+                    <a:pt x="3582731" y="2815950"/>
+                  </a:lnTo>
+                  <a:lnTo>
+                    <a:pt x="3659364" y="2825433"/>
+                  </a:lnTo>
+                  <a:lnTo>
+                    <a:pt x="3735996" y="2834781"/>
+                  </a:lnTo>
+                  <a:lnTo>
+                    <a:pt x="3812629" y="2843996"/>
+                  </a:lnTo>
+                  <a:lnTo>
+                    <a:pt x="3889262" y="2853081"/>
+                  </a:lnTo>
+                  <a:lnTo>
+                    <a:pt x="3965894" y="2862036"/>
+                  </a:lnTo>
+                  <a:lnTo>
+                    <a:pt x="4042527" y="2870865"/>
+                  </a:lnTo>
+                  <a:lnTo>
+                    <a:pt x="4119159" y="2879568"/>
+                  </a:lnTo>
+                  <a:lnTo>
+                    <a:pt x="4195792" y="2888147"/>
+                  </a:lnTo>
+                  <a:lnTo>
+                    <a:pt x="4272424" y="2896605"/>
+                  </a:lnTo>
+                  <a:lnTo>
+                    <a:pt x="4349057" y="2904942"/>
+                  </a:lnTo>
+                  <a:lnTo>
+                    <a:pt x="4425689" y="2913161"/>
+                  </a:lnTo>
+                  <a:lnTo>
+                    <a:pt x="4502322" y="2921264"/>
+                  </a:lnTo>
+                  <a:lnTo>
+                    <a:pt x="4578954" y="2929251"/>
+                  </a:lnTo>
+                  <a:lnTo>
+                    <a:pt x="4655587" y="2937125"/>
+                  </a:lnTo>
+                  <a:lnTo>
+                    <a:pt x="4732220" y="2944887"/>
+                  </a:lnTo>
+                  <a:lnTo>
+                    <a:pt x="4808852" y="2952539"/>
+                  </a:lnTo>
+                  <a:lnTo>
+                    <a:pt x="4885485" y="2960082"/>
+                  </a:lnTo>
+                  <a:lnTo>
+                    <a:pt x="4962117" y="2967518"/>
+                  </a:lnTo>
+                  <a:lnTo>
+                    <a:pt x="5038750" y="2974849"/>
+                  </a:lnTo>
+                  <a:lnTo>
+                    <a:pt x="5115382" y="2982075"/>
+                  </a:lnTo>
+                  <a:lnTo>
+                    <a:pt x="5192015" y="2989199"/>
+                  </a:lnTo>
+                  <a:lnTo>
+                    <a:pt x="5268647" y="2996222"/>
+                  </a:lnTo>
+                  <a:lnTo>
+                    <a:pt x="5345280" y="3003144"/>
+                  </a:lnTo>
+                  <a:lnTo>
+                    <a:pt x="5421912" y="3009969"/>
+                  </a:lnTo>
+                  <a:lnTo>
+                    <a:pt x="5498545" y="3016697"/>
+                  </a:lnTo>
+                  <a:lnTo>
+                    <a:pt x="5575178" y="3023329"/>
+                  </a:lnTo>
+                  <a:lnTo>
+                    <a:pt x="5651810" y="3029867"/>
+                  </a:lnTo>
+                  <a:lnTo>
+                    <a:pt x="5728443" y="3036312"/>
+                  </a:lnTo>
+                  <a:lnTo>
+                    <a:pt x="5805075" y="3042666"/>
+                  </a:lnTo>
+                  <a:lnTo>
+                    <a:pt x="5881708" y="3048929"/>
+                  </a:lnTo>
+                  <a:lnTo>
+                    <a:pt x="5958340" y="3055104"/>
+                  </a:lnTo>
+                  <a:lnTo>
+                    <a:pt x="6034973" y="3061190"/>
+                  </a:lnTo>
+                  <a:lnTo>
+                    <a:pt x="6111605" y="3067191"/>
+                  </a:lnTo>
+                  <a:lnTo>
+                    <a:pt x="6188238" y="3073106"/>
+                  </a:lnTo>
+                  <a:lnTo>
+                    <a:pt x="6264871" y="3078937"/>
+                  </a:lnTo>
+                  <a:lnTo>
+                    <a:pt x="6341503" y="3084685"/>
+                  </a:lnTo>
+                  <a:lnTo>
+                    <a:pt x="6418136" y="3090352"/>
                   </a:lnTo>
                 </a:path>
               </a:pathLst>
@@ -3862,303 +3862,303 @@
           </p:nvSpPr>
           <p:spPr>
             <a:xfrm>
-              <a:off x="817517" y="3906754"/>
-              <a:ext cx="7403783" cy="1561064"/>
+              <a:off x="817517" y="3990743"/>
+              <a:ext cx="7403783" cy="1488881"/>
             </a:xfrm>
             <a:custGeom>
               <a:avLst/>
               <a:pathLst>
-                <a:path w="7403783" h="1561064">
+                <a:path w="7403783" h="1488881">
                   <a:moveTo>
-                    <a:pt x="7403783" y="1561064"/>
+                    <a:pt x="7403783" y="1488881"/>
                   </a:moveTo>
                   <a:lnTo>
-                    <a:pt x="7327150" y="1557283"/>
-                  </a:lnTo>
-                  <a:lnTo>
-                    <a:pt x="7250518" y="1553325"/>
-                  </a:lnTo>
-                  <a:lnTo>
-                    <a:pt x="7173885" y="1549184"/>
-                  </a:lnTo>
-                  <a:lnTo>
-                    <a:pt x="7097253" y="1544851"/>
-                  </a:lnTo>
-                  <a:lnTo>
-                    <a:pt x="7020620" y="1540316"/>
-                  </a:lnTo>
-                  <a:lnTo>
-                    <a:pt x="6943987" y="1535570"/>
-                  </a:lnTo>
-                  <a:lnTo>
-                    <a:pt x="6867355" y="1530604"/>
-                  </a:lnTo>
-                  <a:lnTo>
-                    <a:pt x="6790722" y="1525407"/>
-                  </a:lnTo>
-                  <a:lnTo>
-                    <a:pt x="6714090" y="1519968"/>
-                  </a:lnTo>
-                  <a:lnTo>
-                    <a:pt x="6637457" y="1514277"/>
-                  </a:lnTo>
-                  <a:lnTo>
-                    <a:pt x="6560825" y="1508321"/>
-                  </a:lnTo>
-                  <a:lnTo>
-                    <a:pt x="6484192" y="1502089"/>
-                  </a:lnTo>
-                  <a:lnTo>
-                    <a:pt x="6407560" y="1495567"/>
-                  </a:lnTo>
-                  <a:lnTo>
-                    <a:pt x="6330927" y="1488742"/>
-                  </a:lnTo>
-                  <a:lnTo>
-                    <a:pt x="6254294" y="1481600"/>
-                  </a:lnTo>
-                  <a:lnTo>
-                    <a:pt x="6177662" y="1474126"/>
-                  </a:lnTo>
-                  <a:lnTo>
-                    <a:pt x="6101029" y="1466305"/>
-                  </a:lnTo>
-                  <a:lnTo>
-                    <a:pt x="6024397" y="1458121"/>
-                  </a:lnTo>
-                  <a:lnTo>
-                    <a:pt x="5947764" y="1449556"/>
-                  </a:lnTo>
-                  <a:lnTo>
-                    <a:pt x="5871132" y="1440593"/>
-                  </a:lnTo>
-                  <a:lnTo>
-                    <a:pt x="5794499" y="1431214"/>
-                  </a:lnTo>
-                  <a:lnTo>
-                    <a:pt x="5717867" y="1421399"/>
-                  </a:lnTo>
-                  <a:lnTo>
-                    <a:pt x="5641234" y="1411128"/>
-                  </a:lnTo>
-                  <a:lnTo>
-                    <a:pt x="5564602" y="1400379"/>
-                  </a:lnTo>
-                  <a:lnTo>
-                    <a:pt x="5487969" y="1389131"/>
-                  </a:lnTo>
-                  <a:lnTo>
-                    <a:pt x="5411336" y="1377361"/>
-                  </a:lnTo>
-                  <a:lnTo>
-                    <a:pt x="5334704" y="1365044"/>
-                  </a:lnTo>
-                  <a:lnTo>
-                    <a:pt x="5258071" y="1352154"/>
-                  </a:lnTo>
-                  <a:lnTo>
-                    <a:pt x="5181439" y="1338665"/>
-                  </a:lnTo>
-                  <a:lnTo>
-                    <a:pt x="5104806" y="1324550"/>
-                  </a:lnTo>
-                  <a:lnTo>
-                    <a:pt x="5028174" y="1309779"/>
-                  </a:lnTo>
-                  <a:lnTo>
-                    <a:pt x="4951541" y="1294322"/>
-                  </a:lnTo>
-                  <a:lnTo>
-                    <a:pt x="4874909" y="1278146"/>
-                  </a:lnTo>
-                  <a:lnTo>
-                    <a:pt x="4798276" y="1261219"/>
-                  </a:lnTo>
-                  <a:lnTo>
-                    <a:pt x="4721644" y="1243505"/>
-                  </a:lnTo>
-                  <a:lnTo>
-                    <a:pt x="4645011" y="1224968"/>
-                  </a:lnTo>
-                  <a:lnTo>
-                    <a:pt x="4568378" y="1205570"/>
-                  </a:lnTo>
-                  <a:lnTo>
-                    <a:pt x="4491746" y="1185270"/>
-                  </a:lnTo>
-                  <a:lnTo>
-                    <a:pt x="4415113" y="1164028"/>
-                  </a:lnTo>
-                  <a:lnTo>
-                    <a:pt x="4338481" y="1141798"/>
-                  </a:lnTo>
-                  <a:lnTo>
-                    <a:pt x="4261848" y="1118535"/>
-                  </a:lnTo>
-                  <a:lnTo>
-                    <a:pt x="4185216" y="1094192"/>
-                  </a:lnTo>
-                  <a:lnTo>
-                    <a:pt x="4108583" y="1068717"/>
-                  </a:lnTo>
-                  <a:lnTo>
-                    <a:pt x="4031951" y="1042059"/>
-                  </a:lnTo>
-                  <a:lnTo>
-                    <a:pt x="3955318" y="1014162"/>
-                  </a:lnTo>
-                  <a:lnTo>
-                    <a:pt x="3878685" y="984969"/>
-                  </a:lnTo>
-                  <a:lnTo>
-                    <a:pt x="3802053" y="954419"/>
-                  </a:lnTo>
-                  <a:lnTo>
-                    <a:pt x="3725420" y="922450"/>
-                  </a:lnTo>
-                  <a:lnTo>
-                    <a:pt x="3648788" y="888996"/>
-                  </a:lnTo>
-                  <a:lnTo>
-                    <a:pt x="3572155" y="853987"/>
-                  </a:lnTo>
-                  <a:lnTo>
-                    <a:pt x="3495523" y="817351"/>
-                  </a:lnTo>
-                  <a:lnTo>
-                    <a:pt x="3418890" y="779013"/>
-                  </a:lnTo>
-                  <a:lnTo>
-                    <a:pt x="3342258" y="762245"/>
-                  </a:lnTo>
-                  <a:lnTo>
-                    <a:pt x="3265625" y="749566"/>
-                  </a:lnTo>
-                  <a:lnTo>
-                    <a:pt x="3188993" y="736705"/>
-                  </a:lnTo>
-                  <a:lnTo>
-                    <a:pt x="3112360" y="723658"/>
-                  </a:lnTo>
-                  <a:lnTo>
-                    <a:pt x="3035727" y="710423"/>
-                  </a:lnTo>
-                  <a:lnTo>
-                    <a:pt x="2959095" y="696997"/>
-                  </a:lnTo>
-                  <a:lnTo>
-                    <a:pt x="2882462" y="683378"/>
-                  </a:lnTo>
-                  <a:lnTo>
-                    <a:pt x="2805830" y="669563"/>
-                  </a:lnTo>
-                  <a:lnTo>
-                    <a:pt x="2729197" y="655549"/>
-                  </a:lnTo>
-                  <a:lnTo>
-                    <a:pt x="2652565" y="641333"/>
-                  </a:lnTo>
-                  <a:lnTo>
-                    <a:pt x="2575932" y="626912"/>
-                  </a:lnTo>
-                  <a:lnTo>
-                    <a:pt x="2499300" y="612283"/>
-                  </a:lnTo>
-                  <a:lnTo>
-                    <a:pt x="2422667" y="597444"/>
-                  </a:lnTo>
-                  <a:lnTo>
-                    <a:pt x="2346034" y="582391"/>
-                  </a:lnTo>
-                  <a:lnTo>
-                    <a:pt x="2269402" y="567121"/>
-                  </a:lnTo>
-                  <a:lnTo>
-                    <a:pt x="2192769" y="551632"/>
-                  </a:lnTo>
-                  <a:lnTo>
-                    <a:pt x="2116137" y="535919"/>
-                  </a:lnTo>
-                  <a:lnTo>
-                    <a:pt x="2039504" y="519979"/>
-                  </a:lnTo>
-                  <a:lnTo>
-                    <a:pt x="1962872" y="503811"/>
-                  </a:lnTo>
-                  <a:lnTo>
-                    <a:pt x="1886239" y="487409"/>
-                  </a:lnTo>
-                  <a:lnTo>
-                    <a:pt x="1809607" y="470771"/>
-                  </a:lnTo>
-                  <a:lnTo>
-                    <a:pt x="1732974" y="453893"/>
-                  </a:lnTo>
-                  <a:lnTo>
-                    <a:pt x="1656342" y="436772"/>
-                  </a:lnTo>
-                  <a:lnTo>
-                    <a:pt x="1579709" y="419405"/>
-                  </a:lnTo>
-                  <a:lnTo>
-                    <a:pt x="1503076" y="401787"/>
-                  </a:lnTo>
-                  <a:lnTo>
-                    <a:pt x="1426444" y="383916"/>
-                  </a:lnTo>
-                  <a:lnTo>
-                    <a:pt x="1349811" y="365787"/>
-                  </a:lnTo>
-                  <a:lnTo>
-                    <a:pt x="1273179" y="347397"/>
-                  </a:lnTo>
-                  <a:lnTo>
-                    <a:pt x="1196546" y="328742"/>
-                  </a:lnTo>
-                  <a:lnTo>
-                    <a:pt x="1119914" y="309819"/>
-                  </a:lnTo>
-                  <a:lnTo>
-                    <a:pt x="1043281" y="290622"/>
-                  </a:lnTo>
-                  <a:lnTo>
-                    <a:pt x="966649" y="271150"/>
-                  </a:lnTo>
-                  <a:lnTo>
-                    <a:pt x="890016" y="251397"/>
-                  </a:lnTo>
-                  <a:lnTo>
-                    <a:pt x="813384" y="231359"/>
-                  </a:lnTo>
-                  <a:lnTo>
-                    <a:pt x="736751" y="211033"/>
-                  </a:lnTo>
-                  <a:lnTo>
-                    <a:pt x="660118" y="190413"/>
-                  </a:lnTo>
-                  <a:lnTo>
-                    <a:pt x="583486" y="169497"/>
-                  </a:lnTo>
-                  <a:lnTo>
-                    <a:pt x="506853" y="148280"/>
-                  </a:lnTo>
-                  <a:lnTo>
-                    <a:pt x="430221" y="126757"/>
-                  </a:lnTo>
-                  <a:lnTo>
-                    <a:pt x="353588" y="104924"/>
-                  </a:lnTo>
-                  <a:lnTo>
-                    <a:pt x="276956" y="82776"/>
-                  </a:lnTo>
-                  <a:lnTo>
-                    <a:pt x="200323" y="60309"/>
-                  </a:lnTo>
-                  <a:lnTo>
-                    <a:pt x="123691" y="37519"/>
-                  </a:lnTo>
-                  <a:lnTo>
-                    <a:pt x="47058" y="14401"/>
+                    <a:pt x="7327150" y="1485275"/>
+                  </a:lnTo>
+                  <a:lnTo>
+                    <a:pt x="7250518" y="1481500"/>
+                  </a:lnTo>
+                  <a:lnTo>
+                    <a:pt x="7173885" y="1477551"/>
+                  </a:lnTo>
+                  <a:lnTo>
+                    <a:pt x="7097253" y="1473417"/>
+                  </a:lnTo>
+                  <a:lnTo>
+                    <a:pt x="7020620" y="1469092"/>
+                  </a:lnTo>
+                  <a:lnTo>
+                    <a:pt x="6943987" y="1464566"/>
+                  </a:lnTo>
+                  <a:lnTo>
+                    <a:pt x="6867355" y="1459829"/>
+                  </a:lnTo>
+                  <a:lnTo>
+                    <a:pt x="6790722" y="1454872"/>
+                  </a:lnTo>
+                  <a:lnTo>
+                    <a:pt x="6714090" y="1449685"/>
+                  </a:lnTo>
+                  <a:lnTo>
+                    <a:pt x="6637457" y="1444257"/>
+                  </a:lnTo>
+                  <a:lnTo>
+                    <a:pt x="6560825" y="1438577"/>
+                  </a:lnTo>
+                  <a:lnTo>
+                    <a:pt x="6484192" y="1432633"/>
+                  </a:lnTo>
+                  <a:lnTo>
+                    <a:pt x="6407560" y="1426413"/>
+                  </a:lnTo>
+                  <a:lnTo>
+                    <a:pt x="6330927" y="1419903"/>
+                  </a:lnTo>
+                  <a:lnTo>
+                    <a:pt x="6254294" y="1413092"/>
+                  </a:lnTo>
+                  <a:lnTo>
+                    <a:pt x="6177662" y="1405963"/>
+                  </a:lnTo>
+                  <a:lnTo>
+                    <a:pt x="6101029" y="1398504"/>
+                  </a:lnTo>
+                  <a:lnTo>
+                    <a:pt x="6024397" y="1390698"/>
+                  </a:lnTo>
+                  <a:lnTo>
+                    <a:pt x="5947764" y="1382529"/>
+                  </a:lnTo>
+                  <a:lnTo>
+                    <a:pt x="5871132" y="1373980"/>
+                  </a:lnTo>
+                  <a:lnTo>
+                    <a:pt x="5794499" y="1365035"/>
+                  </a:lnTo>
+                  <a:lnTo>
+                    <a:pt x="5717867" y="1355674"/>
+                  </a:lnTo>
+                  <a:lnTo>
+                    <a:pt x="5641234" y="1345877"/>
+                  </a:lnTo>
+                  <a:lnTo>
+                    <a:pt x="5564602" y="1335626"/>
+                  </a:lnTo>
+                  <a:lnTo>
+                    <a:pt x="5487969" y="1324898"/>
+                  </a:lnTo>
+                  <a:lnTo>
+                    <a:pt x="5411336" y="1313672"/>
+                  </a:lnTo>
+                  <a:lnTo>
+                    <a:pt x="5334704" y="1301925"/>
+                  </a:lnTo>
+                  <a:lnTo>
+                    <a:pt x="5258071" y="1289631"/>
+                  </a:lnTo>
+                  <a:lnTo>
+                    <a:pt x="5181439" y="1276766"/>
+                  </a:lnTo>
+                  <a:lnTo>
+                    <a:pt x="5104806" y="1263303"/>
+                  </a:lnTo>
+                  <a:lnTo>
+                    <a:pt x="5028174" y="1249215"/>
+                  </a:lnTo>
+                  <a:lnTo>
+                    <a:pt x="4951541" y="1234473"/>
+                  </a:lnTo>
+                  <a:lnTo>
+                    <a:pt x="4874909" y="1219045"/>
+                  </a:lnTo>
+                  <a:lnTo>
+                    <a:pt x="4798276" y="1202900"/>
+                  </a:lnTo>
+                  <a:lnTo>
+                    <a:pt x="4721644" y="1186006"/>
+                  </a:lnTo>
+                  <a:lnTo>
+                    <a:pt x="4645011" y="1168326"/>
+                  </a:lnTo>
+                  <a:lnTo>
+                    <a:pt x="4568378" y="1149825"/>
+                  </a:lnTo>
+                  <a:lnTo>
+                    <a:pt x="4491746" y="1130464"/>
+                  </a:lnTo>
+                  <a:lnTo>
+                    <a:pt x="4415113" y="1110203"/>
+                  </a:lnTo>
+                  <a:lnTo>
+                    <a:pt x="4338481" y="1089002"/>
+                  </a:lnTo>
+                  <a:lnTo>
+                    <a:pt x="4261848" y="1066815"/>
+                  </a:lnTo>
+                  <a:lnTo>
+                    <a:pt x="4185216" y="1043597"/>
+                  </a:lnTo>
+                  <a:lnTo>
+                    <a:pt x="4108583" y="1019300"/>
+                  </a:lnTo>
+                  <a:lnTo>
+                    <a:pt x="4031951" y="993875"/>
+                  </a:lnTo>
+                  <a:lnTo>
+                    <a:pt x="3955318" y="967268"/>
+                  </a:lnTo>
+                  <a:lnTo>
+                    <a:pt x="3878685" y="939424"/>
+                  </a:lnTo>
+                  <a:lnTo>
+                    <a:pt x="3802053" y="910287"/>
+                  </a:lnTo>
+                  <a:lnTo>
+                    <a:pt x="3725420" y="879796"/>
+                  </a:lnTo>
+                  <a:lnTo>
+                    <a:pt x="3648788" y="847889"/>
+                  </a:lnTo>
+                  <a:lnTo>
+                    <a:pt x="3572155" y="814499"/>
+                  </a:lnTo>
+                  <a:lnTo>
+                    <a:pt x="3495523" y="779557"/>
+                  </a:lnTo>
+                  <a:lnTo>
+                    <a:pt x="3418890" y="742992"/>
+                  </a:lnTo>
+                  <a:lnTo>
+                    <a:pt x="3342258" y="726999"/>
+                  </a:lnTo>
+                  <a:lnTo>
+                    <a:pt x="3265625" y="714907"/>
+                  </a:lnTo>
+                  <a:lnTo>
+                    <a:pt x="3188993" y="702640"/>
+                  </a:lnTo>
+                  <a:lnTo>
+                    <a:pt x="3112360" y="690196"/>
+                  </a:lnTo>
+                  <a:lnTo>
+                    <a:pt x="3035727" y="677573"/>
+                  </a:lnTo>
+                  <a:lnTo>
+                    <a:pt x="2959095" y="664768"/>
+                  </a:lnTo>
+                  <a:lnTo>
+                    <a:pt x="2882462" y="651779"/>
+                  </a:lnTo>
+                  <a:lnTo>
+                    <a:pt x="2805830" y="638603"/>
+                  </a:lnTo>
+                  <a:lnTo>
+                    <a:pt x="2729197" y="625236"/>
+                  </a:lnTo>
+                  <a:lnTo>
+                    <a:pt x="2652565" y="611678"/>
+                  </a:lnTo>
+                  <a:lnTo>
+                    <a:pt x="2575932" y="597924"/>
+                  </a:lnTo>
+                  <a:lnTo>
+                    <a:pt x="2499300" y="583972"/>
+                  </a:lnTo>
+                  <a:lnTo>
+                    <a:pt x="2422667" y="569819"/>
+                  </a:lnTo>
+                  <a:lnTo>
+                    <a:pt x="2346034" y="555462"/>
+                  </a:lnTo>
+                  <a:lnTo>
+                    <a:pt x="2269402" y="540898"/>
+                  </a:lnTo>
+                  <a:lnTo>
+                    <a:pt x="2192769" y="526124"/>
+                  </a:lnTo>
+                  <a:lnTo>
+                    <a:pt x="2116137" y="511138"/>
+                  </a:lnTo>
+                  <a:lnTo>
+                    <a:pt x="2039504" y="495936"/>
+                  </a:lnTo>
+                  <a:lnTo>
+                    <a:pt x="1962872" y="480514"/>
+                  </a:lnTo>
+                  <a:lnTo>
+                    <a:pt x="1886239" y="464871"/>
+                  </a:lnTo>
+                  <a:lnTo>
+                    <a:pt x="1809607" y="449002"/>
+                  </a:lnTo>
+                  <a:lnTo>
+                    <a:pt x="1732974" y="432905"/>
+                  </a:lnTo>
+                  <a:lnTo>
+                    <a:pt x="1656342" y="416576"/>
+                  </a:lnTo>
+                  <a:lnTo>
+                    <a:pt x="1579709" y="400012"/>
+                  </a:lnTo>
+                  <a:lnTo>
+                    <a:pt x="1503076" y="383209"/>
+                  </a:lnTo>
+                  <a:lnTo>
+                    <a:pt x="1426444" y="366164"/>
+                  </a:lnTo>
+                  <a:lnTo>
+                    <a:pt x="1349811" y="348873"/>
+                  </a:lnTo>
+                  <a:lnTo>
+                    <a:pt x="1273179" y="331334"/>
+                  </a:lnTo>
+                  <a:lnTo>
+                    <a:pt x="1196546" y="313541"/>
+                  </a:lnTo>
+                  <a:lnTo>
+                    <a:pt x="1119914" y="295493"/>
+                  </a:lnTo>
+                  <a:lnTo>
+                    <a:pt x="1043281" y="277184"/>
+                  </a:lnTo>
+                  <a:lnTo>
+                    <a:pt x="966649" y="258612"/>
+                  </a:lnTo>
+                  <a:lnTo>
+                    <a:pt x="890016" y="239772"/>
+                  </a:lnTo>
+                  <a:lnTo>
+                    <a:pt x="813384" y="220661"/>
+                  </a:lnTo>
+                  <a:lnTo>
+                    <a:pt x="736751" y="201274"/>
+                  </a:lnTo>
+                  <a:lnTo>
+                    <a:pt x="660118" y="181609"/>
+                  </a:lnTo>
+                  <a:lnTo>
+                    <a:pt x="583486" y="161660"/>
+                  </a:lnTo>
+                  <a:lnTo>
+                    <a:pt x="506853" y="141423"/>
+                  </a:lnTo>
+                  <a:lnTo>
+                    <a:pt x="430221" y="120896"/>
+                  </a:lnTo>
+                  <a:lnTo>
+                    <a:pt x="353588" y="100072"/>
+                  </a:lnTo>
+                  <a:lnTo>
+                    <a:pt x="276956" y="78949"/>
+                  </a:lnTo>
+                  <a:lnTo>
+                    <a:pt x="200323" y="57521"/>
+                  </a:lnTo>
+                  <a:lnTo>
+                    <a:pt x="123691" y="35784"/>
+                  </a:lnTo>
+                  <a:lnTo>
+                    <a:pt x="47058" y="13735"/>
                   </a:lnTo>
                   <a:lnTo>
                     <a:pt x="0" y="0"/>
@@ -4181,306 +4181,306 @@
           </p:nvSpPr>
           <p:spPr>
             <a:xfrm>
-              <a:off x="817517" y="2269031"/>
-              <a:ext cx="7403783" cy="3096955"/>
+              <a:off x="817517" y="2428748"/>
+              <a:ext cx="7403783" cy="2953753"/>
             </a:xfrm>
             <a:custGeom>
               <a:avLst/>
               <a:pathLst>
-                <a:path w="7403783" h="3096955">
+                <a:path w="7403783" h="2953753">
                   <a:moveTo>
                     <a:pt x="0" y="0"/>
                   </a:moveTo>
                   <a:lnTo>
-                    <a:pt x="47058" y="59937"/>
-                  </a:lnTo>
-                  <a:lnTo>
-                    <a:pt x="123691" y="154670"/>
-                  </a:lnTo>
-                  <a:lnTo>
-                    <a:pt x="200323" y="246617"/>
-                  </a:lnTo>
-                  <a:lnTo>
-                    <a:pt x="276956" y="335859"/>
-                  </a:lnTo>
-                  <a:lnTo>
-                    <a:pt x="353588" y="422475"/>
-                  </a:lnTo>
-                  <a:lnTo>
-                    <a:pt x="430221" y="506544"/>
-                  </a:lnTo>
-                  <a:lnTo>
-                    <a:pt x="506853" y="588139"/>
-                  </a:lnTo>
-                  <a:lnTo>
-                    <a:pt x="583486" y="667334"/>
-                  </a:lnTo>
-                  <a:lnTo>
-                    <a:pt x="660118" y="744199"/>
-                  </a:lnTo>
-                  <a:lnTo>
-                    <a:pt x="736751" y="818803"/>
-                  </a:lnTo>
-                  <a:lnTo>
-                    <a:pt x="813384" y="891212"/>
-                  </a:lnTo>
-                  <a:lnTo>
-                    <a:pt x="890016" y="961491"/>
-                  </a:lnTo>
-                  <a:lnTo>
-                    <a:pt x="966649" y="1029702"/>
-                  </a:lnTo>
-                  <a:lnTo>
-                    <a:pt x="1043281" y="1095907"/>
-                  </a:lnTo>
-                  <a:lnTo>
-                    <a:pt x="1119914" y="1160164"/>
-                  </a:lnTo>
-                  <a:lnTo>
-                    <a:pt x="1196546" y="1222531"/>
-                  </a:lnTo>
-                  <a:lnTo>
-                    <a:pt x="1273179" y="1283063"/>
-                  </a:lnTo>
-                  <a:lnTo>
-                    <a:pt x="1349811" y="1341815"/>
-                  </a:lnTo>
-                  <a:lnTo>
-                    <a:pt x="1426444" y="1398838"/>
-                  </a:lnTo>
-                  <a:lnTo>
-                    <a:pt x="1503076" y="1454183"/>
-                  </a:lnTo>
-                  <a:lnTo>
-                    <a:pt x="1579709" y="1507901"/>
-                  </a:lnTo>
-                  <a:lnTo>
-                    <a:pt x="1656342" y="1560038"/>
-                  </a:lnTo>
-                  <a:lnTo>
-                    <a:pt x="1732974" y="1610641"/>
-                  </a:lnTo>
-                  <a:lnTo>
-                    <a:pt x="1809607" y="1659756"/>
-                  </a:lnTo>
-                  <a:lnTo>
-                    <a:pt x="1886239" y="1707426"/>
-                  </a:lnTo>
-                  <a:lnTo>
-                    <a:pt x="1962872" y="1753693"/>
-                  </a:lnTo>
-                  <a:lnTo>
-                    <a:pt x="2039504" y="1798599"/>
-                  </a:lnTo>
-                  <a:lnTo>
-                    <a:pt x="2116137" y="1842185"/>
-                  </a:lnTo>
-                  <a:lnTo>
-                    <a:pt x="2192769" y="1884488"/>
-                  </a:lnTo>
-                  <a:lnTo>
-                    <a:pt x="2269402" y="1925546"/>
-                  </a:lnTo>
-                  <a:lnTo>
-                    <a:pt x="2346034" y="1965397"/>
-                  </a:lnTo>
-                  <a:lnTo>
-                    <a:pt x="2422667" y="2004075"/>
-                  </a:lnTo>
-                  <a:lnTo>
-                    <a:pt x="2499300" y="2041616"/>
-                  </a:lnTo>
-                  <a:lnTo>
-                    <a:pt x="2575932" y="2078052"/>
-                  </a:lnTo>
-                  <a:lnTo>
-                    <a:pt x="2652565" y="2113416"/>
-                  </a:lnTo>
-                  <a:lnTo>
-                    <a:pt x="2729197" y="2147740"/>
-                  </a:lnTo>
-                  <a:lnTo>
-                    <a:pt x="2805830" y="2181055"/>
-                  </a:lnTo>
-                  <a:lnTo>
-                    <a:pt x="2882462" y="2213389"/>
-                  </a:lnTo>
-                  <a:lnTo>
-                    <a:pt x="2959095" y="2244772"/>
-                  </a:lnTo>
-                  <a:lnTo>
-                    <a:pt x="3035727" y="2275231"/>
-                  </a:lnTo>
-                  <a:lnTo>
-                    <a:pt x="3112360" y="2304795"/>
-                  </a:lnTo>
-                  <a:lnTo>
-                    <a:pt x="3188993" y="2333489"/>
-                  </a:lnTo>
-                  <a:lnTo>
-                    <a:pt x="3265625" y="2361339"/>
-                  </a:lnTo>
-                  <a:lnTo>
-                    <a:pt x="3342258" y="2388369"/>
-                  </a:lnTo>
-                  <a:lnTo>
-                    <a:pt x="3418890" y="2414604"/>
-                  </a:lnTo>
-                  <a:lnTo>
-                    <a:pt x="3495523" y="2440068"/>
-                  </a:lnTo>
-                  <a:lnTo>
-                    <a:pt x="3572155" y="2464782"/>
-                  </a:lnTo>
-                  <a:lnTo>
-                    <a:pt x="3648788" y="2488770"/>
-                  </a:lnTo>
-                  <a:lnTo>
-                    <a:pt x="3725420" y="2512052"/>
-                  </a:lnTo>
-                  <a:lnTo>
-                    <a:pt x="3802053" y="2534648"/>
-                  </a:lnTo>
-                  <a:lnTo>
-                    <a:pt x="3878685" y="2556580"/>
-                  </a:lnTo>
-                  <a:lnTo>
-                    <a:pt x="3955318" y="2577867"/>
-                  </a:lnTo>
-                  <a:lnTo>
-                    <a:pt x="4031951" y="2598528"/>
-                  </a:lnTo>
-                  <a:lnTo>
-                    <a:pt x="4108583" y="2618581"/>
-                  </a:lnTo>
-                  <a:lnTo>
-                    <a:pt x="4185216" y="2638044"/>
-                  </a:lnTo>
-                  <a:lnTo>
-                    <a:pt x="4261848" y="2656934"/>
-                  </a:lnTo>
-                  <a:lnTo>
-                    <a:pt x="4338481" y="2675269"/>
-                  </a:lnTo>
-                  <a:lnTo>
-                    <a:pt x="4415113" y="2693064"/>
-                  </a:lnTo>
-                  <a:lnTo>
-                    <a:pt x="4491746" y="2710336"/>
-                  </a:lnTo>
-                  <a:lnTo>
-                    <a:pt x="4568378" y="2727099"/>
-                  </a:lnTo>
-                  <a:lnTo>
-                    <a:pt x="4645011" y="2743370"/>
-                  </a:lnTo>
-                  <a:lnTo>
-                    <a:pt x="4721644" y="2759162"/>
-                  </a:lnTo>
-                  <a:lnTo>
-                    <a:pt x="4798276" y="2774489"/>
-                  </a:lnTo>
-                  <a:lnTo>
-                    <a:pt x="4874909" y="2789365"/>
-                  </a:lnTo>
-                  <a:lnTo>
-                    <a:pt x="4951541" y="2803804"/>
-                  </a:lnTo>
-                  <a:lnTo>
-                    <a:pt x="5028174" y="2817818"/>
-                  </a:lnTo>
-                  <a:lnTo>
-                    <a:pt x="5104806" y="2831420"/>
-                  </a:lnTo>
-                  <a:lnTo>
-                    <a:pt x="5181439" y="2844621"/>
-                  </a:lnTo>
-                  <a:lnTo>
-                    <a:pt x="5258071" y="2857434"/>
-                  </a:lnTo>
-                  <a:lnTo>
-                    <a:pt x="5334704" y="2869871"/>
-                  </a:lnTo>
-                  <a:lnTo>
-                    <a:pt x="5411336" y="2881941"/>
-                  </a:lnTo>
-                  <a:lnTo>
-                    <a:pt x="5487969" y="2893656"/>
-                  </a:lnTo>
-                  <a:lnTo>
-                    <a:pt x="5564602" y="2905027"/>
-                  </a:lnTo>
-                  <a:lnTo>
-                    <a:pt x="5641234" y="2916063"/>
-                  </a:lnTo>
-                  <a:lnTo>
-                    <a:pt x="5717867" y="2926775"/>
-                  </a:lnTo>
-                  <a:lnTo>
-                    <a:pt x="5794499" y="2937171"/>
-                  </a:lnTo>
-                  <a:lnTo>
-                    <a:pt x="5871132" y="2947262"/>
-                  </a:lnTo>
-                  <a:lnTo>
-                    <a:pt x="5947764" y="2957055"/>
-                  </a:lnTo>
-                  <a:lnTo>
-                    <a:pt x="6024397" y="2966561"/>
-                  </a:lnTo>
-                  <a:lnTo>
-                    <a:pt x="6101029" y="2975787"/>
-                  </a:lnTo>
-                  <a:lnTo>
-                    <a:pt x="6177662" y="2984742"/>
-                  </a:lnTo>
-                  <a:lnTo>
-                    <a:pt x="6254294" y="2993433"/>
-                  </a:lnTo>
-                  <a:lnTo>
-                    <a:pt x="6330927" y="3001868"/>
-                  </a:lnTo>
-                  <a:lnTo>
-                    <a:pt x="6407560" y="3010055"/>
-                  </a:lnTo>
-                  <a:lnTo>
-                    <a:pt x="6484192" y="3018002"/>
-                  </a:lnTo>
-                  <a:lnTo>
-                    <a:pt x="6560825" y="3025715"/>
-                  </a:lnTo>
-                  <a:lnTo>
-                    <a:pt x="6637457" y="3033200"/>
-                  </a:lnTo>
-                  <a:lnTo>
-                    <a:pt x="6714090" y="3040466"/>
-                  </a:lnTo>
-                  <a:lnTo>
-                    <a:pt x="6790722" y="3047518"/>
-                  </a:lnTo>
-                  <a:lnTo>
-                    <a:pt x="6867355" y="3054362"/>
-                  </a:lnTo>
-                  <a:lnTo>
-                    <a:pt x="6943987" y="3061005"/>
-                  </a:lnTo>
-                  <a:lnTo>
-                    <a:pt x="7020620" y="3067453"/>
-                  </a:lnTo>
-                  <a:lnTo>
-                    <a:pt x="7097253" y="3073711"/>
-                  </a:lnTo>
-                  <a:lnTo>
-                    <a:pt x="7173885" y="3079784"/>
-                  </a:lnTo>
-                  <a:lnTo>
-                    <a:pt x="7250518" y="3085680"/>
-                  </a:lnTo>
-                  <a:lnTo>
-                    <a:pt x="7327150" y="3091401"/>
-                  </a:lnTo>
-                  <a:lnTo>
-                    <a:pt x="7403783" y="3096955"/>
+                    <a:pt x="47058" y="57165"/>
+                  </a:lnTo>
+                  <a:lnTo>
+                    <a:pt x="123691" y="147518"/>
+                  </a:lnTo>
+                  <a:lnTo>
+                    <a:pt x="200323" y="235214"/>
+                  </a:lnTo>
+                  <a:lnTo>
+                    <a:pt x="276956" y="320329"/>
+                  </a:lnTo>
+                  <a:lnTo>
+                    <a:pt x="353588" y="402940"/>
+                  </a:lnTo>
+                  <a:lnTo>
+                    <a:pt x="430221" y="483121"/>
+                  </a:lnTo>
+                  <a:lnTo>
+                    <a:pt x="506853" y="560943"/>
+                  </a:lnTo>
+                  <a:lnTo>
+                    <a:pt x="583486" y="636476"/>
+                  </a:lnTo>
+                  <a:lnTo>
+                    <a:pt x="660118" y="709787"/>
+                  </a:lnTo>
+                  <a:lnTo>
+                    <a:pt x="736751" y="780941"/>
+                  </a:lnTo>
+                  <a:lnTo>
+                    <a:pt x="813384" y="850002"/>
+                  </a:lnTo>
+                  <a:lnTo>
+                    <a:pt x="890016" y="917032"/>
+                  </a:lnTo>
+                  <a:lnTo>
+                    <a:pt x="966649" y="982089"/>
+                  </a:lnTo>
+                  <a:lnTo>
+                    <a:pt x="1043281" y="1045233"/>
+                  </a:lnTo>
+                  <a:lnTo>
+                    <a:pt x="1119914" y="1106519"/>
+                  </a:lnTo>
+                  <a:lnTo>
+                    <a:pt x="1196546" y="1166002"/>
+                  </a:lnTo>
+                  <a:lnTo>
+                    <a:pt x="1273179" y="1223735"/>
+                  </a:lnTo>
+                  <a:lnTo>
+                    <a:pt x="1349811" y="1279770"/>
+                  </a:lnTo>
+                  <a:lnTo>
+                    <a:pt x="1426444" y="1334156"/>
+                  </a:lnTo>
+                  <a:lnTo>
+                    <a:pt x="1503076" y="1386942"/>
+                  </a:lnTo>
+                  <a:lnTo>
+                    <a:pt x="1579709" y="1438176"/>
+                  </a:lnTo>
+                  <a:lnTo>
+                    <a:pt x="1656342" y="1487902"/>
+                  </a:lnTo>
+                  <a:lnTo>
+                    <a:pt x="1732974" y="1536166"/>
+                  </a:lnTo>
+                  <a:lnTo>
+                    <a:pt x="1809607" y="1583009"/>
+                  </a:lnTo>
+                  <a:lnTo>
+                    <a:pt x="1886239" y="1628475"/>
+                  </a:lnTo>
+                  <a:lnTo>
+                    <a:pt x="1962872" y="1672603"/>
+                  </a:lnTo>
+                  <a:lnTo>
+                    <a:pt x="2039504" y="1715433"/>
+                  </a:lnTo>
+                  <a:lnTo>
+                    <a:pt x="2116137" y="1757003"/>
+                  </a:lnTo>
+                  <a:lnTo>
+                    <a:pt x="2192769" y="1797350"/>
+                  </a:lnTo>
+                  <a:lnTo>
+                    <a:pt x="2269402" y="1836510"/>
+                  </a:lnTo>
+                  <a:lnTo>
+                    <a:pt x="2346034" y="1874518"/>
+                  </a:lnTo>
+                  <a:lnTo>
+                    <a:pt x="2422667" y="1911408"/>
+                  </a:lnTo>
+                  <a:lnTo>
+                    <a:pt x="2499300" y="1947212"/>
+                  </a:lnTo>
+                  <a:lnTo>
+                    <a:pt x="2575932" y="1981964"/>
+                  </a:lnTo>
+                  <a:lnTo>
+                    <a:pt x="2652565" y="2015693"/>
+                  </a:lnTo>
+                  <a:lnTo>
+                    <a:pt x="2729197" y="2048430"/>
+                  </a:lnTo>
+                  <a:lnTo>
+                    <a:pt x="2805830" y="2080203"/>
+                  </a:lnTo>
+                  <a:lnTo>
+                    <a:pt x="2882462" y="2111042"/>
+                  </a:lnTo>
+                  <a:lnTo>
+                    <a:pt x="2959095" y="2140974"/>
+                  </a:lnTo>
+                  <a:lnTo>
+                    <a:pt x="3035727" y="2170025"/>
+                  </a:lnTo>
+                  <a:lnTo>
+                    <a:pt x="3112360" y="2198222"/>
+                  </a:lnTo>
+                  <a:lnTo>
+                    <a:pt x="3188993" y="2225589"/>
+                  </a:lnTo>
+                  <a:lnTo>
+                    <a:pt x="3265625" y="2252151"/>
+                  </a:lnTo>
+                  <a:lnTo>
+                    <a:pt x="3342258" y="2277932"/>
+                  </a:lnTo>
+                  <a:lnTo>
+                    <a:pt x="3418890" y="2302954"/>
+                  </a:lnTo>
+                  <a:lnTo>
+                    <a:pt x="3495523" y="2327240"/>
+                  </a:lnTo>
+                  <a:lnTo>
+                    <a:pt x="3572155" y="2350812"/>
+                  </a:lnTo>
+                  <a:lnTo>
+                    <a:pt x="3648788" y="2373690"/>
+                  </a:lnTo>
+                  <a:lnTo>
+                    <a:pt x="3725420" y="2395895"/>
+                  </a:lnTo>
+                  <a:lnTo>
+                    <a:pt x="3802053" y="2417447"/>
+                  </a:lnTo>
+                  <a:lnTo>
+                    <a:pt x="3878685" y="2438365"/>
+                  </a:lnTo>
+                  <a:lnTo>
+                    <a:pt x="3955318" y="2458668"/>
+                  </a:lnTo>
+                  <a:lnTo>
+                    <a:pt x="4031951" y="2478373"/>
+                  </a:lnTo>
+                  <a:lnTo>
+                    <a:pt x="4108583" y="2497498"/>
+                  </a:lnTo>
+                  <a:lnTo>
+                    <a:pt x="4185216" y="2516061"/>
+                  </a:lnTo>
+                  <a:lnTo>
+                    <a:pt x="4261848" y="2534078"/>
+                  </a:lnTo>
+                  <a:lnTo>
+                    <a:pt x="4338481" y="2551565"/>
+                  </a:lnTo>
+                  <a:lnTo>
+                    <a:pt x="4415113" y="2568538"/>
+                  </a:lnTo>
+                  <a:lnTo>
+                    <a:pt x="4491746" y="2585011"/>
+                  </a:lnTo>
+                  <a:lnTo>
+                    <a:pt x="4568378" y="2600999"/>
+                  </a:lnTo>
+                  <a:lnTo>
+                    <a:pt x="4645011" y="2616517"/>
+                  </a:lnTo>
+                  <a:lnTo>
+                    <a:pt x="4721644" y="2631579"/>
+                  </a:lnTo>
+                  <a:lnTo>
+                    <a:pt x="4798276" y="2646198"/>
+                  </a:lnTo>
+                  <a:lnTo>
+                    <a:pt x="4874909" y="2660386"/>
+                  </a:lnTo>
+                  <a:lnTo>
+                    <a:pt x="4951541" y="2674157"/>
+                  </a:lnTo>
+                  <a:lnTo>
+                    <a:pt x="5028174" y="2687523"/>
+                  </a:lnTo>
+                  <a:lnTo>
+                    <a:pt x="5104806" y="2700496"/>
+                  </a:lnTo>
+                  <a:lnTo>
+                    <a:pt x="5181439" y="2713087"/>
+                  </a:lnTo>
+                  <a:lnTo>
+                    <a:pt x="5258071" y="2725308"/>
+                  </a:lnTo>
+                  <a:lnTo>
+                    <a:pt x="5334704" y="2737169"/>
+                  </a:lnTo>
+                  <a:lnTo>
+                    <a:pt x="5411336" y="2748681"/>
+                  </a:lnTo>
+                  <a:lnTo>
+                    <a:pt x="5487969" y="2759855"/>
+                  </a:lnTo>
+                  <a:lnTo>
+                    <a:pt x="5564602" y="2770700"/>
+                  </a:lnTo>
+                  <a:lnTo>
+                    <a:pt x="5641234" y="2781226"/>
+                  </a:lnTo>
+                  <a:lnTo>
+                    <a:pt x="5717867" y="2791442"/>
+                  </a:lnTo>
+                  <a:lnTo>
+                    <a:pt x="5794499" y="2801358"/>
+                  </a:lnTo>
+                  <a:lnTo>
+                    <a:pt x="5871132" y="2810981"/>
+                  </a:lnTo>
+                  <a:lnTo>
+                    <a:pt x="5947764" y="2820322"/>
+                  </a:lnTo>
+                  <a:lnTo>
+                    <a:pt x="6024397" y="2829388"/>
+                  </a:lnTo>
+                  <a:lnTo>
+                    <a:pt x="6101029" y="2838188"/>
+                  </a:lnTo>
+                  <a:lnTo>
+                    <a:pt x="6177662" y="2846728"/>
+                  </a:lnTo>
+                  <a:lnTo>
+                    <a:pt x="6254294" y="2855017"/>
+                  </a:lnTo>
+                  <a:lnTo>
+                    <a:pt x="6330927" y="2863063"/>
+                  </a:lnTo>
+                  <a:lnTo>
+                    <a:pt x="6407560" y="2870872"/>
+                  </a:lnTo>
+                  <a:lnTo>
+                    <a:pt x="6484192" y="2878451"/>
+                  </a:lnTo>
+                  <a:lnTo>
+                    <a:pt x="6560825" y="2885807"/>
+                  </a:lnTo>
+                  <a:lnTo>
+                    <a:pt x="6637457" y="2892946"/>
+                  </a:lnTo>
+                  <a:lnTo>
+                    <a:pt x="6714090" y="2899876"/>
+                  </a:lnTo>
+                  <a:lnTo>
+                    <a:pt x="6790722" y="2906602"/>
+                  </a:lnTo>
+                  <a:lnTo>
+                    <a:pt x="6867355" y="2913129"/>
+                  </a:lnTo>
+                  <a:lnTo>
+                    <a:pt x="6943987" y="2919465"/>
+                  </a:lnTo>
+                  <a:lnTo>
+                    <a:pt x="7020620" y="2925615"/>
+                  </a:lnTo>
+                  <a:lnTo>
+                    <a:pt x="7097253" y="2931583"/>
+                  </a:lnTo>
+                  <a:lnTo>
+                    <a:pt x="7173885" y="2937376"/>
+                  </a:lnTo>
+                  <a:lnTo>
+                    <a:pt x="7250518" y="2942999"/>
+                  </a:lnTo>
+                  <a:lnTo>
+                    <a:pt x="7327150" y="2948456"/>
+                  </a:lnTo>
+                  <a:lnTo>
+                    <a:pt x="7403783" y="2953753"/>
                   </a:lnTo>
                 </a:path>
               </a:pathLst>
@@ -4509,7 +4509,7 @@
           </p:nvSpPr>
           <p:spPr>
             <a:xfrm>
-              <a:off x="817517" y="4679530"/>
+              <a:off x="817517" y="4727786"/>
               <a:ext cx="7799693" cy="0"/>
             </a:xfrm>
             <a:custGeom>
@@ -4552,15 +4552,15 @@
           </p:nvSpPr>
           <p:spPr>
             <a:xfrm>
-              <a:off x="4224261" y="1896563"/>
-              <a:ext cx="0" cy="3826579"/>
+              <a:off x="4224261" y="2073503"/>
+              <a:ext cx="0" cy="3649639"/>
             </a:xfrm>
             <a:custGeom>
               <a:avLst/>
               <a:pathLst>
-                <a:path w="0" h="3826579">
+                <a:path w="0" h="3649639">
                   <a:moveTo>
-                    <a:pt x="0" y="3826579"/>
+                    <a:pt x="0" y="3649639"/>
                   </a:moveTo>
                   <a:lnTo>
                     <a:pt x="0" y="0"/>
@@ -4595,7 +4595,7 @@
           </p:nvSpPr>
           <p:spPr>
             <a:xfrm>
-              <a:off x="692708" y="5509156"/>
+              <a:off x="692708" y="5517199"/>
               <a:ext cx="62179" cy="80101"/>
             </a:xfrm>
             <a:prstGeom prst="rect">
@@ -4641,7 +4641,7 @@
           </p:nvSpPr>
           <p:spPr>
             <a:xfrm>
-              <a:off x="692708" y="4639479"/>
+              <a:off x="692708" y="4687735"/>
               <a:ext cx="62179" cy="80101"/>
             </a:xfrm>
             <a:prstGeom prst="rect">
@@ -4687,7 +4687,7 @@
           </p:nvSpPr>
           <p:spPr>
             <a:xfrm>
-              <a:off x="692708" y="3769802"/>
+              <a:off x="692708" y="3858272"/>
               <a:ext cx="62179" cy="80101"/>
             </a:xfrm>
             <a:prstGeom prst="rect">
@@ -4733,7 +4733,7 @@
           </p:nvSpPr>
           <p:spPr>
             <a:xfrm>
-              <a:off x="692708" y="2900125"/>
+              <a:off x="692708" y="3028808"/>
               <a:ext cx="62179" cy="80101"/>
             </a:xfrm>
             <a:prstGeom prst="rect">
@@ -4779,7 +4779,7 @@
           </p:nvSpPr>
           <p:spPr>
             <a:xfrm>
-              <a:off x="692708" y="2030448"/>
+              <a:off x="692708" y="2199345"/>
               <a:ext cx="62179" cy="80101"/>
             </a:xfrm>
             <a:prstGeom prst="rect">
@@ -5055,7 +5055,7 @@
           </p:nvSpPr>
           <p:spPr>
             <a:xfrm rot="-5400000">
-              <a:off x="68446" y="3759743"/>
+              <a:off x="68446" y="3848213"/>
               <a:ext cx="1016904" cy="100218"/>
             </a:xfrm>
             <a:prstGeom prst="rect">
@@ -5096,6 +5096,52 @@
         <p:sp>
           <p:nvSpPr>
             <p:cNvPr id="38" name="tx38"/>
+            <p:cNvSpPr/>
+            <p:nvPr/>
+          </p:nvSpPr>
+          <p:spPr>
+            <a:xfrm>
+              <a:off x="817517" y="1896563"/>
+              <a:ext cx="5626211" cy="82021"/>
+            </a:xfrm>
+            <a:prstGeom prst="rect">
+              <a:avLst/>
+            </a:prstGeom>
+            <a:noFill/>
+          </p:spPr>
+          <p:txBody>
+            <a:bodyPr lIns="0" rIns="0" tIns="0" bIns="0" anchorCtr="1" anchor="ctr" wrap="none"/>
+            <a:lstStyle/>
+            <a:p>
+              <a:pPr algn="l" marL="0" marR="0" indent="0">
+                <a:lnSpc>
+                  <a:spcPts val="900"/>
+                </a:lnSpc>
+                <a:spcBef>
+                  <a:spcPts val="0"/>
+                </a:spcBef>
+                <a:spcAft>
+                  <a:spcPts val="0"/>
+                </a:spcAft>
+              </a:pPr>
+              <a:r>
+                <a:rPr sz="900">
+                  <a:solidFill>
+                    <a:srgbClr val="404040">
+                      <a:alpha val="100000"/>
+                    </a:srgbClr>
+                  </a:solidFill>
+                  <a:latin typeface="Helvetica"/>
+                  <a:cs typeface="Helvetica"/>
+                </a:rPr>
+                <a:t>subHR per 0.1 ratio decline: 1.41 (1.18-1.69)  |  per IQR decline (Δ = 0.30): 2.81 (1.64-4.81)  |  IQR: [0.85, 1.15]</a:t>
+              </a:r>
+            </a:p>
+          </p:txBody>
+        </p:sp>
+        <p:sp>
+          <p:nvSpPr>
+            <p:cNvPr id="39" name="tx39"/>
             <p:cNvSpPr/>
             <p:nvPr/>
           </p:nvSpPr>

--- a/docs/pptx/carbo/jx-carbo-linsubhr-ratio-hosp7.pptx
+++ b/docs/pptx/carbo/jx-carbo-linsubhr-ratio-hosp7.pptx
@@ -5102,7 +5102,7 @@
           <p:spPr>
             <a:xfrm>
               <a:off x="817517" y="1896563"/>
-              <a:ext cx="5626211" cy="82021"/>
+              <a:ext cx="6236116" cy="82021"/>
             </a:xfrm>
             <a:prstGeom prst="rect">
               <a:avLst/>
@@ -5134,7 +5134,7 @@
                   <a:latin typeface="Helvetica"/>
                   <a:cs typeface="Helvetica"/>
                 </a:rPr>
-                <a:t>subHR per 0.1 ratio decline: 1.41 (1.18-1.69)  |  per IQR decline (Δ = 0.30): 2.81 (1.64-4.81)  |  IQR: [0.85, 1.15]</a:t>
+                <a:t>subHR per 0.1 ratio decline: 1.41 (1.18-1.69), p = &lt;0.001  |  per IQR decline (Δ = 0.30): 2.81 (1.64-4.81)  |  IQR: [0.85, 1.15]</a:t>
               </a:r>
             </a:p>
           </p:txBody>

--- a/docs/pptx/carbo/jx-carbo-linsubhr-ratio-hosp7.pptx
+++ b/docs/pptx/carbo/jx-carbo-linsubhr-ratio-hosp7.pptx
@@ -2443,7 +2443,7 @@
           </p:nvSpPr>
           <p:spPr>
             <a:xfrm>
-              <a:off x="1615213" y="2073503"/>
+              <a:off x="1467192" y="2073503"/>
               <a:ext cx="0" cy="3649639"/>
             </a:xfrm>
             <a:custGeom>
@@ -2486,7 +2486,7 @@
           </p:nvSpPr>
           <p:spPr>
             <a:xfrm>
-              <a:off x="3387871" y="2073503"/>
+              <a:off x="3538150" y="2073503"/>
               <a:ext cx="0" cy="3649639"/>
             </a:xfrm>
             <a:custGeom>
@@ -2529,7 +2529,7 @@
           </p:nvSpPr>
           <p:spPr>
             <a:xfrm>
-              <a:off x="5160528" y="2073503"/>
+              <a:off x="5609107" y="2073503"/>
               <a:ext cx="0" cy="3649639"/>
             </a:xfrm>
             <a:custGeom>
@@ -2572,7 +2572,7 @@
           </p:nvSpPr>
           <p:spPr>
             <a:xfrm>
-              <a:off x="6933186" y="2073503"/>
+              <a:off x="7680065" y="2073503"/>
               <a:ext cx="0" cy="3649639"/>
             </a:xfrm>
             <a:custGeom>
@@ -2830,7 +2830,7 @@
           </p:nvSpPr>
           <p:spPr>
             <a:xfrm>
-              <a:off x="2501542" y="2073503"/>
+              <a:off x="2502671" y="2073503"/>
               <a:ext cx="0" cy="3649639"/>
             </a:xfrm>
             <a:custGeom>
@@ -2873,7 +2873,7 @@
           </p:nvSpPr>
           <p:spPr>
             <a:xfrm>
-              <a:off x="4274200" y="2073503"/>
+              <a:off x="4573628" y="2073503"/>
               <a:ext cx="0" cy="3649639"/>
             </a:xfrm>
             <a:custGeom>
@@ -2916,7 +2916,7 @@
           </p:nvSpPr>
           <p:spPr>
             <a:xfrm>
-              <a:off x="6046857" y="2073503"/>
+              <a:off x="6644586" y="2073503"/>
               <a:ext cx="0" cy="3649639"/>
             </a:xfrm>
             <a:custGeom>
@@ -2953,610 +2953,573 @@
         </p:sp>
         <p:sp>
           <p:nvSpPr>
-            <p:cNvPr id="20" name="pl20"/>
+            <p:cNvPr id="20" name="pg20"/>
             <p:cNvSpPr/>
             <p:nvPr/>
           </p:nvSpPr>
           <p:spPr>
             <a:xfrm>
-              <a:off x="7819515" y="2073503"/>
-              <a:ext cx="0" cy="3649639"/>
+              <a:off x="1172049" y="2073503"/>
+              <a:ext cx="7090630" cy="3406122"/>
             </a:xfrm>
             <a:custGeom>
               <a:avLst/>
               <a:pathLst>
-                <a:path w="0" h="3649639">
+                <a:path w="7090630" h="3406122">
                   <a:moveTo>
-                    <a:pt x="0" y="3649639"/>
+                    <a:pt x="1092093" y="0"/>
                   </a:moveTo>
                   <a:lnTo>
-                    <a:pt x="0" y="0"/>
-                  </a:lnTo>
-                  <a:lnTo>
-                    <a:pt x="0" y="0"/>
-                  </a:lnTo>
-                </a:path>
-              </a:pathLst>
-            </a:custGeom>
-            <a:ln w="13550" cap="flat">
-              <a:solidFill>
-                <a:srgbClr val="EBEBEB">
-                  <a:alpha val="100000"/>
-                </a:srgbClr>
-              </a:solidFill>
-              <a:prstDash val="solid"/>
-              <a:round/>
-            </a:ln>
-          </p:spPr>
-          <p:txBody>
-            <a:bodyPr/>
-            <a:lstStyle/>
-            <a:p/>
-          </p:txBody>
-        </p:sp>
-        <p:sp>
-          <p:nvSpPr>
-            <p:cNvPr id="21" name="pg21"/>
-            <p:cNvSpPr/>
-            <p:nvPr/>
-          </p:nvSpPr>
-          <p:spPr>
-            <a:xfrm>
-              <a:off x="817517" y="2073503"/>
-              <a:ext cx="7403783" cy="3406122"/>
-            </a:xfrm>
-            <a:custGeom>
-              <a:avLst/>
-              <a:pathLst>
-                <a:path w="7403783" h="3406122">
-                  <a:moveTo>
-                    <a:pt x="985647" y="0"/>
-                  </a:moveTo>
-                  <a:lnTo>
-                    <a:pt x="1043281" y="117630"/>
-                  </a:lnTo>
-                  <a:lnTo>
-                    <a:pt x="1119914" y="267090"/>
-                  </a:lnTo>
-                  <a:lnTo>
-                    <a:pt x="1196546" y="409914"/>
-                  </a:lnTo>
-                  <a:lnTo>
-                    <a:pt x="1273179" y="546396"/>
-                  </a:lnTo>
-                  <a:lnTo>
-                    <a:pt x="1349811" y="676818"/>
-                  </a:lnTo>
-                  <a:lnTo>
-                    <a:pt x="1426444" y="801450"/>
-                  </a:lnTo>
-                  <a:lnTo>
-                    <a:pt x="1503076" y="920547"/>
-                  </a:lnTo>
-                  <a:lnTo>
-                    <a:pt x="1579709" y="1034356"/>
-                  </a:lnTo>
-                  <a:lnTo>
-                    <a:pt x="1656342" y="1143113"/>
-                  </a:lnTo>
-                  <a:lnTo>
-                    <a:pt x="1732974" y="1247040"/>
-                  </a:lnTo>
-                  <a:lnTo>
-                    <a:pt x="1809607" y="1346353"/>
-                  </a:lnTo>
-                  <a:lnTo>
-                    <a:pt x="1886239" y="1441256"/>
-                  </a:lnTo>
-                  <a:lnTo>
-                    <a:pt x="1962872" y="1531945"/>
-                  </a:lnTo>
-                  <a:lnTo>
-                    <a:pt x="2039504" y="1618608"/>
-                  </a:lnTo>
-                  <a:lnTo>
-                    <a:pt x="2116137" y="1701422"/>
-                  </a:lnTo>
-                  <a:lnTo>
-                    <a:pt x="2192769" y="1780560"/>
-                  </a:lnTo>
-                  <a:lnTo>
-                    <a:pt x="2269402" y="1856184"/>
-                  </a:lnTo>
-                  <a:lnTo>
-                    <a:pt x="2346034" y="1928449"/>
-                  </a:lnTo>
-                  <a:lnTo>
-                    <a:pt x="2422667" y="1997507"/>
-                  </a:lnTo>
-                  <a:lnTo>
-                    <a:pt x="2499300" y="2063498"/>
-                  </a:lnTo>
-                  <a:lnTo>
-                    <a:pt x="2575932" y="2126559"/>
-                  </a:lnTo>
-                  <a:lnTo>
-                    <a:pt x="2652565" y="2186820"/>
-                  </a:lnTo>
-                  <a:lnTo>
-                    <a:pt x="2729197" y="2244405"/>
-                  </a:lnTo>
-                  <a:lnTo>
-                    <a:pt x="2805830" y="2299433"/>
-                  </a:lnTo>
-                  <a:lnTo>
-                    <a:pt x="2882462" y="2352018"/>
-                  </a:lnTo>
-                  <a:lnTo>
-                    <a:pt x="2959095" y="2402269"/>
-                  </a:lnTo>
-                  <a:lnTo>
-                    <a:pt x="3035727" y="2450288"/>
-                  </a:lnTo>
-                  <a:lnTo>
-                    <a:pt x="3112360" y="2496175"/>
-                  </a:lnTo>
-                  <a:lnTo>
-                    <a:pt x="3188993" y="2540024"/>
-                  </a:lnTo>
-                  <a:lnTo>
-                    <a:pt x="3265625" y="2581927"/>
-                  </a:lnTo>
-                  <a:lnTo>
-                    <a:pt x="3342258" y="2621969"/>
-                  </a:lnTo>
-                  <a:lnTo>
-                    <a:pt x="3418890" y="2656161"/>
-                  </a:lnTo>
-                  <a:lnTo>
-                    <a:pt x="3495523" y="2667913"/>
-                  </a:lnTo>
-                  <a:lnTo>
-                    <a:pt x="3572155" y="2679498"/>
-                  </a:lnTo>
-                  <a:lnTo>
-                    <a:pt x="3648788" y="2690918"/>
-                  </a:lnTo>
-                  <a:lnTo>
-                    <a:pt x="3725420" y="2702177"/>
-                  </a:lnTo>
-                  <a:lnTo>
-                    <a:pt x="3802053" y="2713275"/>
-                  </a:lnTo>
-                  <a:lnTo>
-                    <a:pt x="3878685" y="2724216"/>
-                  </a:lnTo>
-                  <a:lnTo>
-                    <a:pt x="3955318" y="2735001"/>
-                  </a:lnTo>
-                  <a:lnTo>
-                    <a:pt x="4031951" y="2745633"/>
-                  </a:lnTo>
-                  <a:lnTo>
-                    <a:pt x="4108583" y="2756115"/>
-                  </a:lnTo>
-                  <a:lnTo>
-                    <a:pt x="4185216" y="2766447"/>
-                  </a:lnTo>
-                  <a:lnTo>
-                    <a:pt x="4261848" y="2776633"/>
-                  </a:lnTo>
-                  <a:lnTo>
-                    <a:pt x="4338481" y="2786674"/>
-                  </a:lnTo>
-                  <a:lnTo>
-                    <a:pt x="4415113" y="2796573"/>
-                  </a:lnTo>
-                  <a:lnTo>
-                    <a:pt x="4491746" y="2806331"/>
-                  </a:lnTo>
-                  <a:lnTo>
-                    <a:pt x="4568378" y="2815950"/>
-                  </a:lnTo>
-                  <a:lnTo>
-                    <a:pt x="4645011" y="2825433"/>
-                  </a:lnTo>
-                  <a:lnTo>
-                    <a:pt x="4721644" y="2834781"/>
-                  </a:lnTo>
-                  <a:lnTo>
-                    <a:pt x="4798276" y="2843996"/>
-                  </a:lnTo>
-                  <a:lnTo>
-                    <a:pt x="4874909" y="2853081"/>
-                  </a:lnTo>
-                  <a:lnTo>
-                    <a:pt x="4951541" y="2862036"/>
-                  </a:lnTo>
-                  <a:lnTo>
-                    <a:pt x="5028174" y="2870865"/>
-                  </a:lnTo>
-                  <a:lnTo>
-                    <a:pt x="5104806" y="2879568"/>
-                  </a:lnTo>
-                  <a:lnTo>
-                    <a:pt x="5181439" y="2888147"/>
-                  </a:lnTo>
-                  <a:lnTo>
-                    <a:pt x="5258071" y="2896605"/>
-                  </a:lnTo>
-                  <a:lnTo>
-                    <a:pt x="5334704" y="2904942"/>
-                  </a:lnTo>
-                  <a:lnTo>
-                    <a:pt x="5411336" y="2913161"/>
-                  </a:lnTo>
-                  <a:lnTo>
-                    <a:pt x="5487969" y="2921264"/>
-                  </a:lnTo>
-                  <a:lnTo>
-                    <a:pt x="5564602" y="2929251"/>
-                  </a:lnTo>
-                  <a:lnTo>
-                    <a:pt x="5641234" y="2937125"/>
-                  </a:lnTo>
-                  <a:lnTo>
-                    <a:pt x="5717867" y="2944887"/>
-                  </a:lnTo>
-                  <a:lnTo>
-                    <a:pt x="5794499" y="2952539"/>
-                  </a:lnTo>
-                  <a:lnTo>
-                    <a:pt x="5871132" y="2960082"/>
-                  </a:lnTo>
-                  <a:lnTo>
-                    <a:pt x="5947764" y="2967518"/>
-                  </a:lnTo>
-                  <a:lnTo>
-                    <a:pt x="6024397" y="2974849"/>
-                  </a:lnTo>
-                  <a:lnTo>
-                    <a:pt x="6101029" y="2982075"/>
-                  </a:lnTo>
-                  <a:lnTo>
-                    <a:pt x="6177662" y="2989199"/>
-                  </a:lnTo>
-                  <a:lnTo>
-                    <a:pt x="6254294" y="2996222"/>
-                  </a:lnTo>
-                  <a:lnTo>
-                    <a:pt x="6330927" y="3003144"/>
-                  </a:lnTo>
-                  <a:lnTo>
-                    <a:pt x="6407560" y="3009969"/>
-                  </a:lnTo>
-                  <a:lnTo>
-                    <a:pt x="6484192" y="3016697"/>
-                  </a:lnTo>
-                  <a:lnTo>
-                    <a:pt x="6560825" y="3023329"/>
-                  </a:lnTo>
-                  <a:lnTo>
-                    <a:pt x="6637457" y="3029867"/>
-                  </a:lnTo>
-                  <a:lnTo>
-                    <a:pt x="6714090" y="3036312"/>
-                  </a:lnTo>
-                  <a:lnTo>
-                    <a:pt x="6790722" y="3042666"/>
-                  </a:lnTo>
-                  <a:lnTo>
-                    <a:pt x="6867355" y="3048929"/>
-                  </a:lnTo>
-                  <a:lnTo>
-                    <a:pt x="6943987" y="3055104"/>
-                  </a:lnTo>
-                  <a:lnTo>
-                    <a:pt x="7020620" y="3061190"/>
-                  </a:lnTo>
-                  <a:lnTo>
-                    <a:pt x="7097253" y="3067191"/>
-                  </a:lnTo>
-                  <a:lnTo>
-                    <a:pt x="7173885" y="3073106"/>
-                  </a:lnTo>
-                  <a:lnTo>
-                    <a:pt x="7250518" y="3078937"/>
-                  </a:lnTo>
-                  <a:lnTo>
-                    <a:pt x="7327150" y="3084685"/>
-                  </a:lnTo>
-                  <a:lnTo>
-                    <a:pt x="7403783" y="3090352"/>
-                  </a:lnTo>
-                  <a:lnTo>
-                    <a:pt x="7403783" y="3406122"/>
-                  </a:lnTo>
-                  <a:lnTo>
-                    <a:pt x="7327150" y="3402515"/>
-                  </a:lnTo>
-                  <a:lnTo>
-                    <a:pt x="7250518" y="3398741"/>
-                  </a:lnTo>
-                  <a:lnTo>
-                    <a:pt x="7173885" y="3394791"/>
-                  </a:lnTo>
-                  <a:lnTo>
-                    <a:pt x="7097253" y="3390658"/>
-                  </a:lnTo>
-                  <a:lnTo>
-                    <a:pt x="7020620" y="3386332"/>
-                  </a:lnTo>
-                  <a:lnTo>
-                    <a:pt x="6943987" y="3381806"/>
-                  </a:lnTo>
-                  <a:lnTo>
-                    <a:pt x="6867355" y="3377070"/>
-                  </a:lnTo>
-                  <a:lnTo>
-                    <a:pt x="6790722" y="3372113"/>
-                  </a:lnTo>
-                  <a:lnTo>
-                    <a:pt x="6714090" y="3366926"/>
-                  </a:lnTo>
-                  <a:lnTo>
-                    <a:pt x="6637457" y="3361498"/>
-                  </a:lnTo>
-                  <a:lnTo>
-                    <a:pt x="6560825" y="3355818"/>
-                  </a:lnTo>
-                  <a:lnTo>
-                    <a:pt x="6484192" y="3349874"/>
-                  </a:lnTo>
-                  <a:lnTo>
-                    <a:pt x="6407560" y="3343653"/>
-                  </a:lnTo>
-                  <a:lnTo>
-                    <a:pt x="6330927" y="3337144"/>
-                  </a:lnTo>
-                  <a:lnTo>
-                    <a:pt x="6254294" y="3330332"/>
-                  </a:lnTo>
-                  <a:lnTo>
-                    <a:pt x="6177662" y="3323204"/>
-                  </a:lnTo>
-                  <a:lnTo>
-                    <a:pt x="6101029" y="3315744"/>
-                  </a:lnTo>
-                  <a:lnTo>
-                    <a:pt x="6024397" y="3307938"/>
-                  </a:lnTo>
-                  <a:lnTo>
-                    <a:pt x="5947764" y="3299769"/>
-                  </a:lnTo>
-                  <a:lnTo>
-                    <a:pt x="5871132" y="3291221"/>
-                  </a:lnTo>
-                  <a:lnTo>
-                    <a:pt x="5794499" y="3282275"/>
-                  </a:lnTo>
-                  <a:lnTo>
-                    <a:pt x="5717867" y="3272914"/>
-                  </a:lnTo>
-                  <a:lnTo>
-                    <a:pt x="5641234" y="3263118"/>
-                  </a:lnTo>
-                  <a:lnTo>
-                    <a:pt x="5564602" y="3252867"/>
-                  </a:lnTo>
-                  <a:lnTo>
-                    <a:pt x="5487969" y="3242139"/>
-                  </a:lnTo>
-                  <a:lnTo>
-                    <a:pt x="5411336" y="3230913"/>
-                  </a:lnTo>
-                  <a:lnTo>
-                    <a:pt x="5334704" y="3219165"/>
-                  </a:lnTo>
-                  <a:lnTo>
-                    <a:pt x="5258071" y="3206871"/>
-                  </a:lnTo>
-                  <a:lnTo>
-                    <a:pt x="5181439" y="3194007"/>
-                  </a:lnTo>
-                  <a:lnTo>
-                    <a:pt x="5104806" y="3180544"/>
-                  </a:lnTo>
-                  <a:lnTo>
-                    <a:pt x="5028174" y="3166456"/>
-                  </a:lnTo>
-                  <a:lnTo>
-                    <a:pt x="4951541" y="3151713"/>
-                  </a:lnTo>
-                  <a:lnTo>
-                    <a:pt x="4874909" y="3136285"/>
-                  </a:lnTo>
-                  <a:lnTo>
-                    <a:pt x="4798276" y="3120141"/>
-                  </a:lnTo>
-                  <a:lnTo>
-                    <a:pt x="4721644" y="3103246"/>
-                  </a:lnTo>
-                  <a:lnTo>
-                    <a:pt x="4645011" y="3085566"/>
-                  </a:lnTo>
-                  <a:lnTo>
-                    <a:pt x="4568378" y="3067065"/>
-                  </a:lnTo>
-                  <a:lnTo>
-                    <a:pt x="4491746" y="3047704"/>
-                  </a:lnTo>
-                  <a:lnTo>
-                    <a:pt x="4415113" y="3027444"/>
-                  </a:lnTo>
-                  <a:lnTo>
-                    <a:pt x="4338481" y="3006242"/>
-                  </a:lnTo>
-                  <a:lnTo>
-                    <a:pt x="4261848" y="2984055"/>
-                  </a:lnTo>
-                  <a:lnTo>
-                    <a:pt x="4185216" y="2960837"/>
-                  </a:lnTo>
-                  <a:lnTo>
-                    <a:pt x="4108583" y="2936541"/>
-                  </a:lnTo>
-                  <a:lnTo>
-                    <a:pt x="4031951" y="2911115"/>
-                  </a:lnTo>
-                  <a:lnTo>
-                    <a:pt x="3955318" y="2884508"/>
-                  </a:lnTo>
-                  <a:lnTo>
-                    <a:pt x="3878685" y="2856665"/>
-                  </a:lnTo>
-                  <a:lnTo>
-                    <a:pt x="3802053" y="2827528"/>
-                  </a:lnTo>
-                  <a:lnTo>
-                    <a:pt x="3725420" y="2797037"/>
-                  </a:lnTo>
-                  <a:lnTo>
-                    <a:pt x="3648788" y="2765129"/>
-                  </a:lnTo>
-                  <a:lnTo>
-                    <a:pt x="3572155" y="2731739"/>
-                  </a:lnTo>
-                  <a:lnTo>
-                    <a:pt x="3495523" y="2696798"/>
-                  </a:lnTo>
-                  <a:lnTo>
-                    <a:pt x="3418890" y="2660233"/>
-                  </a:lnTo>
-                  <a:lnTo>
-                    <a:pt x="3342258" y="2644240"/>
-                  </a:lnTo>
-                  <a:lnTo>
-                    <a:pt x="3265625" y="2632147"/>
-                  </a:lnTo>
-                  <a:lnTo>
-                    <a:pt x="3188993" y="2619880"/>
-                  </a:lnTo>
-                  <a:lnTo>
-                    <a:pt x="3112360" y="2607436"/>
-                  </a:lnTo>
-                  <a:lnTo>
-                    <a:pt x="3035727" y="2594813"/>
-                  </a:lnTo>
-                  <a:lnTo>
-                    <a:pt x="2959095" y="2582009"/>
-                  </a:lnTo>
-                  <a:lnTo>
-                    <a:pt x="2882462" y="2569019"/>
-                  </a:lnTo>
-                  <a:lnTo>
-                    <a:pt x="2805830" y="2555843"/>
-                  </a:lnTo>
-                  <a:lnTo>
-                    <a:pt x="2729197" y="2542477"/>
-                  </a:lnTo>
-                  <a:lnTo>
-                    <a:pt x="2652565" y="2528918"/>
-                  </a:lnTo>
-                  <a:lnTo>
-                    <a:pt x="2575932" y="2515164"/>
-                  </a:lnTo>
-                  <a:lnTo>
-                    <a:pt x="2499300" y="2501212"/>
-                  </a:lnTo>
-                  <a:lnTo>
-                    <a:pt x="2422667" y="2487059"/>
-                  </a:lnTo>
-                  <a:lnTo>
-                    <a:pt x="2346034" y="2472702"/>
-                  </a:lnTo>
-                  <a:lnTo>
-                    <a:pt x="2269402" y="2458138"/>
-                  </a:lnTo>
-                  <a:lnTo>
-                    <a:pt x="2192769" y="2443365"/>
-                  </a:lnTo>
-                  <a:lnTo>
-                    <a:pt x="2116137" y="2428378"/>
-                  </a:lnTo>
-                  <a:lnTo>
-                    <a:pt x="2039504" y="2413176"/>
-                  </a:lnTo>
-                  <a:lnTo>
-                    <a:pt x="1962872" y="2397755"/>
-                  </a:lnTo>
-                  <a:lnTo>
-                    <a:pt x="1886239" y="2382112"/>
-                  </a:lnTo>
-                  <a:lnTo>
-                    <a:pt x="1809607" y="2366243"/>
-                  </a:lnTo>
-                  <a:lnTo>
-                    <a:pt x="1732974" y="2350146"/>
-                  </a:lnTo>
-                  <a:lnTo>
-                    <a:pt x="1656342" y="2333816"/>
-                  </a:lnTo>
-                  <a:lnTo>
-                    <a:pt x="1579709" y="2317252"/>
-                  </a:lnTo>
-                  <a:lnTo>
-                    <a:pt x="1503076" y="2300449"/>
-                  </a:lnTo>
-                  <a:lnTo>
-                    <a:pt x="1426444" y="2283404"/>
-                  </a:lnTo>
-                  <a:lnTo>
-                    <a:pt x="1349811" y="2266114"/>
-                  </a:lnTo>
-                  <a:lnTo>
-                    <a:pt x="1273179" y="2248574"/>
-                  </a:lnTo>
-                  <a:lnTo>
-                    <a:pt x="1196546" y="2230782"/>
-                  </a:lnTo>
-                  <a:lnTo>
-                    <a:pt x="1119914" y="2212733"/>
-                  </a:lnTo>
-                  <a:lnTo>
-                    <a:pt x="1043281" y="2194425"/>
-                  </a:lnTo>
-                  <a:lnTo>
-                    <a:pt x="966649" y="2175852"/>
-                  </a:lnTo>
-                  <a:lnTo>
-                    <a:pt x="890016" y="2157013"/>
-                  </a:lnTo>
-                  <a:lnTo>
-                    <a:pt x="813384" y="2137901"/>
-                  </a:lnTo>
-                  <a:lnTo>
-                    <a:pt x="736751" y="2118515"/>
-                  </a:lnTo>
-                  <a:lnTo>
-                    <a:pt x="660118" y="2098849"/>
-                  </a:lnTo>
-                  <a:lnTo>
-                    <a:pt x="583486" y="2078900"/>
-                  </a:lnTo>
-                  <a:lnTo>
-                    <a:pt x="506853" y="2058664"/>
-                  </a:lnTo>
-                  <a:lnTo>
-                    <a:pt x="430221" y="2038136"/>
-                  </a:lnTo>
-                  <a:lnTo>
-                    <a:pt x="353588" y="2017312"/>
-                  </a:lnTo>
-                  <a:lnTo>
-                    <a:pt x="276956" y="1996189"/>
-                  </a:lnTo>
-                  <a:lnTo>
-                    <a:pt x="200323" y="1974761"/>
-                  </a:lnTo>
-                  <a:lnTo>
-                    <a:pt x="123691" y="1953025"/>
-                  </a:lnTo>
-                  <a:lnTo>
-                    <a:pt x="47058" y="1930975"/>
-                  </a:lnTo>
-                  <a:lnTo>
-                    <a:pt x="0" y="1917240"/>
+                    <a:pt x="1145960" y="117630"/>
+                  </a:lnTo>
+                  <a:lnTo>
+                    <a:pt x="1217582" y="267090"/>
+                  </a:lnTo>
+                  <a:lnTo>
+                    <a:pt x="1289205" y="409914"/>
+                  </a:lnTo>
+                  <a:lnTo>
+                    <a:pt x="1360827" y="546396"/>
+                  </a:lnTo>
+                  <a:lnTo>
+                    <a:pt x="1432450" y="676818"/>
+                  </a:lnTo>
+                  <a:lnTo>
+                    <a:pt x="1504073" y="801450"/>
+                  </a:lnTo>
+                  <a:lnTo>
+                    <a:pt x="1575695" y="920547"/>
+                  </a:lnTo>
+                  <a:lnTo>
+                    <a:pt x="1647318" y="1034356"/>
+                  </a:lnTo>
+                  <a:lnTo>
+                    <a:pt x="1718940" y="1143113"/>
+                  </a:lnTo>
+                  <a:lnTo>
+                    <a:pt x="1790563" y="1247040"/>
+                  </a:lnTo>
+                  <a:lnTo>
+                    <a:pt x="1862185" y="1346353"/>
+                  </a:lnTo>
+                  <a:lnTo>
+                    <a:pt x="1933808" y="1441256"/>
+                  </a:lnTo>
+                  <a:lnTo>
+                    <a:pt x="2005430" y="1531945"/>
+                  </a:lnTo>
+                  <a:lnTo>
+                    <a:pt x="2077053" y="1618608"/>
+                  </a:lnTo>
+                  <a:lnTo>
+                    <a:pt x="2148675" y="1701422"/>
+                  </a:lnTo>
+                  <a:lnTo>
+                    <a:pt x="2220298" y="1780560"/>
+                  </a:lnTo>
+                  <a:lnTo>
+                    <a:pt x="2291920" y="1856184"/>
+                  </a:lnTo>
+                  <a:lnTo>
+                    <a:pt x="2363543" y="1928449"/>
+                  </a:lnTo>
+                  <a:lnTo>
+                    <a:pt x="2435165" y="1997507"/>
+                  </a:lnTo>
+                  <a:lnTo>
+                    <a:pt x="2506788" y="2063498"/>
+                  </a:lnTo>
+                  <a:lnTo>
+                    <a:pt x="2578410" y="2126559"/>
+                  </a:lnTo>
+                  <a:lnTo>
+                    <a:pt x="2650033" y="2186820"/>
+                  </a:lnTo>
+                  <a:lnTo>
+                    <a:pt x="2721655" y="2244405"/>
+                  </a:lnTo>
+                  <a:lnTo>
+                    <a:pt x="2793278" y="2299433"/>
+                  </a:lnTo>
+                  <a:lnTo>
+                    <a:pt x="2864901" y="2352018"/>
+                  </a:lnTo>
+                  <a:lnTo>
+                    <a:pt x="2936523" y="2402269"/>
+                  </a:lnTo>
+                  <a:lnTo>
+                    <a:pt x="3008146" y="2450288"/>
+                  </a:lnTo>
+                  <a:lnTo>
+                    <a:pt x="3079768" y="2496175"/>
+                  </a:lnTo>
+                  <a:lnTo>
+                    <a:pt x="3151391" y="2540024"/>
+                  </a:lnTo>
+                  <a:lnTo>
+                    <a:pt x="3223013" y="2581927"/>
+                  </a:lnTo>
+                  <a:lnTo>
+                    <a:pt x="3294636" y="2621969"/>
+                  </a:lnTo>
+                  <a:lnTo>
+                    <a:pt x="3366258" y="2656161"/>
+                  </a:lnTo>
+                  <a:lnTo>
+                    <a:pt x="3437881" y="2667913"/>
+                  </a:lnTo>
+                  <a:lnTo>
+                    <a:pt x="3509503" y="2679498"/>
+                  </a:lnTo>
+                  <a:lnTo>
+                    <a:pt x="3581126" y="2690918"/>
+                  </a:lnTo>
+                  <a:lnTo>
+                    <a:pt x="3652748" y="2702177"/>
+                  </a:lnTo>
+                  <a:lnTo>
+                    <a:pt x="3724371" y="2713275"/>
+                  </a:lnTo>
+                  <a:lnTo>
+                    <a:pt x="3795993" y="2724216"/>
+                  </a:lnTo>
+                  <a:lnTo>
+                    <a:pt x="3867616" y="2735001"/>
+                  </a:lnTo>
+                  <a:lnTo>
+                    <a:pt x="3939238" y="2745633"/>
+                  </a:lnTo>
+                  <a:lnTo>
+                    <a:pt x="4010861" y="2756115"/>
+                  </a:lnTo>
+                  <a:lnTo>
+                    <a:pt x="4082483" y="2766447"/>
+                  </a:lnTo>
+                  <a:lnTo>
+                    <a:pt x="4154106" y="2776633"/>
+                  </a:lnTo>
+                  <a:lnTo>
+                    <a:pt x="4225729" y="2786674"/>
+                  </a:lnTo>
+                  <a:lnTo>
+                    <a:pt x="4297351" y="2796573"/>
+                  </a:lnTo>
+                  <a:lnTo>
+                    <a:pt x="4368974" y="2806331"/>
+                  </a:lnTo>
+                  <a:lnTo>
+                    <a:pt x="4440596" y="2815950"/>
+                  </a:lnTo>
+                  <a:lnTo>
+                    <a:pt x="4512219" y="2825433"/>
+                  </a:lnTo>
+                  <a:lnTo>
+                    <a:pt x="4583841" y="2834781"/>
+                  </a:lnTo>
+                  <a:lnTo>
+                    <a:pt x="4655464" y="2843996"/>
+                  </a:lnTo>
+                  <a:lnTo>
+                    <a:pt x="4727086" y="2853081"/>
+                  </a:lnTo>
+                  <a:lnTo>
+                    <a:pt x="4798709" y="2862036"/>
+                  </a:lnTo>
+                  <a:lnTo>
+                    <a:pt x="4870331" y="2870865"/>
+                  </a:lnTo>
+                  <a:lnTo>
+                    <a:pt x="4941954" y="2879568"/>
+                  </a:lnTo>
+                  <a:lnTo>
+                    <a:pt x="5013576" y="2888147"/>
+                  </a:lnTo>
+                  <a:lnTo>
+                    <a:pt x="5085199" y="2896605"/>
+                  </a:lnTo>
+                  <a:lnTo>
+                    <a:pt x="5156821" y="2904942"/>
+                  </a:lnTo>
+                  <a:lnTo>
+                    <a:pt x="5228444" y="2913161"/>
+                  </a:lnTo>
+                  <a:lnTo>
+                    <a:pt x="5300066" y="2921264"/>
+                  </a:lnTo>
+                  <a:lnTo>
+                    <a:pt x="5371689" y="2929251"/>
+                  </a:lnTo>
+                  <a:lnTo>
+                    <a:pt x="5443311" y="2937125"/>
+                  </a:lnTo>
+                  <a:lnTo>
+                    <a:pt x="5514934" y="2944887"/>
+                  </a:lnTo>
+                  <a:lnTo>
+                    <a:pt x="5586557" y="2952539"/>
+                  </a:lnTo>
+                  <a:lnTo>
+                    <a:pt x="5658179" y="2960082"/>
+                  </a:lnTo>
+                  <a:lnTo>
+                    <a:pt x="5729802" y="2967518"/>
+                  </a:lnTo>
+                  <a:lnTo>
+                    <a:pt x="5801424" y="2974849"/>
+                  </a:lnTo>
+                  <a:lnTo>
+                    <a:pt x="5873047" y="2982075"/>
+                  </a:lnTo>
+                  <a:lnTo>
+                    <a:pt x="5944669" y="2989199"/>
+                  </a:lnTo>
+                  <a:lnTo>
+                    <a:pt x="6016292" y="2996222"/>
+                  </a:lnTo>
+                  <a:lnTo>
+                    <a:pt x="6087914" y="3003144"/>
+                  </a:lnTo>
+                  <a:lnTo>
+                    <a:pt x="6159537" y="3009969"/>
+                  </a:lnTo>
+                  <a:lnTo>
+                    <a:pt x="6231159" y="3016697"/>
+                  </a:lnTo>
+                  <a:lnTo>
+                    <a:pt x="6302782" y="3023329"/>
+                  </a:lnTo>
+                  <a:lnTo>
+                    <a:pt x="6374404" y="3029867"/>
+                  </a:lnTo>
+                  <a:lnTo>
+                    <a:pt x="6446027" y="3036312"/>
+                  </a:lnTo>
+                  <a:lnTo>
+                    <a:pt x="6517649" y="3042666"/>
+                  </a:lnTo>
+                  <a:lnTo>
+                    <a:pt x="6589272" y="3048929"/>
+                  </a:lnTo>
+                  <a:lnTo>
+                    <a:pt x="6660894" y="3055104"/>
+                  </a:lnTo>
+                  <a:lnTo>
+                    <a:pt x="6732517" y="3061190"/>
+                  </a:lnTo>
+                  <a:lnTo>
+                    <a:pt x="6804139" y="3067191"/>
+                  </a:lnTo>
+                  <a:lnTo>
+                    <a:pt x="6875762" y="3073106"/>
+                  </a:lnTo>
+                  <a:lnTo>
+                    <a:pt x="6947385" y="3078937"/>
+                  </a:lnTo>
+                  <a:lnTo>
+                    <a:pt x="7019007" y="3084685"/>
+                  </a:lnTo>
+                  <a:lnTo>
+                    <a:pt x="7090630" y="3090352"/>
+                  </a:lnTo>
+                  <a:lnTo>
+                    <a:pt x="7090630" y="3406122"/>
+                  </a:lnTo>
+                  <a:lnTo>
+                    <a:pt x="7019007" y="3402515"/>
+                  </a:lnTo>
+                  <a:lnTo>
+                    <a:pt x="6947385" y="3398741"/>
+                  </a:lnTo>
+                  <a:lnTo>
+                    <a:pt x="6875762" y="3394791"/>
+                  </a:lnTo>
+                  <a:lnTo>
+                    <a:pt x="6804139" y="3390658"/>
+                  </a:lnTo>
+                  <a:lnTo>
+                    <a:pt x="6732517" y="3386332"/>
+                  </a:lnTo>
+                  <a:lnTo>
+                    <a:pt x="6660894" y="3381806"/>
+                  </a:lnTo>
+                  <a:lnTo>
+                    <a:pt x="6589272" y="3377070"/>
+                  </a:lnTo>
+                  <a:lnTo>
+                    <a:pt x="6517649" y="3372113"/>
+                  </a:lnTo>
+                  <a:lnTo>
+                    <a:pt x="6446027" y="3366926"/>
+                  </a:lnTo>
+                  <a:lnTo>
+                    <a:pt x="6374404" y="3361498"/>
+                  </a:lnTo>
+                  <a:lnTo>
+                    <a:pt x="6302782" y="3355818"/>
+                  </a:lnTo>
+                  <a:lnTo>
+                    <a:pt x="6231159" y="3349874"/>
+                  </a:lnTo>
+                  <a:lnTo>
+                    <a:pt x="6159537" y="3343653"/>
+                  </a:lnTo>
+                  <a:lnTo>
+                    <a:pt x="6087914" y="3337144"/>
+                  </a:lnTo>
+                  <a:lnTo>
+                    <a:pt x="6016292" y="3330332"/>
+                  </a:lnTo>
+                  <a:lnTo>
+                    <a:pt x="5944669" y="3323204"/>
+                  </a:lnTo>
+                  <a:lnTo>
+                    <a:pt x="5873047" y="3315744"/>
+                  </a:lnTo>
+                  <a:lnTo>
+                    <a:pt x="5801424" y="3307938"/>
+                  </a:lnTo>
+                  <a:lnTo>
+                    <a:pt x="5729802" y="3299769"/>
+                  </a:lnTo>
+                  <a:lnTo>
+                    <a:pt x="5658179" y="3291221"/>
+                  </a:lnTo>
+                  <a:lnTo>
+                    <a:pt x="5586557" y="3282275"/>
+                  </a:lnTo>
+                  <a:lnTo>
+                    <a:pt x="5514934" y="3272914"/>
+                  </a:lnTo>
+                  <a:lnTo>
+                    <a:pt x="5443311" y="3263118"/>
+                  </a:lnTo>
+                  <a:lnTo>
+                    <a:pt x="5371689" y="3252867"/>
+                  </a:lnTo>
+                  <a:lnTo>
+                    <a:pt x="5300066" y="3242139"/>
+                  </a:lnTo>
+                  <a:lnTo>
+                    <a:pt x="5228444" y="3230913"/>
+                  </a:lnTo>
+                  <a:lnTo>
+                    <a:pt x="5156821" y="3219165"/>
+                  </a:lnTo>
+                  <a:lnTo>
+                    <a:pt x="5085199" y="3206871"/>
+                  </a:lnTo>
+                  <a:lnTo>
+                    <a:pt x="5013576" y="3194007"/>
+                  </a:lnTo>
+                  <a:lnTo>
+                    <a:pt x="4941954" y="3180544"/>
+                  </a:lnTo>
+                  <a:lnTo>
+                    <a:pt x="4870331" y="3166456"/>
+                  </a:lnTo>
+                  <a:lnTo>
+                    <a:pt x="4798709" y="3151713"/>
+                  </a:lnTo>
+                  <a:lnTo>
+                    <a:pt x="4727086" y="3136285"/>
+                  </a:lnTo>
+                  <a:lnTo>
+                    <a:pt x="4655464" y="3120141"/>
+                  </a:lnTo>
+                  <a:lnTo>
+                    <a:pt x="4583841" y="3103246"/>
+                  </a:lnTo>
+                  <a:lnTo>
+                    <a:pt x="4512219" y="3085566"/>
+                  </a:lnTo>
+                  <a:lnTo>
+                    <a:pt x="4440596" y="3067065"/>
+                  </a:lnTo>
+                  <a:lnTo>
+                    <a:pt x="4368974" y="3047704"/>
+                  </a:lnTo>
+                  <a:lnTo>
+                    <a:pt x="4297351" y="3027444"/>
+                  </a:lnTo>
+                  <a:lnTo>
+                    <a:pt x="4225729" y="3006242"/>
+                  </a:lnTo>
+                  <a:lnTo>
+                    <a:pt x="4154106" y="2984055"/>
+                  </a:lnTo>
+                  <a:lnTo>
+                    <a:pt x="4082483" y="2960837"/>
+                  </a:lnTo>
+                  <a:lnTo>
+                    <a:pt x="4010861" y="2936541"/>
+                  </a:lnTo>
+                  <a:lnTo>
+                    <a:pt x="3939238" y="2911115"/>
+                  </a:lnTo>
+                  <a:lnTo>
+                    <a:pt x="3867616" y="2884508"/>
+                  </a:lnTo>
+                  <a:lnTo>
+                    <a:pt x="3795993" y="2856665"/>
+                  </a:lnTo>
+                  <a:lnTo>
+                    <a:pt x="3724371" y="2827528"/>
+                  </a:lnTo>
+                  <a:lnTo>
+                    <a:pt x="3652748" y="2797037"/>
+                  </a:lnTo>
+                  <a:lnTo>
+                    <a:pt x="3581126" y="2765129"/>
+                  </a:lnTo>
+                  <a:lnTo>
+                    <a:pt x="3509503" y="2731739"/>
+                  </a:lnTo>
+                  <a:lnTo>
+                    <a:pt x="3437881" y="2696798"/>
+                  </a:lnTo>
+                  <a:lnTo>
+                    <a:pt x="3366258" y="2660233"/>
+                  </a:lnTo>
+                  <a:lnTo>
+                    <a:pt x="3294636" y="2644240"/>
+                  </a:lnTo>
+                  <a:lnTo>
+                    <a:pt x="3223013" y="2632147"/>
+                  </a:lnTo>
+                  <a:lnTo>
+                    <a:pt x="3151391" y="2619880"/>
+                  </a:lnTo>
+                  <a:lnTo>
+                    <a:pt x="3079768" y="2607436"/>
+                  </a:lnTo>
+                  <a:lnTo>
+                    <a:pt x="3008146" y="2594813"/>
+                  </a:lnTo>
+                  <a:lnTo>
+                    <a:pt x="2936523" y="2582009"/>
+                  </a:lnTo>
+                  <a:lnTo>
+                    <a:pt x="2864901" y="2569019"/>
+                  </a:lnTo>
+                  <a:lnTo>
+                    <a:pt x="2793278" y="2555843"/>
+                  </a:lnTo>
+                  <a:lnTo>
+                    <a:pt x="2721655" y="2542477"/>
+                  </a:lnTo>
+                  <a:lnTo>
+                    <a:pt x="2650033" y="2528918"/>
+                  </a:lnTo>
+                  <a:lnTo>
+                    <a:pt x="2578410" y="2515164"/>
+                  </a:lnTo>
+                  <a:lnTo>
+                    <a:pt x="2506788" y="2501212"/>
+                  </a:lnTo>
+                  <a:lnTo>
+                    <a:pt x="2435165" y="2487059"/>
+                  </a:lnTo>
+                  <a:lnTo>
+                    <a:pt x="2363543" y="2472702"/>
+                  </a:lnTo>
+                  <a:lnTo>
+                    <a:pt x="2291920" y="2458138"/>
+                  </a:lnTo>
+                  <a:lnTo>
+                    <a:pt x="2220298" y="2443365"/>
+                  </a:lnTo>
+                  <a:lnTo>
+                    <a:pt x="2148675" y="2428378"/>
+                  </a:lnTo>
+                  <a:lnTo>
+                    <a:pt x="2077053" y="2413176"/>
+                  </a:lnTo>
+                  <a:lnTo>
+                    <a:pt x="2005430" y="2397755"/>
+                  </a:lnTo>
+                  <a:lnTo>
+                    <a:pt x="1933808" y="2382112"/>
+                  </a:lnTo>
+                  <a:lnTo>
+                    <a:pt x="1862185" y="2366243"/>
+                  </a:lnTo>
+                  <a:lnTo>
+                    <a:pt x="1790563" y="2350146"/>
+                  </a:lnTo>
+                  <a:lnTo>
+                    <a:pt x="1718940" y="2333816"/>
+                  </a:lnTo>
+                  <a:lnTo>
+                    <a:pt x="1647318" y="2317252"/>
+                  </a:lnTo>
+                  <a:lnTo>
+                    <a:pt x="1575695" y="2300449"/>
+                  </a:lnTo>
+                  <a:lnTo>
+                    <a:pt x="1504073" y="2283404"/>
+                  </a:lnTo>
+                  <a:lnTo>
+                    <a:pt x="1432450" y="2266114"/>
+                  </a:lnTo>
+                  <a:lnTo>
+                    <a:pt x="1360827" y="2248574"/>
+                  </a:lnTo>
+                  <a:lnTo>
+                    <a:pt x="1289205" y="2230782"/>
+                  </a:lnTo>
+                  <a:lnTo>
+                    <a:pt x="1217582" y="2212733"/>
+                  </a:lnTo>
+                  <a:lnTo>
+                    <a:pt x="1145960" y="2194425"/>
+                  </a:lnTo>
+                  <a:lnTo>
+                    <a:pt x="1074337" y="2175852"/>
+                  </a:lnTo>
+                  <a:lnTo>
+                    <a:pt x="1002715" y="2157013"/>
+                  </a:lnTo>
+                  <a:lnTo>
+                    <a:pt x="931092" y="2137901"/>
+                  </a:lnTo>
+                  <a:lnTo>
+                    <a:pt x="859470" y="2118515"/>
+                  </a:lnTo>
+                  <a:lnTo>
+                    <a:pt x="787847" y="2098849"/>
+                  </a:lnTo>
+                  <a:lnTo>
+                    <a:pt x="716225" y="2078900"/>
+                  </a:lnTo>
+                  <a:lnTo>
+                    <a:pt x="644602" y="2058664"/>
+                  </a:lnTo>
+                  <a:lnTo>
+                    <a:pt x="572980" y="2038136"/>
+                  </a:lnTo>
+                  <a:lnTo>
+                    <a:pt x="501357" y="2017312"/>
+                  </a:lnTo>
+                  <a:lnTo>
+                    <a:pt x="429735" y="1996189"/>
+                  </a:lnTo>
+                  <a:lnTo>
+                    <a:pt x="358112" y="1974761"/>
+                  </a:lnTo>
+                  <a:lnTo>
+                    <a:pt x="286490" y="1953025"/>
+                  </a:lnTo>
+                  <a:lnTo>
+                    <a:pt x="214867" y="1930975"/>
+                  </a:lnTo>
+                  <a:lnTo>
+                    <a:pt x="143245" y="1908608"/>
+                  </a:lnTo>
+                  <a:lnTo>
+                    <a:pt x="71622" y="1885919"/>
+                  </a:lnTo>
+                  <a:lnTo>
+                    <a:pt x="0" y="1862902"/>
                   </a:lnTo>
                   <a:close/>
                 </a:path>
@@ -3576,273 +3539,598 @@
         </p:sp>
         <p:sp>
           <p:nvSpPr>
+            <p:cNvPr id="21" name="pl21"/>
+            <p:cNvSpPr/>
+            <p:nvPr/>
+          </p:nvSpPr>
+          <p:spPr>
+            <a:xfrm>
+              <a:off x="2264143" y="2073503"/>
+              <a:ext cx="5998536" cy="3090352"/>
+            </a:xfrm>
+            <a:custGeom>
+              <a:avLst/>
+              <a:pathLst>
+                <a:path w="5998536" h="3090352">
+                  <a:moveTo>
+                    <a:pt x="0" y="0"/>
+                  </a:moveTo>
+                  <a:lnTo>
+                    <a:pt x="53866" y="117630"/>
+                  </a:lnTo>
+                  <a:lnTo>
+                    <a:pt x="125489" y="267090"/>
+                  </a:lnTo>
+                  <a:lnTo>
+                    <a:pt x="197111" y="409914"/>
+                  </a:lnTo>
+                  <a:lnTo>
+                    <a:pt x="268734" y="546396"/>
+                  </a:lnTo>
+                  <a:lnTo>
+                    <a:pt x="340356" y="676818"/>
+                  </a:lnTo>
+                  <a:lnTo>
+                    <a:pt x="411979" y="801450"/>
+                  </a:lnTo>
+                  <a:lnTo>
+                    <a:pt x="483601" y="920547"/>
+                  </a:lnTo>
+                  <a:lnTo>
+                    <a:pt x="555224" y="1034356"/>
+                  </a:lnTo>
+                  <a:lnTo>
+                    <a:pt x="626846" y="1143113"/>
+                  </a:lnTo>
+                  <a:lnTo>
+                    <a:pt x="698469" y="1247040"/>
+                  </a:lnTo>
+                  <a:lnTo>
+                    <a:pt x="770091" y="1346353"/>
+                  </a:lnTo>
+                  <a:lnTo>
+                    <a:pt x="841714" y="1441256"/>
+                  </a:lnTo>
+                  <a:lnTo>
+                    <a:pt x="913336" y="1531945"/>
+                  </a:lnTo>
+                  <a:lnTo>
+                    <a:pt x="984959" y="1618608"/>
+                  </a:lnTo>
+                  <a:lnTo>
+                    <a:pt x="1056581" y="1701422"/>
+                  </a:lnTo>
+                  <a:lnTo>
+                    <a:pt x="1128204" y="1780560"/>
+                  </a:lnTo>
+                  <a:lnTo>
+                    <a:pt x="1199826" y="1856184"/>
+                  </a:lnTo>
+                  <a:lnTo>
+                    <a:pt x="1271449" y="1928449"/>
+                  </a:lnTo>
+                  <a:lnTo>
+                    <a:pt x="1343072" y="1997507"/>
+                  </a:lnTo>
+                  <a:lnTo>
+                    <a:pt x="1414694" y="2063498"/>
+                  </a:lnTo>
+                  <a:lnTo>
+                    <a:pt x="1486317" y="2126559"/>
+                  </a:lnTo>
+                  <a:lnTo>
+                    <a:pt x="1557939" y="2186820"/>
+                  </a:lnTo>
+                  <a:lnTo>
+                    <a:pt x="1629562" y="2244405"/>
+                  </a:lnTo>
+                  <a:lnTo>
+                    <a:pt x="1701184" y="2299433"/>
+                  </a:lnTo>
+                  <a:lnTo>
+                    <a:pt x="1772807" y="2352018"/>
+                  </a:lnTo>
+                  <a:lnTo>
+                    <a:pt x="1844429" y="2402269"/>
+                  </a:lnTo>
+                  <a:lnTo>
+                    <a:pt x="1916052" y="2450288"/>
+                  </a:lnTo>
+                  <a:lnTo>
+                    <a:pt x="1987674" y="2496175"/>
+                  </a:lnTo>
+                  <a:lnTo>
+                    <a:pt x="2059297" y="2540024"/>
+                  </a:lnTo>
+                  <a:lnTo>
+                    <a:pt x="2130919" y="2581927"/>
+                  </a:lnTo>
+                  <a:lnTo>
+                    <a:pt x="2202542" y="2621969"/>
+                  </a:lnTo>
+                  <a:lnTo>
+                    <a:pt x="2274164" y="2656161"/>
+                  </a:lnTo>
+                  <a:lnTo>
+                    <a:pt x="2345787" y="2667913"/>
+                  </a:lnTo>
+                  <a:lnTo>
+                    <a:pt x="2417409" y="2679498"/>
+                  </a:lnTo>
+                  <a:lnTo>
+                    <a:pt x="2489032" y="2690918"/>
+                  </a:lnTo>
+                  <a:lnTo>
+                    <a:pt x="2560654" y="2702177"/>
+                  </a:lnTo>
+                  <a:lnTo>
+                    <a:pt x="2632277" y="2713275"/>
+                  </a:lnTo>
+                  <a:lnTo>
+                    <a:pt x="2703900" y="2724216"/>
+                  </a:lnTo>
+                  <a:lnTo>
+                    <a:pt x="2775522" y="2735001"/>
+                  </a:lnTo>
+                  <a:lnTo>
+                    <a:pt x="2847145" y="2745633"/>
+                  </a:lnTo>
+                  <a:lnTo>
+                    <a:pt x="2918767" y="2756115"/>
+                  </a:lnTo>
+                  <a:lnTo>
+                    <a:pt x="2990390" y="2766447"/>
+                  </a:lnTo>
+                  <a:lnTo>
+                    <a:pt x="3062012" y="2776633"/>
+                  </a:lnTo>
+                  <a:lnTo>
+                    <a:pt x="3133635" y="2786674"/>
+                  </a:lnTo>
+                  <a:lnTo>
+                    <a:pt x="3205257" y="2796573"/>
+                  </a:lnTo>
+                  <a:lnTo>
+                    <a:pt x="3276880" y="2806331"/>
+                  </a:lnTo>
+                  <a:lnTo>
+                    <a:pt x="3348502" y="2815950"/>
+                  </a:lnTo>
+                  <a:lnTo>
+                    <a:pt x="3420125" y="2825433"/>
+                  </a:lnTo>
+                  <a:lnTo>
+                    <a:pt x="3491747" y="2834781"/>
+                  </a:lnTo>
+                  <a:lnTo>
+                    <a:pt x="3563370" y="2843996"/>
+                  </a:lnTo>
+                  <a:lnTo>
+                    <a:pt x="3634992" y="2853081"/>
+                  </a:lnTo>
+                  <a:lnTo>
+                    <a:pt x="3706615" y="2862036"/>
+                  </a:lnTo>
+                  <a:lnTo>
+                    <a:pt x="3778237" y="2870865"/>
+                  </a:lnTo>
+                  <a:lnTo>
+                    <a:pt x="3849860" y="2879568"/>
+                  </a:lnTo>
+                  <a:lnTo>
+                    <a:pt x="3921482" y="2888147"/>
+                  </a:lnTo>
+                  <a:lnTo>
+                    <a:pt x="3993105" y="2896605"/>
+                  </a:lnTo>
+                  <a:lnTo>
+                    <a:pt x="4064728" y="2904942"/>
+                  </a:lnTo>
+                  <a:lnTo>
+                    <a:pt x="4136350" y="2913161"/>
+                  </a:lnTo>
+                  <a:lnTo>
+                    <a:pt x="4207973" y="2921264"/>
+                  </a:lnTo>
+                  <a:lnTo>
+                    <a:pt x="4279595" y="2929251"/>
+                  </a:lnTo>
+                  <a:lnTo>
+                    <a:pt x="4351218" y="2937125"/>
+                  </a:lnTo>
+                  <a:lnTo>
+                    <a:pt x="4422840" y="2944887"/>
+                  </a:lnTo>
+                  <a:lnTo>
+                    <a:pt x="4494463" y="2952539"/>
+                  </a:lnTo>
+                  <a:lnTo>
+                    <a:pt x="4566085" y="2960082"/>
+                  </a:lnTo>
+                  <a:lnTo>
+                    <a:pt x="4637708" y="2967518"/>
+                  </a:lnTo>
+                  <a:lnTo>
+                    <a:pt x="4709330" y="2974849"/>
+                  </a:lnTo>
+                  <a:lnTo>
+                    <a:pt x="4780953" y="2982075"/>
+                  </a:lnTo>
+                  <a:lnTo>
+                    <a:pt x="4852575" y="2989199"/>
+                  </a:lnTo>
+                  <a:lnTo>
+                    <a:pt x="4924198" y="2996222"/>
+                  </a:lnTo>
+                  <a:lnTo>
+                    <a:pt x="4995820" y="3003144"/>
+                  </a:lnTo>
+                  <a:lnTo>
+                    <a:pt x="5067443" y="3009969"/>
+                  </a:lnTo>
+                  <a:lnTo>
+                    <a:pt x="5139065" y="3016697"/>
+                  </a:lnTo>
+                  <a:lnTo>
+                    <a:pt x="5210688" y="3023329"/>
+                  </a:lnTo>
+                  <a:lnTo>
+                    <a:pt x="5282310" y="3029867"/>
+                  </a:lnTo>
+                  <a:lnTo>
+                    <a:pt x="5353933" y="3036312"/>
+                  </a:lnTo>
+                  <a:lnTo>
+                    <a:pt x="5425556" y="3042666"/>
+                  </a:lnTo>
+                  <a:lnTo>
+                    <a:pt x="5497178" y="3048929"/>
+                  </a:lnTo>
+                  <a:lnTo>
+                    <a:pt x="5568801" y="3055104"/>
+                  </a:lnTo>
+                  <a:lnTo>
+                    <a:pt x="5640423" y="3061190"/>
+                  </a:lnTo>
+                  <a:lnTo>
+                    <a:pt x="5712046" y="3067191"/>
+                  </a:lnTo>
+                  <a:lnTo>
+                    <a:pt x="5783668" y="3073106"/>
+                  </a:lnTo>
+                  <a:lnTo>
+                    <a:pt x="5855291" y="3078937"/>
+                  </a:lnTo>
+                  <a:lnTo>
+                    <a:pt x="5926913" y="3084685"/>
+                  </a:lnTo>
+                  <a:lnTo>
+                    <a:pt x="5998536" y="3090352"/>
+                  </a:lnTo>
+                </a:path>
+              </a:pathLst>
+            </a:custGeom>
+          </p:spPr>
+          <p:txBody>
+            <a:bodyPr/>
+            <a:lstStyle/>
+            <a:p/>
+          </p:txBody>
+        </p:sp>
+        <p:sp>
+          <p:nvSpPr>
             <p:cNvPr id="22" name="pl22"/>
             <p:cNvSpPr/>
             <p:nvPr/>
           </p:nvSpPr>
           <p:spPr>
             <a:xfrm>
-              <a:off x="1803164" y="2073503"/>
-              <a:ext cx="6418136" cy="3090352"/>
+              <a:off x="1172049" y="3936406"/>
+              <a:ext cx="7090630" cy="1543219"/>
             </a:xfrm>
             <a:custGeom>
               <a:avLst/>
               <a:pathLst>
-                <a:path w="6418136" h="3090352">
+                <a:path w="7090630" h="1543219">
                   <a:moveTo>
+                    <a:pt x="7090630" y="1543219"/>
+                  </a:moveTo>
+                  <a:lnTo>
+                    <a:pt x="7019007" y="1539612"/>
+                  </a:lnTo>
+                  <a:lnTo>
+                    <a:pt x="6947385" y="1535838"/>
+                  </a:lnTo>
+                  <a:lnTo>
+                    <a:pt x="6875762" y="1531888"/>
+                  </a:lnTo>
+                  <a:lnTo>
+                    <a:pt x="6804139" y="1527755"/>
+                  </a:lnTo>
+                  <a:lnTo>
+                    <a:pt x="6732517" y="1523429"/>
+                  </a:lnTo>
+                  <a:lnTo>
+                    <a:pt x="6660894" y="1518903"/>
+                  </a:lnTo>
+                  <a:lnTo>
+                    <a:pt x="6589272" y="1514167"/>
+                  </a:lnTo>
+                  <a:lnTo>
+                    <a:pt x="6517649" y="1509210"/>
+                  </a:lnTo>
+                  <a:lnTo>
+                    <a:pt x="6446027" y="1504023"/>
+                  </a:lnTo>
+                  <a:lnTo>
+                    <a:pt x="6374404" y="1498595"/>
+                  </a:lnTo>
+                  <a:lnTo>
+                    <a:pt x="6302782" y="1492915"/>
+                  </a:lnTo>
+                  <a:lnTo>
+                    <a:pt x="6231159" y="1486971"/>
+                  </a:lnTo>
+                  <a:lnTo>
+                    <a:pt x="6159537" y="1480750"/>
+                  </a:lnTo>
+                  <a:lnTo>
+                    <a:pt x="6087914" y="1474241"/>
+                  </a:lnTo>
+                  <a:lnTo>
+                    <a:pt x="6016292" y="1467429"/>
+                  </a:lnTo>
+                  <a:lnTo>
+                    <a:pt x="5944669" y="1460301"/>
+                  </a:lnTo>
+                  <a:lnTo>
+                    <a:pt x="5873047" y="1452841"/>
+                  </a:lnTo>
+                  <a:lnTo>
+                    <a:pt x="5801424" y="1445035"/>
+                  </a:lnTo>
+                  <a:lnTo>
+                    <a:pt x="5729802" y="1436866"/>
+                  </a:lnTo>
+                  <a:lnTo>
+                    <a:pt x="5658179" y="1428318"/>
+                  </a:lnTo>
+                  <a:lnTo>
+                    <a:pt x="5586557" y="1419372"/>
+                  </a:lnTo>
+                  <a:lnTo>
+                    <a:pt x="5514934" y="1410011"/>
+                  </a:lnTo>
+                  <a:lnTo>
+                    <a:pt x="5443311" y="1400215"/>
+                  </a:lnTo>
+                  <a:lnTo>
+                    <a:pt x="5371689" y="1389964"/>
+                  </a:lnTo>
+                  <a:lnTo>
+                    <a:pt x="5300066" y="1379236"/>
+                  </a:lnTo>
+                  <a:lnTo>
+                    <a:pt x="5228444" y="1368010"/>
+                  </a:lnTo>
+                  <a:lnTo>
+                    <a:pt x="5156821" y="1356262"/>
+                  </a:lnTo>
+                  <a:lnTo>
+                    <a:pt x="5085199" y="1343968"/>
+                  </a:lnTo>
+                  <a:lnTo>
+                    <a:pt x="5013576" y="1331104"/>
+                  </a:lnTo>
+                  <a:lnTo>
+                    <a:pt x="4941954" y="1317641"/>
+                  </a:lnTo>
+                  <a:lnTo>
+                    <a:pt x="4870331" y="1303553"/>
+                  </a:lnTo>
+                  <a:lnTo>
+                    <a:pt x="4798709" y="1288810"/>
+                  </a:lnTo>
+                  <a:lnTo>
+                    <a:pt x="4727086" y="1273382"/>
+                  </a:lnTo>
+                  <a:lnTo>
+                    <a:pt x="4655464" y="1257238"/>
+                  </a:lnTo>
+                  <a:lnTo>
+                    <a:pt x="4583841" y="1240343"/>
+                  </a:lnTo>
+                  <a:lnTo>
+                    <a:pt x="4512219" y="1222663"/>
+                  </a:lnTo>
+                  <a:lnTo>
+                    <a:pt x="4440596" y="1204162"/>
+                  </a:lnTo>
+                  <a:lnTo>
+                    <a:pt x="4368974" y="1184801"/>
+                  </a:lnTo>
+                  <a:lnTo>
+                    <a:pt x="4297351" y="1164541"/>
+                  </a:lnTo>
+                  <a:lnTo>
+                    <a:pt x="4225729" y="1143339"/>
+                  </a:lnTo>
+                  <a:lnTo>
+                    <a:pt x="4154106" y="1121152"/>
+                  </a:lnTo>
+                  <a:lnTo>
+                    <a:pt x="4082483" y="1097934"/>
+                  </a:lnTo>
+                  <a:lnTo>
+                    <a:pt x="4010861" y="1073638"/>
+                  </a:lnTo>
+                  <a:lnTo>
+                    <a:pt x="3939238" y="1048212"/>
+                  </a:lnTo>
+                  <a:lnTo>
+                    <a:pt x="3867616" y="1021605"/>
+                  </a:lnTo>
+                  <a:lnTo>
+                    <a:pt x="3795993" y="993762"/>
+                  </a:lnTo>
+                  <a:lnTo>
+                    <a:pt x="3724371" y="964625"/>
+                  </a:lnTo>
+                  <a:lnTo>
+                    <a:pt x="3652748" y="934134"/>
+                  </a:lnTo>
+                  <a:lnTo>
+                    <a:pt x="3581126" y="902226"/>
+                  </a:lnTo>
+                  <a:lnTo>
+                    <a:pt x="3509503" y="868836"/>
+                  </a:lnTo>
+                  <a:lnTo>
+                    <a:pt x="3437881" y="833895"/>
+                  </a:lnTo>
+                  <a:lnTo>
+                    <a:pt x="3366258" y="797330"/>
+                  </a:lnTo>
+                  <a:lnTo>
+                    <a:pt x="3294636" y="781337"/>
+                  </a:lnTo>
+                  <a:lnTo>
+                    <a:pt x="3223013" y="769244"/>
+                  </a:lnTo>
+                  <a:lnTo>
+                    <a:pt x="3151391" y="756977"/>
+                  </a:lnTo>
+                  <a:lnTo>
+                    <a:pt x="3079768" y="744533"/>
+                  </a:lnTo>
+                  <a:lnTo>
+                    <a:pt x="3008146" y="731910"/>
+                  </a:lnTo>
+                  <a:lnTo>
+                    <a:pt x="2936523" y="719106"/>
+                  </a:lnTo>
+                  <a:lnTo>
+                    <a:pt x="2864901" y="706116"/>
+                  </a:lnTo>
+                  <a:lnTo>
+                    <a:pt x="2793278" y="692940"/>
+                  </a:lnTo>
+                  <a:lnTo>
+                    <a:pt x="2721655" y="679574"/>
+                  </a:lnTo>
+                  <a:lnTo>
+                    <a:pt x="2650033" y="666015"/>
+                  </a:lnTo>
+                  <a:lnTo>
+                    <a:pt x="2578410" y="652261"/>
+                  </a:lnTo>
+                  <a:lnTo>
+                    <a:pt x="2506788" y="638309"/>
+                  </a:lnTo>
+                  <a:lnTo>
+                    <a:pt x="2435165" y="624156"/>
+                  </a:lnTo>
+                  <a:lnTo>
+                    <a:pt x="2363543" y="609799"/>
+                  </a:lnTo>
+                  <a:lnTo>
+                    <a:pt x="2291920" y="595235"/>
+                  </a:lnTo>
+                  <a:lnTo>
+                    <a:pt x="2220298" y="580462"/>
+                  </a:lnTo>
+                  <a:lnTo>
+                    <a:pt x="2148675" y="565475"/>
+                  </a:lnTo>
+                  <a:lnTo>
+                    <a:pt x="2077053" y="550273"/>
+                  </a:lnTo>
+                  <a:lnTo>
+                    <a:pt x="2005430" y="534852"/>
+                  </a:lnTo>
+                  <a:lnTo>
+                    <a:pt x="1933808" y="519209"/>
+                  </a:lnTo>
+                  <a:lnTo>
+                    <a:pt x="1862185" y="503340"/>
+                  </a:lnTo>
+                  <a:lnTo>
+                    <a:pt x="1790563" y="487243"/>
+                  </a:lnTo>
+                  <a:lnTo>
+                    <a:pt x="1718940" y="470914"/>
+                  </a:lnTo>
+                  <a:lnTo>
+                    <a:pt x="1647318" y="454349"/>
+                  </a:lnTo>
+                  <a:lnTo>
+                    <a:pt x="1575695" y="437546"/>
+                  </a:lnTo>
+                  <a:lnTo>
+                    <a:pt x="1504073" y="420501"/>
+                  </a:lnTo>
+                  <a:lnTo>
+                    <a:pt x="1432450" y="403211"/>
+                  </a:lnTo>
+                  <a:lnTo>
+                    <a:pt x="1360827" y="385671"/>
+                  </a:lnTo>
+                  <a:lnTo>
+                    <a:pt x="1289205" y="367879"/>
+                  </a:lnTo>
+                  <a:lnTo>
+                    <a:pt x="1217582" y="349830"/>
+                  </a:lnTo>
+                  <a:lnTo>
+                    <a:pt x="1145960" y="331522"/>
+                  </a:lnTo>
+                  <a:lnTo>
+                    <a:pt x="1074337" y="312949"/>
+                  </a:lnTo>
+                  <a:lnTo>
+                    <a:pt x="1002715" y="294110"/>
+                  </a:lnTo>
+                  <a:lnTo>
+                    <a:pt x="931092" y="274998"/>
+                  </a:lnTo>
+                  <a:lnTo>
+                    <a:pt x="859470" y="255612"/>
+                  </a:lnTo>
+                  <a:lnTo>
+                    <a:pt x="787847" y="235946"/>
+                  </a:lnTo>
+                  <a:lnTo>
+                    <a:pt x="716225" y="215997"/>
+                  </a:lnTo>
+                  <a:lnTo>
+                    <a:pt x="644602" y="195761"/>
+                  </a:lnTo>
+                  <a:lnTo>
+                    <a:pt x="572980" y="175233"/>
+                  </a:lnTo>
+                  <a:lnTo>
+                    <a:pt x="501357" y="154410"/>
+                  </a:lnTo>
+                  <a:lnTo>
+                    <a:pt x="429735" y="133286"/>
+                  </a:lnTo>
+                  <a:lnTo>
+                    <a:pt x="358112" y="111858"/>
+                  </a:lnTo>
+                  <a:lnTo>
+                    <a:pt x="286490" y="90122"/>
+                  </a:lnTo>
+                  <a:lnTo>
+                    <a:pt x="214867" y="68072"/>
+                  </a:lnTo>
+                  <a:lnTo>
+                    <a:pt x="143245" y="45705"/>
+                  </a:lnTo>
+                  <a:lnTo>
+                    <a:pt x="71622" y="23016"/>
+                  </a:lnTo>
+                  <a:lnTo>
                     <a:pt x="0" y="0"/>
-                  </a:moveTo>
-                  <a:lnTo>
-                    <a:pt x="57634" y="117630"/>
-                  </a:lnTo>
-                  <a:lnTo>
-                    <a:pt x="134267" y="267090"/>
-                  </a:lnTo>
-                  <a:lnTo>
-                    <a:pt x="210899" y="409914"/>
-                  </a:lnTo>
-                  <a:lnTo>
-                    <a:pt x="287532" y="546396"/>
-                  </a:lnTo>
-                  <a:lnTo>
-                    <a:pt x="364164" y="676818"/>
-                  </a:lnTo>
-                  <a:lnTo>
-                    <a:pt x="440797" y="801450"/>
-                  </a:lnTo>
-                  <a:lnTo>
-                    <a:pt x="517429" y="920547"/>
-                  </a:lnTo>
-                  <a:lnTo>
-                    <a:pt x="594062" y="1034356"/>
-                  </a:lnTo>
-                  <a:lnTo>
-                    <a:pt x="670694" y="1143113"/>
-                  </a:lnTo>
-                  <a:lnTo>
-                    <a:pt x="747327" y="1247040"/>
-                  </a:lnTo>
-                  <a:lnTo>
-                    <a:pt x="823960" y="1346353"/>
-                  </a:lnTo>
-                  <a:lnTo>
-                    <a:pt x="900592" y="1441256"/>
-                  </a:lnTo>
-                  <a:lnTo>
-                    <a:pt x="977225" y="1531945"/>
-                  </a:lnTo>
-                  <a:lnTo>
-                    <a:pt x="1053857" y="1618608"/>
-                  </a:lnTo>
-                  <a:lnTo>
-                    <a:pt x="1130490" y="1701422"/>
-                  </a:lnTo>
-                  <a:lnTo>
-                    <a:pt x="1207122" y="1780560"/>
-                  </a:lnTo>
-                  <a:lnTo>
-                    <a:pt x="1283755" y="1856184"/>
-                  </a:lnTo>
-                  <a:lnTo>
-                    <a:pt x="1360387" y="1928449"/>
-                  </a:lnTo>
-                  <a:lnTo>
-                    <a:pt x="1437020" y="1997507"/>
-                  </a:lnTo>
-                  <a:lnTo>
-                    <a:pt x="1513652" y="2063498"/>
-                  </a:lnTo>
-                  <a:lnTo>
-                    <a:pt x="1590285" y="2126559"/>
-                  </a:lnTo>
-                  <a:lnTo>
-                    <a:pt x="1666918" y="2186820"/>
-                  </a:lnTo>
-                  <a:lnTo>
-                    <a:pt x="1743550" y="2244405"/>
-                  </a:lnTo>
-                  <a:lnTo>
-                    <a:pt x="1820183" y="2299433"/>
-                  </a:lnTo>
-                  <a:lnTo>
-                    <a:pt x="1896815" y="2352018"/>
-                  </a:lnTo>
-                  <a:lnTo>
-                    <a:pt x="1973448" y="2402269"/>
-                  </a:lnTo>
-                  <a:lnTo>
-                    <a:pt x="2050080" y="2450288"/>
-                  </a:lnTo>
-                  <a:lnTo>
-                    <a:pt x="2126713" y="2496175"/>
-                  </a:lnTo>
-                  <a:lnTo>
-                    <a:pt x="2203345" y="2540024"/>
-                  </a:lnTo>
-                  <a:lnTo>
-                    <a:pt x="2279978" y="2581927"/>
-                  </a:lnTo>
-                  <a:lnTo>
-                    <a:pt x="2356611" y="2621969"/>
-                  </a:lnTo>
-                  <a:lnTo>
-                    <a:pt x="2433243" y="2656161"/>
-                  </a:lnTo>
-                  <a:lnTo>
-                    <a:pt x="2509876" y="2667913"/>
-                  </a:lnTo>
-                  <a:lnTo>
-                    <a:pt x="2586508" y="2679498"/>
-                  </a:lnTo>
-                  <a:lnTo>
-                    <a:pt x="2663141" y="2690918"/>
-                  </a:lnTo>
-                  <a:lnTo>
-                    <a:pt x="2739773" y="2702177"/>
-                  </a:lnTo>
-                  <a:lnTo>
-                    <a:pt x="2816406" y="2713275"/>
-                  </a:lnTo>
-                  <a:lnTo>
-                    <a:pt x="2893038" y="2724216"/>
-                  </a:lnTo>
-                  <a:lnTo>
-                    <a:pt x="2969671" y="2735001"/>
-                  </a:lnTo>
-                  <a:lnTo>
-                    <a:pt x="3046303" y="2745633"/>
-                  </a:lnTo>
-                  <a:lnTo>
-                    <a:pt x="3122936" y="2756115"/>
-                  </a:lnTo>
-                  <a:lnTo>
-                    <a:pt x="3199569" y="2766447"/>
-                  </a:lnTo>
-                  <a:lnTo>
-                    <a:pt x="3276201" y="2776633"/>
-                  </a:lnTo>
-                  <a:lnTo>
-                    <a:pt x="3352834" y="2786674"/>
-                  </a:lnTo>
-                  <a:lnTo>
-                    <a:pt x="3429466" y="2796573"/>
-                  </a:lnTo>
-                  <a:lnTo>
-                    <a:pt x="3506099" y="2806331"/>
-                  </a:lnTo>
-                  <a:lnTo>
-                    <a:pt x="3582731" y="2815950"/>
-                  </a:lnTo>
-                  <a:lnTo>
-                    <a:pt x="3659364" y="2825433"/>
-                  </a:lnTo>
-                  <a:lnTo>
-                    <a:pt x="3735996" y="2834781"/>
-                  </a:lnTo>
-                  <a:lnTo>
-                    <a:pt x="3812629" y="2843996"/>
-                  </a:lnTo>
-                  <a:lnTo>
-                    <a:pt x="3889262" y="2853081"/>
-                  </a:lnTo>
-                  <a:lnTo>
-                    <a:pt x="3965894" y="2862036"/>
-                  </a:lnTo>
-                  <a:lnTo>
-                    <a:pt x="4042527" y="2870865"/>
-                  </a:lnTo>
-                  <a:lnTo>
-                    <a:pt x="4119159" y="2879568"/>
-                  </a:lnTo>
-                  <a:lnTo>
-                    <a:pt x="4195792" y="2888147"/>
-                  </a:lnTo>
-                  <a:lnTo>
-                    <a:pt x="4272424" y="2896605"/>
-                  </a:lnTo>
-                  <a:lnTo>
-                    <a:pt x="4349057" y="2904942"/>
-                  </a:lnTo>
-                  <a:lnTo>
-                    <a:pt x="4425689" y="2913161"/>
-                  </a:lnTo>
-                  <a:lnTo>
-                    <a:pt x="4502322" y="2921264"/>
-                  </a:lnTo>
-                  <a:lnTo>
-                    <a:pt x="4578954" y="2929251"/>
-                  </a:lnTo>
-                  <a:lnTo>
-                    <a:pt x="4655587" y="2937125"/>
-                  </a:lnTo>
-                  <a:lnTo>
-                    <a:pt x="4732220" y="2944887"/>
-                  </a:lnTo>
-                  <a:lnTo>
-                    <a:pt x="4808852" y="2952539"/>
-                  </a:lnTo>
-                  <a:lnTo>
-                    <a:pt x="4885485" y="2960082"/>
-                  </a:lnTo>
-                  <a:lnTo>
-                    <a:pt x="4962117" y="2967518"/>
-                  </a:lnTo>
-                  <a:lnTo>
-                    <a:pt x="5038750" y="2974849"/>
-                  </a:lnTo>
-                  <a:lnTo>
-                    <a:pt x="5115382" y="2982075"/>
-                  </a:lnTo>
-                  <a:lnTo>
-                    <a:pt x="5192015" y="2989199"/>
-                  </a:lnTo>
-                  <a:lnTo>
-                    <a:pt x="5268647" y="2996222"/>
-                  </a:lnTo>
-                  <a:lnTo>
-                    <a:pt x="5345280" y="3003144"/>
-                  </a:lnTo>
-                  <a:lnTo>
-                    <a:pt x="5421912" y="3009969"/>
-                  </a:lnTo>
-                  <a:lnTo>
-                    <a:pt x="5498545" y="3016697"/>
-                  </a:lnTo>
-                  <a:lnTo>
-                    <a:pt x="5575178" y="3023329"/>
-                  </a:lnTo>
-                  <a:lnTo>
-                    <a:pt x="5651810" y="3029867"/>
-                  </a:lnTo>
-                  <a:lnTo>
-                    <a:pt x="5728443" y="3036312"/>
-                  </a:lnTo>
-                  <a:lnTo>
-                    <a:pt x="5805075" y="3042666"/>
-                  </a:lnTo>
-                  <a:lnTo>
-                    <a:pt x="5881708" y="3048929"/>
-                  </a:lnTo>
-                  <a:lnTo>
-                    <a:pt x="5958340" y="3055104"/>
-                  </a:lnTo>
-                  <a:lnTo>
-                    <a:pt x="6034973" y="3061190"/>
-                  </a:lnTo>
-                  <a:lnTo>
-                    <a:pt x="6111605" y="3067191"/>
-                  </a:lnTo>
-                  <a:lnTo>
-                    <a:pt x="6188238" y="3073106"/>
-                  </a:lnTo>
-                  <a:lnTo>
-                    <a:pt x="6264871" y="3078937"/>
-                  </a:lnTo>
-                  <a:lnTo>
-                    <a:pt x="6341503" y="3084685"/>
-                  </a:lnTo>
-                  <a:lnTo>
-                    <a:pt x="6418136" y="3090352"/>
                   </a:lnTo>
                 </a:path>
               </a:pathLst>
@@ -3862,625 +4150,312 @@
           </p:nvSpPr>
           <p:spPr>
             <a:xfrm>
-              <a:off x="817517" y="3990743"/>
-              <a:ext cx="7403783" cy="1488881"/>
+              <a:off x="1172049" y="2198088"/>
+              <a:ext cx="7090630" cy="3184412"/>
             </a:xfrm>
             <a:custGeom>
               <a:avLst/>
               <a:pathLst>
-                <a:path w="7403783" h="1488881">
-                  <a:moveTo>
-                    <a:pt x="7403783" y="1488881"/>
-                  </a:moveTo>
-                  <a:lnTo>
-                    <a:pt x="7327150" y="1485275"/>
-                  </a:lnTo>
-                  <a:lnTo>
-                    <a:pt x="7250518" y="1481500"/>
-                  </a:lnTo>
-                  <a:lnTo>
-                    <a:pt x="7173885" y="1477551"/>
-                  </a:lnTo>
-                  <a:lnTo>
-                    <a:pt x="7097253" y="1473417"/>
-                  </a:lnTo>
-                  <a:lnTo>
-                    <a:pt x="7020620" y="1469092"/>
-                  </a:lnTo>
-                  <a:lnTo>
-                    <a:pt x="6943987" y="1464566"/>
-                  </a:lnTo>
-                  <a:lnTo>
-                    <a:pt x="6867355" y="1459829"/>
-                  </a:lnTo>
-                  <a:lnTo>
-                    <a:pt x="6790722" y="1454872"/>
-                  </a:lnTo>
-                  <a:lnTo>
-                    <a:pt x="6714090" y="1449685"/>
-                  </a:lnTo>
-                  <a:lnTo>
-                    <a:pt x="6637457" y="1444257"/>
-                  </a:lnTo>
-                  <a:lnTo>
-                    <a:pt x="6560825" y="1438577"/>
-                  </a:lnTo>
-                  <a:lnTo>
-                    <a:pt x="6484192" y="1432633"/>
-                  </a:lnTo>
-                  <a:lnTo>
-                    <a:pt x="6407560" y="1426413"/>
-                  </a:lnTo>
-                  <a:lnTo>
-                    <a:pt x="6330927" y="1419903"/>
-                  </a:lnTo>
-                  <a:lnTo>
-                    <a:pt x="6254294" y="1413092"/>
-                  </a:lnTo>
-                  <a:lnTo>
-                    <a:pt x="6177662" y="1405963"/>
-                  </a:lnTo>
-                  <a:lnTo>
-                    <a:pt x="6101029" y="1398504"/>
-                  </a:lnTo>
-                  <a:lnTo>
-                    <a:pt x="6024397" y="1390698"/>
-                  </a:lnTo>
-                  <a:lnTo>
-                    <a:pt x="5947764" y="1382529"/>
-                  </a:lnTo>
-                  <a:lnTo>
-                    <a:pt x="5871132" y="1373980"/>
-                  </a:lnTo>
-                  <a:lnTo>
-                    <a:pt x="5794499" y="1365035"/>
-                  </a:lnTo>
-                  <a:lnTo>
-                    <a:pt x="5717867" y="1355674"/>
-                  </a:lnTo>
-                  <a:lnTo>
-                    <a:pt x="5641234" y="1345877"/>
-                  </a:lnTo>
-                  <a:lnTo>
-                    <a:pt x="5564602" y="1335626"/>
-                  </a:lnTo>
-                  <a:lnTo>
-                    <a:pt x="5487969" y="1324898"/>
-                  </a:lnTo>
-                  <a:lnTo>
-                    <a:pt x="5411336" y="1313672"/>
-                  </a:lnTo>
-                  <a:lnTo>
-                    <a:pt x="5334704" y="1301925"/>
-                  </a:lnTo>
-                  <a:lnTo>
-                    <a:pt x="5258071" y="1289631"/>
-                  </a:lnTo>
-                  <a:lnTo>
-                    <a:pt x="5181439" y="1276766"/>
-                  </a:lnTo>
-                  <a:lnTo>
-                    <a:pt x="5104806" y="1263303"/>
-                  </a:lnTo>
-                  <a:lnTo>
-                    <a:pt x="5028174" y="1249215"/>
-                  </a:lnTo>
-                  <a:lnTo>
-                    <a:pt x="4951541" y="1234473"/>
-                  </a:lnTo>
-                  <a:lnTo>
-                    <a:pt x="4874909" y="1219045"/>
-                  </a:lnTo>
-                  <a:lnTo>
-                    <a:pt x="4798276" y="1202900"/>
-                  </a:lnTo>
-                  <a:lnTo>
-                    <a:pt x="4721644" y="1186006"/>
-                  </a:lnTo>
-                  <a:lnTo>
-                    <a:pt x="4645011" y="1168326"/>
-                  </a:lnTo>
-                  <a:lnTo>
-                    <a:pt x="4568378" y="1149825"/>
-                  </a:lnTo>
-                  <a:lnTo>
-                    <a:pt x="4491746" y="1130464"/>
-                  </a:lnTo>
-                  <a:lnTo>
-                    <a:pt x="4415113" y="1110203"/>
-                  </a:lnTo>
-                  <a:lnTo>
-                    <a:pt x="4338481" y="1089002"/>
-                  </a:lnTo>
-                  <a:lnTo>
-                    <a:pt x="4261848" y="1066815"/>
-                  </a:lnTo>
-                  <a:lnTo>
-                    <a:pt x="4185216" y="1043597"/>
-                  </a:lnTo>
-                  <a:lnTo>
-                    <a:pt x="4108583" y="1019300"/>
-                  </a:lnTo>
-                  <a:lnTo>
-                    <a:pt x="4031951" y="993875"/>
-                  </a:lnTo>
-                  <a:lnTo>
-                    <a:pt x="3955318" y="967268"/>
-                  </a:lnTo>
-                  <a:lnTo>
-                    <a:pt x="3878685" y="939424"/>
-                  </a:lnTo>
-                  <a:lnTo>
-                    <a:pt x="3802053" y="910287"/>
-                  </a:lnTo>
-                  <a:lnTo>
-                    <a:pt x="3725420" y="879796"/>
-                  </a:lnTo>
-                  <a:lnTo>
-                    <a:pt x="3648788" y="847889"/>
-                  </a:lnTo>
-                  <a:lnTo>
-                    <a:pt x="3572155" y="814499"/>
-                  </a:lnTo>
-                  <a:lnTo>
-                    <a:pt x="3495523" y="779557"/>
-                  </a:lnTo>
-                  <a:lnTo>
-                    <a:pt x="3418890" y="742992"/>
-                  </a:lnTo>
-                  <a:lnTo>
-                    <a:pt x="3342258" y="726999"/>
-                  </a:lnTo>
-                  <a:lnTo>
-                    <a:pt x="3265625" y="714907"/>
-                  </a:lnTo>
-                  <a:lnTo>
-                    <a:pt x="3188993" y="702640"/>
-                  </a:lnTo>
-                  <a:lnTo>
-                    <a:pt x="3112360" y="690196"/>
-                  </a:lnTo>
-                  <a:lnTo>
-                    <a:pt x="3035727" y="677573"/>
-                  </a:lnTo>
-                  <a:lnTo>
-                    <a:pt x="2959095" y="664768"/>
-                  </a:lnTo>
-                  <a:lnTo>
-                    <a:pt x="2882462" y="651779"/>
-                  </a:lnTo>
-                  <a:lnTo>
-                    <a:pt x="2805830" y="638603"/>
-                  </a:lnTo>
-                  <a:lnTo>
-                    <a:pt x="2729197" y="625236"/>
-                  </a:lnTo>
-                  <a:lnTo>
-                    <a:pt x="2652565" y="611678"/>
-                  </a:lnTo>
-                  <a:lnTo>
-                    <a:pt x="2575932" y="597924"/>
-                  </a:lnTo>
-                  <a:lnTo>
-                    <a:pt x="2499300" y="583972"/>
-                  </a:lnTo>
-                  <a:lnTo>
-                    <a:pt x="2422667" y="569819"/>
-                  </a:lnTo>
-                  <a:lnTo>
-                    <a:pt x="2346034" y="555462"/>
-                  </a:lnTo>
-                  <a:lnTo>
-                    <a:pt x="2269402" y="540898"/>
-                  </a:lnTo>
-                  <a:lnTo>
-                    <a:pt x="2192769" y="526124"/>
-                  </a:lnTo>
-                  <a:lnTo>
-                    <a:pt x="2116137" y="511138"/>
-                  </a:lnTo>
-                  <a:lnTo>
-                    <a:pt x="2039504" y="495936"/>
-                  </a:lnTo>
-                  <a:lnTo>
-                    <a:pt x="1962872" y="480514"/>
-                  </a:lnTo>
-                  <a:lnTo>
-                    <a:pt x="1886239" y="464871"/>
-                  </a:lnTo>
-                  <a:lnTo>
-                    <a:pt x="1809607" y="449002"/>
-                  </a:lnTo>
-                  <a:lnTo>
-                    <a:pt x="1732974" y="432905"/>
-                  </a:lnTo>
-                  <a:lnTo>
-                    <a:pt x="1656342" y="416576"/>
-                  </a:lnTo>
-                  <a:lnTo>
-                    <a:pt x="1579709" y="400012"/>
-                  </a:lnTo>
-                  <a:lnTo>
-                    <a:pt x="1503076" y="383209"/>
-                  </a:lnTo>
-                  <a:lnTo>
-                    <a:pt x="1426444" y="366164"/>
-                  </a:lnTo>
-                  <a:lnTo>
-                    <a:pt x="1349811" y="348873"/>
-                  </a:lnTo>
-                  <a:lnTo>
-                    <a:pt x="1273179" y="331334"/>
-                  </a:lnTo>
-                  <a:lnTo>
-                    <a:pt x="1196546" y="313541"/>
-                  </a:lnTo>
-                  <a:lnTo>
-                    <a:pt x="1119914" y="295493"/>
-                  </a:lnTo>
-                  <a:lnTo>
-                    <a:pt x="1043281" y="277184"/>
-                  </a:lnTo>
-                  <a:lnTo>
-                    <a:pt x="966649" y="258612"/>
-                  </a:lnTo>
-                  <a:lnTo>
-                    <a:pt x="890016" y="239772"/>
-                  </a:lnTo>
-                  <a:lnTo>
-                    <a:pt x="813384" y="220661"/>
-                  </a:lnTo>
-                  <a:lnTo>
-                    <a:pt x="736751" y="201274"/>
-                  </a:lnTo>
-                  <a:lnTo>
-                    <a:pt x="660118" y="181609"/>
-                  </a:lnTo>
-                  <a:lnTo>
-                    <a:pt x="583486" y="161660"/>
-                  </a:lnTo>
-                  <a:lnTo>
-                    <a:pt x="506853" y="141423"/>
-                  </a:lnTo>
-                  <a:lnTo>
-                    <a:pt x="430221" y="120896"/>
-                  </a:lnTo>
-                  <a:lnTo>
-                    <a:pt x="353588" y="100072"/>
-                  </a:lnTo>
-                  <a:lnTo>
-                    <a:pt x="276956" y="78949"/>
-                  </a:lnTo>
-                  <a:lnTo>
-                    <a:pt x="200323" y="57521"/>
-                  </a:lnTo>
-                  <a:lnTo>
-                    <a:pt x="123691" y="35784"/>
-                  </a:lnTo>
-                  <a:lnTo>
-                    <a:pt x="47058" y="13735"/>
-                  </a:lnTo>
-                  <a:lnTo>
-                    <a:pt x="0" y="0"/>
-                  </a:lnTo>
-                </a:path>
-              </a:pathLst>
-            </a:custGeom>
-          </p:spPr>
-          <p:txBody>
-            <a:bodyPr/>
-            <a:lstStyle/>
-            <a:p/>
-          </p:txBody>
-        </p:sp>
-        <p:sp>
-          <p:nvSpPr>
-            <p:cNvPr id="24" name="pl24"/>
-            <p:cNvSpPr/>
-            <p:nvPr/>
-          </p:nvSpPr>
-          <p:spPr>
-            <a:xfrm>
-              <a:off x="817517" y="2428748"/>
-              <a:ext cx="7403783" cy="2953753"/>
-            </a:xfrm>
-            <a:custGeom>
-              <a:avLst/>
-              <a:pathLst>
-                <a:path w="7403783" h="2953753">
+                <a:path w="7090630" h="3184412">
                   <a:moveTo>
                     <a:pt x="0" y="0"/>
                   </a:moveTo>
                   <a:lnTo>
-                    <a:pt x="47058" y="57165"/>
-                  </a:lnTo>
-                  <a:lnTo>
-                    <a:pt x="123691" y="147518"/>
-                  </a:lnTo>
-                  <a:lnTo>
-                    <a:pt x="200323" y="235214"/>
-                  </a:lnTo>
-                  <a:lnTo>
-                    <a:pt x="276956" y="320329"/>
-                  </a:lnTo>
-                  <a:lnTo>
-                    <a:pt x="353588" y="402940"/>
-                  </a:lnTo>
-                  <a:lnTo>
-                    <a:pt x="430221" y="483121"/>
-                  </a:lnTo>
-                  <a:lnTo>
-                    <a:pt x="506853" y="560943"/>
-                  </a:lnTo>
-                  <a:lnTo>
-                    <a:pt x="583486" y="636476"/>
-                  </a:lnTo>
-                  <a:lnTo>
-                    <a:pt x="660118" y="709787"/>
-                  </a:lnTo>
-                  <a:lnTo>
-                    <a:pt x="736751" y="780941"/>
-                  </a:lnTo>
-                  <a:lnTo>
-                    <a:pt x="813384" y="850002"/>
-                  </a:lnTo>
-                  <a:lnTo>
-                    <a:pt x="890016" y="917032"/>
-                  </a:lnTo>
-                  <a:lnTo>
-                    <a:pt x="966649" y="982089"/>
-                  </a:lnTo>
-                  <a:lnTo>
-                    <a:pt x="1043281" y="1045233"/>
-                  </a:lnTo>
-                  <a:lnTo>
-                    <a:pt x="1119914" y="1106519"/>
-                  </a:lnTo>
-                  <a:lnTo>
-                    <a:pt x="1196546" y="1166002"/>
-                  </a:lnTo>
-                  <a:lnTo>
-                    <a:pt x="1273179" y="1223735"/>
-                  </a:lnTo>
-                  <a:lnTo>
-                    <a:pt x="1349811" y="1279770"/>
-                  </a:lnTo>
-                  <a:lnTo>
-                    <a:pt x="1426444" y="1334156"/>
-                  </a:lnTo>
-                  <a:lnTo>
-                    <a:pt x="1503076" y="1386942"/>
-                  </a:lnTo>
-                  <a:lnTo>
-                    <a:pt x="1579709" y="1438176"/>
-                  </a:lnTo>
-                  <a:lnTo>
-                    <a:pt x="1656342" y="1487902"/>
-                  </a:lnTo>
-                  <a:lnTo>
-                    <a:pt x="1732974" y="1536166"/>
-                  </a:lnTo>
-                  <a:lnTo>
-                    <a:pt x="1809607" y="1583009"/>
-                  </a:lnTo>
-                  <a:lnTo>
-                    <a:pt x="1886239" y="1628475"/>
-                  </a:lnTo>
-                  <a:lnTo>
-                    <a:pt x="1962872" y="1672603"/>
-                  </a:lnTo>
-                  <a:lnTo>
-                    <a:pt x="2039504" y="1715433"/>
-                  </a:lnTo>
-                  <a:lnTo>
-                    <a:pt x="2116137" y="1757003"/>
-                  </a:lnTo>
-                  <a:lnTo>
-                    <a:pt x="2192769" y="1797350"/>
-                  </a:lnTo>
-                  <a:lnTo>
-                    <a:pt x="2269402" y="1836510"/>
-                  </a:lnTo>
-                  <a:lnTo>
-                    <a:pt x="2346034" y="1874518"/>
-                  </a:lnTo>
-                  <a:lnTo>
-                    <a:pt x="2422667" y="1911408"/>
-                  </a:lnTo>
-                  <a:lnTo>
-                    <a:pt x="2499300" y="1947212"/>
-                  </a:lnTo>
-                  <a:lnTo>
-                    <a:pt x="2575932" y="1981964"/>
-                  </a:lnTo>
-                  <a:lnTo>
-                    <a:pt x="2652565" y="2015693"/>
-                  </a:lnTo>
-                  <a:lnTo>
-                    <a:pt x="2729197" y="2048430"/>
-                  </a:lnTo>
-                  <a:lnTo>
-                    <a:pt x="2805830" y="2080203"/>
-                  </a:lnTo>
-                  <a:lnTo>
-                    <a:pt x="2882462" y="2111042"/>
-                  </a:lnTo>
-                  <a:lnTo>
-                    <a:pt x="2959095" y="2140974"/>
-                  </a:lnTo>
-                  <a:lnTo>
-                    <a:pt x="3035727" y="2170025"/>
-                  </a:lnTo>
-                  <a:lnTo>
-                    <a:pt x="3112360" y="2198222"/>
-                  </a:lnTo>
-                  <a:lnTo>
-                    <a:pt x="3188993" y="2225589"/>
-                  </a:lnTo>
-                  <a:lnTo>
-                    <a:pt x="3265625" y="2252151"/>
-                  </a:lnTo>
-                  <a:lnTo>
-                    <a:pt x="3342258" y="2277932"/>
-                  </a:lnTo>
-                  <a:lnTo>
-                    <a:pt x="3418890" y="2302954"/>
-                  </a:lnTo>
-                  <a:lnTo>
-                    <a:pt x="3495523" y="2327240"/>
-                  </a:lnTo>
-                  <a:lnTo>
-                    <a:pt x="3572155" y="2350812"/>
-                  </a:lnTo>
-                  <a:lnTo>
-                    <a:pt x="3648788" y="2373690"/>
-                  </a:lnTo>
-                  <a:lnTo>
-                    <a:pt x="3725420" y="2395895"/>
-                  </a:lnTo>
-                  <a:lnTo>
-                    <a:pt x="3802053" y="2417447"/>
-                  </a:lnTo>
-                  <a:lnTo>
-                    <a:pt x="3878685" y="2438365"/>
-                  </a:lnTo>
-                  <a:lnTo>
-                    <a:pt x="3955318" y="2458668"/>
-                  </a:lnTo>
-                  <a:lnTo>
-                    <a:pt x="4031951" y="2478373"/>
-                  </a:lnTo>
-                  <a:lnTo>
-                    <a:pt x="4108583" y="2497498"/>
-                  </a:lnTo>
-                  <a:lnTo>
-                    <a:pt x="4185216" y="2516061"/>
-                  </a:lnTo>
-                  <a:lnTo>
-                    <a:pt x="4261848" y="2534078"/>
-                  </a:lnTo>
-                  <a:lnTo>
-                    <a:pt x="4338481" y="2551565"/>
-                  </a:lnTo>
-                  <a:lnTo>
-                    <a:pt x="4415113" y="2568538"/>
-                  </a:lnTo>
-                  <a:lnTo>
-                    <a:pt x="4491746" y="2585011"/>
-                  </a:lnTo>
-                  <a:lnTo>
-                    <a:pt x="4568378" y="2600999"/>
-                  </a:lnTo>
-                  <a:lnTo>
-                    <a:pt x="4645011" y="2616517"/>
-                  </a:lnTo>
-                  <a:lnTo>
-                    <a:pt x="4721644" y="2631579"/>
-                  </a:lnTo>
-                  <a:lnTo>
-                    <a:pt x="4798276" y="2646198"/>
-                  </a:lnTo>
-                  <a:lnTo>
-                    <a:pt x="4874909" y="2660386"/>
-                  </a:lnTo>
-                  <a:lnTo>
-                    <a:pt x="4951541" y="2674157"/>
-                  </a:lnTo>
-                  <a:lnTo>
-                    <a:pt x="5028174" y="2687523"/>
-                  </a:lnTo>
-                  <a:lnTo>
-                    <a:pt x="5104806" y="2700496"/>
-                  </a:lnTo>
-                  <a:lnTo>
-                    <a:pt x="5181439" y="2713087"/>
-                  </a:lnTo>
-                  <a:lnTo>
-                    <a:pt x="5258071" y="2725308"/>
-                  </a:lnTo>
-                  <a:lnTo>
-                    <a:pt x="5334704" y="2737169"/>
-                  </a:lnTo>
-                  <a:lnTo>
-                    <a:pt x="5411336" y="2748681"/>
-                  </a:lnTo>
-                  <a:lnTo>
-                    <a:pt x="5487969" y="2759855"/>
-                  </a:lnTo>
-                  <a:lnTo>
-                    <a:pt x="5564602" y="2770700"/>
-                  </a:lnTo>
-                  <a:lnTo>
-                    <a:pt x="5641234" y="2781226"/>
-                  </a:lnTo>
-                  <a:lnTo>
-                    <a:pt x="5717867" y="2791442"/>
-                  </a:lnTo>
-                  <a:lnTo>
-                    <a:pt x="5794499" y="2801358"/>
-                  </a:lnTo>
-                  <a:lnTo>
-                    <a:pt x="5871132" y="2810981"/>
-                  </a:lnTo>
-                  <a:lnTo>
-                    <a:pt x="5947764" y="2820322"/>
-                  </a:lnTo>
-                  <a:lnTo>
-                    <a:pt x="6024397" y="2829388"/>
-                  </a:lnTo>
-                  <a:lnTo>
-                    <a:pt x="6101029" y="2838188"/>
-                  </a:lnTo>
-                  <a:lnTo>
-                    <a:pt x="6177662" y="2846728"/>
-                  </a:lnTo>
-                  <a:lnTo>
-                    <a:pt x="6254294" y="2855017"/>
-                  </a:lnTo>
-                  <a:lnTo>
-                    <a:pt x="6330927" y="2863063"/>
-                  </a:lnTo>
-                  <a:lnTo>
-                    <a:pt x="6407560" y="2870872"/>
-                  </a:lnTo>
-                  <a:lnTo>
-                    <a:pt x="6484192" y="2878451"/>
-                  </a:lnTo>
-                  <a:lnTo>
-                    <a:pt x="6560825" y="2885807"/>
-                  </a:lnTo>
-                  <a:lnTo>
-                    <a:pt x="6637457" y="2892946"/>
-                  </a:lnTo>
-                  <a:lnTo>
-                    <a:pt x="6714090" y="2899876"/>
-                  </a:lnTo>
-                  <a:lnTo>
-                    <a:pt x="6790722" y="2906602"/>
-                  </a:lnTo>
-                  <a:lnTo>
-                    <a:pt x="6867355" y="2913129"/>
-                  </a:lnTo>
-                  <a:lnTo>
-                    <a:pt x="6943987" y="2919465"/>
-                  </a:lnTo>
-                  <a:lnTo>
-                    <a:pt x="7020620" y="2925615"/>
-                  </a:lnTo>
-                  <a:lnTo>
-                    <a:pt x="7097253" y="2931583"/>
-                  </a:lnTo>
-                  <a:lnTo>
-                    <a:pt x="7173885" y="2937376"/>
-                  </a:lnTo>
-                  <a:lnTo>
-                    <a:pt x="7250518" y="2942999"/>
-                  </a:lnTo>
-                  <a:lnTo>
-                    <a:pt x="7327150" y="2948456"/>
-                  </a:lnTo>
-                  <a:lnTo>
-                    <a:pt x="7403783" y="2953753"/>
+                    <a:pt x="71622" y="98820"/>
+                  </a:lnTo>
+                  <a:lnTo>
+                    <a:pt x="143245" y="194733"/>
+                  </a:lnTo>
+                  <a:lnTo>
+                    <a:pt x="214867" y="287825"/>
+                  </a:lnTo>
+                  <a:lnTo>
+                    <a:pt x="286490" y="378178"/>
+                  </a:lnTo>
+                  <a:lnTo>
+                    <a:pt x="358112" y="465873"/>
+                  </a:lnTo>
+                  <a:lnTo>
+                    <a:pt x="429735" y="550989"/>
+                  </a:lnTo>
+                  <a:lnTo>
+                    <a:pt x="501357" y="633600"/>
+                  </a:lnTo>
+                  <a:lnTo>
+                    <a:pt x="572980" y="713781"/>
+                  </a:lnTo>
+                  <a:lnTo>
+                    <a:pt x="644602" y="791603"/>
+                  </a:lnTo>
+                  <a:lnTo>
+                    <a:pt x="716225" y="867136"/>
+                  </a:lnTo>
+                  <a:lnTo>
+                    <a:pt x="787847" y="940447"/>
+                  </a:lnTo>
+                  <a:lnTo>
+                    <a:pt x="859470" y="1011601"/>
+                  </a:lnTo>
+                  <a:lnTo>
+                    <a:pt x="931092" y="1080662"/>
+                  </a:lnTo>
+                  <a:lnTo>
+                    <a:pt x="1002715" y="1147691"/>
+                  </a:lnTo>
+                  <a:lnTo>
+                    <a:pt x="1074337" y="1212749"/>
+                  </a:lnTo>
+                  <a:lnTo>
+                    <a:pt x="1145960" y="1275892"/>
+                  </a:lnTo>
+                  <a:lnTo>
+                    <a:pt x="1217582" y="1337178"/>
+                  </a:lnTo>
+                  <a:lnTo>
+                    <a:pt x="1289205" y="1396661"/>
+                  </a:lnTo>
+                  <a:lnTo>
+                    <a:pt x="1360827" y="1454395"/>
+                  </a:lnTo>
+                  <a:lnTo>
+                    <a:pt x="1432450" y="1510429"/>
+                  </a:lnTo>
+                  <a:lnTo>
+                    <a:pt x="1504073" y="1564816"/>
+                  </a:lnTo>
+                  <a:lnTo>
+                    <a:pt x="1575695" y="1617602"/>
+                  </a:lnTo>
+                  <a:lnTo>
+                    <a:pt x="1647318" y="1668836"/>
+                  </a:lnTo>
+                  <a:lnTo>
+                    <a:pt x="1718940" y="1718562"/>
+                  </a:lnTo>
+                  <a:lnTo>
+                    <a:pt x="1790563" y="1766825"/>
+                  </a:lnTo>
+                  <a:lnTo>
+                    <a:pt x="1862185" y="1813669"/>
+                  </a:lnTo>
+                  <a:lnTo>
+                    <a:pt x="1933808" y="1859135"/>
+                  </a:lnTo>
+                  <a:lnTo>
+                    <a:pt x="2005430" y="1903263"/>
+                  </a:lnTo>
+                  <a:lnTo>
+                    <a:pt x="2077053" y="1946093"/>
+                  </a:lnTo>
+                  <a:lnTo>
+                    <a:pt x="2148675" y="1987662"/>
+                  </a:lnTo>
+                  <a:lnTo>
+                    <a:pt x="2220298" y="2028009"/>
+                  </a:lnTo>
+                  <a:lnTo>
+                    <a:pt x="2291920" y="2067169"/>
+                  </a:lnTo>
+                  <a:lnTo>
+                    <a:pt x="2363543" y="2105178"/>
+                  </a:lnTo>
+                  <a:lnTo>
+                    <a:pt x="2435165" y="2142067"/>
+                  </a:lnTo>
+                  <a:lnTo>
+                    <a:pt x="2506788" y="2177872"/>
+                  </a:lnTo>
+                  <a:lnTo>
+                    <a:pt x="2578410" y="2212624"/>
+                  </a:lnTo>
+                  <a:lnTo>
+                    <a:pt x="2650033" y="2246353"/>
+                  </a:lnTo>
+                  <a:lnTo>
+                    <a:pt x="2721655" y="2279089"/>
+                  </a:lnTo>
+                  <a:lnTo>
+                    <a:pt x="2793278" y="2310863"/>
+                  </a:lnTo>
+                  <a:lnTo>
+                    <a:pt x="2864901" y="2341702"/>
+                  </a:lnTo>
+                  <a:lnTo>
+                    <a:pt x="2936523" y="2371634"/>
+                  </a:lnTo>
+                  <a:lnTo>
+                    <a:pt x="3008146" y="2400685"/>
+                  </a:lnTo>
+                  <a:lnTo>
+                    <a:pt x="3079768" y="2428882"/>
+                  </a:lnTo>
+                  <a:lnTo>
+                    <a:pt x="3151391" y="2456249"/>
+                  </a:lnTo>
+                  <a:lnTo>
+                    <a:pt x="3223013" y="2482811"/>
+                  </a:lnTo>
+                  <a:lnTo>
+                    <a:pt x="3294636" y="2508592"/>
+                  </a:lnTo>
+                  <a:lnTo>
+                    <a:pt x="3366258" y="2533614"/>
+                  </a:lnTo>
+                  <a:lnTo>
+                    <a:pt x="3437881" y="2557900"/>
+                  </a:lnTo>
+                  <a:lnTo>
+                    <a:pt x="3509503" y="2581472"/>
+                  </a:lnTo>
+                  <a:lnTo>
+                    <a:pt x="3581126" y="2604350"/>
+                  </a:lnTo>
+                  <a:lnTo>
+                    <a:pt x="3652748" y="2626555"/>
+                  </a:lnTo>
+                  <a:lnTo>
+                    <a:pt x="3724371" y="2648107"/>
+                  </a:lnTo>
+                  <a:lnTo>
+                    <a:pt x="3795993" y="2669025"/>
+                  </a:lnTo>
+                  <a:lnTo>
+                    <a:pt x="3867616" y="2689327"/>
+                  </a:lnTo>
+                  <a:lnTo>
+                    <a:pt x="3939238" y="2709033"/>
+                  </a:lnTo>
+                  <a:lnTo>
+                    <a:pt x="4010861" y="2728158"/>
+                  </a:lnTo>
+                  <a:lnTo>
+                    <a:pt x="4082483" y="2746721"/>
+                  </a:lnTo>
+                  <a:lnTo>
+                    <a:pt x="4154106" y="2764738"/>
+                  </a:lnTo>
+                  <a:lnTo>
+                    <a:pt x="4225729" y="2782225"/>
+                  </a:lnTo>
+                  <a:lnTo>
+                    <a:pt x="4297351" y="2799197"/>
+                  </a:lnTo>
+                  <a:lnTo>
+                    <a:pt x="4368974" y="2815670"/>
+                  </a:lnTo>
+                  <a:lnTo>
+                    <a:pt x="4440596" y="2831659"/>
+                  </a:lnTo>
+                  <a:lnTo>
+                    <a:pt x="4512219" y="2847177"/>
+                  </a:lnTo>
+                  <a:lnTo>
+                    <a:pt x="4583841" y="2862239"/>
+                  </a:lnTo>
+                  <a:lnTo>
+                    <a:pt x="4655464" y="2876857"/>
+                  </a:lnTo>
+                  <a:lnTo>
+                    <a:pt x="4727086" y="2891046"/>
+                  </a:lnTo>
+                  <a:lnTo>
+                    <a:pt x="4798709" y="2904817"/>
+                  </a:lnTo>
+                  <a:lnTo>
+                    <a:pt x="4870331" y="2918183"/>
+                  </a:lnTo>
+                  <a:lnTo>
+                    <a:pt x="4941954" y="2931156"/>
+                  </a:lnTo>
+                  <a:lnTo>
+                    <a:pt x="5013576" y="2943747"/>
+                  </a:lnTo>
+                  <a:lnTo>
+                    <a:pt x="5085199" y="2955967"/>
+                  </a:lnTo>
+                  <a:lnTo>
+                    <a:pt x="5156821" y="2967829"/>
+                  </a:lnTo>
+                  <a:lnTo>
+                    <a:pt x="5228444" y="2979341"/>
+                  </a:lnTo>
+                  <a:lnTo>
+                    <a:pt x="5300066" y="2990515"/>
+                  </a:lnTo>
+                  <a:lnTo>
+                    <a:pt x="5371689" y="3001359"/>
+                  </a:lnTo>
+                  <a:lnTo>
+                    <a:pt x="5443311" y="3011885"/>
+                  </a:lnTo>
+                  <a:lnTo>
+                    <a:pt x="5514934" y="3022102"/>
+                  </a:lnTo>
+                  <a:lnTo>
+                    <a:pt x="5586557" y="3032017"/>
+                  </a:lnTo>
+                  <a:lnTo>
+                    <a:pt x="5658179" y="3041641"/>
+                  </a:lnTo>
+                  <a:lnTo>
+                    <a:pt x="5729802" y="3050982"/>
+                  </a:lnTo>
+                  <a:lnTo>
+                    <a:pt x="5801424" y="3060048"/>
+                  </a:lnTo>
+                  <a:lnTo>
+                    <a:pt x="5873047" y="3068847"/>
+                  </a:lnTo>
+                  <a:lnTo>
+                    <a:pt x="5944669" y="3077388"/>
+                  </a:lnTo>
+                  <a:lnTo>
+                    <a:pt x="6016292" y="3085677"/>
+                  </a:lnTo>
+                  <a:lnTo>
+                    <a:pt x="6087914" y="3093723"/>
+                  </a:lnTo>
+                  <a:lnTo>
+                    <a:pt x="6159537" y="3101531"/>
+                  </a:lnTo>
+                  <a:lnTo>
+                    <a:pt x="6231159" y="3109110"/>
+                  </a:lnTo>
+                  <a:lnTo>
+                    <a:pt x="6302782" y="3116466"/>
+                  </a:lnTo>
+                  <a:lnTo>
+                    <a:pt x="6374404" y="3123606"/>
+                  </a:lnTo>
+                  <a:lnTo>
+                    <a:pt x="6446027" y="3130536"/>
+                  </a:lnTo>
+                  <a:lnTo>
+                    <a:pt x="6517649" y="3137261"/>
+                  </a:lnTo>
+                  <a:lnTo>
+                    <a:pt x="6589272" y="3143789"/>
+                  </a:lnTo>
+                  <a:lnTo>
+                    <a:pt x="6660894" y="3150125"/>
+                  </a:lnTo>
+                  <a:lnTo>
+                    <a:pt x="6732517" y="3156274"/>
+                  </a:lnTo>
+                  <a:lnTo>
+                    <a:pt x="6804139" y="3162243"/>
+                  </a:lnTo>
+                  <a:lnTo>
+                    <a:pt x="6875762" y="3168036"/>
+                  </a:lnTo>
+                  <a:lnTo>
+                    <a:pt x="6947385" y="3173659"/>
+                  </a:lnTo>
+                  <a:lnTo>
+                    <a:pt x="7019007" y="3179116"/>
+                  </a:lnTo>
+                  <a:lnTo>
+                    <a:pt x="7090630" y="3184412"/>
                   </a:lnTo>
                 </a:path>
               </a:pathLst>
@@ -4503,7 +4478,7 @@
         </p:sp>
         <p:sp>
           <p:nvSpPr>
-            <p:cNvPr id="25" name="pl25"/>
+            <p:cNvPr id="24" name="pl24"/>
             <p:cNvSpPr/>
             <p:nvPr/>
           </p:nvSpPr>
@@ -4546,13 +4521,13 @@
         </p:sp>
         <p:sp>
           <p:nvSpPr>
-            <p:cNvPr id="26" name="pl26"/>
+            <p:cNvPr id="25" name="pl25"/>
             <p:cNvSpPr/>
             <p:nvPr/>
           </p:nvSpPr>
           <p:spPr>
             <a:xfrm>
-              <a:off x="4224261" y="2073503"/>
+              <a:off x="4526955" y="2073503"/>
               <a:ext cx="0" cy="3649639"/>
             </a:xfrm>
             <a:custGeom>
@@ -4589,7 +4564,7 @@
         </p:sp>
         <p:sp>
           <p:nvSpPr>
-            <p:cNvPr id="27" name="tx27"/>
+            <p:cNvPr id="26" name="tx26"/>
             <p:cNvSpPr/>
             <p:nvPr/>
           </p:nvSpPr>
@@ -4635,7 +4610,7 @@
         </p:sp>
         <p:sp>
           <p:nvSpPr>
-            <p:cNvPr id="28" name="tx28"/>
+            <p:cNvPr id="27" name="tx27"/>
             <p:cNvSpPr/>
             <p:nvPr/>
           </p:nvSpPr>
@@ -4681,7 +4656,7 @@
         </p:sp>
         <p:sp>
           <p:nvSpPr>
-            <p:cNvPr id="29" name="tx29"/>
+            <p:cNvPr id="28" name="tx28"/>
             <p:cNvSpPr/>
             <p:nvPr/>
           </p:nvSpPr>
@@ -4727,7 +4702,7 @@
         </p:sp>
         <p:sp>
           <p:nvSpPr>
-            <p:cNvPr id="30" name="tx30"/>
+            <p:cNvPr id="29" name="tx29"/>
             <p:cNvSpPr/>
             <p:nvPr/>
           </p:nvSpPr>
@@ -4773,7 +4748,7 @@
         </p:sp>
         <p:sp>
           <p:nvSpPr>
-            <p:cNvPr id="31" name="tx31"/>
+            <p:cNvPr id="30" name="tx30"/>
             <p:cNvSpPr/>
             <p:nvPr/>
           </p:nvSpPr>
@@ -4819,14 +4794,14 @@
         </p:sp>
         <p:sp>
           <p:nvSpPr>
-            <p:cNvPr id="32" name="tx32"/>
+            <p:cNvPr id="31" name="tx31"/>
             <p:cNvSpPr/>
             <p:nvPr/>
           </p:nvSpPr>
           <p:spPr>
             <a:xfrm>
-              <a:off x="2423864" y="5785772"/>
-              <a:ext cx="155356" cy="80101"/>
+              <a:off x="2421884" y="5785772"/>
+              <a:ext cx="161574" cy="80101"/>
             </a:xfrm>
             <a:prstGeom prst="rect">
               <a:avLst/>
@@ -4858,21 +4833,21 @@
                   <a:latin typeface="Helvetica"/>
                   <a:cs typeface="Helvetica"/>
                 </a:rPr>
-                <a:t>0.8</a:t>
+                <a:t>-25</a:t>
               </a:r>
             </a:p>
           </p:txBody>
         </p:sp>
         <p:sp>
           <p:nvSpPr>
-            <p:cNvPr id="33" name="tx33"/>
+            <p:cNvPr id="32" name="tx32"/>
             <p:cNvSpPr/>
             <p:nvPr/>
           </p:nvSpPr>
           <p:spPr>
             <a:xfrm>
-              <a:off x="4196521" y="5785772"/>
-              <a:ext cx="155356" cy="80101"/>
+              <a:off x="4542539" y="5785772"/>
+              <a:ext cx="62179" cy="80101"/>
             </a:xfrm>
             <a:prstGeom prst="rect">
               <a:avLst/>
@@ -4904,21 +4879,21 @@
                   <a:latin typeface="Helvetica"/>
                   <a:cs typeface="Helvetica"/>
                 </a:rPr>
-                <a:t>1.0</a:t>
+                <a:t>0</a:t>
               </a:r>
             </a:p>
           </p:txBody>
         </p:sp>
         <p:sp>
           <p:nvSpPr>
-            <p:cNvPr id="34" name="tx34"/>
+            <p:cNvPr id="33" name="tx33"/>
             <p:cNvSpPr/>
             <p:nvPr/>
           </p:nvSpPr>
           <p:spPr>
             <a:xfrm>
-              <a:off x="5969179" y="5785772"/>
-              <a:ext cx="155356" cy="80101"/>
+              <a:off x="6582407" y="5785772"/>
+              <a:ext cx="124358" cy="80101"/>
             </a:xfrm>
             <a:prstGeom prst="rect">
               <a:avLst/>
@@ -4950,67 +4925,21 @@
                   <a:latin typeface="Helvetica"/>
                   <a:cs typeface="Helvetica"/>
                 </a:rPr>
-                <a:t>1.2</a:t>
+                <a:t>25</a:t>
               </a:r>
             </a:p>
           </p:txBody>
         </p:sp>
         <p:sp>
           <p:nvSpPr>
-            <p:cNvPr id="35" name="tx35"/>
+            <p:cNvPr id="34" name="tx34"/>
             <p:cNvSpPr/>
             <p:nvPr/>
           </p:nvSpPr>
           <p:spPr>
             <a:xfrm>
-              <a:off x="7741836" y="5785772"/>
-              <a:ext cx="155356" cy="80101"/>
-            </a:xfrm>
-            <a:prstGeom prst="rect">
-              <a:avLst/>
-            </a:prstGeom>
-            <a:noFill/>
-          </p:spPr>
-          <p:txBody>
-            <a:bodyPr lIns="0" rIns="0" tIns="0" bIns="0" anchorCtr="1" anchor="ctr" wrap="none"/>
-            <a:lstStyle/>
-            <a:p>
-              <a:pPr algn="l" marL="0" marR="0" indent="0">
-                <a:lnSpc>
-                  <a:spcPts val="880"/>
-                </a:lnSpc>
-                <a:spcBef>
-                  <a:spcPts val="0"/>
-                </a:spcBef>
-                <a:spcAft>
-                  <a:spcPts val="0"/>
-                </a:spcAft>
-              </a:pPr>
-              <a:r>
-                <a:rPr sz="880">
-                  <a:solidFill>
-                    <a:srgbClr val="4D4D4D">
-                      <a:alpha val="100000"/>
-                    </a:srgbClr>
-                  </a:solidFill>
-                  <a:latin typeface="Helvetica"/>
-                  <a:cs typeface="Helvetica"/>
-                </a:rPr>
-                <a:t>1.4</a:t>
-              </a:r>
-            </a:p>
-          </p:txBody>
-        </p:sp>
-        <p:sp>
-          <p:nvSpPr>
-            <p:cNvPr id="36" name="tx36"/>
-            <p:cNvSpPr/>
-            <p:nvPr/>
-          </p:nvSpPr>
-          <p:spPr>
-            <a:xfrm>
-              <a:off x="3879271" y="5925448"/>
-              <a:ext cx="1676186" cy="100218"/>
+              <a:off x="2928340" y="5925448"/>
+              <a:ext cx="3578047" cy="100218"/>
             </a:xfrm>
             <a:prstGeom prst="rect">
               <a:avLst/>
@@ -5042,14 +4971,14 @@
                   <a:latin typeface="Helvetica"/>
                   <a:cs typeface="Helvetica"/>
                 </a:rPr>
-                <a:t>CKD-EPI Cr-Cys / CG ratio</a:t>
+                <a:t>eGFR difference (%): 100 × (CKD-EPI Cr-Cys − CG) / CG</a:t>
               </a:r>
             </a:p>
           </p:txBody>
         </p:sp>
         <p:sp>
           <p:nvSpPr>
-            <p:cNvPr id="37" name="tx37"/>
+            <p:cNvPr id="35" name="tx35"/>
             <p:cNvSpPr/>
             <p:nvPr/>
           </p:nvSpPr>
@@ -5095,14 +5024,14 @@
         </p:sp>
         <p:sp>
           <p:nvSpPr>
-            <p:cNvPr id="38" name="tx38"/>
+            <p:cNvPr id="36" name="tx36"/>
             <p:cNvSpPr/>
             <p:nvPr/>
           </p:nvSpPr>
           <p:spPr>
             <a:xfrm>
               <a:off x="817517" y="1896563"/>
-              <a:ext cx="6236116" cy="82021"/>
+              <a:ext cx="6388364" cy="82021"/>
             </a:xfrm>
             <a:prstGeom prst="rect">
               <a:avLst/>
@@ -5134,14 +5063,14 @@
                   <a:latin typeface="Helvetica"/>
                   <a:cs typeface="Helvetica"/>
                 </a:rPr>
-                <a:t>subHR per 0.1 ratio decline: 1.41 (1.18-1.69), p = &lt;0.001  |  per IQR decline (Δ = 0.30): 2.81 (1.64-4.81)  |  IQR: [0.85, 1.15]</a:t>
+                <a:t>subHR per 10 % decline: 1.41 (1.18-1.69), p = &lt;0.001  |  per IQR decline (Δ = 29.9 %): 2.81 (1.64-4.81)  |  IQR: [-15.0, 14.9] %</a:t>
               </a:r>
             </a:p>
           </p:txBody>
         </p:sp>
         <p:sp>
           <p:nvSpPr>
-            <p:cNvPr id="39" name="tx39"/>
+            <p:cNvPr id="37" name="tx37"/>
             <p:cNvSpPr/>
             <p:nvPr/>
           </p:nvSpPr>

--- a/docs/pptx/carbo/jx-carbo-linsubhr-ratio-hosp7.pptx
+++ b/docs/pptx/carbo/jx-carbo-linsubhr-ratio-hosp7.pptx
@@ -2265,34 +2265,26 @@
         </p:sp>
         <p:sp>
           <p:nvSpPr>
-            <p:cNvPr id="4" name="pl4"/>
+            <p:cNvPr id="4" name="rc4"/>
             <p:cNvSpPr/>
             <p:nvPr/>
           </p:nvSpPr>
           <p:spPr>
             <a:xfrm>
-              <a:off x="817517" y="5142518"/>
-              <a:ext cx="7799693" cy="0"/>
+              <a:off x="457200" y="1600200"/>
+              <a:ext cx="8229600" cy="4525962"/>
             </a:xfrm>
-            <a:custGeom>
+            <a:prstGeom prst="rect">
               <a:avLst/>
-              <a:pathLst>
-                <a:path w="7799693" h="0">
-                  <a:moveTo>
-                    <a:pt x="0" y="0"/>
-                  </a:moveTo>
-                  <a:lnTo>
-                    <a:pt x="7799693" y="0"/>
-                  </a:lnTo>
-                  <a:lnTo>
-                    <a:pt x="7799693" y="0"/>
-                  </a:lnTo>
-                </a:path>
-              </a:pathLst>
-            </a:custGeom>
-            <a:ln w="6775" cap="flat">
+            </a:prstGeom>
+            <a:solidFill>
+              <a:srgbClr val="FFFFFF">
+                <a:alpha val="100000"/>
+              </a:srgbClr>
+            </a:solidFill>
+            <a:ln w="13550" cap="rnd">
               <a:solidFill>
-                <a:srgbClr val="EBEBEB">
+                <a:srgbClr val="FFFFFF">
                   <a:alpha val="100000"/>
                 </a:srgbClr>
               </a:solidFill>
@@ -2314,21 +2306,21 @@
           </p:nvSpPr>
           <p:spPr>
             <a:xfrm>
-              <a:off x="817517" y="4313054"/>
-              <a:ext cx="7799693" cy="0"/>
+              <a:off x="887106" y="3250627"/>
+              <a:ext cx="7660515" cy="0"/>
             </a:xfrm>
             <a:custGeom>
               <a:avLst/>
               <a:pathLst>
-                <a:path w="7799693" h="0">
+                <a:path w="7660515" h="0">
                   <a:moveTo>
                     <a:pt x="0" y="0"/>
                   </a:moveTo>
                   <a:lnTo>
-                    <a:pt x="7799693" y="0"/>
-                  </a:lnTo>
-                  <a:lnTo>
-                    <a:pt x="7799693" y="0"/>
+                    <a:pt x="7660515" y="0"/>
+                  </a:lnTo>
+                  <a:lnTo>
+                    <a:pt x="7660515" y="0"/>
                   </a:lnTo>
                 </a:path>
               </a:pathLst>
@@ -2357,21 +2349,21 @@
           </p:nvSpPr>
           <p:spPr>
             <a:xfrm>
-              <a:off x="817517" y="3483591"/>
-              <a:ext cx="7799693" cy="0"/>
+              <a:off x="887106" y="2951293"/>
+              <a:ext cx="7660515" cy="0"/>
             </a:xfrm>
             <a:custGeom>
               <a:avLst/>
               <a:pathLst>
-                <a:path w="7799693" h="0">
+                <a:path w="7660515" h="0">
                   <a:moveTo>
                     <a:pt x="0" y="0"/>
                   </a:moveTo>
                   <a:lnTo>
-                    <a:pt x="7799693" y="0"/>
-                  </a:lnTo>
-                  <a:lnTo>
-                    <a:pt x="7799693" y="0"/>
+                    <a:pt x="7660515" y="0"/>
+                  </a:lnTo>
+                  <a:lnTo>
+                    <a:pt x="7660515" y="0"/>
                   </a:lnTo>
                 </a:path>
               </a:pathLst>
@@ -2400,21 +2392,21 @@
           </p:nvSpPr>
           <p:spPr>
             <a:xfrm>
-              <a:off x="817517" y="2654127"/>
-              <a:ext cx="7799693" cy="0"/>
+              <a:off x="887106" y="2651959"/>
+              <a:ext cx="7660515" cy="0"/>
             </a:xfrm>
             <a:custGeom>
               <a:avLst/>
               <a:pathLst>
-                <a:path w="7799693" h="0">
+                <a:path w="7660515" h="0">
                   <a:moveTo>
                     <a:pt x="0" y="0"/>
                   </a:moveTo>
                   <a:lnTo>
-                    <a:pt x="7799693" y="0"/>
-                  </a:lnTo>
-                  <a:lnTo>
-                    <a:pt x="7799693" y="0"/>
+                    <a:pt x="7660515" y="0"/>
+                  </a:lnTo>
+                  <a:lnTo>
+                    <a:pt x="7660515" y="0"/>
                   </a:lnTo>
                 </a:path>
               </a:pathLst>
@@ -2443,21 +2435,21 @@
           </p:nvSpPr>
           <p:spPr>
             <a:xfrm>
-              <a:off x="1467192" y="2073503"/>
-              <a:ext cx="0" cy="3649639"/>
+              <a:off x="887106" y="2352625"/>
+              <a:ext cx="7660515" cy="0"/>
             </a:xfrm>
             <a:custGeom>
               <a:avLst/>
               <a:pathLst>
-                <a:path w="0" h="3649639">
+                <a:path w="7660515" h="0">
                   <a:moveTo>
-                    <a:pt x="0" y="3649639"/>
+                    <a:pt x="0" y="0"/>
                   </a:moveTo>
                   <a:lnTo>
-                    <a:pt x="0" y="0"/>
-                  </a:lnTo>
-                  <a:lnTo>
-                    <a:pt x="0" y="0"/>
+                    <a:pt x="7660515" y="0"/>
+                  </a:lnTo>
+                  <a:lnTo>
+                    <a:pt x="7660515" y="0"/>
                   </a:lnTo>
                 </a:path>
               </a:pathLst>
@@ -2486,15 +2478,15 @@
           </p:nvSpPr>
           <p:spPr>
             <a:xfrm>
-              <a:off x="3538150" y="2073503"/>
-              <a:ext cx="0" cy="3649639"/>
+              <a:off x="1525188" y="2143092"/>
+              <a:ext cx="0" cy="1317069"/>
             </a:xfrm>
             <a:custGeom>
               <a:avLst/>
               <a:pathLst>
-                <a:path w="0" h="3649639">
+                <a:path w="0" h="1317069">
                   <a:moveTo>
-                    <a:pt x="0" y="3649639"/>
+                    <a:pt x="0" y="1317069"/>
                   </a:moveTo>
                   <a:lnTo>
                     <a:pt x="0" y="0"/>
@@ -2529,15 +2521,15 @@
           </p:nvSpPr>
           <p:spPr>
             <a:xfrm>
-              <a:off x="5609107" y="2073503"/>
-              <a:ext cx="0" cy="3649639"/>
+              <a:off x="3559192" y="2143092"/>
+              <a:ext cx="0" cy="1317069"/>
             </a:xfrm>
             <a:custGeom>
               <a:avLst/>
               <a:pathLst>
-                <a:path w="0" h="3649639">
+                <a:path w="0" h="1317069">
                   <a:moveTo>
-                    <a:pt x="0" y="3649639"/>
+                    <a:pt x="0" y="1317069"/>
                   </a:moveTo>
                   <a:lnTo>
                     <a:pt x="0" y="0"/>
@@ -2572,15 +2564,15 @@
           </p:nvSpPr>
           <p:spPr>
             <a:xfrm>
-              <a:off x="7680065" y="2073503"/>
-              <a:ext cx="0" cy="3649639"/>
+              <a:off x="5593195" y="2143092"/>
+              <a:ext cx="0" cy="1317069"/>
             </a:xfrm>
             <a:custGeom>
               <a:avLst/>
               <a:pathLst>
-                <a:path w="0" h="3649639">
+                <a:path w="0" h="1317069">
                   <a:moveTo>
-                    <a:pt x="0" y="3649639"/>
+                    <a:pt x="0" y="1317069"/>
                   </a:moveTo>
                   <a:lnTo>
                     <a:pt x="0" y="0"/>
@@ -2615,26 +2607,26 @@
           </p:nvSpPr>
           <p:spPr>
             <a:xfrm>
-              <a:off x="817517" y="5557249"/>
-              <a:ext cx="7799693" cy="0"/>
+              <a:off x="7627198" y="2143092"/>
+              <a:ext cx="0" cy="1317069"/>
             </a:xfrm>
             <a:custGeom>
               <a:avLst/>
               <a:pathLst>
-                <a:path w="7799693" h="0">
+                <a:path w="0" h="1317069">
                   <a:moveTo>
+                    <a:pt x="0" y="1317069"/>
+                  </a:moveTo>
+                  <a:lnTo>
                     <a:pt x="0" y="0"/>
-                  </a:moveTo>
-                  <a:lnTo>
-                    <a:pt x="7799693" y="0"/>
-                  </a:lnTo>
-                  <a:lnTo>
-                    <a:pt x="7799693" y="0"/>
+                  </a:lnTo>
+                  <a:lnTo>
+                    <a:pt x="0" y="0"/>
                   </a:lnTo>
                 </a:path>
               </a:pathLst>
             </a:custGeom>
-            <a:ln w="13550" cap="flat">
+            <a:ln w="6775" cap="flat">
               <a:solidFill>
                 <a:srgbClr val="EBEBEB">
                   <a:alpha val="100000"/>
@@ -2658,21 +2650,21 @@
           </p:nvSpPr>
           <p:spPr>
             <a:xfrm>
-              <a:off x="817517" y="4727786"/>
-              <a:ext cx="7799693" cy="0"/>
+              <a:off x="887106" y="3400294"/>
+              <a:ext cx="7660515" cy="0"/>
             </a:xfrm>
             <a:custGeom>
               <a:avLst/>
               <a:pathLst>
-                <a:path w="7799693" h="0">
+                <a:path w="7660515" h="0">
                   <a:moveTo>
                     <a:pt x="0" y="0"/>
                   </a:moveTo>
                   <a:lnTo>
-                    <a:pt x="7799693" y="0"/>
-                  </a:lnTo>
-                  <a:lnTo>
-                    <a:pt x="7799693" y="0"/>
+                    <a:pt x="7660515" y="0"/>
+                  </a:lnTo>
+                  <a:lnTo>
+                    <a:pt x="7660515" y="0"/>
                   </a:lnTo>
                 </a:path>
               </a:pathLst>
@@ -2701,21 +2693,21 @@
           </p:nvSpPr>
           <p:spPr>
             <a:xfrm>
-              <a:off x="817517" y="3898322"/>
-              <a:ext cx="7799693" cy="0"/>
+              <a:off x="887106" y="3100960"/>
+              <a:ext cx="7660515" cy="0"/>
             </a:xfrm>
             <a:custGeom>
               <a:avLst/>
               <a:pathLst>
-                <a:path w="7799693" h="0">
+                <a:path w="7660515" h="0">
                   <a:moveTo>
                     <a:pt x="0" y="0"/>
                   </a:moveTo>
                   <a:lnTo>
-                    <a:pt x="7799693" y="0"/>
-                  </a:lnTo>
-                  <a:lnTo>
-                    <a:pt x="7799693" y="0"/>
+                    <a:pt x="7660515" y="0"/>
+                  </a:lnTo>
+                  <a:lnTo>
+                    <a:pt x="7660515" y="0"/>
                   </a:lnTo>
                 </a:path>
               </a:pathLst>
@@ -2744,21 +2736,21 @@
           </p:nvSpPr>
           <p:spPr>
             <a:xfrm>
-              <a:off x="817517" y="3068859"/>
-              <a:ext cx="7799693" cy="0"/>
+              <a:off x="887106" y="2801626"/>
+              <a:ext cx="7660515" cy="0"/>
             </a:xfrm>
             <a:custGeom>
               <a:avLst/>
               <a:pathLst>
-                <a:path w="7799693" h="0">
+                <a:path w="7660515" h="0">
                   <a:moveTo>
                     <a:pt x="0" y="0"/>
                   </a:moveTo>
                   <a:lnTo>
-                    <a:pt x="7799693" y="0"/>
-                  </a:lnTo>
-                  <a:lnTo>
-                    <a:pt x="7799693" y="0"/>
+                    <a:pt x="7660515" y="0"/>
+                  </a:lnTo>
+                  <a:lnTo>
+                    <a:pt x="7660515" y="0"/>
                   </a:lnTo>
                 </a:path>
               </a:pathLst>
@@ -2787,21 +2779,21 @@
           </p:nvSpPr>
           <p:spPr>
             <a:xfrm>
-              <a:off x="817517" y="2239395"/>
-              <a:ext cx="7799693" cy="0"/>
+              <a:off x="887106" y="2502292"/>
+              <a:ext cx="7660515" cy="0"/>
             </a:xfrm>
             <a:custGeom>
               <a:avLst/>
               <a:pathLst>
-                <a:path w="7799693" h="0">
+                <a:path w="7660515" h="0">
                   <a:moveTo>
                     <a:pt x="0" y="0"/>
                   </a:moveTo>
                   <a:lnTo>
-                    <a:pt x="7799693" y="0"/>
-                  </a:lnTo>
-                  <a:lnTo>
-                    <a:pt x="7799693" y="0"/>
+                    <a:pt x="7660515" y="0"/>
+                  </a:lnTo>
+                  <a:lnTo>
+                    <a:pt x="7660515" y="0"/>
                   </a:lnTo>
                 </a:path>
               </a:pathLst>
@@ -2830,21 +2822,21 @@
           </p:nvSpPr>
           <p:spPr>
             <a:xfrm>
-              <a:off x="2502671" y="2073503"/>
-              <a:ext cx="0" cy="3649639"/>
+              <a:off x="887106" y="2202958"/>
+              <a:ext cx="7660515" cy="0"/>
             </a:xfrm>
             <a:custGeom>
               <a:avLst/>
               <a:pathLst>
-                <a:path w="0" h="3649639">
+                <a:path w="7660515" h="0">
                   <a:moveTo>
-                    <a:pt x="0" y="3649639"/>
+                    <a:pt x="0" y="0"/>
                   </a:moveTo>
                   <a:lnTo>
-                    <a:pt x="0" y="0"/>
-                  </a:lnTo>
-                  <a:lnTo>
-                    <a:pt x="0" y="0"/>
+                    <a:pt x="7660515" y="0"/>
+                  </a:lnTo>
+                  <a:lnTo>
+                    <a:pt x="7660515" y="0"/>
                   </a:lnTo>
                 </a:path>
               </a:pathLst>
@@ -2873,15 +2865,15 @@
           </p:nvSpPr>
           <p:spPr>
             <a:xfrm>
-              <a:off x="4573628" y="2073503"/>
-              <a:ext cx="0" cy="3649639"/>
+              <a:off x="2542190" y="2143092"/>
+              <a:ext cx="0" cy="1317069"/>
             </a:xfrm>
             <a:custGeom>
               <a:avLst/>
               <a:pathLst>
-                <a:path w="0" h="3649639">
+                <a:path w="0" h="1317069">
                   <a:moveTo>
-                    <a:pt x="0" y="3649639"/>
+                    <a:pt x="0" y="1317069"/>
                   </a:moveTo>
                   <a:lnTo>
                     <a:pt x="0" y="0"/>
@@ -2916,15 +2908,15 @@
           </p:nvSpPr>
           <p:spPr>
             <a:xfrm>
-              <a:off x="6644586" y="2073503"/>
-              <a:ext cx="0" cy="3649639"/>
+              <a:off x="4576193" y="2143092"/>
+              <a:ext cx="0" cy="1317069"/>
             </a:xfrm>
             <a:custGeom>
               <a:avLst/>
               <a:pathLst>
-                <a:path w="0" h="3649639">
+                <a:path w="0" h="1317069">
                   <a:moveTo>
-                    <a:pt x="0" y="3649639"/>
+                    <a:pt x="0" y="1317069"/>
                   </a:moveTo>
                   <a:lnTo>
                     <a:pt x="0" y="0"/>
@@ -2953,573 +2945,616 @@
         </p:sp>
         <p:sp>
           <p:nvSpPr>
-            <p:cNvPr id="20" name="pg20"/>
+            <p:cNvPr id="20" name="pl20"/>
             <p:cNvSpPr/>
             <p:nvPr/>
           </p:nvSpPr>
           <p:spPr>
             <a:xfrm>
-              <a:off x="1172049" y="2073503"/>
-              <a:ext cx="7090630" cy="3406122"/>
+              <a:off x="6610197" y="2143092"/>
+              <a:ext cx="0" cy="1317069"/>
             </a:xfrm>
             <a:custGeom>
               <a:avLst/>
               <a:pathLst>
-                <a:path w="7090630" h="3406122">
+                <a:path w="0" h="1317069">
                   <a:moveTo>
-                    <a:pt x="1092093" y="0"/>
+                    <a:pt x="0" y="1317069"/>
                   </a:moveTo>
                   <a:lnTo>
-                    <a:pt x="1145960" y="117630"/>
-                  </a:lnTo>
-                  <a:lnTo>
-                    <a:pt x="1217582" y="267090"/>
-                  </a:lnTo>
-                  <a:lnTo>
-                    <a:pt x="1289205" y="409914"/>
-                  </a:lnTo>
-                  <a:lnTo>
-                    <a:pt x="1360827" y="546396"/>
-                  </a:lnTo>
-                  <a:lnTo>
-                    <a:pt x="1432450" y="676818"/>
-                  </a:lnTo>
-                  <a:lnTo>
-                    <a:pt x="1504073" y="801450"/>
-                  </a:lnTo>
-                  <a:lnTo>
-                    <a:pt x="1575695" y="920547"/>
-                  </a:lnTo>
-                  <a:lnTo>
-                    <a:pt x="1647318" y="1034356"/>
-                  </a:lnTo>
-                  <a:lnTo>
-                    <a:pt x="1718940" y="1143113"/>
-                  </a:lnTo>
-                  <a:lnTo>
-                    <a:pt x="1790563" y="1247040"/>
-                  </a:lnTo>
-                  <a:lnTo>
-                    <a:pt x="1862185" y="1346353"/>
-                  </a:lnTo>
-                  <a:lnTo>
-                    <a:pt x="1933808" y="1441256"/>
-                  </a:lnTo>
-                  <a:lnTo>
-                    <a:pt x="2005430" y="1531945"/>
-                  </a:lnTo>
-                  <a:lnTo>
-                    <a:pt x="2077053" y="1618608"/>
-                  </a:lnTo>
-                  <a:lnTo>
-                    <a:pt x="2148675" y="1701422"/>
-                  </a:lnTo>
-                  <a:lnTo>
-                    <a:pt x="2220298" y="1780560"/>
-                  </a:lnTo>
-                  <a:lnTo>
-                    <a:pt x="2291920" y="1856184"/>
-                  </a:lnTo>
-                  <a:lnTo>
-                    <a:pt x="2363543" y="1928449"/>
-                  </a:lnTo>
-                  <a:lnTo>
-                    <a:pt x="2435165" y="1997507"/>
-                  </a:lnTo>
-                  <a:lnTo>
-                    <a:pt x="2506788" y="2063498"/>
-                  </a:lnTo>
-                  <a:lnTo>
-                    <a:pt x="2578410" y="2126559"/>
-                  </a:lnTo>
-                  <a:lnTo>
-                    <a:pt x="2650033" y="2186820"/>
-                  </a:lnTo>
-                  <a:lnTo>
-                    <a:pt x="2721655" y="2244405"/>
-                  </a:lnTo>
-                  <a:lnTo>
-                    <a:pt x="2793278" y="2299433"/>
-                  </a:lnTo>
-                  <a:lnTo>
-                    <a:pt x="2864901" y="2352018"/>
-                  </a:lnTo>
-                  <a:lnTo>
-                    <a:pt x="2936523" y="2402269"/>
-                  </a:lnTo>
-                  <a:lnTo>
-                    <a:pt x="3008146" y="2450288"/>
-                  </a:lnTo>
-                  <a:lnTo>
-                    <a:pt x="3079768" y="2496175"/>
-                  </a:lnTo>
-                  <a:lnTo>
-                    <a:pt x="3151391" y="2540024"/>
-                  </a:lnTo>
-                  <a:lnTo>
-                    <a:pt x="3223013" y="2581927"/>
-                  </a:lnTo>
-                  <a:lnTo>
-                    <a:pt x="3294636" y="2621969"/>
-                  </a:lnTo>
-                  <a:lnTo>
-                    <a:pt x="3366258" y="2656161"/>
-                  </a:lnTo>
-                  <a:lnTo>
-                    <a:pt x="3437881" y="2667913"/>
-                  </a:lnTo>
-                  <a:lnTo>
-                    <a:pt x="3509503" y="2679498"/>
-                  </a:lnTo>
-                  <a:lnTo>
-                    <a:pt x="3581126" y="2690918"/>
-                  </a:lnTo>
-                  <a:lnTo>
-                    <a:pt x="3652748" y="2702177"/>
-                  </a:lnTo>
-                  <a:lnTo>
-                    <a:pt x="3724371" y="2713275"/>
-                  </a:lnTo>
-                  <a:lnTo>
-                    <a:pt x="3795993" y="2724216"/>
-                  </a:lnTo>
-                  <a:lnTo>
-                    <a:pt x="3867616" y="2735001"/>
-                  </a:lnTo>
-                  <a:lnTo>
-                    <a:pt x="3939238" y="2745633"/>
-                  </a:lnTo>
-                  <a:lnTo>
-                    <a:pt x="4010861" y="2756115"/>
-                  </a:lnTo>
-                  <a:lnTo>
-                    <a:pt x="4082483" y="2766447"/>
-                  </a:lnTo>
-                  <a:lnTo>
-                    <a:pt x="4154106" y="2776633"/>
-                  </a:lnTo>
-                  <a:lnTo>
-                    <a:pt x="4225729" y="2786674"/>
-                  </a:lnTo>
-                  <a:lnTo>
-                    <a:pt x="4297351" y="2796573"/>
-                  </a:lnTo>
-                  <a:lnTo>
-                    <a:pt x="4368974" y="2806331"/>
-                  </a:lnTo>
-                  <a:lnTo>
-                    <a:pt x="4440596" y="2815950"/>
-                  </a:lnTo>
-                  <a:lnTo>
-                    <a:pt x="4512219" y="2825433"/>
-                  </a:lnTo>
-                  <a:lnTo>
-                    <a:pt x="4583841" y="2834781"/>
-                  </a:lnTo>
-                  <a:lnTo>
-                    <a:pt x="4655464" y="2843996"/>
-                  </a:lnTo>
-                  <a:lnTo>
-                    <a:pt x="4727086" y="2853081"/>
-                  </a:lnTo>
-                  <a:lnTo>
-                    <a:pt x="4798709" y="2862036"/>
-                  </a:lnTo>
-                  <a:lnTo>
-                    <a:pt x="4870331" y="2870865"/>
-                  </a:lnTo>
-                  <a:lnTo>
-                    <a:pt x="4941954" y="2879568"/>
-                  </a:lnTo>
-                  <a:lnTo>
-                    <a:pt x="5013576" y="2888147"/>
-                  </a:lnTo>
-                  <a:lnTo>
-                    <a:pt x="5085199" y="2896605"/>
-                  </a:lnTo>
-                  <a:lnTo>
-                    <a:pt x="5156821" y="2904942"/>
-                  </a:lnTo>
-                  <a:lnTo>
-                    <a:pt x="5228444" y="2913161"/>
-                  </a:lnTo>
-                  <a:lnTo>
-                    <a:pt x="5300066" y="2921264"/>
-                  </a:lnTo>
-                  <a:lnTo>
-                    <a:pt x="5371689" y="2929251"/>
-                  </a:lnTo>
-                  <a:lnTo>
-                    <a:pt x="5443311" y="2937125"/>
-                  </a:lnTo>
-                  <a:lnTo>
-                    <a:pt x="5514934" y="2944887"/>
-                  </a:lnTo>
-                  <a:lnTo>
-                    <a:pt x="5586557" y="2952539"/>
-                  </a:lnTo>
-                  <a:lnTo>
-                    <a:pt x="5658179" y="2960082"/>
-                  </a:lnTo>
-                  <a:lnTo>
-                    <a:pt x="5729802" y="2967518"/>
-                  </a:lnTo>
-                  <a:lnTo>
-                    <a:pt x="5801424" y="2974849"/>
-                  </a:lnTo>
-                  <a:lnTo>
-                    <a:pt x="5873047" y="2982075"/>
-                  </a:lnTo>
-                  <a:lnTo>
-                    <a:pt x="5944669" y="2989199"/>
-                  </a:lnTo>
-                  <a:lnTo>
-                    <a:pt x="6016292" y="2996222"/>
-                  </a:lnTo>
-                  <a:lnTo>
-                    <a:pt x="6087914" y="3003144"/>
-                  </a:lnTo>
-                  <a:lnTo>
-                    <a:pt x="6159537" y="3009969"/>
-                  </a:lnTo>
-                  <a:lnTo>
-                    <a:pt x="6231159" y="3016697"/>
-                  </a:lnTo>
-                  <a:lnTo>
-                    <a:pt x="6302782" y="3023329"/>
-                  </a:lnTo>
-                  <a:lnTo>
-                    <a:pt x="6374404" y="3029867"/>
-                  </a:lnTo>
-                  <a:lnTo>
-                    <a:pt x="6446027" y="3036312"/>
-                  </a:lnTo>
-                  <a:lnTo>
-                    <a:pt x="6517649" y="3042666"/>
-                  </a:lnTo>
-                  <a:lnTo>
-                    <a:pt x="6589272" y="3048929"/>
-                  </a:lnTo>
-                  <a:lnTo>
-                    <a:pt x="6660894" y="3055104"/>
-                  </a:lnTo>
-                  <a:lnTo>
-                    <a:pt x="6732517" y="3061190"/>
-                  </a:lnTo>
-                  <a:lnTo>
-                    <a:pt x="6804139" y="3067191"/>
-                  </a:lnTo>
-                  <a:lnTo>
-                    <a:pt x="6875762" y="3073106"/>
-                  </a:lnTo>
-                  <a:lnTo>
-                    <a:pt x="6947385" y="3078937"/>
-                  </a:lnTo>
-                  <a:lnTo>
-                    <a:pt x="7019007" y="3084685"/>
-                  </a:lnTo>
-                  <a:lnTo>
-                    <a:pt x="7090630" y="3090352"/>
-                  </a:lnTo>
-                  <a:lnTo>
-                    <a:pt x="7090630" y="3406122"/>
-                  </a:lnTo>
-                  <a:lnTo>
-                    <a:pt x="7019007" y="3402515"/>
-                  </a:lnTo>
-                  <a:lnTo>
-                    <a:pt x="6947385" y="3398741"/>
-                  </a:lnTo>
-                  <a:lnTo>
-                    <a:pt x="6875762" y="3394791"/>
-                  </a:lnTo>
-                  <a:lnTo>
-                    <a:pt x="6804139" y="3390658"/>
-                  </a:lnTo>
-                  <a:lnTo>
-                    <a:pt x="6732517" y="3386332"/>
-                  </a:lnTo>
-                  <a:lnTo>
-                    <a:pt x="6660894" y="3381806"/>
-                  </a:lnTo>
-                  <a:lnTo>
-                    <a:pt x="6589272" y="3377070"/>
-                  </a:lnTo>
-                  <a:lnTo>
-                    <a:pt x="6517649" y="3372113"/>
-                  </a:lnTo>
-                  <a:lnTo>
-                    <a:pt x="6446027" y="3366926"/>
-                  </a:lnTo>
-                  <a:lnTo>
-                    <a:pt x="6374404" y="3361498"/>
-                  </a:lnTo>
-                  <a:lnTo>
-                    <a:pt x="6302782" y="3355818"/>
-                  </a:lnTo>
-                  <a:lnTo>
-                    <a:pt x="6231159" y="3349874"/>
-                  </a:lnTo>
-                  <a:lnTo>
-                    <a:pt x="6159537" y="3343653"/>
-                  </a:lnTo>
-                  <a:lnTo>
-                    <a:pt x="6087914" y="3337144"/>
-                  </a:lnTo>
-                  <a:lnTo>
-                    <a:pt x="6016292" y="3330332"/>
-                  </a:lnTo>
-                  <a:lnTo>
-                    <a:pt x="5944669" y="3323204"/>
-                  </a:lnTo>
-                  <a:lnTo>
-                    <a:pt x="5873047" y="3315744"/>
-                  </a:lnTo>
-                  <a:lnTo>
-                    <a:pt x="5801424" y="3307938"/>
-                  </a:lnTo>
-                  <a:lnTo>
-                    <a:pt x="5729802" y="3299769"/>
-                  </a:lnTo>
-                  <a:lnTo>
-                    <a:pt x="5658179" y="3291221"/>
-                  </a:lnTo>
-                  <a:lnTo>
-                    <a:pt x="5586557" y="3282275"/>
-                  </a:lnTo>
-                  <a:lnTo>
-                    <a:pt x="5514934" y="3272914"/>
-                  </a:lnTo>
-                  <a:lnTo>
-                    <a:pt x="5443311" y="3263118"/>
-                  </a:lnTo>
-                  <a:lnTo>
-                    <a:pt x="5371689" y="3252867"/>
-                  </a:lnTo>
-                  <a:lnTo>
-                    <a:pt x="5300066" y="3242139"/>
-                  </a:lnTo>
-                  <a:lnTo>
-                    <a:pt x="5228444" y="3230913"/>
-                  </a:lnTo>
-                  <a:lnTo>
-                    <a:pt x="5156821" y="3219165"/>
-                  </a:lnTo>
-                  <a:lnTo>
-                    <a:pt x="5085199" y="3206871"/>
-                  </a:lnTo>
-                  <a:lnTo>
-                    <a:pt x="5013576" y="3194007"/>
-                  </a:lnTo>
-                  <a:lnTo>
-                    <a:pt x="4941954" y="3180544"/>
-                  </a:lnTo>
-                  <a:lnTo>
-                    <a:pt x="4870331" y="3166456"/>
-                  </a:lnTo>
-                  <a:lnTo>
-                    <a:pt x="4798709" y="3151713"/>
-                  </a:lnTo>
-                  <a:lnTo>
-                    <a:pt x="4727086" y="3136285"/>
-                  </a:lnTo>
-                  <a:lnTo>
-                    <a:pt x="4655464" y="3120141"/>
-                  </a:lnTo>
-                  <a:lnTo>
-                    <a:pt x="4583841" y="3103246"/>
-                  </a:lnTo>
-                  <a:lnTo>
-                    <a:pt x="4512219" y="3085566"/>
-                  </a:lnTo>
-                  <a:lnTo>
-                    <a:pt x="4440596" y="3067065"/>
-                  </a:lnTo>
-                  <a:lnTo>
-                    <a:pt x="4368974" y="3047704"/>
-                  </a:lnTo>
-                  <a:lnTo>
-                    <a:pt x="4297351" y="3027444"/>
-                  </a:lnTo>
-                  <a:lnTo>
-                    <a:pt x="4225729" y="3006242"/>
-                  </a:lnTo>
-                  <a:lnTo>
-                    <a:pt x="4154106" y="2984055"/>
-                  </a:lnTo>
-                  <a:lnTo>
-                    <a:pt x="4082483" y="2960837"/>
-                  </a:lnTo>
-                  <a:lnTo>
-                    <a:pt x="4010861" y="2936541"/>
-                  </a:lnTo>
-                  <a:lnTo>
-                    <a:pt x="3939238" y="2911115"/>
-                  </a:lnTo>
-                  <a:lnTo>
-                    <a:pt x="3867616" y="2884508"/>
-                  </a:lnTo>
-                  <a:lnTo>
-                    <a:pt x="3795993" y="2856665"/>
-                  </a:lnTo>
-                  <a:lnTo>
-                    <a:pt x="3724371" y="2827528"/>
-                  </a:lnTo>
-                  <a:lnTo>
-                    <a:pt x="3652748" y="2797037"/>
-                  </a:lnTo>
-                  <a:lnTo>
-                    <a:pt x="3581126" y="2765129"/>
-                  </a:lnTo>
-                  <a:lnTo>
-                    <a:pt x="3509503" y="2731739"/>
-                  </a:lnTo>
-                  <a:lnTo>
-                    <a:pt x="3437881" y="2696798"/>
-                  </a:lnTo>
-                  <a:lnTo>
-                    <a:pt x="3366258" y="2660233"/>
-                  </a:lnTo>
-                  <a:lnTo>
-                    <a:pt x="3294636" y="2644240"/>
-                  </a:lnTo>
-                  <a:lnTo>
-                    <a:pt x="3223013" y="2632147"/>
-                  </a:lnTo>
-                  <a:lnTo>
-                    <a:pt x="3151391" y="2619880"/>
-                  </a:lnTo>
-                  <a:lnTo>
-                    <a:pt x="3079768" y="2607436"/>
-                  </a:lnTo>
-                  <a:lnTo>
-                    <a:pt x="3008146" y="2594813"/>
-                  </a:lnTo>
-                  <a:lnTo>
-                    <a:pt x="2936523" y="2582009"/>
-                  </a:lnTo>
-                  <a:lnTo>
-                    <a:pt x="2864901" y="2569019"/>
-                  </a:lnTo>
-                  <a:lnTo>
-                    <a:pt x="2793278" y="2555843"/>
-                  </a:lnTo>
-                  <a:lnTo>
-                    <a:pt x="2721655" y="2542477"/>
-                  </a:lnTo>
-                  <a:lnTo>
-                    <a:pt x="2650033" y="2528918"/>
-                  </a:lnTo>
-                  <a:lnTo>
-                    <a:pt x="2578410" y="2515164"/>
-                  </a:lnTo>
-                  <a:lnTo>
-                    <a:pt x="2506788" y="2501212"/>
-                  </a:lnTo>
-                  <a:lnTo>
-                    <a:pt x="2435165" y="2487059"/>
-                  </a:lnTo>
-                  <a:lnTo>
-                    <a:pt x="2363543" y="2472702"/>
-                  </a:lnTo>
-                  <a:lnTo>
-                    <a:pt x="2291920" y="2458138"/>
-                  </a:lnTo>
-                  <a:lnTo>
-                    <a:pt x="2220298" y="2443365"/>
-                  </a:lnTo>
-                  <a:lnTo>
-                    <a:pt x="2148675" y="2428378"/>
-                  </a:lnTo>
-                  <a:lnTo>
-                    <a:pt x="2077053" y="2413176"/>
-                  </a:lnTo>
-                  <a:lnTo>
-                    <a:pt x="2005430" y="2397755"/>
-                  </a:lnTo>
-                  <a:lnTo>
-                    <a:pt x="1933808" y="2382112"/>
-                  </a:lnTo>
-                  <a:lnTo>
-                    <a:pt x="1862185" y="2366243"/>
-                  </a:lnTo>
-                  <a:lnTo>
-                    <a:pt x="1790563" y="2350146"/>
-                  </a:lnTo>
-                  <a:lnTo>
-                    <a:pt x="1718940" y="2333816"/>
-                  </a:lnTo>
-                  <a:lnTo>
-                    <a:pt x="1647318" y="2317252"/>
-                  </a:lnTo>
-                  <a:lnTo>
-                    <a:pt x="1575695" y="2300449"/>
-                  </a:lnTo>
-                  <a:lnTo>
-                    <a:pt x="1504073" y="2283404"/>
-                  </a:lnTo>
-                  <a:lnTo>
-                    <a:pt x="1432450" y="2266114"/>
-                  </a:lnTo>
-                  <a:lnTo>
-                    <a:pt x="1360827" y="2248574"/>
-                  </a:lnTo>
-                  <a:lnTo>
-                    <a:pt x="1289205" y="2230782"/>
-                  </a:lnTo>
-                  <a:lnTo>
-                    <a:pt x="1217582" y="2212733"/>
-                  </a:lnTo>
-                  <a:lnTo>
-                    <a:pt x="1145960" y="2194425"/>
-                  </a:lnTo>
-                  <a:lnTo>
-                    <a:pt x="1074337" y="2175852"/>
-                  </a:lnTo>
-                  <a:lnTo>
-                    <a:pt x="1002715" y="2157013"/>
-                  </a:lnTo>
-                  <a:lnTo>
-                    <a:pt x="931092" y="2137901"/>
-                  </a:lnTo>
-                  <a:lnTo>
-                    <a:pt x="859470" y="2118515"/>
-                  </a:lnTo>
-                  <a:lnTo>
-                    <a:pt x="787847" y="2098849"/>
-                  </a:lnTo>
-                  <a:lnTo>
-                    <a:pt x="716225" y="2078900"/>
-                  </a:lnTo>
-                  <a:lnTo>
-                    <a:pt x="644602" y="2058664"/>
-                  </a:lnTo>
-                  <a:lnTo>
-                    <a:pt x="572980" y="2038136"/>
-                  </a:lnTo>
-                  <a:lnTo>
-                    <a:pt x="501357" y="2017312"/>
-                  </a:lnTo>
-                  <a:lnTo>
-                    <a:pt x="429735" y="1996189"/>
-                  </a:lnTo>
-                  <a:lnTo>
-                    <a:pt x="358112" y="1974761"/>
-                  </a:lnTo>
-                  <a:lnTo>
-                    <a:pt x="286490" y="1953025"/>
-                  </a:lnTo>
-                  <a:lnTo>
-                    <a:pt x="214867" y="1930975"/>
-                  </a:lnTo>
-                  <a:lnTo>
-                    <a:pt x="143245" y="1908608"/>
-                  </a:lnTo>
-                  <a:lnTo>
-                    <a:pt x="71622" y="1885919"/>
-                  </a:lnTo>
-                  <a:lnTo>
-                    <a:pt x="0" y="1862902"/>
+                    <a:pt x="0" y="0"/>
+                  </a:lnTo>
+                  <a:lnTo>
+                    <a:pt x="0" y="0"/>
+                  </a:lnTo>
+                </a:path>
+              </a:pathLst>
+            </a:custGeom>
+            <a:ln w="13550" cap="flat">
+              <a:solidFill>
+                <a:srgbClr val="EBEBEB">
+                  <a:alpha val="100000"/>
+                </a:srgbClr>
+              </a:solidFill>
+              <a:prstDash val="solid"/>
+              <a:round/>
+            </a:ln>
+          </p:spPr>
+          <p:txBody>
+            <a:bodyPr/>
+            <a:lstStyle/>
+            <a:p/>
+          </p:txBody>
+        </p:sp>
+        <p:sp>
+          <p:nvSpPr>
+            <p:cNvPr id="21" name="pg21"/>
+            <p:cNvSpPr/>
+            <p:nvPr/>
+          </p:nvSpPr>
+          <p:spPr>
+            <a:xfrm>
+              <a:off x="1235312" y="2143092"/>
+              <a:ext cx="6964104" cy="1229189"/>
+            </a:xfrm>
+            <a:custGeom>
+              <a:avLst/>
+              <a:pathLst>
+                <a:path w="6964104" h="1229189">
+                  <a:moveTo>
+                    <a:pt x="1072606" y="0"/>
+                  </a:moveTo>
+                  <a:lnTo>
+                    <a:pt x="1125511" y="42450"/>
+                  </a:lnTo>
+                  <a:lnTo>
+                    <a:pt x="1195856" y="96386"/>
+                  </a:lnTo>
+                  <a:lnTo>
+                    <a:pt x="1266200" y="147928"/>
+                  </a:lnTo>
+                  <a:lnTo>
+                    <a:pt x="1336545" y="197181"/>
+                  </a:lnTo>
+                  <a:lnTo>
+                    <a:pt x="1406889" y="244247"/>
+                  </a:lnTo>
+                  <a:lnTo>
+                    <a:pt x="1477234" y="289224"/>
+                  </a:lnTo>
+                  <a:lnTo>
+                    <a:pt x="1547578" y="332203"/>
+                  </a:lnTo>
+                  <a:lnTo>
+                    <a:pt x="1617923" y="373275"/>
+                  </a:lnTo>
+                  <a:lnTo>
+                    <a:pt x="1688267" y="412522"/>
+                  </a:lnTo>
+                  <a:lnTo>
+                    <a:pt x="1758612" y="450027"/>
+                  </a:lnTo>
+                  <a:lnTo>
+                    <a:pt x="1828956" y="485867"/>
+                  </a:lnTo>
+                  <a:lnTo>
+                    <a:pt x="1899301" y="520115"/>
+                  </a:lnTo>
+                  <a:lnTo>
+                    <a:pt x="1969645" y="552843"/>
+                  </a:lnTo>
+                  <a:lnTo>
+                    <a:pt x="2039990" y="584117"/>
+                  </a:lnTo>
+                  <a:lnTo>
+                    <a:pt x="2110334" y="614003"/>
+                  </a:lnTo>
+                  <a:lnTo>
+                    <a:pt x="2180679" y="642562"/>
+                  </a:lnTo>
+                  <a:lnTo>
+                    <a:pt x="2251023" y="669853"/>
+                  </a:lnTo>
+                  <a:lnTo>
+                    <a:pt x="2321368" y="695932"/>
+                  </a:lnTo>
+                  <a:lnTo>
+                    <a:pt x="2391712" y="720853"/>
+                  </a:lnTo>
+                  <a:lnTo>
+                    <a:pt x="2462057" y="744667"/>
+                  </a:lnTo>
+                  <a:lnTo>
+                    <a:pt x="2532401" y="767425"/>
+                  </a:lnTo>
+                  <a:lnTo>
+                    <a:pt x="2602746" y="789171"/>
+                  </a:lnTo>
+                  <a:lnTo>
+                    <a:pt x="2673090" y="809953"/>
+                  </a:lnTo>
+                  <a:lnTo>
+                    <a:pt x="2743435" y="829811"/>
+                  </a:lnTo>
+                  <a:lnTo>
+                    <a:pt x="2813779" y="848788"/>
+                  </a:lnTo>
+                  <a:lnTo>
+                    <a:pt x="2884124" y="866922"/>
+                  </a:lnTo>
+                  <a:lnTo>
+                    <a:pt x="2954468" y="884251"/>
+                  </a:lnTo>
+                  <a:lnTo>
+                    <a:pt x="3024813" y="900810"/>
+                  </a:lnTo>
+                  <a:lnTo>
+                    <a:pt x="3095157" y="916635"/>
+                  </a:lnTo>
+                  <a:lnTo>
+                    <a:pt x="3165502" y="931756"/>
+                  </a:lnTo>
+                  <a:lnTo>
+                    <a:pt x="3235846" y="946206"/>
+                  </a:lnTo>
+                  <a:lnTo>
+                    <a:pt x="3306191" y="958546"/>
+                  </a:lnTo>
+                  <a:lnTo>
+                    <a:pt x="3376535" y="962787"/>
+                  </a:lnTo>
+                  <a:lnTo>
+                    <a:pt x="3446880" y="966967"/>
+                  </a:lnTo>
+                  <a:lnTo>
+                    <a:pt x="3517224" y="971089"/>
+                  </a:lnTo>
+                  <a:lnTo>
+                    <a:pt x="3587569" y="975152"/>
+                  </a:lnTo>
+                  <a:lnTo>
+                    <a:pt x="3657913" y="979157"/>
+                  </a:lnTo>
+                  <a:lnTo>
+                    <a:pt x="3728257" y="983105"/>
+                  </a:lnTo>
+                  <a:lnTo>
+                    <a:pt x="3798602" y="986997"/>
+                  </a:lnTo>
+                  <a:lnTo>
+                    <a:pt x="3868946" y="990834"/>
+                  </a:lnTo>
+                  <a:lnTo>
+                    <a:pt x="3939291" y="994617"/>
+                  </a:lnTo>
+                  <a:lnTo>
+                    <a:pt x="4009635" y="998345"/>
+                  </a:lnTo>
+                  <a:lnTo>
+                    <a:pt x="4079980" y="1002021"/>
+                  </a:lnTo>
+                  <a:lnTo>
+                    <a:pt x="4150324" y="1005645"/>
+                  </a:lnTo>
+                  <a:lnTo>
+                    <a:pt x="4220669" y="1009217"/>
+                  </a:lnTo>
+                  <a:lnTo>
+                    <a:pt x="4291013" y="1012738"/>
+                  </a:lnTo>
+                  <a:lnTo>
+                    <a:pt x="4361358" y="1016210"/>
+                  </a:lnTo>
+                  <a:lnTo>
+                    <a:pt x="4431702" y="1019632"/>
+                  </a:lnTo>
+                  <a:lnTo>
+                    <a:pt x="4502047" y="1023005"/>
+                  </a:lnTo>
+                  <a:lnTo>
+                    <a:pt x="4572391" y="1026331"/>
+                  </a:lnTo>
+                  <a:lnTo>
+                    <a:pt x="4642736" y="1029609"/>
+                  </a:lnTo>
+                  <a:lnTo>
+                    <a:pt x="4713080" y="1032841"/>
+                  </a:lnTo>
+                  <a:lnTo>
+                    <a:pt x="4783425" y="1036027"/>
+                  </a:lnTo>
+                  <a:lnTo>
+                    <a:pt x="4853769" y="1039168"/>
+                  </a:lnTo>
+                  <a:lnTo>
+                    <a:pt x="4924114" y="1042264"/>
+                  </a:lnTo>
+                  <a:lnTo>
+                    <a:pt x="4994458" y="1045316"/>
+                  </a:lnTo>
+                  <a:lnTo>
+                    <a:pt x="5064803" y="1048325"/>
+                  </a:lnTo>
+                  <a:lnTo>
+                    <a:pt x="5135147" y="1051291"/>
+                  </a:lnTo>
+                  <a:lnTo>
+                    <a:pt x="5205492" y="1054215"/>
+                  </a:lnTo>
+                  <a:lnTo>
+                    <a:pt x="5275836" y="1057097"/>
+                  </a:lnTo>
+                  <a:lnTo>
+                    <a:pt x="5346181" y="1059939"/>
+                  </a:lnTo>
+                  <a:lnTo>
+                    <a:pt x="5416525" y="1062740"/>
+                  </a:lnTo>
+                  <a:lnTo>
+                    <a:pt x="5486870" y="1065501"/>
+                  </a:lnTo>
+                  <a:lnTo>
+                    <a:pt x="5557214" y="1068224"/>
+                  </a:lnTo>
+                  <a:lnTo>
+                    <a:pt x="5627559" y="1070907"/>
+                  </a:lnTo>
+                  <a:lnTo>
+                    <a:pt x="5697903" y="1073553"/>
+                  </a:lnTo>
+                  <a:lnTo>
+                    <a:pt x="5768248" y="1076160"/>
+                  </a:lnTo>
+                  <a:lnTo>
+                    <a:pt x="5838592" y="1078731"/>
+                  </a:lnTo>
+                  <a:lnTo>
+                    <a:pt x="5908937" y="1081266"/>
+                  </a:lnTo>
+                  <a:lnTo>
+                    <a:pt x="5979281" y="1083764"/>
+                  </a:lnTo>
+                  <a:lnTo>
+                    <a:pt x="6049626" y="1086227"/>
+                  </a:lnTo>
+                  <a:lnTo>
+                    <a:pt x="6119970" y="1088655"/>
+                  </a:lnTo>
+                  <a:lnTo>
+                    <a:pt x="6190315" y="1091048"/>
+                  </a:lnTo>
+                  <a:lnTo>
+                    <a:pt x="6260659" y="1093407"/>
+                  </a:lnTo>
+                  <a:lnTo>
+                    <a:pt x="6331004" y="1095733"/>
+                  </a:lnTo>
+                  <a:lnTo>
+                    <a:pt x="6401348" y="1098026"/>
+                  </a:lnTo>
+                  <a:lnTo>
+                    <a:pt x="6471693" y="1100286"/>
+                  </a:lnTo>
+                  <a:lnTo>
+                    <a:pt x="6542037" y="1102515"/>
+                  </a:lnTo>
+                  <a:lnTo>
+                    <a:pt x="6612382" y="1104711"/>
+                  </a:lnTo>
+                  <a:lnTo>
+                    <a:pt x="6682726" y="1106877"/>
+                  </a:lnTo>
+                  <a:lnTo>
+                    <a:pt x="6753071" y="1109011"/>
+                  </a:lnTo>
+                  <a:lnTo>
+                    <a:pt x="6823415" y="1111116"/>
+                  </a:lnTo>
+                  <a:lnTo>
+                    <a:pt x="6893760" y="1113190"/>
+                  </a:lnTo>
+                  <a:lnTo>
+                    <a:pt x="6964104" y="1115235"/>
+                  </a:lnTo>
+                  <a:lnTo>
+                    <a:pt x="6964104" y="1229189"/>
+                  </a:lnTo>
+                  <a:lnTo>
+                    <a:pt x="6893760" y="1227887"/>
+                  </a:lnTo>
+                  <a:lnTo>
+                    <a:pt x="6823415" y="1226525"/>
+                  </a:lnTo>
+                  <a:lnTo>
+                    <a:pt x="6753071" y="1225100"/>
+                  </a:lnTo>
+                  <a:lnTo>
+                    <a:pt x="6682726" y="1223608"/>
+                  </a:lnTo>
+                  <a:lnTo>
+                    <a:pt x="6612382" y="1222047"/>
+                  </a:lnTo>
+                  <a:lnTo>
+                    <a:pt x="6542037" y="1220414"/>
+                  </a:lnTo>
+                  <a:lnTo>
+                    <a:pt x="6471693" y="1218705"/>
+                  </a:lnTo>
+                  <a:lnTo>
+                    <a:pt x="6401348" y="1216916"/>
+                  </a:lnTo>
+                  <a:lnTo>
+                    <a:pt x="6331004" y="1215044"/>
+                  </a:lnTo>
+                  <a:lnTo>
+                    <a:pt x="6260659" y="1213085"/>
+                  </a:lnTo>
+                  <a:lnTo>
+                    <a:pt x="6190315" y="1211035"/>
+                  </a:lnTo>
+                  <a:lnTo>
+                    <a:pt x="6119970" y="1208890"/>
+                  </a:lnTo>
+                  <a:lnTo>
+                    <a:pt x="6049626" y="1206645"/>
+                  </a:lnTo>
+                  <a:lnTo>
+                    <a:pt x="5979281" y="1204296"/>
+                  </a:lnTo>
+                  <a:lnTo>
+                    <a:pt x="5908937" y="1201838"/>
+                  </a:lnTo>
+                  <a:lnTo>
+                    <a:pt x="5838592" y="1199266"/>
+                  </a:lnTo>
+                  <a:lnTo>
+                    <a:pt x="5768248" y="1196574"/>
+                  </a:lnTo>
+                  <a:lnTo>
+                    <a:pt x="5697903" y="1193757"/>
+                  </a:lnTo>
+                  <a:lnTo>
+                    <a:pt x="5627559" y="1190809"/>
+                  </a:lnTo>
+                  <a:lnTo>
+                    <a:pt x="5557214" y="1187724"/>
+                  </a:lnTo>
+                  <a:lnTo>
+                    <a:pt x="5486870" y="1184496"/>
+                  </a:lnTo>
+                  <a:lnTo>
+                    <a:pt x="5416525" y="1181117"/>
+                  </a:lnTo>
+                  <a:lnTo>
+                    <a:pt x="5346181" y="1177582"/>
+                  </a:lnTo>
+                  <a:lnTo>
+                    <a:pt x="5275836" y="1173883"/>
+                  </a:lnTo>
+                  <a:lnTo>
+                    <a:pt x="5205492" y="1170011"/>
+                  </a:lnTo>
+                  <a:lnTo>
+                    <a:pt x="5135147" y="1165960"/>
+                  </a:lnTo>
+                  <a:lnTo>
+                    <a:pt x="5064803" y="1161721"/>
+                  </a:lnTo>
+                  <a:lnTo>
+                    <a:pt x="4994458" y="1157284"/>
+                  </a:lnTo>
+                  <a:lnTo>
+                    <a:pt x="4924114" y="1152641"/>
+                  </a:lnTo>
+                  <a:lnTo>
+                    <a:pt x="4853769" y="1147783"/>
+                  </a:lnTo>
+                  <a:lnTo>
+                    <a:pt x="4783425" y="1142699"/>
+                  </a:lnTo>
+                  <a:lnTo>
+                    <a:pt x="4713080" y="1137379"/>
+                  </a:lnTo>
+                  <a:lnTo>
+                    <a:pt x="4642736" y="1131811"/>
+                  </a:lnTo>
+                  <a:lnTo>
+                    <a:pt x="4572391" y="1125985"/>
+                  </a:lnTo>
+                  <a:lnTo>
+                    <a:pt x="4502047" y="1119888"/>
+                  </a:lnTo>
+                  <a:lnTo>
+                    <a:pt x="4431702" y="1113508"/>
+                  </a:lnTo>
+                  <a:lnTo>
+                    <a:pt x="4361358" y="1106831"/>
+                  </a:lnTo>
+                  <a:lnTo>
+                    <a:pt x="4291013" y="1099844"/>
+                  </a:lnTo>
+                  <a:lnTo>
+                    <a:pt x="4220669" y="1092533"/>
+                  </a:lnTo>
+                  <a:lnTo>
+                    <a:pt x="4150324" y="1084882"/>
+                  </a:lnTo>
+                  <a:lnTo>
+                    <a:pt x="4079980" y="1076875"/>
+                  </a:lnTo>
+                  <a:lnTo>
+                    <a:pt x="4009635" y="1068496"/>
+                  </a:lnTo>
+                  <a:lnTo>
+                    <a:pt x="3939291" y="1059728"/>
+                  </a:lnTo>
+                  <a:lnTo>
+                    <a:pt x="3868946" y="1050553"/>
+                  </a:lnTo>
+                  <a:lnTo>
+                    <a:pt x="3798602" y="1040951"/>
+                  </a:lnTo>
+                  <a:lnTo>
+                    <a:pt x="3728257" y="1030903"/>
+                  </a:lnTo>
+                  <a:lnTo>
+                    <a:pt x="3657913" y="1020388"/>
+                  </a:lnTo>
+                  <a:lnTo>
+                    <a:pt x="3587569" y="1009385"/>
+                  </a:lnTo>
+                  <a:lnTo>
+                    <a:pt x="3517224" y="997870"/>
+                  </a:lnTo>
+                  <a:lnTo>
+                    <a:pt x="3446880" y="985820"/>
+                  </a:lnTo>
+                  <a:lnTo>
+                    <a:pt x="3376535" y="973211"/>
+                  </a:lnTo>
+                  <a:lnTo>
+                    <a:pt x="3306191" y="960015"/>
+                  </a:lnTo>
+                  <a:lnTo>
+                    <a:pt x="3235846" y="954244"/>
+                  </a:lnTo>
+                  <a:lnTo>
+                    <a:pt x="3165502" y="949880"/>
+                  </a:lnTo>
+                  <a:lnTo>
+                    <a:pt x="3095157" y="945453"/>
+                  </a:lnTo>
+                  <a:lnTo>
+                    <a:pt x="3024813" y="940962"/>
+                  </a:lnTo>
+                  <a:lnTo>
+                    <a:pt x="2954468" y="936407"/>
+                  </a:lnTo>
+                  <a:lnTo>
+                    <a:pt x="2884124" y="931786"/>
+                  </a:lnTo>
+                  <a:lnTo>
+                    <a:pt x="2813779" y="927098"/>
+                  </a:lnTo>
+                  <a:lnTo>
+                    <a:pt x="2743435" y="922343"/>
+                  </a:lnTo>
+                  <a:lnTo>
+                    <a:pt x="2673090" y="917520"/>
+                  </a:lnTo>
+                  <a:lnTo>
+                    <a:pt x="2602746" y="912627"/>
+                  </a:lnTo>
+                  <a:lnTo>
+                    <a:pt x="2532401" y="907663"/>
+                  </a:lnTo>
+                  <a:lnTo>
+                    <a:pt x="2462057" y="902628"/>
+                  </a:lnTo>
+                  <a:lnTo>
+                    <a:pt x="2391712" y="897521"/>
+                  </a:lnTo>
+                  <a:lnTo>
+                    <a:pt x="2321368" y="892340"/>
+                  </a:lnTo>
+                  <a:lnTo>
+                    <a:pt x="2251023" y="887084"/>
+                  </a:lnTo>
+                  <a:lnTo>
+                    <a:pt x="2180679" y="881753"/>
+                  </a:lnTo>
+                  <a:lnTo>
+                    <a:pt x="2110334" y="876344"/>
+                  </a:lnTo>
+                  <a:lnTo>
+                    <a:pt x="2039990" y="870858"/>
+                  </a:lnTo>
+                  <a:lnTo>
+                    <a:pt x="1969645" y="865293"/>
+                  </a:lnTo>
+                  <a:lnTo>
+                    <a:pt x="1899301" y="859648"/>
+                  </a:lnTo>
+                  <a:lnTo>
+                    <a:pt x="1828956" y="853921"/>
+                  </a:lnTo>
+                  <a:lnTo>
+                    <a:pt x="1758612" y="848112"/>
+                  </a:lnTo>
+                  <a:lnTo>
+                    <a:pt x="1688267" y="842219"/>
+                  </a:lnTo>
+                  <a:lnTo>
+                    <a:pt x="1617923" y="836241"/>
+                  </a:lnTo>
+                  <a:lnTo>
+                    <a:pt x="1547578" y="830178"/>
+                  </a:lnTo>
+                  <a:lnTo>
+                    <a:pt x="1477234" y="824027"/>
+                  </a:lnTo>
+                  <a:lnTo>
+                    <a:pt x="1406889" y="817787"/>
+                  </a:lnTo>
+                  <a:lnTo>
+                    <a:pt x="1336545" y="811457"/>
+                  </a:lnTo>
+                  <a:lnTo>
+                    <a:pt x="1266200" y="805036"/>
+                  </a:lnTo>
+                  <a:lnTo>
+                    <a:pt x="1195856" y="798523"/>
+                  </a:lnTo>
+                  <a:lnTo>
+                    <a:pt x="1125511" y="791916"/>
+                  </a:lnTo>
+                  <a:lnTo>
+                    <a:pt x="1055167" y="785214"/>
+                  </a:lnTo>
+                  <a:lnTo>
+                    <a:pt x="984822" y="778415"/>
+                  </a:lnTo>
+                  <a:lnTo>
+                    <a:pt x="914478" y="771518"/>
+                  </a:lnTo>
+                  <a:lnTo>
+                    <a:pt x="844133" y="764522"/>
+                  </a:lnTo>
+                  <a:lnTo>
+                    <a:pt x="773789" y="757425"/>
+                  </a:lnTo>
+                  <a:lnTo>
+                    <a:pt x="703444" y="750226"/>
+                  </a:lnTo>
+                  <a:lnTo>
+                    <a:pt x="633100" y="742923"/>
+                  </a:lnTo>
+                  <a:lnTo>
+                    <a:pt x="562755" y="735515"/>
+                  </a:lnTo>
+                  <a:lnTo>
+                    <a:pt x="492411" y="728000"/>
+                  </a:lnTo>
+                  <a:lnTo>
+                    <a:pt x="422066" y="720377"/>
+                  </a:lnTo>
+                  <a:lnTo>
+                    <a:pt x="351722" y="712645"/>
+                  </a:lnTo>
+                  <a:lnTo>
+                    <a:pt x="281377" y="704800"/>
+                  </a:lnTo>
+                  <a:lnTo>
+                    <a:pt x="211033" y="696843"/>
+                  </a:lnTo>
+                  <a:lnTo>
+                    <a:pt x="140688" y="688771"/>
+                  </a:lnTo>
+                  <a:lnTo>
+                    <a:pt x="70344" y="680583"/>
+                  </a:lnTo>
+                  <a:lnTo>
+                    <a:pt x="0" y="672277"/>
                   </a:lnTo>
                   <a:close/>
                 </a:path>
@@ -3539,598 +3574,273 @@
         </p:sp>
         <p:sp>
           <p:nvSpPr>
-            <p:cNvPr id="21" name="pl21"/>
-            <p:cNvSpPr/>
-            <p:nvPr/>
-          </p:nvSpPr>
-          <p:spPr>
-            <a:xfrm>
-              <a:off x="2264143" y="2073503"/>
-              <a:ext cx="5998536" cy="3090352"/>
-            </a:xfrm>
-            <a:custGeom>
-              <a:avLst/>
-              <a:pathLst>
-                <a:path w="5998536" h="3090352">
-                  <a:moveTo>
-                    <a:pt x="0" y="0"/>
-                  </a:moveTo>
-                  <a:lnTo>
-                    <a:pt x="53866" y="117630"/>
-                  </a:lnTo>
-                  <a:lnTo>
-                    <a:pt x="125489" y="267090"/>
-                  </a:lnTo>
-                  <a:lnTo>
-                    <a:pt x="197111" y="409914"/>
-                  </a:lnTo>
-                  <a:lnTo>
-                    <a:pt x="268734" y="546396"/>
-                  </a:lnTo>
-                  <a:lnTo>
-                    <a:pt x="340356" y="676818"/>
-                  </a:lnTo>
-                  <a:lnTo>
-                    <a:pt x="411979" y="801450"/>
-                  </a:lnTo>
-                  <a:lnTo>
-                    <a:pt x="483601" y="920547"/>
-                  </a:lnTo>
-                  <a:lnTo>
-                    <a:pt x="555224" y="1034356"/>
-                  </a:lnTo>
-                  <a:lnTo>
-                    <a:pt x="626846" y="1143113"/>
-                  </a:lnTo>
-                  <a:lnTo>
-                    <a:pt x="698469" y="1247040"/>
-                  </a:lnTo>
-                  <a:lnTo>
-                    <a:pt x="770091" y="1346353"/>
-                  </a:lnTo>
-                  <a:lnTo>
-                    <a:pt x="841714" y="1441256"/>
-                  </a:lnTo>
-                  <a:lnTo>
-                    <a:pt x="913336" y="1531945"/>
-                  </a:lnTo>
-                  <a:lnTo>
-                    <a:pt x="984959" y="1618608"/>
-                  </a:lnTo>
-                  <a:lnTo>
-                    <a:pt x="1056581" y="1701422"/>
-                  </a:lnTo>
-                  <a:lnTo>
-                    <a:pt x="1128204" y="1780560"/>
-                  </a:lnTo>
-                  <a:lnTo>
-                    <a:pt x="1199826" y="1856184"/>
-                  </a:lnTo>
-                  <a:lnTo>
-                    <a:pt x="1271449" y="1928449"/>
-                  </a:lnTo>
-                  <a:lnTo>
-                    <a:pt x="1343072" y="1997507"/>
-                  </a:lnTo>
-                  <a:lnTo>
-                    <a:pt x="1414694" y="2063498"/>
-                  </a:lnTo>
-                  <a:lnTo>
-                    <a:pt x="1486317" y="2126559"/>
-                  </a:lnTo>
-                  <a:lnTo>
-                    <a:pt x="1557939" y="2186820"/>
-                  </a:lnTo>
-                  <a:lnTo>
-                    <a:pt x="1629562" y="2244405"/>
-                  </a:lnTo>
-                  <a:lnTo>
-                    <a:pt x="1701184" y="2299433"/>
-                  </a:lnTo>
-                  <a:lnTo>
-                    <a:pt x="1772807" y="2352018"/>
-                  </a:lnTo>
-                  <a:lnTo>
-                    <a:pt x="1844429" y="2402269"/>
-                  </a:lnTo>
-                  <a:lnTo>
-                    <a:pt x="1916052" y="2450288"/>
-                  </a:lnTo>
-                  <a:lnTo>
-                    <a:pt x="1987674" y="2496175"/>
-                  </a:lnTo>
-                  <a:lnTo>
-                    <a:pt x="2059297" y="2540024"/>
-                  </a:lnTo>
-                  <a:lnTo>
-                    <a:pt x="2130919" y="2581927"/>
-                  </a:lnTo>
-                  <a:lnTo>
-                    <a:pt x="2202542" y="2621969"/>
-                  </a:lnTo>
-                  <a:lnTo>
-                    <a:pt x="2274164" y="2656161"/>
-                  </a:lnTo>
-                  <a:lnTo>
-                    <a:pt x="2345787" y="2667913"/>
-                  </a:lnTo>
-                  <a:lnTo>
-                    <a:pt x="2417409" y="2679498"/>
-                  </a:lnTo>
-                  <a:lnTo>
-                    <a:pt x="2489032" y="2690918"/>
-                  </a:lnTo>
-                  <a:lnTo>
-                    <a:pt x="2560654" y="2702177"/>
-                  </a:lnTo>
-                  <a:lnTo>
-                    <a:pt x="2632277" y="2713275"/>
-                  </a:lnTo>
-                  <a:lnTo>
-                    <a:pt x="2703900" y="2724216"/>
-                  </a:lnTo>
-                  <a:lnTo>
-                    <a:pt x="2775522" y="2735001"/>
-                  </a:lnTo>
-                  <a:lnTo>
-                    <a:pt x="2847145" y="2745633"/>
-                  </a:lnTo>
-                  <a:lnTo>
-                    <a:pt x="2918767" y="2756115"/>
-                  </a:lnTo>
-                  <a:lnTo>
-                    <a:pt x="2990390" y="2766447"/>
-                  </a:lnTo>
-                  <a:lnTo>
-                    <a:pt x="3062012" y="2776633"/>
-                  </a:lnTo>
-                  <a:lnTo>
-                    <a:pt x="3133635" y="2786674"/>
-                  </a:lnTo>
-                  <a:lnTo>
-                    <a:pt x="3205257" y="2796573"/>
-                  </a:lnTo>
-                  <a:lnTo>
-                    <a:pt x="3276880" y="2806331"/>
-                  </a:lnTo>
-                  <a:lnTo>
-                    <a:pt x="3348502" y="2815950"/>
-                  </a:lnTo>
-                  <a:lnTo>
-                    <a:pt x="3420125" y="2825433"/>
-                  </a:lnTo>
-                  <a:lnTo>
-                    <a:pt x="3491747" y="2834781"/>
-                  </a:lnTo>
-                  <a:lnTo>
-                    <a:pt x="3563370" y="2843996"/>
-                  </a:lnTo>
-                  <a:lnTo>
-                    <a:pt x="3634992" y="2853081"/>
-                  </a:lnTo>
-                  <a:lnTo>
-                    <a:pt x="3706615" y="2862036"/>
-                  </a:lnTo>
-                  <a:lnTo>
-                    <a:pt x="3778237" y="2870865"/>
-                  </a:lnTo>
-                  <a:lnTo>
-                    <a:pt x="3849860" y="2879568"/>
-                  </a:lnTo>
-                  <a:lnTo>
-                    <a:pt x="3921482" y="2888147"/>
-                  </a:lnTo>
-                  <a:lnTo>
-                    <a:pt x="3993105" y="2896605"/>
-                  </a:lnTo>
-                  <a:lnTo>
-                    <a:pt x="4064728" y="2904942"/>
-                  </a:lnTo>
-                  <a:lnTo>
-                    <a:pt x="4136350" y="2913161"/>
-                  </a:lnTo>
-                  <a:lnTo>
-                    <a:pt x="4207973" y="2921264"/>
-                  </a:lnTo>
-                  <a:lnTo>
-                    <a:pt x="4279595" y="2929251"/>
-                  </a:lnTo>
-                  <a:lnTo>
-                    <a:pt x="4351218" y="2937125"/>
-                  </a:lnTo>
-                  <a:lnTo>
-                    <a:pt x="4422840" y="2944887"/>
-                  </a:lnTo>
-                  <a:lnTo>
-                    <a:pt x="4494463" y="2952539"/>
-                  </a:lnTo>
-                  <a:lnTo>
-                    <a:pt x="4566085" y="2960082"/>
-                  </a:lnTo>
-                  <a:lnTo>
-                    <a:pt x="4637708" y="2967518"/>
-                  </a:lnTo>
-                  <a:lnTo>
-                    <a:pt x="4709330" y="2974849"/>
-                  </a:lnTo>
-                  <a:lnTo>
-                    <a:pt x="4780953" y="2982075"/>
-                  </a:lnTo>
-                  <a:lnTo>
-                    <a:pt x="4852575" y="2989199"/>
-                  </a:lnTo>
-                  <a:lnTo>
-                    <a:pt x="4924198" y="2996222"/>
-                  </a:lnTo>
-                  <a:lnTo>
-                    <a:pt x="4995820" y="3003144"/>
-                  </a:lnTo>
-                  <a:lnTo>
-                    <a:pt x="5067443" y="3009969"/>
-                  </a:lnTo>
-                  <a:lnTo>
-                    <a:pt x="5139065" y="3016697"/>
-                  </a:lnTo>
-                  <a:lnTo>
-                    <a:pt x="5210688" y="3023329"/>
-                  </a:lnTo>
-                  <a:lnTo>
-                    <a:pt x="5282310" y="3029867"/>
-                  </a:lnTo>
-                  <a:lnTo>
-                    <a:pt x="5353933" y="3036312"/>
-                  </a:lnTo>
-                  <a:lnTo>
-                    <a:pt x="5425556" y="3042666"/>
-                  </a:lnTo>
-                  <a:lnTo>
-                    <a:pt x="5497178" y="3048929"/>
-                  </a:lnTo>
-                  <a:lnTo>
-                    <a:pt x="5568801" y="3055104"/>
-                  </a:lnTo>
-                  <a:lnTo>
-                    <a:pt x="5640423" y="3061190"/>
-                  </a:lnTo>
-                  <a:lnTo>
-                    <a:pt x="5712046" y="3067191"/>
-                  </a:lnTo>
-                  <a:lnTo>
-                    <a:pt x="5783668" y="3073106"/>
-                  </a:lnTo>
-                  <a:lnTo>
-                    <a:pt x="5855291" y="3078937"/>
-                  </a:lnTo>
-                  <a:lnTo>
-                    <a:pt x="5926913" y="3084685"/>
-                  </a:lnTo>
-                  <a:lnTo>
-                    <a:pt x="5998536" y="3090352"/>
-                  </a:lnTo>
-                </a:path>
-              </a:pathLst>
-            </a:custGeom>
-          </p:spPr>
-          <p:txBody>
-            <a:bodyPr/>
-            <a:lstStyle/>
-            <a:p/>
-          </p:txBody>
-        </p:sp>
-        <p:sp>
-          <p:nvSpPr>
             <p:cNvPr id="22" name="pl22"/>
             <p:cNvSpPr/>
             <p:nvPr/>
           </p:nvSpPr>
           <p:spPr>
             <a:xfrm>
-              <a:off x="1172049" y="3936406"/>
-              <a:ext cx="7090630" cy="1543219"/>
+              <a:off x="2307918" y="2143092"/>
+              <a:ext cx="5891498" cy="1115235"/>
             </a:xfrm>
             <a:custGeom>
               <a:avLst/>
               <a:pathLst>
-                <a:path w="7090630" h="1543219">
+                <a:path w="5891498" h="1115235">
                   <a:moveTo>
-                    <a:pt x="7090630" y="1543219"/>
+                    <a:pt x="0" y="0"/>
                   </a:moveTo>
                   <a:lnTo>
-                    <a:pt x="7019007" y="1539612"/>
-                  </a:lnTo>
-                  <a:lnTo>
-                    <a:pt x="6947385" y="1535838"/>
-                  </a:lnTo>
-                  <a:lnTo>
-                    <a:pt x="6875762" y="1531888"/>
-                  </a:lnTo>
-                  <a:lnTo>
-                    <a:pt x="6804139" y="1527755"/>
-                  </a:lnTo>
-                  <a:lnTo>
-                    <a:pt x="6732517" y="1523429"/>
-                  </a:lnTo>
-                  <a:lnTo>
-                    <a:pt x="6660894" y="1518903"/>
-                  </a:lnTo>
-                  <a:lnTo>
-                    <a:pt x="6589272" y="1514167"/>
-                  </a:lnTo>
-                  <a:lnTo>
-                    <a:pt x="6517649" y="1509210"/>
-                  </a:lnTo>
-                  <a:lnTo>
-                    <a:pt x="6446027" y="1504023"/>
-                  </a:lnTo>
-                  <a:lnTo>
-                    <a:pt x="6374404" y="1498595"/>
-                  </a:lnTo>
-                  <a:lnTo>
-                    <a:pt x="6302782" y="1492915"/>
-                  </a:lnTo>
-                  <a:lnTo>
-                    <a:pt x="6231159" y="1486971"/>
-                  </a:lnTo>
-                  <a:lnTo>
-                    <a:pt x="6159537" y="1480750"/>
-                  </a:lnTo>
-                  <a:lnTo>
-                    <a:pt x="6087914" y="1474241"/>
-                  </a:lnTo>
-                  <a:lnTo>
-                    <a:pt x="6016292" y="1467429"/>
-                  </a:lnTo>
-                  <a:lnTo>
-                    <a:pt x="5944669" y="1460301"/>
-                  </a:lnTo>
-                  <a:lnTo>
-                    <a:pt x="5873047" y="1452841"/>
-                  </a:lnTo>
-                  <a:lnTo>
-                    <a:pt x="5801424" y="1445035"/>
-                  </a:lnTo>
-                  <a:lnTo>
-                    <a:pt x="5729802" y="1436866"/>
-                  </a:lnTo>
-                  <a:lnTo>
-                    <a:pt x="5658179" y="1428318"/>
-                  </a:lnTo>
-                  <a:lnTo>
-                    <a:pt x="5586557" y="1419372"/>
-                  </a:lnTo>
-                  <a:lnTo>
-                    <a:pt x="5514934" y="1410011"/>
-                  </a:lnTo>
-                  <a:lnTo>
-                    <a:pt x="5443311" y="1400215"/>
-                  </a:lnTo>
-                  <a:lnTo>
-                    <a:pt x="5371689" y="1389964"/>
-                  </a:lnTo>
-                  <a:lnTo>
-                    <a:pt x="5300066" y="1379236"/>
-                  </a:lnTo>
-                  <a:lnTo>
-                    <a:pt x="5228444" y="1368010"/>
-                  </a:lnTo>
-                  <a:lnTo>
-                    <a:pt x="5156821" y="1356262"/>
-                  </a:lnTo>
-                  <a:lnTo>
-                    <a:pt x="5085199" y="1343968"/>
-                  </a:lnTo>
-                  <a:lnTo>
-                    <a:pt x="5013576" y="1331104"/>
-                  </a:lnTo>
-                  <a:lnTo>
-                    <a:pt x="4941954" y="1317641"/>
-                  </a:lnTo>
-                  <a:lnTo>
-                    <a:pt x="4870331" y="1303553"/>
-                  </a:lnTo>
-                  <a:lnTo>
-                    <a:pt x="4798709" y="1288810"/>
-                  </a:lnTo>
-                  <a:lnTo>
-                    <a:pt x="4727086" y="1273382"/>
-                  </a:lnTo>
-                  <a:lnTo>
-                    <a:pt x="4655464" y="1257238"/>
-                  </a:lnTo>
-                  <a:lnTo>
-                    <a:pt x="4583841" y="1240343"/>
-                  </a:lnTo>
-                  <a:lnTo>
-                    <a:pt x="4512219" y="1222663"/>
-                  </a:lnTo>
-                  <a:lnTo>
-                    <a:pt x="4440596" y="1204162"/>
-                  </a:lnTo>
-                  <a:lnTo>
-                    <a:pt x="4368974" y="1184801"/>
-                  </a:lnTo>
-                  <a:lnTo>
-                    <a:pt x="4297351" y="1164541"/>
-                  </a:lnTo>
-                  <a:lnTo>
-                    <a:pt x="4225729" y="1143339"/>
-                  </a:lnTo>
-                  <a:lnTo>
-                    <a:pt x="4154106" y="1121152"/>
-                  </a:lnTo>
-                  <a:lnTo>
-                    <a:pt x="4082483" y="1097934"/>
-                  </a:lnTo>
-                  <a:lnTo>
-                    <a:pt x="4010861" y="1073638"/>
-                  </a:lnTo>
-                  <a:lnTo>
-                    <a:pt x="3939238" y="1048212"/>
-                  </a:lnTo>
-                  <a:lnTo>
-                    <a:pt x="3867616" y="1021605"/>
-                  </a:lnTo>
-                  <a:lnTo>
-                    <a:pt x="3795993" y="993762"/>
-                  </a:lnTo>
-                  <a:lnTo>
-                    <a:pt x="3724371" y="964625"/>
-                  </a:lnTo>
-                  <a:lnTo>
-                    <a:pt x="3652748" y="934134"/>
-                  </a:lnTo>
-                  <a:lnTo>
-                    <a:pt x="3581126" y="902226"/>
-                  </a:lnTo>
-                  <a:lnTo>
-                    <a:pt x="3509503" y="868836"/>
-                  </a:lnTo>
-                  <a:lnTo>
-                    <a:pt x="3437881" y="833895"/>
-                  </a:lnTo>
-                  <a:lnTo>
-                    <a:pt x="3366258" y="797330"/>
-                  </a:lnTo>
-                  <a:lnTo>
-                    <a:pt x="3294636" y="781337"/>
-                  </a:lnTo>
-                  <a:lnTo>
-                    <a:pt x="3223013" y="769244"/>
-                  </a:lnTo>
-                  <a:lnTo>
-                    <a:pt x="3151391" y="756977"/>
-                  </a:lnTo>
-                  <a:lnTo>
-                    <a:pt x="3079768" y="744533"/>
-                  </a:lnTo>
-                  <a:lnTo>
-                    <a:pt x="3008146" y="731910"/>
-                  </a:lnTo>
-                  <a:lnTo>
-                    <a:pt x="2936523" y="719106"/>
-                  </a:lnTo>
-                  <a:lnTo>
-                    <a:pt x="2864901" y="706116"/>
-                  </a:lnTo>
-                  <a:lnTo>
-                    <a:pt x="2793278" y="692940"/>
-                  </a:lnTo>
-                  <a:lnTo>
-                    <a:pt x="2721655" y="679574"/>
-                  </a:lnTo>
-                  <a:lnTo>
-                    <a:pt x="2650033" y="666015"/>
-                  </a:lnTo>
-                  <a:lnTo>
-                    <a:pt x="2578410" y="652261"/>
-                  </a:lnTo>
-                  <a:lnTo>
-                    <a:pt x="2506788" y="638309"/>
-                  </a:lnTo>
-                  <a:lnTo>
-                    <a:pt x="2435165" y="624156"/>
-                  </a:lnTo>
-                  <a:lnTo>
-                    <a:pt x="2363543" y="609799"/>
-                  </a:lnTo>
-                  <a:lnTo>
-                    <a:pt x="2291920" y="595235"/>
-                  </a:lnTo>
-                  <a:lnTo>
-                    <a:pt x="2220298" y="580462"/>
-                  </a:lnTo>
-                  <a:lnTo>
-                    <a:pt x="2148675" y="565475"/>
-                  </a:lnTo>
-                  <a:lnTo>
-                    <a:pt x="2077053" y="550273"/>
-                  </a:lnTo>
-                  <a:lnTo>
-                    <a:pt x="2005430" y="534852"/>
-                  </a:lnTo>
-                  <a:lnTo>
-                    <a:pt x="1933808" y="519209"/>
-                  </a:lnTo>
-                  <a:lnTo>
-                    <a:pt x="1862185" y="503340"/>
-                  </a:lnTo>
-                  <a:lnTo>
-                    <a:pt x="1790563" y="487243"/>
-                  </a:lnTo>
-                  <a:lnTo>
-                    <a:pt x="1718940" y="470914"/>
-                  </a:lnTo>
-                  <a:lnTo>
-                    <a:pt x="1647318" y="454349"/>
-                  </a:lnTo>
-                  <a:lnTo>
-                    <a:pt x="1575695" y="437546"/>
-                  </a:lnTo>
-                  <a:lnTo>
-                    <a:pt x="1504073" y="420501"/>
-                  </a:lnTo>
-                  <a:lnTo>
-                    <a:pt x="1432450" y="403211"/>
-                  </a:lnTo>
-                  <a:lnTo>
-                    <a:pt x="1360827" y="385671"/>
-                  </a:lnTo>
-                  <a:lnTo>
-                    <a:pt x="1289205" y="367879"/>
-                  </a:lnTo>
-                  <a:lnTo>
-                    <a:pt x="1217582" y="349830"/>
-                  </a:lnTo>
-                  <a:lnTo>
-                    <a:pt x="1145960" y="331522"/>
-                  </a:lnTo>
-                  <a:lnTo>
-                    <a:pt x="1074337" y="312949"/>
-                  </a:lnTo>
-                  <a:lnTo>
-                    <a:pt x="1002715" y="294110"/>
-                  </a:lnTo>
-                  <a:lnTo>
-                    <a:pt x="931092" y="274998"/>
-                  </a:lnTo>
-                  <a:lnTo>
-                    <a:pt x="859470" y="255612"/>
-                  </a:lnTo>
-                  <a:lnTo>
-                    <a:pt x="787847" y="235946"/>
-                  </a:lnTo>
-                  <a:lnTo>
-                    <a:pt x="716225" y="215997"/>
-                  </a:lnTo>
-                  <a:lnTo>
-                    <a:pt x="644602" y="195761"/>
-                  </a:lnTo>
-                  <a:lnTo>
-                    <a:pt x="572980" y="175233"/>
-                  </a:lnTo>
-                  <a:lnTo>
-                    <a:pt x="501357" y="154410"/>
-                  </a:lnTo>
-                  <a:lnTo>
-                    <a:pt x="429735" y="133286"/>
-                  </a:lnTo>
-                  <a:lnTo>
-                    <a:pt x="358112" y="111858"/>
-                  </a:lnTo>
-                  <a:lnTo>
-                    <a:pt x="286490" y="90122"/>
-                  </a:lnTo>
-                  <a:lnTo>
-                    <a:pt x="214867" y="68072"/>
-                  </a:lnTo>
-                  <a:lnTo>
-                    <a:pt x="143245" y="45705"/>
-                  </a:lnTo>
-                  <a:lnTo>
-                    <a:pt x="71622" y="23016"/>
-                  </a:lnTo>
-                  <a:lnTo>
-                    <a:pt x="0" y="0"/>
+                    <a:pt x="52905" y="42450"/>
+                  </a:lnTo>
+                  <a:lnTo>
+                    <a:pt x="123249" y="96386"/>
+                  </a:lnTo>
+                  <a:lnTo>
+                    <a:pt x="193594" y="147928"/>
+                  </a:lnTo>
+                  <a:lnTo>
+                    <a:pt x="263938" y="197181"/>
+                  </a:lnTo>
+                  <a:lnTo>
+                    <a:pt x="334283" y="244247"/>
+                  </a:lnTo>
+                  <a:lnTo>
+                    <a:pt x="404627" y="289224"/>
+                  </a:lnTo>
+                  <a:lnTo>
+                    <a:pt x="474972" y="332203"/>
+                  </a:lnTo>
+                  <a:lnTo>
+                    <a:pt x="545316" y="373275"/>
+                  </a:lnTo>
+                  <a:lnTo>
+                    <a:pt x="615661" y="412522"/>
+                  </a:lnTo>
+                  <a:lnTo>
+                    <a:pt x="686005" y="450027"/>
+                  </a:lnTo>
+                  <a:lnTo>
+                    <a:pt x="756350" y="485867"/>
+                  </a:lnTo>
+                  <a:lnTo>
+                    <a:pt x="826694" y="520115"/>
+                  </a:lnTo>
+                  <a:lnTo>
+                    <a:pt x="897039" y="552843"/>
+                  </a:lnTo>
+                  <a:lnTo>
+                    <a:pt x="967383" y="584117"/>
+                  </a:lnTo>
+                  <a:lnTo>
+                    <a:pt x="1037728" y="614003"/>
+                  </a:lnTo>
+                  <a:lnTo>
+                    <a:pt x="1108072" y="642562"/>
+                  </a:lnTo>
+                  <a:lnTo>
+                    <a:pt x="1178417" y="669853"/>
+                  </a:lnTo>
+                  <a:lnTo>
+                    <a:pt x="1248761" y="695932"/>
+                  </a:lnTo>
+                  <a:lnTo>
+                    <a:pt x="1319106" y="720853"/>
+                  </a:lnTo>
+                  <a:lnTo>
+                    <a:pt x="1389450" y="744667"/>
+                  </a:lnTo>
+                  <a:lnTo>
+                    <a:pt x="1459795" y="767425"/>
+                  </a:lnTo>
+                  <a:lnTo>
+                    <a:pt x="1530139" y="789171"/>
+                  </a:lnTo>
+                  <a:lnTo>
+                    <a:pt x="1600484" y="809953"/>
+                  </a:lnTo>
+                  <a:lnTo>
+                    <a:pt x="1670828" y="829811"/>
+                  </a:lnTo>
+                  <a:lnTo>
+                    <a:pt x="1741173" y="848788"/>
+                  </a:lnTo>
+                  <a:lnTo>
+                    <a:pt x="1811517" y="866922"/>
+                  </a:lnTo>
+                  <a:lnTo>
+                    <a:pt x="1881862" y="884251"/>
+                  </a:lnTo>
+                  <a:lnTo>
+                    <a:pt x="1952206" y="900810"/>
+                  </a:lnTo>
+                  <a:lnTo>
+                    <a:pt x="2022551" y="916635"/>
+                  </a:lnTo>
+                  <a:lnTo>
+                    <a:pt x="2092895" y="931756"/>
+                  </a:lnTo>
+                  <a:lnTo>
+                    <a:pt x="2163240" y="946206"/>
+                  </a:lnTo>
+                  <a:lnTo>
+                    <a:pt x="2233584" y="958546"/>
+                  </a:lnTo>
+                  <a:lnTo>
+                    <a:pt x="2303929" y="962787"/>
+                  </a:lnTo>
+                  <a:lnTo>
+                    <a:pt x="2374273" y="966967"/>
+                  </a:lnTo>
+                  <a:lnTo>
+                    <a:pt x="2444618" y="971089"/>
+                  </a:lnTo>
+                  <a:lnTo>
+                    <a:pt x="2514962" y="975152"/>
+                  </a:lnTo>
+                  <a:lnTo>
+                    <a:pt x="2585307" y="979157"/>
+                  </a:lnTo>
+                  <a:lnTo>
+                    <a:pt x="2655651" y="983105"/>
+                  </a:lnTo>
+                  <a:lnTo>
+                    <a:pt x="2725996" y="986997"/>
+                  </a:lnTo>
+                  <a:lnTo>
+                    <a:pt x="2796340" y="990834"/>
+                  </a:lnTo>
+                  <a:lnTo>
+                    <a:pt x="2866685" y="994617"/>
+                  </a:lnTo>
+                  <a:lnTo>
+                    <a:pt x="2937029" y="998345"/>
+                  </a:lnTo>
+                  <a:lnTo>
+                    <a:pt x="3007373" y="1002021"/>
+                  </a:lnTo>
+                  <a:lnTo>
+                    <a:pt x="3077718" y="1005645"/>
+                  </a:lnTo>
+                  <a:lnTo>
+                    <a:pt x="3148062" y="1009217"/>
+                  </a:lnTo>
+                  <a:lnTo>
+                    <a:pt x="3218407" y="1012738"/>
+                  </a:lnTo>
+                  <a:lnTo>
+                    <a:pt x="3288751" y="1016210"/>
+                  </a:lnTo>
+                  <a:lnTo>
+                    <a:pt x="3359096" y="1019632"/>
+                  </a:lnTo>
+                  <a:lnTo>
+                    <a:pt x="3429440" y="1023005"/>
+                  </a:lnTo>
+                  <a:lnTo>
+                    <a:pt x="3499785" y="1026331"/>
+                  </a:lnTo>
+                  <a:lnTo>
+                    <a:pt x="3570129" y="1029609"/>
+                  </a:lnTo>
+                  <a:lnTo>
+                    <a:pt x="3640474" y="1032841"/>
+                  </a:lnTo>
+                  <a:lnTo>
+                    <a:pt x="3710818" y="1036027"/>
+                  </a:lnTo>
+                  <a:lnTo>
+                    <a:pt x="3781163" y="1039168"/>
+                  </a:lnTo>
+                  <a:lnTo>
+                    <a:pt x="3851507" y="1042264"/>
+                  </a:lnTo>
+                  <a:lnTo>
+                    <a:pt x="3921852" y="1045316"/>
+                  </a:lnTo>
+                  <a:lnTo>
+                    <a:pt x="3992196" y="1048325"/>
+                  </a:lnTo>
+                  <a:lnTo>
+                    <a:pt x="4062541" y="1051291"/>
+                  </a:lnTo>
+                  <a:lnTo>
+                    <a:pt x="4132885" y="1054215"/>
+                  </a:lnTo>
+                  <a:lnTo>
+                    <a:pt x="4203230" y="1057097"/>
+                  </a:lnTo>
+                  <a:lnTo>
+                    <a:pt x="4273574" y="1059939"/>
+                  </a:lnTo>
+                  <a:lnTo>
+                    <a:pt x="4343919" y="1062740"/>
+                  </a:lnTo>
+                  <a:lnTo>
+                    <a:pt x="4414263" y="1065501"/>
+                  </a:lnTo>
+                  <a:lnTo>
+                    <a:pt x="4484608" y="1068224"/>
+                  </a:lnTo>
+                  <a:lnTo>
+                    <a:pt x="4554952" y="1070907"/>
+                  </a:lnTo>
+                  <a:lnTo>
+                    <a:pt x="4625297" y="1073553"/>
+                  </a:lnTo>
+                  <a:lnTo>
+                    <a:pt x="4695641" y="1076160"/>
+                  </a:lnTo>
+                  <a:lnTo>
+                    <a:pt x="4765986" y="1078731"/>
+                  </a:lnTo>
+                  <a:lnTo>
+                    <a:pt x="4836330" y="1081266"/>
+                  </a:lnTo>
+                  <a:lnTo>
+                    <a:pt x="4906675" y="1083764"/>
+                  </a:lnTo>
+                  <a:lnTo>
+                    <a:pt x="4977019" y="1086227"/>
+                  </a:lnTo>
+                  <a:lnTo>
+                    <a:pt x="5047364" y="1088655"/>
+                  </a:lnTo>
+                  <a:lnTo>
+                    <a:pt x="5117708" y="1091048"/>
+                  </a:lnTo>
+                  <a:lnTo>
+                    <a:pt x="5188053" y="1093407"/>
+                  </a:lnTo>
+                  <a:lnTo>
+                    <a:pt x="5258397" y="1095733"/>
+                  </a:lnTo>
+                  <a:lnTo>
+                    <a:pt x="5328742" y="1098026"/>
+                  </a:lnTo>
+                  <a:lnTo>
+                    <a:pt x="5399086" y="1100286"/>
+                  </a:lnTo>
+                  <a:lnTo>
+                    <a:pt x="5469431" y="1102515"/>
+                  </a:lnTo>
+                  <a:lnTo>
+                    <a:pt x="5539775" y="1104711"/>
+                  </a:lnTo>
+                  <a:lnTo>
+                    <a:pt x="5610120" y="1106877"/>
+                  </a:lnTo>
+                  <a:lnTo>
+                    <a:pt x="5680464" y="1109011"/>
+                  </a:lnTo>
+                  <a:lnTo>
+                    <a:pt x="5750809" y="1111116"/>
+                  </a:lnTo>
+                  <a:lnTo>
+                    <a:pt x="5821153" y="1113190"/>
+                  </a:lnTo>
+                  <a:lnTo>
+                    <a:pt x="5891498" y="1115235"/>
                   </a:lnTo>
                 </a:path>
               </a:pathLst>
@@ -4150,312 +3860,637 @@
           </p:nvSpPr>
           <p:spPr>
             <a:xfrm>
-              <a:off x="1172049" y="2198088"/>
-              <a:ext cx="7090630" cy="3184412"/>
+              <a:off x="1235312" y="2815369"/>
+              <a:ext cx="6964104" cy="556911"/>
             </a:xfrm>
             <a:custGeom>
               <a:avLst/>
               <a:pathLst>
-                <a:path w="7090630" h="3184412">
+                <a:path w="6964104" h="556911">
+                  <a:moveTo>
+                    <a:pt x="6964104" y="556911"/>
+                  </a:moveTo>
+                  <a:lnTo>
+                    <a:pt x="6893760" y="555609"/>
+                  </a:lnTo>
+                  <a:lnTo>
+                    <a:pt x="6823415" y="554247"/>
+                  </a:lnTo>
+                  <a:lnTo>
+                    <a:pt x="6753071" y="552822"/>
+                  </a:lnTo>
+                  <a:lnTo>
+                    <a:pt x="6682726" y="551330"/>
+                  </a:lnTo>
+                  <a:lnTo>
+                    <a:pt x="6612382" y="549770"/>
+                  </a:lnTo>
+                  <a:lnTo>
+                    <a:pt x="6542037" y="548136"/>
+                  </a:lnTo>
+                  <a:lnTo>
+                    <a:pt x="6471693" y="546427"/>
+                  </a:lnTo>
+                  <a:lnTo>
+                    <a:pt x="6401348" y="544638"/>
+                  </a:lnTo>
+                  <a:lnTo>
+                    <a:pt x="6331004" y="542766"/>
+                  </a:lnTo>
+                  <a:lnTo>
+                    <a:pt x="6260659" y="540807"/>
+                  </a:lnTo>
+                  <a:lnTo>
+                    <a:pt x="6190315" y="538757"/>
+                  </a:lnTo>
+                  <a:lnTo>
+                    <a:pt x="6119970" y="536612"/>
+                  </a:lnTo>
+                  <a:lnTo>
+                    <a:pt x="6049626" y="534368"/>
+                  </a:lnTo>
+                  <a:lnTo>
+                    <a:pt x="5979281" y="532019"/>
+                  </a:lnTo>
+                  <a:lnTo>
+                    <a:pt x="5908937" y="529560"/>
+                  </a:lnTo>
+                  <a:lnTo>
+                    <a:pt x="5838592" y="526988"/>
+                  </a:lnTo>
+                  <a:lnTo>
+                    <a:pt x="5768248" y="524296"/>
+                  </a:lnTo>
+                  <a:lnTo>
+                    <a:pt x="5697903" y="521479"/>
+                  </a:lnTo>
+                  <a:lnTo>
+                    <a:pt x="5627559" y="518531"/>
+                  </a:lnTo>
+                  <a:lnTo>
+                    <a:pt x="5557214" y="515446"/>
+                  </a:lnTo>
+                  <a:lnTo>
+                    <a:pt x="5486870" y="512218"/>
+                  </a:lnTo>
+                  <a:lnTo>
+                    <a:pt x="5416525" y="508840"/>
+                  </a:lnTo>
+                  <a:lnTo>
+                    <a:pt x="5346181" y="505304"/>
+                  </a:lnTo>
+                  <a:lnTo>
+                    <a:pt x="5275836" y="501605"/>
+                  </a:lnTo>
+                  <a:lnTo>
+                    <a:pt x="5205492" y="497733"/>
+                  </a:lnTo>
+                  <a:lnTo>
+                    <a:pt x="5135147" y="493682"/>
+                  </a:lnTo>
+                  <a:lnTo>
+                    <a:pt x="5064803" y="489443"/>
+                  </a:lnTo>
+                  <a:lnTo>
+                    <a:pt x="4994458" y="485006"/>
+                  </a:lnTo>
+                  <a:lnTo>
+                    <a:pt x="4924114" y="480364"/>
+                  </a:lnTo>
+                  <a:lnTo>
+                    <a:pt x="4853769" y="475505"/>
+                  </a:lnTo>
+                  <a:lnTo>
+                    <a:pt x="4783425" y="470421"/>
+                  </a:lnTo>
+                  <a:lnTo>
+                    <a:pt x="4713080" y="465101"/>
+                  </a:lnTo>
+                  <a:lnTo>
+                    <a:pt x="4642736" y="459533"/>
+                  </a:lnTo>
+                  <a:lnTo>
+                    <a:pt x="4572391" y="453707"/>
+                  </a:lnTo>
+                  <a:lnTo>
+                    <a:pt x="4502047" y="447610"/>
+                  </a:lnTo>
+                  <a:lnTo>
+                    <a:pt x="4431702" y="441230"/>
+                  </a:lnTo>
+                  <a:lnTo>
+                    <a:pt x="4361358" y="434553"/>
+                  </a:lnTo>
+                  <a:lnTo>
+                    <a:pt x="4291013" y="427567"/>
+                  </a:lnTo>
+                  <a:lnTo>
+                    <a:pt x="4220669" y="420255"/>
+                  </a:lnTo>
+                  <a:lnTo>
+                    <a:pt x="4150324" y="412604"/>
+                  </a:lnTo>
+                  <a:lnTo>
+                    <a:pt x="4079980" y="404597"/>
+                  </a:lnTo>
+                  <a:lnTo>
+                    <a:pt x="4009635" y="396218"/>
+                  </a:lnTo>
+                  <a:lnTo>
+                    <a:pt x="3939291" y="387450"/>
+                  </a:lnTo>
+                  <a:lnTo>
+                    <a:pt x="3868946" y="378275"/>
+                  </a:lnTo>
+                  <a:lnTo>
+                    <a:pt x="3798602" y="368673"/>
+                  </a:lnTo>
+                  <a:lnTo>
+                    <a:pt x="3728257" y="358625"/>
+                  </a:lnTo>
+                  <a:lnTo>
+                    <a:pt x="3657913" y="348110"/>
+                  </a:lnTo>
+                  <a:lnTo>
+                    <a:pt x="3587569" y="337107"/>
+                  </a:lnTo>
+                  <a:lnTo>
+                    <a:pt x="3517224" y="325592"/>
+                  </a:lnTo>
+                  <a:lnTo>
+                    <a:pt x="3446880" y="313542"/>
+                  </a:lnTo>
+                  <a:lnTo>
+                    <a:pt x="3376535" y="300933"/>
+                  </a:lnTo>
+                  <a:lnTo>
+                    <a:pt x="3306191" y="287737"/>
+                  </a:lnTo>
+                  <a:lnTo>
+                    <a:pt x="3235846" y="281966"/>
+                  </a:lnTo>
+                  <a:lnTo>
+                    <a:pt x="3165502" y="277602"/>
+                  </a:lnTo>
+                  <a:lnTo>
+                    <a:pt x="3095157" y="273175"/>
+                  </a:lnTo>
+                  <a:lnTo>
+                    <a:pt x="3024813" y="268684"/>
+                  </a:lnTo>
+                  <a:lnTo>
+                    <a:pt x="2954468" y="264129"/>
+                  </a:lnTo>
+                  <a:lnTo>
+                    <a:pt x="2884124" y="259508"/>
+                  </a:lnTo>
+                  <a:lnTo>
+                    <a:pt x="2813779" y="254820"/>
+                  </a:lnTo>
+                  <a:lnTo>
+                    <a:pt x="2743435" y="250065"/>
+                  </a:lnTo>
+                  <a:lnTo>
+                    <a:pt x="2673090" y="245242"/>
+                  </a:lnTo>
+                  <a:lnTo>
+                    <a:pt x="2602746" y="240349"/>
+                  </a:lnTo>
+                  <a:lnTo>
+                    <a:pt x="2532401" y="235385"/>
+                  </a:lnTo>
+                  <a:lnTo>
+                    <a:pt x="2462057" y="230350"/>
+                  </a:lnTo>
+                  <a:lnTo>
+                    <a:pt x="2391712" y="225243"/>
+                  </a:lnTo>
+                  <a:lnTo>
+                    <a:pt x="2321368" y="220062"/>
+                  </a:lnTo>
+                  <a:lnTo>
+                    <a:pt x="2251023" y="214806"/>
+                  </a:lnTo>
+                  <a:lnTo>
+                    <a:pt x="2180679" y="209475"/>
+                  </a:lnTo>
+                  <a:lnTo>
+                    <a:pt x="2110334" y="204066"/>
+                  </a:lnTo>
+                  <a:lnTo>
+                    <a:pt x="2039990" y="198580"/>
+                  </a:lnTo>
+                  <a:lnTo>
+                    <a:pt x="1969645" y="193015"/>
+                  </a:lnTo>
+                  <a:lnTo>
+                    <a:pt x="1899301" y="187370"/>
+                  </a:lnTo>
+                  <a:lnTo>
+                    <a:pt x="1828956" y="181643"/>
+                  </a:lnTo>
+                  <a:lnTo>
+                    <a:pt x="1758612" y="175834"/>
+                  </a:lnTo>
+                  <a:lnTo>
+                    <a:pt x="1688267" y="169941"/>
+                  </a:lnTo>
+                  <a:lnTo>
+                    <a:pt x="1617923" y="163964"/>
+                  </a:lnTo>
+                  <a:lnTo>
+                    <a:pt x="1547578" y="157900"/>
+                  </a:lnTo>
+                  <a:lnTo>
+                    <a:pt x="1477234" y="151749"/>
+                  </a:lnTo>
+                  <a:lnTo>
+                    <a:pt x="1406889" y="145509"/>
+                  </a:lnTo>
+                  <a:lnTo>
+                    <a:pt x="1336545" y="139179"/>
+                  </a:lnTo>
+                  <a:lnTo>
+                    <a:pt x="1266200" y="132758"/>
+                  </a:lnTo>
+                  <a:lnTo>
+                    <a:pt x="1195856" y="126245"/>
+                  </a:lnTo>
+                  <a:lnTo>
+                    <a:pt x="1125511" y="119638"/>
+                  </a:lnTo>
+                  <a:lnTo>
+                    <a:pt x="1055167" y="112936"/>
+                  </a:lnTo>
+                  <a:lnTo>
+                    <a:pt x="984822" y="106137"/>
+                  </a:lnTo>
+                  <a:lnTo>
+                    <a:pt x="914478" y="99240"/>
+                  </a:lnTo>
+                  <a:lnTo>
+                    <a:pt x="844133" y="92244"/>
+                  </a:lnTo>
+                  <a:lnTo>
+                    <a:pt x="773789" y="85147"/>
+                  </a:lnTo>
+                  <a:lnTo>
+                    <a:pt x="703444" y="77948"/>
+                  </a:lnTo>
+                  <a:lnTo>
+                    <a:pt x="633100" y="70645"/>
+                  </a:lnTo>
+                  <a:lnTo>
+                    <a:pt x="562755" y="63237"/>
+                  </a:lnTo>
+                  <a:lnTo>
+                    <a:pt x="492411" y="55722"/>
+                  </a:lnTo>
+                  <a:lnTo>
+                    <a:pt x="422066" y="48099"/>
+                  </a:lnTo>
+                  <a:lnTo>
+                    <a:pt x="351722" y="40367"/>
+                  </a:lnTo>
+                  <a:lnTo>
+                    <a:pt x="281377" y="32523"/>
+                  </a:lnTo>
+                  <a:lnTo>
+                    <a:pt x="211033" y="24565"/>
+                  </a:lnTo>
+                  <a:lnTo>
+                    <a:pt x="140688" y="16494"/>
+                  </a:lnTo>
+                  <a:lnTo>
+                    <a:pt x="70344" y="8306"/>
+                  </a:lnTo>
+                  <a:lnTo>
+                    <a:pt x="0" y="0"/>
+                  </a:lnTo>
+                </a:path>
+              </a:pathLst>
+            </a:custGeom>
+          </p:spPr>
+          <p:txBody>
+            <a:bodyPr/>
+            <a:lstStyle/>
+            <a:p/>
+          </p:txBody>
+        </p:sp>
+        <p:sp>
+          <p:nvSpPr>
+            <p:cNvPr id="24" name="pl24"/>
+            <p:cNvSpPr/>
+            <p:nvPr/>
+          </p:nvSpPr>
+          <p:spPr>
+            <a:xfrm>
+              <a:off x="1235312" y="2188052"/>
+              <a:ext cx="6964104" cy="1149179"/>
+            </a:xfrm>
+            <a:custGeom>
+              <a:avLst/>
+              <a:pathLst>
+                <a:path w="6964104" h="1149179">
                   <a:moveTo>
                     <a:pt x="0" y="0"/>
                   </a:moveTo>
                   <a:lnTo>
-                    <a:pt x="71622" y="98820"/>
-                  </a:lnTo>
-                  <a:lnTo>
-                    <a:pt x="143245" y="194733"/>
-                  </a:lnTo>
-                  <a:lnTo>
-                    <a:pt x="214867" y="287825"/>
-                  </a:lnTo>
-                  <a:lnTo>
-                    <a:pt x="286490" y="378178"/>
-                  </a:lnTo>
-                  <a:lnTo>
-                    <a:pt x="358112" y="465873"/>
-                  </a:lnTo>
-                  <a:lnTo>
-                    <a:pt x="429735" y="550989"/>
-                  </a:lnTo>
-                  <a:lnTo>
-                    <a:pt x="501357" y="633600"/>
-                  </a:lnTo>
-                  <a:lnTo>
-                    <a:pt x="572980" y="713781"/>
-                  </a:lnTo>
-                  <a:lnTo>
-                    <a:pt x="644602" y="791603"/>
-                  </a:lnTo>
-                  <a:lnTo>
-                    <a:pt x="716225" y="867136"/>
-                  </a:lnTo>
-                  <a:lnTo>
-                    <a:pt x="787847" y="940447"/>
-                  </a:lnTo>
-                  <a:lnTo>
-                    <a:pt x="859470" y="1011601"/>
-                  </a:lnTo>
-                  <a:lnTo>
-                    <a:pt x="931092" y="1080662"/>
-                  </a:lnTo>
-                  <a:lnTo>
-                    <a:pt x="1002715" y="1147691"/>
-                  </a:lnTo>
-                  <a:lnTo>
-                    <a:pt x="1074337" y="1212749"/>
-                  </a:lnTo>
-                  <a:lnTo>
-                    <a:pt x="1145960" y="1275892"/>
-                  </a:lnTo>
-                  <a:lnTo>
-                    <a:pt x="1217582" y="1337178"/>
-                  </a:lnTo>
-                  <a:lnTo>
-                    <a:pt x="1289205" y="1396661"/>
-                  </a:lnTo>
-                  <a:lnTo>
-                    <a:pt x="1360827" y="1454395"/>
-                  </a:lnTo>
-                  <a:lnTo>
-                    <a:pt x="1432450" y="1510429"/>
-                  </a:lnTo>
-                  <a:lnTo>
-                    <a:pt x="1504073" y="1564816"/>
-                  </a:lnTo>
-                  <a:lnTo>
-                    <a:pt x="1575695" y="1617602"/>
-                  </a:lnTo>
-                  <a:lnTo>
-                    <a:pt x="1647318" y="1668836"/>
-                  </a:lnTo>
-                  <a:lnTo>
-                    <a:pt x="1718940" y="1718562"/>
-                  </a:lnTo>
-                  <a:lnTo>
-                    <a:pt x="1790563" y="1766825"/>
-                  </a:lnTo>
-                  <a:lnTo>
-                    <a:pt x="1862185" y="1813669"/>
-                  </a:lnTo>
-                  <a:lnTo>
-                    <a:pt x="1933808" y="1859135"/>
-                  </a:lnTo>
-                  <a:lnTo>
-                    <a:pt x="2005430" y="1903263"/>
-                  </a:lnTo>
-                  <a:lnTo>
-                    <a:pt x="2077053" y="1946093"/>
-                  </a:lnTo>
-                  <a:lnTo>
-                    <a:pt x="2148675" y="1987662"/>
-                  </a:lnTo>
-                  <a:lnTo>
-                    <a:pt x="2220298" y="2028009"/>
-                  </a:lnTo>
-                  <a:lnTo>
-                    <a:pt x="2291920" y="2067169"/>
-                  </a:lnTo>
-                  <a:lnTo>
-                    <a:pt x="2363543" y="2105178"/>
-                  </a:lnTo>
-                  <a:lnTo>
-                    <a:pt x="2435165" y="2142067"/>
-                  </a:lnTo>
-                  <a:lnTo>
-                    <a:pt x="2506788" y="2177872"/>
-                  </a:lnTo>
-                  <a:lnTo>
-                    <a:pt x="2578410" y="2212624"/>
-                  </a:lnTo>
-                  <a:lnTo>
-                    <a:pt x="2650033" y="2246353"/>
-                  </a:lnTo>
-                  <a:lnTo>
-                    <a:pt x="2721655" y="2279089"/>
-                  </a:lnTo>
-                  <a:lnTo>
-                    <a:pt x="2793278" y="2310863"/>
-                  </a:lnTo>
-                  <a:lnTo>
-                    <a:pt x="2864901" y="2341702"/>
-                  </a:lnTo>
-                  <a:lnTo>
-                    <a:pt x="2936523" y="2371634"/>
-                  </a:lnTo>
-                  <a:lnTo>
-                    <a:pt x="3008146" y="2400685"/>
-                  </a:lnTo>
-                  <a:lnTo>
-                    <a:pt x="3079768" y="2428882"/>
-                  </a:lnTo>
-                  <a:lnTo>
-                    <a:pt x="3151391" y="2456249"/>
-                  </a:lnTo>
-                  <a:lnTo>
-                    <a:pt x="3223013" y="2482811"/>
-                  </a:lnTo>
-                  <a:lnTo>
-                    <a:pt x="3294636" y="2508592"/>
-                  </a:lnTo>
-                  <a:lnTo>
-                    <a:pt x="3366258" y="2533614"/>
-                  </a:lnTo>
-                  <a:lnTo>
-                    <a:pt x="3437881" y="2557900"/>
-                  </a:lnTo>
-                  <a:lnTo>
-                    <a:pt x="3509503" y="2581472"/>
-                  </a:lnTo>
-                  <a:lnTo>
-                    <a:pt x="3581126" y="2604350"/>
-                  </a:lnTo>
-                  <a:lnTo>
-                    <a:pt x="3652748" y="2626555"/>
-                  </a:lnTo>
-                  <a:lnTo>
-                    <a:pt x="3724371" y="2648107"/>
-                  </a:lnTo>
-                  <a:lnTo>
-                    <a:pt x="3795993" y="2669025"/>
-                  </a:lnTo>
-                  <a:lnTo>
-                    <a:pt x="3867616" y="2689327"/>
-                  </a:lnTo>
-                  <a:lnTo>
-                    <a:pt x="3939238" y="2709033"/>
-                  </a:lnTo>
-                  <a:lnTo>
-                    <a:pt x="4010861" y="2728158"/>
-                  </a:lnTo>
-                  <a:lnTo>
-                    <a:pt x="4082483" y="2746721"/>
-                  </a:lnTo>
-                  <a:lnTo>
-                    <a:pt x="4154106" y="2764738"/>
-                  </a:lnTo>
-                  <a:lnTo>
-                    <a:pt x="4225729" y="2782225"/>
-                  </a:lnTo>
-                  <a:lnTo>
-                    <a:pt x="4297351" y="2799197"/>
-                  </a:lnTo>
-                  <a:lnTo>
-                    <a:pt x="4368974" y="2815670"/>
-                  </a:lnTo>
-                  <a:lnTo>
-                    <a:pt x="4440596" y="2831659"/>
-                  </a:lnTo>
-                  <a:lnTo>
-                    <a:pt x="4512219" y="2847177"/>
-                  </a:lnTo>
-                  <a:lnTo>
-                    <a:pt x="4583841" y="2862239"/>
-                  </a:lnTo>
-                  <a:lnTo>
-                    <a:pt x="4655464" y="2876857"/>
-                  </a:lnTo>
-                  <a:lnTo>
-                    <a:pt x="4727086" y="2891046"/>
-                  </a:lnTo>
-                  <a:lnTo>
-                    <a:pt x="4798709" y="2904817"/>
-                  </a:lnTo>
-                  <a:lnTo>
-                    <a:pt x="4870331" y="2918183"/>
-                  </a:lnTo>
-                  <a:lnTo>
-                    <a:pt x="4941954" y="2931156"/>
-                  </a:lnTo>
-                  <a:lnTo>
-                    <a:pt x="5013576" y="2943747"/>
-                  </a:lnTo>
-                  <a:lnTo>
-                    <a:pt x="5085199" y="2955967"/>
-                  </a:lnTo>
-                  <a:lnTo>
-                    <a:pt x="5156821" y="2967829"/>
-                  </a:lnTo>
-                  <a:lnTo>
-                    <a:pt x="5228444" y="2979341"/>
-                  </a:lnTo>
-                  <a:lnTo>
-                    <a:pt x="5300066" y="2990515"/>
-                  </a:lnTo>
-                  <a:lnTo>
-                    <a:pt x="5371689" y="3001359"/>
-                  </a:lnTo>
-                  <a:lnTo>
-                    <a:pt x="5443311" y="3011885"/>
-                  </a:lnTo>
-                  <a:lnTo>
-                    <a:pt x="5514934" y="3022102"/>
-                  </a:lnTo>
-                  <a:lnTo>
-                    <a:pt x="5586557" y="3032017"/>
-                  </a:lnTo>
-                  <a:lnTo>
-                    <a:pt x="5658179" y="3041641"/>
-                  </a:lnTo>
-                  <a:lnTo>
-                    <a:pt x="5729802" y="3050982"/>
-                  </a:lnTo>
-                  <a:lnTo>
-                    <a:pt x="5801424" y="3060048"/>
-                  </a:lnTo>
-                  <a:lnTo>
-                    <a:pt x="5873047" y="3068847"/>
-                  </a:lnTo>
-                  <a:lnTo>
-                    <a:pt x="5944669" y="3077388"/>
-                  </a:lnTo>
-                  <a:lnTo>
-                    <a:pt x="6016292" y="3085677"/>
-                  </a:lnTo>
-                  <a:lnTo>
-                    <a:pt x="6087914" y="3093723"/>
-                  </a:lnTo>
-                  <a:lnTo>
-                    <a:pt x="6159537" y="3101531"/>
-                  </a:lnTo>
-                  <a:lnTo>
-                    <a:pt x="6231159" y="3109110"/>
-                  </a:lnTo>
-                  <a:lnTo>
-                    <a:pt x="6302782" y="3116466"/>
-                  </a:lnTo>
-                  <a:lnTo>
-                    <a:pt x="6374404" y="3123606"/>
-                  </a:lnTo>
-                  <a:lnTo>
-                    <a:pt x="6446027" y="3130536"/>
-                  </a:lnTo>
-                  <a:lnTo>
-                    <a:pt x="6517649" y="3137261"/>
-                  </a:lnTo>
-                  <a:lnTo>
-                    <a:pt x="6589272" y="3143789"/>
-                  </a:lnTo>
-                  <a:lnTo>
-                    <a:pt x="6660894" y="3150125"/>
-                  </a:lnTo>
-                  <a:lnTo>
-                    <a:pt x="6732517" y="3156274"/>
-                  </a:lnTo>
-                  <a:lnTo>
-                    <a:pt x="6804139" y="3162243"/>
-                  </a:lnTo>
-                  <a:lnTo>
-                    <a:pt x="6875762" y="3168036"/>
-                  </a:lnTo>
-                  <a:lnTo>
-                    <a:pt x="6947385" y="3173659"/>
-                  </a:lnTo>
-                  <a:lnTo>
-                    <a:pt x="7019007" y="3179116"/>
-                  </a:lnTo>
-                  <a:lnTo>
-                    <a:pt x="7090630" y="3184412"/>
+                    <a:pt x="70344" y="35661"/>
+                  </a:lnTo>
+                  <a:lnTo>
+                    <a:pt x="140688" y="70274"/>
+                  </a:lnTo>
+                  <a:lnTo>
+                    <a:pt x="211033" y="103869"/>
+                  </a:lnTo>
+                  <a:lnTo>
+                    <a:pt x="281377" y="136475"/>
+                  </a:lnTo>
+                  <a:lnTo>
+                    <a:pt x="351722" y="168122"/>
+                  </a:lnTo>
+                  <a:lnTo>
+                    <a:pt x="422066" y="198838"/>
+                  </a:lnTo>
+                  <a:lnTo>
+                    <a:pt x="492411" y="228651"/>
+                  </a:lnTo>
+                  <a:lnTo>
+                    <a:pt x="562755" y="257586"/>
+                  </a:lnTo>
+                  <a:lnTo>
+                    <a:pt x="633100" y="285671"/>
+                  </a:lnTo>
+                  <a:lnTo>
+                    <a:pt x="703444" y="312929"/>
+                  </a:lnTo>
+                  <a:lnTo>
+                    <a:pt x="773789" y="339385"/>
+                  </a:lnTo>
+                  <a:lnTo>
+                    <a:pt x="844133" y="365063"/>
+                  </a:lnTo>
+                  <a:lnTo>
+                    <a:pt x="914478" y="389985"/>
+                  </a:lnTo>
+                  <a:lnTo>
+                    <a:pt x="984822" y="414175"/>
+                  </a:lnTo>
+                  <a:lnTo>
+                    <a:pt x="1055167" y="437652"/>
+                  </a:lnTo>
+                  <a:lnTo>
+                    <a:pt x="1125511" y="460439"/>
+                  </a:lnTo>
+                  <a:lnTo>
+                    <a:pt x="1195856" y="482556"/>
+                  </a:lnTo>
+                  <a:lnTo>
+                    <a:pt x="1266200" y="504022"/>
+                  </a:lnTo>
+                  <a:lnTo>
+                    <a:pt x="1336545" y="524856"/>
+                  </a:lnTo>
+                  <a:lnTo>
+                    <a:pt x="1406889" y="545078"/>
+                  </a:lnTo>
+                  <a:lnTo>
+                    <a:pt x="1477234" y="564705"/>
+                  </a:lnTo>
+                  <a:lnTo>
+                    <a:pt x="1547578" y="583754"/>
+                  </a:lnTo>
+                  <a:lnTo>
+                    <a:pt x="1617923" y="602243"/>
+                  </a:lnTo>
+                  <a:lnTo>
+                    <a:pt x="1688267" y="620188"/>
+                  </a:lnTo>
+                  <a:lnTo>
+                    <a:pt x="1758612" y="637605"/>
+                  </a:lnTo>
+                  <a:lnTo>
+                    <a:pt x="1828956" y="654510"/>
+                  </a:lnTo>
+                  <a:lnTo>
+                    <a:pt x="1899301" y="670918"/>
+                  </a:lnTo>
+                  <a:lnTo>
+                    <a:pt x="1969645" y="686842"/>
+                  </a:lnTo>
+                  <a:lnTo>
+                    <a:pt x="2039990" y="702299"/>
+                  </a:lnTo>
+                  <a:lnTo>
+                    <a:pt x="2110334" y="717300"/>
+                  </a:lnTo>
+                  <a:lnTo>
+                    <a:pt x="2180679" y="731861"/>
+                  </a:lnTo>
+                  <a:lnTo>
+                    <a:pt x="2251023" y="745993"/>
+                  </a:lnTo>
+                  <a:lnTo>
+                    <a:pt x="2321368" y="759709"/>
+                  </a:lnTo>
+                  <a:lnTo>
+                    <a:pt x="2391712" y="773021"/>
+                  </a:lnTo>
+                  <a:lnTo>
+                    <a:pt x="2462057" y="785942"/>
+                  </a:lnTo>
+                  <a:lnTo>
+                    <a:pt x="2532401" y="798483"/>
+                  </a:lnTo>
+                  <a:lnTo>
+                    <a:pt x="2602746" y="810655"/>
+                  </a:lnTo>
+                  <a:lnTo>
+                    <a:pt x="2673090" y="822469"/>
+                  </a:lnTo>
+                  <a:lnTo>
+                    <a:pt x="2743435" y="833936"/>
+                  </a:lnTo>
+                  <a:lnTo>
+                    <a:pt x="2813779" y="845065"/>
+                  </a:lnTo>
+                  <a:lnTo>
+                    <a:pt x="2884124" y="855867"/>
+                  </a:lnTo>
+                  <a:lnTo>
+                    <a:pt x="2954468" y="866350"/>
+                  </a:lnTo>
+                  <a:lnTo>
+                    <a:pt x="3024813" y="876526"/>
+                  </a:lnTo>
+                  <a:lnTo>
+                    <a:pt x="3095157" y="886402"/>
+                  </a:lnTo>
+                  <a:lnTo>
+                    <a:pt x="3165502" y="895988"/>
+                  </a:lnTo>
+                  <a:lnTo>
+                    <a:pt x="3235846" y="905291"/>
+                  </a:lnTo>
+                  <a:lnTo>
+                    <a:pt x="3306191" y="914321"/>
+                  </a:lnTo>
+                  <a:lnTo>
+                    <a:pt x="3376535" y="923086"/>
+                  </a:lnTo>
+                  <a:lnTo>
+                    <a:pt x="3446880" y="931592"/>
+                  </a:lnTo>
+                  <a:lnTo>
+                    <a:pt x="3517224" y="939848"/>
+                  </a:lnTo>
+                  <a:lnTo>
+                    <a:pt x="3587569" y="947862"/>
+                  </a:lnTo>
+                  <a:lnTo>
+                    <a:pt x="3657913" y="955639"/>
+                  </a:lnTo>
+                  <a:lnTo>
+                    <a:pt x="3728257" y="963188"/>
+                  </a:lnTo>
+                  <a:lnTo>
+                    <a:pt x="3798602" y="970515"/>
+                  </a:lnTo>
+                  <a:lnTo>
+                    <a:pt x="3868946" y="977626"/>
+                  </a:lnTo>
+                  <a:lnTo>
+                    <a:pt x="3939291" y="984528"/>
+                  </a:lnTo>
+                  <a:lnTo>
+                    <a:pt x="4009635" y="991227"/>
+                  </a:lnTo>
+                  <a:lnTo>
+                    <a:pt x="4079980" y="997729"/>
+                  </a:lnTo>
+                  <a:lnTo>
+                    <a:pt x="4150324" y="1004039"/>
+                  </a:lnTo>
+                  <a:lnTo>
+                    <a:pt x="4220669" y="1010164"/>
+                  </a:lnTo>
+                  <a:lnTo>
+                    <a:pt x="4291013" y="1016109"/>
+                  </a:lnTo>
+                  <a:lnTo>
+                    <a:pt x="4361358" y="1021879"/>
+                  </a:lnTo>
+                  <a:lnTo>
+                    <a:pt x="4431702" y="1027479"/>
+                  </a:lnTo>
+                  <a:lnTo>
+                    <a:pt x="4502047" y="1032914"/>
+                  </a:lnTo>
+                  <a:lnTo>
+                    <a:pt x="4572391" y="1038190"/>
+                  </a:lnTo>
+                  <a:lnTo>
+                    <a:pt x="4642736" y="1043310"/>
+                  </a:lnTo>
+                  <a:lnTo>
+                    <a:pt x="4713080" y="1048280"/>
+                  </a:lnTo>
+                  <a:lnTo>
+                    <a:pt x="4783425" y="1053103"/>
+                  </a:lnTo>
+                  <a:lnTo>
+                    <a:pt x="4853769" y="1057785"/>
+                  </a:lnTo>
+                  <a:lnTo>
+                    <a:pt x="4924114" y="1062329"/>
+                  </a:lnTo>
+                  <a:lnTo>
+                    <a:pt x="4994458" y="1066739"/>
+                  </a:lnTo>
+                  <a:lnTo>
+                    <a:pt x="5064803" y="1071019"/>
+                  </a:lnTo>
+                  <a:lnTo>
+                    <a:pt x="5135147" y="1075174"/>
+                  </a:lnTo>
+                  <a:lnTo>
+                    <a:pt x="5205492" y="1079206"/>
+                  </a:lnTo>
+                  <a:lnTo>
+                    <a:pt x="5275836" y="1083120"/>
+                  </a:lnTo>
+                  <a:lnTo>
+                    <a:pt x="5346181" y="1086918"/>
+                  </a:lnTo>
+                  <a:lnTo>
+                    <a:pt x="5416525" y="1090605"/>
+                  </a:lnTo>
+                  <a:lnTo>
+                    <a:pt x="5486870" y="1094183"/>
+                  </a:lnTo>
+                  <a:lnTo>
+                    <a:pt x="5557214" y="1097656"/>
+                  </a:lnTo>
+                  <a:lnTo>
+                    <a:pt x="5627559" y="1101027"/>
+                  </a:lnTo>
+                  <a:lnTo>
+                    <a:pt x="5697903" y="1104299"/>
+                  </a:lnTo>
+                  <a:lnTo>
+                    <a:pt x="5768248" y="1107475"/>
+                  </a:lnTo>
+                  <a:lnTo>
+                    <a:pt x="5838592" y="1110557"/>
+                  </a:lnTo>
+                  <a:lnTo>
+                    <a:pt x="5908937" y="1113548"/>
+                  </a:lnTo>
+                  <a:lnTo>
+                    <a:pt x="5979281" y="1116451"/>
+                  </a:lnTo>
+                  <a:lnTo>
+                    <a:pt x="6049626" y="1119269"/>
+                  </a:lnTo>
+                  <a:lnTo>
+                    <a:pt x="6119970" y="1122004"/>
+                  </a:lnTo>
+                  <a:lnTo>
+                    <a:pt x="6190315" y="1124659"/>
+                  </a:lnTo>
+                  <a:lnTo>
+                    <a:pt x="6260659" y="1127236"/>
+                  </a:lnTo>
+                  <a:lnTo>
+                    <a:pt x="6331004" y="1129736"/>
+                  </a:lnTo>
+                  <a:lnTo>
+                    <a:pt x="6401348" y="1132163"/>
+                  </a:lnTo>
+                  <a:lnTo>
+                    <a:pt x="6471693" y="1134519"/>
+                  </a:lnTo>
+                  <a:lnTo>
+                    <a:pt x="6542037" y="1136806"/>
+                  </a:lnTo>
+                  <a:lnTo>
+                    <a:pt x="6612382" y="1139025"/>
+                  </a:lnTo>
+                  <a:lnTo>
+                    <a:pt x="6682726" y="1141179"/>
+                  </a:lnTo>
+                  <a:lnTo>
+                    <a:pt x="6753071" y="1143269"/>
+                  </a:lnTo>
+                  <a:lnTo>
+                    <a:pt x="6823415" y="1145298"/>
+                  </a:lnTo>
+                  <a:lnTo>
+                    <a:pt x="6893760" y="1147268"/>
+                  </a:lnTo>
+                  <a:lnTo>
+                    <a:pt x="6964104" y="1149179"/>
                   </a:lnTo>
                 </a:path>
               </a:pathLst>
@@ -4478,27 +4513,27 @@
         </p:sp>
         <p:sp>
           <p:nvSpPr>
-            <p:cNvPr id="24" name="pl24"/>
+            <p:cNvPr id="25" name="pl25"/>
             <p:cNvSpPr/>
             <p:nvPr/>
           </p:nvSpPr>
           <p:spPr>
             <a:xfrm>
-              <a:off x="817517" y="4727786"/>
-              <a:ext cx="7799693" cy="0"/>
+              <a:off x="887106" y="3100960"/>
+              <a:ext cx="7660515" cy="0"/>
             </a:xfrm>
             <a:custGeom>
               <a:avLst/>
               <a:pathLst>
-                <a:path w="7799693" h="0">
+                <a:path w="7660515" h="0">
                   <a:moveTo>
                     <a:pt x="0" y="0"/>
                   </a:moveTo>
                   <a:lnTo>
-                    <a:pt x="7799693" y="0"/>
-                  </a:lnTo>
-                  <a:lnTo>
-                    <a:pt x="7799693" y="0"/>
+                    <a:pt x="7660515" y="0"/>
+                  </a:lnTo>
+                  <a:lnTo>
+                    <a:pt x="7660515" y="0"/>
                   </a:lnTo>
                 </a:path>
               </a:pathLst>
@@ -4521,21 +4556,21 @@
         </p:sp>
         <p:sp>
           <p:nvSpPr>
-            <p:cNvPr id="25" name="pl25"/>
+            <p:cNvPr id="26" name="pl26"/>
             <p:cNvSpPr/>
             <p:nvPr/>
           </p:nvSpPr>
           <p:spPr>
             <a:xfrm>
-              <a:off x="4526955" y="2073503"/>
-              <a:ext cx="0" cy="3649639"/>
+              <a:off x="4530353" y="2143092"/>
+              <a:ext cx="0" cy="1317069"/>
             </a:xfrm>
             <a:custGeom>
               <a:avLst/>
               <a:pathLst>
-                <a:path w="0" h="3649639">
+                <a:path w="0" h="1317069">
                   <a:moveTo>
-                    <a:pt x="0" y="3649639"/>
+                    <a:pt x="0" y="1317069"/>
                   </a:moveTo>
                   <a:lnTo>
                     <a:pt x="0" y="0"/>
@@ -4564,13 +4599,13 @@
         </p:sp>
         <p:sp>
           <p:nvSpPr>
-            <p:cNvPr id="26" name="tx26"/>
+            <p:cNvPr id="27" name="tx27"/>
             <p:cNvSpPr/>
             <p:nvPr/>
           </p:nvSpPr>
           <p:spPr>
             <a:xfrm>
-              <a:off x="692708" y="5517199"/>
+              <a:off x="762297" y="3360243"/>
               <a:ext cx="62179" cy="80101"/>
             </a:xfrm>
             <a:prstGeom prst="rect">
@@ -4610,13 +4645,13 @@
         </p:sp>
         <p:sp>
           <p:nvSpPr>
-            <p:cNvPr id="27" name="tx27"/>
+            <p:cNvPr id="28" name="tx28"/>
             <p:cNvSpPr/>
             <p:nvPr/>
           </p:nvSpPr>
           <p:spPr>
             <a:xfrm>
-              <a:off x="692708" y="4687735"/>
+              <a:off x="762297" y="3060909"/>
               <a:ext cx="62179" cy="80101"/>
             </a:xfrm>
             <a:prstGeom prst="rect">
@@ -4656,13 +4691,13 @@
         </p:sp>
         <p:sp>
           <p:nvSpPr>
-            <p:cNvPr id="28" name="tx28"/>
+            <p:cNvPr id="29" name="tx29"/>
             <p:cNvSpPr/>
             <p:nvPr/>
           </p:nvSpPr>
           <p:spPr>
             <a:xfrm>
-              <a:off x="692708" y="3858272"/>
+              <a:off x="762297" y="2761575"/>
               <a:ext cx="62179" cy="80101"/>
             </a:xfrm>
             <a:prstGeom prst="rect">
@@ -4702,13 +4737,13 @@
         </p:sp>
         <p:sp>
           <p:nvSpPr>
-            <p:cNvPr id="29" name="tx29"/>
+            <p:cNvPr id="30" name="tx30"/>
             <p:cNvSpPr/>
             <p:nvPr/>
           </p:nvSpPr>
           <p:spPr>
             <a:xfrm>
-              <a:off x="692708" y="3028808"/>
+              <a:off x="762297" y="2462242"/>
               <a:ext cx="62179" cy="80101"/>
             </a:xfrm>
             <a:prstGeom prst="rect">
@@ -4748,13 +4783,13 @@
         </p:sp>
         <p:sp>
           <p:nvSpPr>
-            <p:cNvPr id="30" name="tx30"/>
+            <p:cNvPr id="31" name="tx31"/>
             <p:cNvSpPr/>
             <p:nvPr/>
           </p:nvSpPr>
           <p:spPr>
             <a:xfrm>
-              <a:off x="692708" y="2199345"/>
+              <a:off x="762297" y="2162908"/>
               <a:ext cx="62179" cy="80101"/>
             </a:xfrm>
             <a:prstGeom prst="rect">
@@ -4794,13 +4829,13 @@
         </p:sp>
         <p:sp>
           <p:nvSpPr>
-            <p:cNvPr id="31" name="tx31"/>
+            <p:cNvPr id="32" name="tx32"/>
             <p:cNvSpPr/>
             <p:nvPr/>
           </p:nvSpPr>
           <p:spPr>
             <a:xfrm>
-              <a:off x="2421884" y="5785772"/>
+              <a:off x="2461403" y="3522791"/>
               <a:ext cx="161574" cy="80101"/>
             </a:xfrm>
             <a:prstGeom prst="rect">
@@ -4840,13 +4875,13 @@
         </p:sp>
         <p:sp>
           <p:nvSpPr>
-            <p:cNvPr id="32" name="tx32"/>
+            <p:cNvPr id="33" name="tx33"/>
             <p:cNvSpPr/>
             <p:nvPr/>
           </p:nvSpPr>
           <p:spPr>
             <a:xfrm>
-              <a:off x="4542539" y="5785772"/>
+              <a:off x="4545104" y="3522791"/>
               <a:ext cx="62179" cy="80101"/>
             </a:xfrm>
             <a:prstGeom prst="rect">
@@ -4886,13 +4921,13 @@
         </p:sp>
         <p:sp>
           <p:nvSpPr>
-            <p:cNvPr id="33" name="tx33"/>
+            <p:cNvPr id="34" name="tx34"/>
             <p:cNvSpPr/>
             <p:nvPr/>
           </p:nvSpPr>
           <p:spPr>
             <a:xfrm>
-              <a:off x="6582407" y="5785772"/>
+              <a:off x="6548017" y="3522791"/>
               <a:ext cx="124358" cy="80101"/>
             </a:xfrm>
             <a:prstGeom prst="rect">
@@ -4932,13 +4967,13 @@
         </p:sp>
         <p:sp>
           <p:nvSpPr>
-            <p:cNvPr id="34" name="tx34"/>
+            <p:cNvPr id="35" name="tx35"/>
             <p:cNvSpPr/>
             <p:nvPr/>
           </p:nvSpPr>
           <p:spPr>
             <a:xfrm>
-              <a:off x="2928340" y="5925448"/>
+              <a:off x="2928340" y="3662467"/>
               <a:ext cx="3578047" cy="100218"/>
             </a:xfrm>
             <a:prstGeom prst="rect">
@@ -4978,13 +5013,13 @@
         </p:sp>
         <p:sp>
           <p:nvSpPr>
-            <p:cNvPr id="35" name="tx35"/>
+            <p:cNvPr id="36" name="tx36"/>
             <p:cNvSpPr/>
             <p:nvPr/>
           </p:nvSpPr>
           <p:spPr>
             <a:xfrm rot="-5400000">
-              <a:off x="68446" y="3848213"/>
+              <a:off x="138035" y="2751517"/>
               <a:ext cx="1016904" cy="100218"/>
             </a:xfrm>
             <a:prstGeom prst="rect">
@@ -5024,13 +5059,13 @@
         </p:sp>
         <p:sp>
           <p:nvSpPr>
-            <p:cNvPr id="36" name="tx36"/>
+            <p:cNvPr id="37" name="tx37"/>
             <p:cNvSpPr/>
             <p:nvPr/>
           </p:nvSpPr>
           <p:spPr>
             <a:xfrm>
-              <a:off x="817517" y="1896563"/>
+              <a:off x="887106" y="1966152"/>
               <a:ext cx="6388364" cy="82021"/>
             </a:xfrm>
             <a:prstGeom prst="rect">
@@ -5070,13 +5105,3656 @@
         </p:sp>
         <p:sp>
           <p:nvSpPr>
-            <p:cNvPr id="37" name="tx37"/>
+            <p:cNvPr id="38" name="tx38"/>
             <p:cNvSpPr/>
             <p:nvPr/>
           </p:nvSpPr>
           <p:spPr>
             <a:xfrm>
-              <a:off x="817517" y="1669789"/>
+              <a:off x="887106" y="1739378"/>
+              <a:ext cx="2197577" cy="120152"/>
+            </a:xfrm>
+            <a:prstGeom prst="rect">
+              <a:avLst/>
+            </a:prstGeom>
+            <a:noFill/>
+          </p:spPr>
+          <p:txBody>
+            <a:bodyPr lIns="0" rIns="0" tIns="0" bIns="0" anchorCtr="1" anchor="ctr" wrap="none"/>
+            <a:lstStyle/>
+            <a:p>
+              <a:pPr algn="l" marL="0" marR="0" indent="0">
+                <a:lnSpc>
+                  <a:spcPts val="1320"/>
+                </a:lnSpc>
+                <a:spcBef>
+                  <a:spcPts val="0"/>
+                </a:spcBef>
+                <a:spcAft>
+                  <a:spcPts val="0"/>
+                </a:spcAft>
+              </a:pPr>
+              <a:r>
+                <a:rPr sz="1320">
+                  <a:solidFill>
+                    <a:srgbClr val="000000">
+                      <a:alpha val="100000"/>
+                    </a:srgbClr>
+                  </a:solidFill>
+                  <a:latin typeface="Helvetica"/>
+                  <a:cs typeface="Helvetica"/>
+                </a:rPr>
+                <a:t>Infection/Sepsis (Carboplatin)</a:t>
+              </a:r>
+            </a:p>
+          </p:txBody>
+        </p:sp>
+        <p:sp>
+          <p:nvSpPr>
+            <p:cNvPr id="39" name="pl39"/>
+            <p:cNvSpPr/>
+            <p:nvPr/>
+          </p:nvSpPr>
+          <p:spPr>
+            <a:xfrm>
+              <a:off x="887106" y="5444019"/>
+              <a:ext cx="7660515" cy="0"/>
+            </a:xfrm>
+            <a:custGeom>
+              <a:avLst/>
+              <a:pathLst>
+                <a:path w="7660515" h="0">
+                  <a:moveTo>
+                    <a:pt x="0" y="0"/>
+                  </a:moveTo>
+                  <a:lnTo>
+                    <a:pt x="7660515" y="0"/>
+                  </a:lnTo>
+                  <a:lnTo>
+                    <a:pt x="7660515" y="0"/>
+                  </a:lnTo>
+                </a:path>
+              </a:pathLst>
+            </a:custGeom>
+            <a:ln w="6775" cap="flat">
+              <a:solidFill>
+                <a:srgbClr val="EBEBEB">
+                  <a:alpha val="100000"/>
+                </a:srgbClr>
+              </a:solidFill>
+              <a:prstDash val="solid"/>
+              <a:round/>
+            </a:ln>
+          </p:spPr>
+          <p:txBody>
+            <a:bodyPr/>
+            <a:lstStyle/>
+            <a:p/>
+          </p:txBody>
+        </p:sp>
+        <p:sp>
+          <p:nvSpPr>
+            <p:cNvPr id="40" name="pl40"/>
+            <p:cNvSpPr/>
+            <p:nvPr/>
+          </p:nvSpPr>
+          <p:spPr>
+            <a:xfrm>
+              <a:off x="887106" y="5144686"/>
+              <a:ext cx="7660515" cy="0"/>
+            </a:xfrm>
+            <a:custGeom>
+              <a:avLst/>
+              <a:pathLst>
+                <a:path w="7660515" h="0">
+                  <a:moveTo>
+                    <a:pt x="0" y="0"/>
+                  </a:moveTo>
+                  <a:lnTo>
+                    <a:pt x="7660515" y="0"/>
+                  </a:lnTo>
+                  <a:lnTo>
+                    <a:pt x="7660515" y="0"/>
+                  </a:lnTo>
+                </a:path>
+              </a:pathLst>
+            </a:custGeom>
+            <a:ln w="6775" cap="flat">
+              <a:solidFill>
+                <a:srgbClr val="EBEBEB">
+                  <a:alpha val="100000"/>
+                </a:srgbClr>
+              </a:solidFill>
+              <a:prstDash val="solid"/>
+              <a:round/>
+            </a:ln>
+          </p:spPr>
+          <p:txBody>
+            <a:bodyPr/>
+            <a:lstStyle/>
+            <a:p/>
+          </p:txBody>
+        </p:sp>
+        <p:sp>
+          <p:nvSpPr>
+            <p:cNvPr id="41" name="pl41"/>
+            <p:cNvSpPr/>
+            <p:nvPr/>
+          </p:nvSpPr>
+          <p:spPr>
+            <a:xfrm>
+              <a:off x="887106" y="4845352"/>
+              <a:ext cx="7660515" cy="0"/>
+            </a:xfrm>
+            <a:custGeom>
+              <a:avLst/>
+              <a:pathLst>
+                <a:path w="7660515" h="0">
+                  <a:moveTo>
+                    <a:pt x="0" y="0"/>
+                  </a:moveTo>
+                  <a:lnTo>
+                    <a:pt x="7660515" y="0"/>
+                  </a:lnTo>
+                  <a:lnTo>
+                    <a:pt x="7660515" y="0"/>
+                  </a:lnTo>
+                </a:path>
+              </a:pathLst>
+            </a:custGeom>
+            <a:ln w="6775" cap="flat">
+              <a:solidFill>
+                <a:srgbClr val="EBEBEB">
+                  <a:alpha val="100000"/>
+                </a:srgbClr>
+              </a:solidFill>
+              <a:prstDash val="solid"/>
+              <a:round/>
+            </a:ln>
+          </p:spPr>
+          <p:txBody>
+            <a:bodyPr/>
+            <a:lstStyle/>
+            <a:p/>
+          </p:txBody>
+        </p:sp>
+        <p:sp>
+          <p:nvSpPr>
+            <p:cNvPr id="42" name="pl42"/>
+            <p:cNvSpPr/>
+            <p:nvPr/>
+          </p:nvSpPr>
+          <p:spPr>
+            <a:xfrm>
+              <a:off x="887106" y="4546018"/>
+              <a:ext cx="7660515" cy="0"/>
+            </a:xfrm>
+            <a:custGeom>
+              <a:avLst/>
+              <a:pathLst>
+                <a:path w="7660515" h="0">
+                  <a:moveTo>
+                    <a:pt x="0" y="0"/>
+                  </a:moveTo>
+                  <a:lnTo>
+                    <a:pt x="7660515" y="0"/>
+                  </a:lnTo>
+                  <a:lnTo>
+                    <a:pt x="7660515" y="0"/>
+                  </a:lnTo>
+                </a:path>
+              </a:pathLst>
+            </a:custGeom>
+            <a:ln w="6775" cap="flat">
+              <a:solidFill>
+                <a:srgbClr val="EBEBEB">
+                  <a:alpha val="100000"/>
+                </a:srgbClr>
+              </a:solidFill>
+              <a:prstDash val="solid"/>
+              <a:round/>
+            </a:ln>
+          </p:spPr>
+          <p:txBody>
+            <a:bodyPr/>
+            <a:lstStyle/>
+            <a:p/>
+          </p:txBody>
+        </p:sp>
+        <p:sp>
+          <p:nvSpPr>
+            <p:cNvPr id="43" name="pl43"/>
+            <p:cNvSpPr/>
+            <p:nvPr/>
+          </p:nvSpPr>
+          <p:spPr>
+            <a:xfrm>
+              <a:off x="914987" y="4336484"/>
+              <a:ext cx="0" cy="1317069"/>
+            </a:xfrm>
+            <a:custGeom>
+              <a:avLst/>
+              <a:pathLst>
+                <a:path w="0" h="1317069">
+                  <a:moveTo>
+                    <a:pt x="0" y="1317069"/>
+                  </a:moveTo>
+                  <a:lnTo>
+                    <a:pt x="0" y="0"/>
+                  </a:lnTo>
+                  <a:lnTo>
+                    <a:pt x="0" y="0"/>
+                  </a:lnTo>
+                </a:path>
+              </a:pathLst>
+            </a:custGeom>
+            <a:ln w="6775" cap="flat">
+              <a:solidFill>
+                <a:srgbClr val="EBEBEB">
+                  <a:alpha val="100000"/>
+                </a:srgbClr>
+              </a:solidFill>
+              <a:prstDash val="solid"/>
+              <a:round/>
+            </a:ln>
+          </p:spPr>
+          <p:txBody>
+            <a:bodyPr/>
+            <a:lstStyle/>
+            <a:p/>
+          </p:txBody>
+        </p:sp>
+        <p:sp>
+          <p:nvSpPr>
+            <p:cNvPr id="44" name="pl44"/>
+            <p:cNvSpPr/>
+            <p:nvPr/>
+          </p:nvSpPr>
+          <p:spPr>
+            <a:xfrm>
+              <a:off x="1728588" y="4336484"/>
+              <a:ext cx="0" cy="1317069"/>
+            </a:xfrm>
+            <a:custGeom>
+              <a:avLst/>
+              <a:pathLst>
+                <a:path w="0" h="1317069">
+                  <a:moveTo>
+                    <a:pt x="0" y="1317069"/>
+                  </a:moveTo>
+                  <a:lnTo>
+                    <a:pt x="0" y="0"/>
+                  </a:lnTo>
+                  <a:lnTo>
+                    <a:pt x="0" y="0"/>
+                  </a:lnTo>
+                </a:path>
+              </a:pathLst>
+            </a:custGeom>
+            <a:ln w="6775" cap="flat">
+              <a:solidFill>
+                <a:srgbClr val="EBEBEB">
+                  <a:alpha val="100000"/>
+                </a:srgbClr>
+              </a:solidFill>
+              <a:prstDash val="solid"/>
+              <a:round/>
+            </a:ln>
+          </p:spPr>
+          <p:txBody>
+            <a:bodyPr/>
+            <a:lstStyle/>
+            <a:p/>
+          </p:txBody>
+        </p:sp>
+        <p:sp>
+          <p:nvSpPr>
+            <p:cNvPr id="45" name="pl45"/>
+            <p:cNvSpPr/>
+            <p:nvPr/>
+          </p:nvSpPr>
+          <p:spPr>
+            <a:xfrm>
+              <a:off x="2542190" y="4336484"/>
+              <a:ext cx="0" cy="1317069"/>
+            </a:xfrm>
+            <a:custGeom>
+              <a:avLst/>
+              <a:pathLst>
+                <a:path w="0" h="1317069">
+                  <a:moveTo>
+                    <a:pt x="0" y="1317069"/>
+                  </a:moveTo>
+                  <a:lnTo>
+                    <a:pt x="0" y="0"/>
+                  </a:lnTo>
+                  <a:lnTo>
+                    <a:pt x="0" y="0"/>
+                  </a:lnTo>
+                </a:path>
+              </a:pathLst>
+            </a:custGeom>
+            <a:ln w="6775" cap="flat">
+              <a:solidFill>
+                <a:srgbClr val="EBEBEB">
+                  <a:alpha val="100000"/>
+                </a:srgbClr>
+              </a:solidFill>
+              <a:prstDash val="solid"/>
+              <a:round/>
+            </a:ln>
+          </p:spPr>
+          <p:txBody>
+            <a:bodyPr/>
+            <a:lstStyle/>
+            <a:p/>
+          </p:txBody>
+        </p:sp>
+        <p:sp>
+          <p:nvSpPr>
+            <p:cNvPr id="46" name="pl46"/>
+            <p:cNvSpPr/>
+            <p:nvPr/>
+          </p:nvSpPr>
+          <p:spPr>
+            <a:xfrm>
+              <a:off x="3355791" y="4336484"/>
+              <a:ext cx="0" cy="1317069"/>
+            </a:xfrm>
+            <a:custGeom>
+              <a:avLst/>
+              <a:pathLst>
+                <a:path w="0" h="1317069">
+                  <a:moveTo>
+                    <a:pt x="0" y="1317069"/>
+                  </a:moveTo>
+                  <a:lnTo>
+                    <a:pt x="0" y="0"/>
+                  </a:lnTo>
+                  <a:lnTo>
+                    <a:pt x="0" y="0"/>
+                  </a:lnTo>
+                </a:path>
+              </a:pathLst>
+            </a:custGeom>
+            <a:ln w="6775" cap="flat">
+              <a:solidFill>
+                <a:srgbClr val="EBEBEB">
+                  <a:alpha val="100000"/>
+                </a:srgbClr>
+              </a:solidFill>
+              <a:prstDash val="solid"/>
+              <a:round/>
+            </a:ln>
+          </p:spPr>
+          <p:txBody>
+            <a:bodyPr/>
+            <a:lstStyle/>
+            <a:p/>
+          </p:txBody>
+        </p:sp>
+        <p:sp>
+          <p:nvSpPr>
+            <p:cNvPr id="47" name="pl47"/>
+            <p:cNvSpPr/>
+            <p:nvPr/>
+          </p:nvSpPr>
+          <p:spPr>
+            <a:xfrm>
+              <a:off x="4169393" y="4336484"/>
+              <a:ext cx="0" cy="1317069"/>
+            </a:xfrm>
+            <a:custGeom>
+              <a:avLst/>
+              <a:pathLst>
+                <a:path w="0" h="1317069">
+                  <a:moveTo>
+                    <a:pt x="0" y="1317069"/>
+                  </a:moveTo>
+                  <a:lnTo>
+                    <a:pt x="0" y="0"/>
+                  </a:lnTo>
+                  <a:lnTo>
+                    <a:pt x="0" y="0"/>
+                  </a:lnTo>
+                </a:path>
+              </a:pathLst>
+            </a:custGeom>
+            <a:ln w="6775" cap="flat">
+              <a:solidFill>
+                <a:srgbClr val="EBEBEB">
+                  <a:alpha val="100000"/>
+                </a:srgbClr>
+              </a:solidFill>
+              <a:prstDash val="solid"/>
+              <a:round/>
+            </a:ln>
+          </p:spPr>
+          <p:txBody>
+            <a:bodyPr/>
+            <a:lstStyle/>
+            <a:p/>
+          </p:txBody>
+        </p:sp>
+        <p:sp>
+          <p:nvSpPr>
+            <p:cNvPr id="48" name="pl48"/>
+            <p:cNvSpPr/>
+            <p:nvPr/>
+          </p:nvSpPr>
+          <p:spPr>
+            <a:xfrm>
+              <a:off x="4982994" y="4336484"/>
+              <a:ext cx="0" cy="1317069"/>
+            </a:xfrm>
+            <a:custGeom>
+              <a:avLst/>
+              <a:pathLst>
+                <a:path w="0" h="1317069">
+                  <a:moveTo>
+                    <a:pt x="0" y="1317069"/>
+                  </a:moveTo>
+                  <a:lnTo>
+                    <a:pt x="0" y="0"/>
+                  </a:lnTo>
+                  <a:lnTo>
+                    <a:pt x="0" y="0"/>
+                  </a:lnTo>
+                </a:path>
+              </a:pathLst>
+            </a:custGeom>
+            <a:ln w="6775" cap="flat">
+              <a:solidFill>
+                <a:srgbClr val="EBEBEB">
+                  <a:alpha val="100000"/>
+                </a:srgbClr>
+              </a:solidFill>
+              <a:prstDash val="solid"/>
+              <a:round/>
+            </a:ln>
+          </p:spPr>
+          <p:txBody>
+            <a:bodyPr/>
+            <a:lstStyle/>
+            <a:p/>
+          </p:txBody>
+        </p:sp>
+        <p:sp>
+          <p:nvSpPr>
+            <p:cNvPr id="49" name="pl49"/>
+            <p:cNvSpPr/>
+            <p:nvPr/>
+          </p:nvSpPr>
+          <p:spPr>
+            <a:xfrm>
+              <a:off x="5796595" y="4336484"/>
+              <a:ext cx="0" cy="1317069"/>
+            </a:xfrm>
+            <a:custGeom>
+              <a:avLst/>
+              <a:pathLst>
+                <a:path w="0" h="1317069">
+                  <a:moveTo>
+                    <a:pt x="0" y="1317069"/>
+                  </a:moveTo>
+                  <a:lnTo>
+                    <a:pt x="0" y="0"/>
+                  </a:lnTo>
+                  <a:lnTo>
+                    <a:pt x="0" y="0"/>
+                  </a:lnTo>
+                </a:path>
+              </a:pathLst>
+            </a:custGeom>
+            <a:ln w="6775" cap="flat">
+              <a:solidFill>
+                <a:srgbClr val="EBEBEB">
+                  <a:alpha val="100000"/>
+                </a:srgbClr>
+              </a:solidFill>
+              <a:prstDash val="solid"/>
+              <a:round/>
+            </a:ln>
+          </p:spPr>
+          <p:txBody>
+            <a:bodyPr/>
+            <a:lstStyle/>
+            <a:p/>
+          </p:txBody>
+        </p:sp>
+        <p:sp>
+          <p:nvSpPr>
+            <p:cNvPr id="50" name="pl50"/>
+            <p:cNvSpPr/>
+            <p:nvPr/>
+          </p:nvSpPr>
+          <p:spPr>
+            <a:xfrm>
+              <a:off x="6610197" y="4336484"/>
+              <a:ext cx="0" cy="1317069"/>
+            </a:xfrm>
+            <a:custGeom>
+              <a:avLst/>
+              <a:pathLst>
+                <a:path w="0" h="1317069">
+                  <a:moveTo>
+                    <a:pt x="0" y="1317069"/>
+                  </a:moveTo>
+                  <a:lnTo>
+                    <a:pt x="0" y="0"/>
+                  </a:lnTo>
+                  <a:lnTo>
+                    <a:pt x="0" y="0"/>
+                  </a:lnTo>
+                </a:path>
+              </a:pathLst>
+            </a:custGeom>
+            <a:ln w="6775" cap="flat">
+              <a:solidFill>
+                <a:srgbClr val="EBEBEB">
+                  <a:alpha val="100000"/>
+                </a:srgbClr>
+              </a:solidFill>
+              <a:prstDash val="solid"/>
+              <a:round/>
+            </a:ln>
+          </p:spPr>
+          <p:txBody>
+            <a:bodyPr/>
+            <a:lstStyle/>
+            <a:p/>
+          </p:txBody>
+        </p:sp>
+        <p:sp>
+          <p:nvSpPr>
+            <p:cNvPr id="51" name="pl51"/>
+            <p:cNvSpPr/>
+            <p:nvPr/>
+          </p:nvSpPr>
+          <p:spPr>
+            <a:xfrm>
+              <a:off x="7423798" y="4336484"/>
+              <a:ext cx="0" cy="1317069"/>
+            </a:xfrm>
+            <a:custGeom>
+              <a:avLst/>
+              <a:pathLst>
+                <a:path w="0" h="1317069">
+                  <a:moveTo>
+                    <a:pt x="0" y="1317069"/>
+                  </a:moveTo>
+                  <a:lnTo>
+                    <a:pt x="0" y="0"/>
+                  </a:lnTo>
+                  <a:lnTo>
+                    <a:pt x="0" y="0"/>
+                  </a:lnTo>
+                </a:path>
+              </a:pathLst>
+            </a:custGeom>
+            <a:ln w="6775" cap="flat">
+              <a:solidFill>
+                <a:srgbClr val="EBEBEB">
+                  <a:alpha val="100000"/>
+                </a:srgbClr>
+              </a:solidFill>
+              <a:prstDash val="solid"/>
+              <a:round/>
+            </a:ln>
+          </p:spPr>
+          <p:txBody>
+            <a:bodyPr/>
+            <a:lstStyle/>
+            <a:p/>
+          </p:txBody>
+        </p:sp>
+        <p:sp>
+          <p:nvSpPr>
+            <p:cNvPr id="52" name="pl52"/>
+            <p:cNvSpPr/>
+            <p:nvPr/>
+          </p:nvSpPr>
+          <p:spPr>
+            <a:xfrm>
+              <a:off x="8237399" y="4336484"/>
+              <a:ext cx="0" cy="1317069"/>
+            </a:xfrm>
+            <a:custGeom>
+              <a:avLst/>
+              <a:pathLst>
+                <a:path w="0" h="1317069">
+                  <a:moveTo>
+                    <a:pt x="0" y="1317069"/>
+                  </a:moveTo>
+                  <a:lnTo>
+                    <a:pt x="0" y="0"/>
+                  </a:lnTo>
+                  <a:lnTo>
+                    <a:pt x="0" y="0"/>
+                  </a:lnTo>
+                </a:path>
+              </a:pathLst>
+            </a:custGeom>
+            <a:ln w="6775" cap="flat">
+              <a:solidFill>
+                <a:srgbClr val="EBEBEB">
+                  <a:alpha val="100000"/>
+                </a:srgbClr>
+              </a:solidFill>
+              <a:prstDash val="solid"/>
+              <a:round/>
+            </a:ln>
+          </p:spPr>
+          <p:txBody>
+            <a:bodyPr/>
+            <a:lstStyle/>
+            <a:p/>
+          </p:txBody>
+        </p:sp>
+        <p:sp>
+          <p:nvSpPr>
+            <p:cNvPr id="53" name="pl53"/>
+            <p:cNvSpPr/>
+            <p:nvPr/>
+          </p:nvSpPr>
+          <p:spPr>
+            <a:xfrm>
+              <a:off x="887106" y="5593686"/>
+              <a:ext cx="7660515" cy="0"/>
+            </a:xfrm>
+            <a:custGeom>
+              <a:avLst/>
+              <a:pathLst>
+                <a:path w="7660515" h="0">
+                  <a:moveTo>
+                    <a:pt x="0" y="0"/>
+                  </a:moveTo>
+                  <a:lnTo>
+                    <a:pt x="7660515" y="0"/>
+                  </a:lnTo>
+                  <a:lnTo>
+                    <a:pt x="7660515" y="0"/>
+                  </a:lnTo>
+                </a:path>
+              </a:pathLst>
+            </a:custGeom>
+            <a:ln w="13550" cap="flat">
+              <a:solidFill>
+                <a:srgbClr val="EBEBEB">
+                  <a:alpha val="100000"/>
+                </a:srgbClr>
+              </a:solidFill>
+              <a:prstDash val="solid"/>
+              <a:round/>
+            </a:ln>
+          </p:spPr>
+          <p:txBody>
+            <a:bodyPr/>
+            <a:lstStyle/>
+            <a:p/>
+          </p:txBody>
+        </p:sp>
+        <p:sp>
+          <p:nvSpPr>
+            <p:cNvPr id="54" name="pl54"/>
+            <p:cNvSpPr/>
+            <p:nvPr/>
+          </p:nvSpPr>
+          <p:spPr>
+            <a:xfrm>
+              <a:off x="887106" y="5294352"/>
+              <a:ext cx="7660515" cy="0"/>
+            </a:xfrm>
+            <a:custGeom>
+              <a:avLst/>
+              <a:pathLst>
+                <a:path w="7660515" h="0">
+                  <a:moveTo>
+                    <a:pt x="0" y="0"/>
+                  </a:moveTo>
+                  <a:lnTo>
+                    <a:pt x="7660515" y="0"/>
+                  </a:lnTo>
+                  <a:lnTo>
+                    <a:pt x="7660515" y="0"/>
+                  </a:lnTo>
+                </a:path>
+              </a:pathLst>
+            </a:custGeom>
+            <a:ln w="13550" cap="flat">
+              <a:solidFill>
+                <a:srgbClr val="EBEBEB">
+                  <a:alpha val="100000"/>
+                </a:srgbClr>
+              </a:solidFill>
+              <a:prstDash val="solid"/>
+              <a:round/>
+            </a:ln>
+          </p:spPr>
+          <p:txBody>
+            <a:bodyPr/>
+            <a:lstStyle/>
+            <a:p/>
+          </p:txBody>
+        </p:sp>
+        <p:sp>
+          <p:nvSpPr>
+            <p:cNvPr id="55" name="pl55"/>
+            <p:cNvSpPr/>
+            <p:nvPr/>
+          </p:nvSpPr>
+          <p:spPr>
+            <a:xfrm>
+              <a:off x="887106" y="4995019"/>
+              <a:ext cx="7660515" cy="0"/>
+            </a:xfrm>
+            <a:custGeom>
+              <a:avLst/>
+              <a:pathLst>
+                <a:path w="7660515" h="0">
+                  <a:moveTo>
+                    <a:pt x="0" y="0"/>
+                  </a:moveTo>
+                  <a:lnTo>
+                    <a:pt x="7660515" y="0"/>
+                  </a:lnTo>
+                  <a:lnTo>
+                    <a:pt x="7660515" y="0"/>
+                  </a:lnTo>
+                </a:path>
+              </a:pathLst>
+            </a:custGeom>
+            <a:ln w="13550" cap="flat">
+              <a:solidFill>
+                <a:srgbClr val="EBEBEB">
+                  <a:alpha val="100000"/>
+                </a:srgbClr>
+              </a:solidFill>
+              <a:prstDash val="solid"/>
+              <a:round/>
+            </a:ln>
+          </p:spPr>
+          <p:txBody>
+            <a:bodyPr/>
+            <a:lstStyle/>
+            <a:p/>
+          </p:txBody>
+        </p:sp>
+        <p:sp>
+          <p:nvSpPr>
+            <p:cNvPr id="56" name="pl56"/>
+            <p:cNvSpPr/>
+            <p:nvPr/>
+          </p:nvSpPr>
+          <p:spPr>
+            <a:xfrm>
+              <a:off x="887106" y="4695685"/>
+              <a:ext cx="7660515" cy="0"/>
+            </a:xfrm>
+            <a:custGeom>
+              <a:avLst/>
+              <a:pathLst>
+                <a:path w="7660515" h="0">
+                  <a:moveTo>
+                    <a:pt x="0" y="0"/>
+                  </a:moveTo>
+                  <a:lnTo>
+                    <a:pt x="7660515" y="0"/>
+                  </a:lnTo>
+                  <a:lnTo>
+                    <a:pt x="7660515" y="0"/>
+                  </a:lnTo>
+                </a:path>
+              </a:pathLst>
+            </a:custGeom>
+            <a:ln w="13550" cap="flat">
+              <a:solidFill>
+                <a:srgbClr val="EBEBEB">
+                  <a:alpha val="100000"/>
+                </a:srgbClr>
+              </a:solidFill>
+              <a:prstDash val="solid"/>
+              <a:round/>
+            </a:ln>
+          </p:spPr>
+          <p:txBody>
+            <a:bodyPr/>
+            <a:lstStyle/>
+            <a:p/>
+          </p:txBody>
+        </p:sp>
+        <p:sp>
+          <p:nvSpPr>
+            <p:cNvPr id="57" name="pl57"/>
+            <p:cNvSpPr/>
+            <p:nvPr/>
+          </p:nvSpPr>
+          <p:spPr>
+            <a:xfrm>
+              <a:off x="887106" y="4396351"/>
+              <a:ext cx="7660515" cy="0"/>
+            </a:xfrm>
+            <a:custGeom>
+              <a:avLst/>
+              <a:pathLst>
+                <a:path w="7660515" h="0">
+                  <a:moveTo>
+                    <a:pt x="0" y="0"/>
+                  </a:moveTo>
+                  <a:lnTo>
+                    <a:pt x="7660515" y="0"/>
+                  </a:lnTo>
+                  <a:lnTo>
+                    <a:pt x="7660515" y="0"/>
+                  </a:lnTo>
+                </a:path>
+              </a:pathLst>
+            </a:custGeom>
+            <a:ln w="13550" cap="flat">
+              <a:solidFill>
+                <a:srgbClr val="EBEBEB">
+                  <a:alpha val="100000"/>
+                </a:srgbClr>
+              </a:solidFill>
+              <a:prstDash val="solid"/>
+              <a:round/>
+            </a:ln>
+          </p:spPr>
+          <p:txBody>
+            <a:bodyPr/>
+            <a:lstStyle/>
+            <a:p/>
+          </p:txBody>
+        </p:sp>
+        <p:sp>
+          <p:nvSpPr>
+            <p:cNvPr id="58" name="pl58"/>
+            <p:cNvSpPr/>
+            <p:nvPr/>
+          </p:nvSpPr>
+          <p:spPr>
+            <a:xfrm>
+              <a:off x="1321788" y="4336484"/>
+              <a:ext cx="0" cy="1317069"/>
+            </a:xfrm>
+            <a:custGeom>
+              <a:avLst/>
+              <a:pathLst>
+                <a:path w="0" h="1317069">
+                  <a:moveTo>
+                    <a:pt x="0" y="1317069"/>
+                  </a:moveTo>
+                  <a:lnTo>
+                    <a:pt x="0" y="0"/>
+                  </a:lnTo>
+                  <a:lnTo>
+                    <a:pt x="0" y="0"/>
+                  </a:lnTo>
+                </a:path>
+              </a:pathLst>
+            </a:custGeom>
+            <a:ln w="13550" cap="flat">
+              <a:solidFill>
+                <a:srgbClr val="EBEBEB">
+                  <a:alpha val="100000"/>
+                </a:srgbClr>
+              </a:solidFill>
+              <a:prstDash val="solid"/>
+              <a:round/>
+            </a:ln>
+          </p:spPr>
+          <p:txBody>
+            <a:bodyPr/>
+            <a:lstStyle/>
+            <a:p/>
+          </p:txBody>
+        </p:sp>
+        <p:sp>
+          <p:nvSpPr>
+            <p:cNvPr id="59" name="pl59"/>
+            <p:cNvSpPr/>
+            <p:nvPr/>
+          </p:nvSpPr>
+          <p:spPr>
+            <a:xfrm>
+              <a:off x="2135389" y="4336484"/>
+              <a:ext cx="0" cy="1317069"/>
+            </a:xfrm>
+            <a:custGeom>
+              <a:avLst/>
+              <a:pathLst>
+                <a:path w="0" h="1317069">
+                  <a:moveTo>
+                    <a:pt x="0" y="1317069"/>
+                  </a:moveTo>
+                  <a:lnTo>
+                    <a:pt x="0" y="0"/>
+                  </a:lnTo>
+                  <a:lnTo>
+                    <a:pt x="0" y="0"/>
+                  </a:lnTo>
+                </a:path>
+              </a:pathLst>
+            </a:custGeom>
+            <a:ln w="13550" cap="flat">
+              <a:solidFill>
+                <a:srgbClr val="EBEBEB">
+                  <a:alpha val="100000"/>
+                </a:srgbClr>
+              </a:solidFill>
+              <a:prstDash val="solid"/>
+              <a:round/>
+            </a:ln>
+          </p:spPr>
+          <p:txBody>
+            <a:bodyPr/>
+            <a:lstStyle/>
+            <a:p/>
+          </p:txBody>
+        </p:sp>
+        <p:sp>
+          <p:nvSpPr>
+            <p:cNvPr id="60" name="pl60"/>
+            <p:cNvSpPr/>
+            <p:nvPr/>
+          </p:nvSpPr>
+          <p:spPr>
+            <a:xfrm>
+              <a:off x="2948991" y="4336484"/>
+              <a:ext cx="0" cy="1317069"/>
+            </a:xfrm>
+            <a:custGeom>
+              <a:avLst/>
+              <a:pathLst>
+                <a:path w="0" h="1317069">
+                  <a:moveTo>
+                    <a:pt x="0" y="1317069"/>
+                  </a:moveTo>
+                  <a:lnTo>
+                    <a:pt x="0" y="0"/>
+                  </a:lnTo>
+                  <a:lnTo>
+                    <a:pt x="0" y="0"/>
+                  </a:lnTo>
+                </a:path>
+              </a:pathLst>
+            </a:custGeom>
+            <a:ln w="13550" cap="flat">
+              <a:solidFill>
+                <a:srgbClr val="EBEBEB">
+                  <a:alpha val="100000"/>
+                </a:srgbClr>
+              </a:solidFill>
+              <a:prstDash val="solid"/>
+              <a:round/>
+            </a:ln>
+          </p:spPr>
+          <p:txBody>
+            <a:bodyPr/>
+            <a:lstStyle/>
+            <a:p/>
+          </p:txBody>
+        </p:sp>
+        <p:sp>
+          <p:nvSpPr>
+            <p:cNvPr id="61" name="pl61"/>
+            <p:cNvSpPr/>
+            <p:nvPr/>
+          </p:nvSpPr>
+          <p:spPr>
+            <a:xfrm>
+              <a:off x="3762592" y="4336484"/>
+              <a:ext cx="0" cy="1317069"/>
+            </a:xfrm>
+            <a:custGeom>
+              <a:avLst/>
+              <a:pathLst>
+                <a:path w="0" h="1317069">
+                  <a:moveTo>
+                    <a:pt x="0" y="1317069"/>
+                  </a:moveTo>
+                  <a:lnTo>
+                    <a:pt x="0" y="0"/>
+                  </a:lnTo>
+                  <a:lnTo>
+                    <a:pt x="0" y="0"/>
+                  </a:lnTo>
+                </a:path>
+              </a:pathLst>
+            </a:custGeom>
+            <a:ln w="13550" cap="flat">
+              <a:solidFill>
+                <a:srgbClr val="EBEBEB">
+                  <a:alpha val="100000"/>
+                </a:srgbClr>
+              </a:solidFill>
+              <a:prstDash val="solid"/>
+              <a:round/>
+            </a:ln>
+          </p:spPr>
+          <p:txBody>
+            <a:bodyPr/>
+            <a:lstStyle/>
+            <a:p/>
+          </p:txBody>
+        </p:sp>
+        <p:sp>
+          <p:nvSpPr>
+            <p:cNvPr id="62" name="pl62"/>
+            <p:cNvSpPr/>
+            <p:nvPr/>
+          </p:nvSpPr>
+          <p:spPr>
+            <a:xfrm>
+              <a:off x="4576193" y="4336484"/>
+              <a:ext cx="0" cy="1317069"/>
+            </a:xfrm>
+            <a:custGeom>
+              <a:avLst/>
+              <a:pathLst>
+                <a:path w="0" h="1317069">
+                  <a:moveTo>
+                    <a:pt x="0" y="1317069"/>
+                  </a:moveTo>
+                  <a:lnTo>
+                    <a:pt x="0" y="0"/>
+                  </a:lnTo>
+                  <a:lnTo>
+                    <a:pt x="0" y="0"/>
+                  </a:lnTo>
+                </a:path>
+              </a:pathLst>
+            </a:custGeom>
+            <a:ln w="13550" cap="flat">
+              <a:solidFill>
+                <a:srgbClr val="EBEBEB">
+                  <a:alpha val="100000"/>
+                </a:srgbClr>
+              </a:solidFill>
+              <a:prstDash val="solid"/>
+              <a:round/>
+            </a:ln>
+          </p:spPr>
+          <p:txBody>
+            <a:bodyPr/>
+            <a:lstStyle/>
+            <a:p/>
+          </p:txBody>
+        </p:sp>
+        <p:sp>
+          <p:nvSpPr>
+            <p:cNvPr id="63" name="pl63"/>
+            <p:cNvSpPr/>
+            <p:nvPr/>
+          </p:nvSpPr>
+          <p:spPr>
+            <a:xfrm>
+              <a:off x="5389795" y="4336484"/>
+              <a:ext cx="0" cy="1317069"/>
+            </a:xfrm>
+            <a:custGeom>
+              <a:avLst/>
+              <a:pathLst>
+                <a:path w="0" h="1317069">
+                  <a:moveTo>
+                    <a:pt x="0" y="1317069"/>
+                  </a:moveTo>
+                  <a:lnTo>
+                    <a:pt x="0" y="0"/>
+                  </a:lnTo>
+                  <a:lnTo>
+                    <a:pt x="0" y="0"/>
+                  </a:lnTo>
+                </a:path>
+              </a:pathLst>
+            </a:custGeom>
+            <a:ln w="13550" cap="flat">
+              <a:solidFill>
+                <a:srgbClr val="EBEBEB">
+                  <a:alpha val="100000"/>
+                </a:srgbClr>
+              </a:solidFill>
+              <a:prstDash val="solid"/>
+              <a:round/>
+            </a:ln>
+          </p:spPr>
+          <p:txBody>
+            <a:bodyPr/>
+            <a:lstStyle/>
+            <a:p/>
+          </p:txBody>
+        </p:sp>
+        <p:sp>
+          <p:nvSpPr>
+            <p:cNvPr id="64" name="pl64"/>
+            <p:cNvSpPr/>
+            <p:nvPr/>
+          </p:nvSpPr>
+          <p:spPr>
+            <a:xfrm>
+              <a:off x="6203396" y="4336484"/>
+              <a:ext cx="0" cy="1317069"/>
+            </a:xfrm>
+            <a:custGeom>
+              <a:avLst/>
+              <a:pathLst>
+                <a:path w="0" h="1317069">
+                  <a:moveTo>
+                    <a:pt x="0" y="1317069"/>
+                  </a:moveTo>
+                  <a:lnTo>
+                    <a:pt x="0" y="0"/>
+                  </a:lnTo>
+                  <a:lnTo>
+                    <a:pt x="0" y="0"/>
+                  </a:lnTo>
+                </a:path>
+              </a:pathLst>
+            </a:custGeom>
+            <a:ln w="13550" cap="flat">
+              <a:solidFill>
+                <a:srgbClr val="EBEBEB">
+                  <a:alpha val="100000"/>
+                </a:srgbClr>
+              </a:solidFill>
+              <a:prstDash val="solid"/>
+              <a:round/>
+            </a:ln>
+          </p:spPr>
+          <p:txBody>
+            <a:bodyPr/>
+            <a:lstStyle/>
+            <a:p/>
+          </p:txBody>
+        </p:sp>
+        <p:sp>
+          <p:nvSpPr>
+            <p:cNvPr id="65" name="pl65"/>
+            <p:cNvSpPr/>
+            <p:nvPr/>
+          </p:nvSpPr>
+          <p:spPr>
+            <a:xfrm>
+              <a:off x="7016997" y="4336484"/>
+              <a:ext cx="0" cy="1317069"/>
+            </a:xfrm>
+            <a:custGeom>
+              <a:avLst/>
+              <a:pathLst>
+                <a:path w="0" h="1317069">
+                  <a:moveTo>
+                    <a:pt x="0" y="1317069"/>
+                  </a:moveTo>
+                  <a:lnTo>
+                    <a:pt x="0" y="0"/>
+                  </a:lnTo>
+                  <a:lnTo>
+                    <a:pt x="0" y="0"/>
+                  </a:lnTo>
+                </a:path>
+              </a:pathLst>
+            </a:custGeom>
+            <a:ln w="13550" cap="flat">
+              <a:solidFill>
+                <a:srgbClr val="EBEBEB">
+                  <a:alpha val="100000"/>
+                </a:srgbClr>
+              </a:solidFill>
+              <a:prstDash val="solid"/>
+              <a:round/>
+            </a:ln>
+          </p:spPr>
+          <p:txBody>
+            <a:bodyPr/>
+            <a:lstStyle/>
+            <a:p/>
+          </p:txBody>
+        </p:sp>
+        <p:sp>
+          <p:nvSpPr>
+            <p:cNvPr id="66" name="pl66"/>
+            <p:cNvSpPr/>
+            <p:nvPr/>
+          </p:nvSpPr>
+          <p:spPr>
+            <a:xfrm>
+              <a:off x="7830599" y="4336484"/>
+              <a:ext cx="0" cy="1317069"/>
+            </a:xfrm>
+            <a:custGeom>
+              <a:avLst/>
+              <a:pathLst>
+                <a:path w="0" h="1317069">
+                  <a:moveTo>
+                    <a:pt x="0" y="1317069"/>
+                  </a:moveTo>
+                  <a:lnTo>
+                    <a:pt x="0" y="0"/>
+                  </a:lnTo>
+                  <a:lnTo>
+                    <a:pt x="0" y="0"/>
+                  </a:lnTo>
+                </a:path>
+              </a:pathLst>
+            </a:custGeom>
+            <a:ln w="13550" cap="flat">
+              <a:solidFill>
+                <a:srgbClr val="EBEBEB">
+                  <a:alpha val="100000"/>
+                </a:srgbClr>
+              </a:solidFill>
+              <a:prstDash val="solid"/>
+              <a:round/>
+            </a:ln>
+          </p:spPr>
+          <p:txBody>
+            <a:bodyPr/>
+            <a:lstStyle/>
+            <a:p/>
+          </p:txBody>
+        </p:sp>
+        <p:sp>
+          <p:nvSpPr>
+            <p:cNvPr id="67" name="pg67"/>
+            <p:cNvSpPr/>
+            <p:nvPr/>
+          </p:nvSpPr>
+          <p:spPr>
+            <a:xfrm>
+              <a:off x="1235312" y="4336484"/>
+              <a:ext cx="6964104" cy="1229189"/>
+            </a:xfrm>
+            <a:custGeom>
+              <a:avLst/>
+              <a:pathLst>
+                <a:path w="6964104" h="1229189">
+                  <a:moveTo>
+                    <a:pt x="1072606" y="0"/>
+                  </a:moveTo>
+                  <a:lnTo>
+                    <a:pt x="1125511" y="42450"/>
+                  </a:lnTo>
+                  <a:lnTo>
+                    <a:pt x="1195856" y="96386"/>
+                  </a:lnTo>
+                  <a:lnTo>
+                    <a:pt x="1266200" y="147928"/>
+                  </a:lnTo>
+                  <a:lnTo>
+                    <a:pt x="1336545" y="197181"/>
+                  </a:lnTo>
+                  <a:lnTo>
+                    <a:pt x="1406889" y="244247"/>
+                  </a:lnTo>
+                  <a:lnTo>
+                    <a:pt x="1477234" y="289224"/>
+                  </a:lnTo>
+                  <a:lnTo>
+                    <a:pt x="1547578" y="332203"/>
+                  </a:lnTo>
+                  <a:lnTo>
+                    <a:pt x="1617923" y="373275"/>
+                  </a:lnTo>
+                  <a:lnTo>
+                    <a:pt x="1688267" y="412522"/>
+                  </a:lnTo>
+                  <a:lnTo>
+                    <a:pt x="1758612" y="450027"/>
+                  </a:lnTo>
+                  <a:lnTo>
+                    <a:pt x="1828956" y="485867"/>
+                  </a:lnTo>
+                  <a:lnTo>
+                    <a:pt x="1899301" y="520115"/>
+                  </a:lnTo>
+                  <a:lnTo>
+                    <a:pt x="1969645" y="552843"/>
+                  </a:lnTo>
+                  <a:lnTo>
+                    <a:pt x="2039990" y="584117"/>
+                  </a:lnTo>
+                  <a:lnTo>
+                    <a:pt x="2110334" y="614003"/>
+                  </a:lnTo>
+                  <a:lnTo>
+                    <a:pt x="2180679" y="642562"/>
+                  </a:lnTo>
+                  <a:lnTo>
+                    <a:pt x="2251023" y="669853"/>
+                  </a:lnTo>
+                  <a:lnTo>
+                    <a:pt x="2321368" y="695932"/>
+                  </a:lnTo>
+                  <a:lnTo>
+                    <a:pt x="2391712" y="720853"/>
+                  </a:lnTo>
+                  <a:lnTo>
+                    <a:pt x="2462057" y="744667"/>
+                  </a:lnTo>
+                  <a:lnTo>
+                    <a:pt x="2532401" y="767425"/>
+                  </a:lnTo>
+                  <a:lnTo>
+                    <a:pt x="2602746" y="789171"/>
+                  </a:lnTo>
+                  <a:lnTo>
+                    <a:pt x="2673090" y="809953"/>
+                  </a:lnTo>
+                  <a:lnTo>
+                    <a:pt x="2743435" y="829811"/>
+                  </a:lnTo>
+                  <a:lnTo>
+                    <a:pt x="2813779" y="848788"/>
+                  </a:lnTo>
+                  <a:lnTo>
+                    <a:pt x="2884124" y="866922"/>
+                  </a:lnTo>
+                  <a:lnTo>
+                    <a:pt x="2954468" y="884251"/>
+                  </a:lnTo>
+                  <a:lnTo>
+                    <a:pt x="3024813" y="900810"/>
+                  </a:lnTo>
+                  <a:lnTo>
+                    <a:pt x="3095157" y="916635"/>
+                  </a:lnTo>
+                  <a:lnTo>
+                    <a:pt x="3165502" y="931756"/>
+                  </a:lnTo>
+                  <a:lnTo>
+                    <a:pt x="3235846" y="946206"/>
+                  </a:lnTo>
+                  <a:lnTo>
+                    <a:pt x="3306191" y="958546"/>
+                  </a:lnTo>
+                  <a:lnTo>
+                    <a:pt x="3376535" y="962787"/>
+                  </a:lnTo>
+                  <a:lnTo>
+                    <a:pt x="3446880" y="966967"/>
+                  </a:lnTo>
+                  <a:lnTo>
+                    <a:pt x="3517224" y="971089"/>
+                  </a:lnTo>
+                  <a:lnTo>
+                    <a:pt x="3587569" y="975152"/>
+                  </a:lnTo>
+                  <a:lnTo>
+                    <a:pt x="3657913" y="979157"/>
+                  </a:lnTo>
+                  <a:lnTo>
+                    <a:pt x="3728257" y="983105"/>
+                  </a:lnTo>
+                  <a:lnTo>
+                    <a:pt x="3798602" y="986997"/>
+                  </a:lnTo>
+                  <a:lnTo>
+                    <a:pt x="3868946" y="990834"/>
+                  </a:lnTo>
+                  <a:lnTo>
+                    <a:pt x="3939291" y="994617"/>
+                  </a:lnTo>
+                  <a:lnTo>
+                    <a:pt x="4009635" y="998345"/>
+                  </a:lnTo>
+                  <a:lnTo>
+                    <a:pt x="4079980" y="1002021"/>
+                  </a:lnTo>
+                  <a:lnTo>
+                    <a:pt x="4150324" y="1005645"/>
+                  </a:lnTo>
+                  <a:lnTo>
+                    <a:pt x="4220669" y="1009217"/>
+                  </a:lnTo>
+                  <a:lnTo>
+                    <a:pt x="4291013" y="1012738"/>
+                  </a:lnTo>
+                  <a:lnTo>
+                    <a:pt x="4361358" y="1016210"/>
+                  </a:lnTo>
+                  <a:lnTo>
+                    <a:pt x="4431702" y="1019632"/>
+                  </a:lnTo>
+                  <a:lnTo>
+                    <a:pt x="4502047" y="1023005"/>
+                  </a:lnTo>
+                  <a:lnTo>
+                    <a:pt x="4572391" y="1026331"/>
+                  </a:lnTo>
+                  <a:lnTo>
+                    <a:pt x="4642736" y="1029609"/>
+                  </a:lnTo>
+                  <a:lnTo>
+                    <a:pt x="4713080" y="1032841"/>
+                  </a:lnTo>
+                  <a:lnTo>
+                    <a:pt x="4783425" y="1036027"/>
+                  </a:lnTo>
+                  <a:lnTo>
+                    <a:pt x="4853769" y="1039168"/>
+                  </a:lnTo>
+                  <a:lnTo>
+                    <a:pt x="4924114" y="1042264"/>
+                  </a:lnTo>
+                  <a:lnTo>
+                    <a:pt x="4994458" y="1045316"/>
+                  </a:lnTo>
+                  <a:lnTo>
+                    <a:pt x="5064803" y="1048325"/>
+                  </a:lnTo>
+                  <a:lnTo>
+                    <a:pt x="5135147" y="1051291"/>
+                  </a:lnTo>
+                  <a:lnTo>
+                    <a:pt x="5205492" y="1054215"/>
+                  </a:lnTo>
+                  <a:lnTo>
+                    <a:pt x="5275836" y="1057097"/>
+                  </a:lnTo>
+                  <a:lnTo>
+                    <a:pt x="5346181" y="1059939"/>
+                  </a:lnTo>
+                  <a:lnTo>
+                    <a:pt x="5416525" y="1062740"/>
+                  </a:lnTo>
+                  <a:lnTo>
+                    <a:pt x="5486870" y="1065501"/>
+                  </a:lnTo>
+                  <a:lnTo>
+                    <a:pt x="5557214" y="1068224"/>
+                  </a:lnTo>
+                  <a:lnTo>
+                    <a:pt x="5627559" y="1070907"/>
+                  </a:lnTo>
+                  <a:lnTo>
+                    <a:pt x="5697903" y="1073553"/>
+                  </a:lnTo>
+                  <a:lnTo>
+                    <a:pt x="5768248" y="1076160"/>
+                  </a:lnTo>
+                  <a:lnTo>
+                    <a:pt x="5838592" y="1078731"/>
+                  </a:lnTo>
+                  <a:lnTo>
+                    <a:pt x="5908937" y="1081266"/>
+                  </a:lnTo>
+                  <a:lnTo>
+                    <a:pt x="5979281" y="1083764"/>
+                  </a:lnTo>
+                  <a:lnTo>
+                    <a:pt x="6049626" y="1086227"/>
+                  </a:lnTo>
+                  <a:lnTo>
+                    <a:pt x="6119970" y="1088655"/>
+                  </a:lnTo>
+                  <a:lnTo>
+                    <a:pt x="6190315" y="1091048"/>
+                  </a:lnTo>
+                  <a:lnTo>
+                    <a:pt x="6260659" y="1093407"/>
+                  </a:lnTo>
+                  <a:lnTo>
+                    <a:pt x="6331004" y="1095733"/>
+                  </a:lnTo>
+                  <a:lnTo>
+                    <a:pt x="6401348" y="1098026"/>
+                  </a:lnTo>
+                  <a:lnTo>
+                    <a:pt x="6471693" y="1100286"/>
+                  </a:lnTo>
+                  <a:lnTo>
+                    <a:pt x="6542037" y="1102515"/>
+                  </a:lnTo>
+                  <a:lnTo>
+                    <a:pt x="6612382" y="1104711"/>
+                  </a:lnTo>
+                  <a:lnTo>
+                    <a:pt x="6682726" y="1106877"/>
+                  </a:lnTo>
+                  <a:lnTo>
+                    <a:pt x="6753071" y="1109011"/>
+                  </a:lnTo>
+                  <a:lnTo>
+                    <a:pt x="6823415" y="1111116"/>
+                  </a:lnTo>
+                  <a:lnTo>
+                    <a:pt x="6893760" y="1113190"/>
+                  </a:lnTo>
+                  <a:lnTo>
+                    <a:pt x="6964104" y="1115235"/>
+                  </a:lnTo>
+                  <a:lnTo>
+                    <a:pt x="6964104" y="1229189"/>
+                  </a:lnTo>
+                  <a:lnTo>
+                    <a:pt x="6893760" y="1227887"/>
+                  </a:lnTo>
+                  <a:lnTo>
+                    <a:pt x="6823415" y="1226525"/>
+                  </a:lnTo>
+                  <a:lnTo>
+                    <a:pt x="6753071" y="1225100"/>
+                  </a:lnTo>
+                  <a:lnTo>
+                    <a:pt x="6682726" y="1223608"/>
+                  </a:lnTo>
+                  <a:lnTo>
+                    <a:pt x="6612382" y="1222047"/>
+                  </a:lnTo>
+                  <a:lnTo>
+                    <a:pt x="6542037" y="1220414"/>
+                  </a:lnTo>
+                  <a:lnTo>
+                    <a:pt x="6471693" y="1218705"/>
+                  </a:lnTo>
+                  <a:lnTo>
+                    <a:pt x="6401348" y="1216916"/>
+                  </a:lnTo>
+                  <a:lnTo>
+                    <a:pt x="6331004" y="1215044"/>
+                  </a:lnTo>
+                  <a:lnTo>
+                    <a:pt x="6260659" y="1213085"/>
+                  </a:lnTo>
+                  <a:lnTo>
+                    <a:pt x="6190315" y="1211035"/>
+                  </a:lnTo>
+                  <a:lnTo>
+                    <a:pt x="6119970" y="1208890"/>
+                  </a:lnTo>
+                  <a:lnTo>
+                    <a:pt x="6049626" y="1206645"/>
+                  </a:lnTo>
+                  <a:lnTo>
+                    <a:pt x="5979281" y="1204296"/>
+                  </a:lnTo>
+                  <a:lnTo>
+                    <a:pt x="5908937" y="1201838"/>
+                  </a:lnTo>
+                  <a:lnTo>
+                    <a:pt x="5838592" y="1199266"/>
+                  </a:lnTo>
+                  <a:lnTo>
+                    <a:pt x="5768248" y="1196574"/>
+                  </a:lnTo>
+                  <a:lnTo>
+                    <a:pt x="5697903" y="1193757"/>
+                  </a:lnTo>
+                  <a:lnTo>
+                    <a:pt x="5627559" y="1190809"/>
+                  </a:lnTo>
+                  <a:lnTo>
+                    <a:pt x="5557214" y="1187724"/>
+                  </a:lnTo>
+                  <a:lnTo>
+                    <a:pt x="5486870" y="1184496"/>
+                  </a:lnTo>
+                  <a:lnTo>
+                    <a:pt x="5416525" y="1181117"/>
+                  </a:lnTo>
+                  <a:lnTo>
+                    <a:pt x="5346181" y="1177582"/>
+                  </a:lnTo>
+                  <a:lnTo>
+                    <a:pt x="5275836" y="1173883"/>
+                  </a:lnTo>
+                  <a:lnTo>
+                    <a:pt x="5205492" y="1170011"/>
+                  </a:lnTo>
+                  <a:lnTo>
+                    <a:pt x="5135147" y="1165960"/>
+                  </a:lnTo>
+                  <a:lnTo>
+                    <a:pt x="5064803" y="1161721"/>
+                  </a:lnTo>
+                  <a:lnTo>
+                    <a:pt x="4994458" y="1157284"/>
+                  </a:lnTo>
+                  <a:lnTo>
+                    <a:pt x="4924114" y="1152641"/>
+                  </a:lnTo>
+                  <a:lnTo>
+                    <a:pt x="4853769" y="1147783"/>
+                  </a:lnTo>
+                  <a:lnTo>
+                    <a:pt x="4783425" y="1142699"/>
+                  </a:lnTo>
+                  <a:lnTo>
+                    <a:pt x="4713080" y="1137379"/>
+                  </a:lnTo>
+                  <a:lnTo>
+                    <a:pt x="4642736" y="1131811"/>
+                  </a:lnTo>
+                  <a:lnTo>
+                    <a:pt x="4572391" y="1125985"/>
+                  </a:lnTo>
+                  <a:lnTo>
+                    <a:pt x="4502047" y="1119888"/>
+                  </a:lnTo>
+                  <a:lnTo>
+                    <a:pt x="4431702" y="1113508"/>
+                  </a:lnTo>
+                  <a:lnTo>
+                    <a:pt x="4361358" y="1106831"/>
+                  </a:lnTo>
+                  <a:lnTo>
+                    <a:pt x="4291013" y="1099844"/>
+                  </a:lnTo>
+                  <a:lnTo>
+                    <a:pt x="4220669" y="1092533"/>
+                  </a:lnTo>
+                  <a:lnTo>
+                    <a:pt x="4150324" y="1084882"/>
+                  </a:lnTo>
+                  <a:lnTo>
+                    <a:pt x="4079980" y="1076875"/>
+                  </a:lnTo>
+                  <a:lnTo>
+                    <a:pt x="4009635" y="1068496"/>
+                  </a:lnTo>
+                  <a:lnTo>
+                    <a:pt x="3939291" y="1059728"/>
+                  </a:lnTo>
+                  <a:lnTo>
+                    <a:pt x="3868946" y="1050553"/>
+                  </a:lnTo>
+                  <a:lnTo>
+                    <a:pt x="3798602" y="1040951"/>
+                  </a:lnTo>
+                  <a:lnTo>
+                    <a:pt x="3728257" y="1030903"/>
+                  </a:lnTo>
+                  <a:lnTo>
+                    <a:pt x="3657913" y="1020388"/>
+                  </a:lnTo>
+                  <a:lnTo>
+                    <a:pt x="3587569" y="1009385"/>
+                  </a:lnTo>
+                  <a:lnTo>
+                    <a:pt x="3517224" y="997870"/>
+                  </a:lnTo>
+                  <a:lnTo>
+                    <a:pt x="3446880" y="985820"/>
+                  </a:lnTo>
+                  <a:lnTo>
+                    <a:pt x="3376535" y="973211"/>
+                  </a:lnTo>
+                  <a:lnTo>
+                    <a:pt x="3306191" y="960015"/>
+                  </a:lnTo>
+                  <a:lnTo>
+                    <a:pt x="3235846" y="954244"/>
+                  </a:lnTo>
+                  <a:lnTo>
+                    <a:pt x="3165502" y="949880"/>
+                  </a:lnTo>
+                  <a:lnTo>
+                    <a:pt x="3095157" y="945453"/>
+                  </a:lnTo>
+                  <a:lnTo>
+                    <a:pt x="3024813" y="940962"/>
+                  </a:lnTo>
+                  <a:lnTo>
+                    <a:pt x="2954468" y="936407"/>
+                  </a:lnTo>
+                  <a:lnTo>
+                    <a:pt x="2884124" y="931786"/>
+                  </a:lnTo>
+                  <a:lnTo>
+                    <a:pt x="2813779" y="927098"/>
+                  </a:lnTo>
+                  <a:lnTo>
+                    <a:pt x="2743435" y="922343"/>
+                  </a:lnTo>
+                  <a:lnTo>
+                    <a:pt x="2673090" y="917520"/>
+                  </a:lnTo>
+                  <a:lnTo>
+                    <a:pt x="2602746" y="912627"/>
+                  </a:lnTo>
+                  <a:lnTo>
+                    <a:pt x="2532401" y="907663"/>
+                  </a:lnTo>
+                  <a:lnTo>
+                    <a:pt x="2462057" y="902628"/>
+                  </a:lnTo>
+                  <a:lnTo>
+                    <a:pt x="2391712" y="897521"/>
+                  </a:lnTo>
+                  <a:lnTo>
+                    <a:pt x="2321368" y="892340"/>
+                  </a:lnTo>
+                  <a:lnTo>
+                    <a:pt x="2251023" y="887084"/>
+                  </a:lnTo>
+                  <a:lnTo>
+                    <a:pt x="2180679" y="881753"/>
+                  </a:lnTo>
+                  <a:lnTo>
+                    <a:pt x="2110334" y="876344"/>
+                  </a:lnTo>
+                  <a:lnTo>
+                    <a:pt x="2039990" y="870858"/>
+                  </a:lnTo>
+                  <a:lnTo>
+                    <a:pt x="1969645" y="865293"/>
+                  </a:lnTo>
+                  <a:lnTo>
+                    <a:pt x="1899301" y="859648"/>
+                  </a:lnTo>
+                  <a:lnTo>
+                    <a:pt x="1828956" y="853921"/>
+                  </a:lnTo>
+                  <a:lnTo>
+                    <a:pt x="1758612" y="848112"/>
+                  </a:lnTo>
+                  <a:lnTo>
+                    <a:pt x="1688267" y="842219"/>
+                  </a:lnTo>
+                  <a:lnTo>
+                    <a:pt x="1617923" y="836241"/>
+                  </a:lnTo>
+                  <a:lnTo>
+                    <a:pt x="1547578" y="830178"/>
+                  </a:lnTo>
+                  <a:lnTo>
+                    <a:pt x="1477234" y="824027"/>
+                  </a:lnTo>
+                  <a:lnTo>
+                    <a:pt x="1406889" y="817787"/>
+                  </a:lnTo>
+                  <a:lnTo>
+                    <a:pt x="1336545" y="811457"/>
+                  </a:lnTo>
+                  <a:lnTo>
+                    <a:pt x="1266200" y="805036"/>
+                  </a:lnTo>
+                  <a:lnTo>
+                    <a:pt x="1195856" y="798523"/>
+                  </a:lnTo>
+                  <a:lnTo>
+                    <a:pt x="1125511" y="791916"/>
+                  </a:lnTo>
+                  <a:lnTo>
+                    <a:pt x="1055167" y="785214"/>
+                  </a:lnTo>
+                  <a:lnTo>
+                    <a:pt x="984822" y="778415"/>
+                  </a:lnTo>
+                  <a:lnTo>
+                    <a:pt x="914478" y="771518"/>
+                  </a:lnTo>
+                  <a:lnTo>
+                    <a:pt x="844133" y="764522"/>
+                  </a:lnTo>
+                  <a:lnTo>
+                    <a:pt x="773789" y="757425"/>
+                  </a:lnTo>
+                  <a:lnTo>
+                    <a:pt x="703444" y="750226"/>
+                  </a:lnTo>
+                  <a:lnTo>
+                    <a:pt x="633100" y="742923"/>
+                  </a:lnTo>
+                  <a:lnTo>
+                    <a:pt x="562755" y="735515"/>
+                  </a:lnTo>
+                  <a:lnTo>
+                    <a:pt x="492411" y="728000"/>
+                  </a:lnTo>
+                  <a:lnTo>
+                    <a:pt x="422066" y="720377"/>
+                  </a:lnTo>
+                  <a:lnTo>
+                    <a:pt x="351722" y="712645"/>
+                  </a:lnTo>
+                  <a:lnTo>
+                    <a:pt x="281377" y="704800"/>
+                  </a:lnTo>
+                  <a:lnTo>
+                    <a:pt x="211033" y="696843"/>
+                  </a:lnTo>
+                  <a:lnTo>
+                    <a:pt x="140688" y="688771"/>
+                  </a:lnTo>
+                  <a:lnTo>
+                    <a:pt x="70344" y="680583"/>
+                  </a:lnTo>
+                  <a:lnTo>
+                    <a:pt x="0" y="672277"/>
+                  </a:lnTo>
+                  <a:close/>
+                </a:path>
+              </a:pathLst>
+            </a:custGeom>
+            <a:solidFill>
+              <a:srgbClr val="FF8C00">
+                <a:alpha val="20000"/>
+              </a:srgbClr>
+            </a:solidFill>
+          </p:spPr>
+          <p:txBody>
+            <a:bodyPr/>
+            <a:lstStyle/>
+            <a:p/>
+          </p:txBody>
+        </p:sp>
+        <p:sp>
+          <p:nvSpPr>
+            <p:cNvPr id="68" name="pl68"/>
+            <p:cNvSpPr/>
+            <p:nvPr/>
+          </p:nvSpPr>
+          <p:spPr>
+            <a:xfrm>
+              <a:off x="2307918" y="4336484"/>
+              <a:ext cx="5891498" cy="1115235"/>
+            </a:xfrm>
+            <a:custGeom>
+              <a:avLst/>
+              <a:pathLst>
+                <a:path w="5891498" h="1115235">
+                  <a:moveTo>
+                    <a:pt x="0" y="0"/>
+                  </a:moveTo>
+                  <a:lnTo>
+                    <a:pt x="52905" y="42450"/>
+                  </a:lnTo>
+                  <a:lnTo>
+                    <a:pt x="123249" y="96386"/>
+                  </a:lnTo>
+                  <a:lnTo>
+                    <a:pt x="193594" y="147928"/>
+                  </a:lnTo>
+                  <a:lnTo>
+                    <a:pt x="263938" y="197181"/>
+                  </a:lnTo>
+                  <a:lnTo>
+                    <a:pt x="334283" y="244247"/>
+                  </a:lnTo>
+                  <a:lnTo>
+                    <a:pt x="404627" y="289224"/>
+                  </a:lnTo>
+                  <a:lnTo>
+                    <a:pt x="474972" y="332203"/>
+                  </a:lnTo>
+                  <a:lnTo>
+                    <a:pt x="545316" y="373275"/>
+                  </a:lnTo>
+                  <a:lnTo>
+                    <a:pt x="615661" y="412522"/>
+                  </a:lnTo>
+                  <a:lnTo>
+                    <a:pt x="686005" y="450027"/>
+                  </a:lnTo>
+                  <a:lnTo>
+                    <a:pt x="756350" y="485867"/>
+                  </a:lnTo>
+                  <a:lnTo>
+                    <a:pt x="826694" y="520115"/>
+                  </a:lnTo>
+                  <a:lnTo>
+                    <a:pt x="897039" y="552843"/>
+                  </a:lnTo>
+                  <a:lnTo>
+                    <a:pt x="967383" y="584117"/>
+                  </a:lnTo>
+                  <a:lnTo>
+                    <a:pt x="1037728" y="614003"/>
+                  </a:lnTo>
+                  <a:lnTo>
+                    <a:pt x="1108072" y="642562"/>
+                  </a:lnTo>
+                  <a:lnTo>
+                    <a:pt x="1178417" y="669853"/>
+                  </a:lnTo>
+                  <a:lnTo>
+                    <a:pt x="1248761" y="695932"/>
+                  </a:lnTo>
+                  <a:lnTo>
+                    <a:pt x="1319106" y="720853"/>
+                  </a:lnTo>
+                  <a:lnTo>
+                    <a:pt x="1389450" y="744667"/>
+                  </a:lnTo>
+                  <a:lnTo>
+                    <a:pt x="1459795" y="767425"/>
+                  </a:lnTo>
+                  <a:lnTo>
+                    <a:pt x="1530139" y="789171"/>
+                  </a:lnTo>
+                  <a:lnTo>
+                    <a:pt x="1600484" y="809953"/>
+                  </a:lnTo>
+                  <a:lnTo>
+                    <a:pt x="1670828" y="829811"/>
+                  </a:lnTo>
+                  <a:lnTo>
+                    <a:pt x="1741173" y="848788"/>
+                  </a:lnTo>
+                  <a:lnTo>
+                    <a:pt x="1811517" y="866922"/>
+                  </a:lnTo>
+                  <a:lnTo>
+                    <a:pt x="1881862" y="884251"/>
+                  </a:lnTo>
+                  <a:lnTo>
+                    <a:pt x="1952206" y="900810"/>
+                  </a:lnTo>
+                  <a:lnTo>
+                    <a:pt x="2022551" y="916635"/>
+                  </a:lnTo>
+                  <a:lnTo>
+                    <a:pt x="2092895" y="931756"/>
+                  </a:lnTo>
+                  <a:lnTo>
+                    <a:pt x="2163240" y="946206"/>
+                  </a:lnTo>
+                  <a:lnTo>
+                    <a:pt x="2233584" y="958546"/>
+                  </a:lnTo>
+                  <a:lnTo>
+                    <a:pt x="2303929" y="962787"/>
+                  </a:lnTo>
+                  <a:lnTo>
+                    <a:pt x="2374273" y="966967"/>
+                  </a:lnTo>
+                  <a:lnTo>
+                    <a:pt x="2444618" y="971089"/>
+                  </a:lnTo>
+                  <a:lnTo>
+                    <a:pt x="2514962" y="975152"/>
+                  </a:lnTo>
+                  <a:lnTo>
+                    <a:pt x="2585307" y="979157"/>
+                  </a:lnTo>
+                  <a:lnTo>
+                    <a:pt x="2655651" y="983105"/>
+                  </a:lnTo>
+                  <a:lnTo>
+                    <a:pt x="2725996" y="986997"/>
+                  </a:lnTo>
+                  <a:lnTo>
+                    <a:pt x="2796340" y="990834"/>
+                  </a:lnTo>
+                  <a:lnTo>
+                    <a:pt x="2866685" y="994617"/>
+                  </a:lnTo>
+                  <a:lnTo>
+                    <a:pt x="2937029" y="998345"/>
+                  </a:lnTo>
+                  <a:lnTo>
+                    <a:pt x="3007373" y="1002021"/>
+                  </a:lnTo>
+                  <a:lnTo>
+                    <a:pt x="3077718" y="1005645"/>
+                  </a:lnTo>
+                  <a:lnTo>
+                    <a:pt x="3148062" y="1009217"/>
+                  </a:lnTo>
+                  <a:lnTo>
+                    <a:pt x="3218407" y="1012738"/>
+                  </a:lnTo>
+                  <a:lnTo>
+                    <a:pt x="3288751" y="1016210"/>
+                  </a:lnTo>
+                  <a:lnTo>
+                    <a:pt x="3359096" y="1019632"/>
+                  </a:lnTo>
+                  <a:lnTo>
+                    <a:pt x="3429440" y="1023005"/>
+                  </a:lnTo>
+                  <a:lnTo>
+                    <a:pt x="3499785" y="1026331"/>
+                  </a:lnTo>
+                  <a:lnTo>
+                    <a:pt x="3570129" y="1029609"/>
+                  </a:lnTo>
+                  <a:lnTo>
+                    <a:pt x="3640474" y="1032841"/>
+                  </a:lnTo>
+                  <a:lnTo>
+                    <a:pt x="3710818" y="1036027"/>
+                  </a:lnTo>
+                  <a:lnTo>
+                    <a:pt x="3781163" y="1039168"/>
+                  </a:lnTo>
+                  <a:lnTo>
+                    <a:pt x="3851507" y="1042264"/>
+                  </a:lnTo>
+                  <a:lnTo>
+                    <a:pt x="3921852" y="1045316"/>
+                  </a:lnTo>
+                  <a:lnTo>
+                    <a:pt x="3992196" y="1048325"/>
+                  </a:lnTo>
+                  <a:lnTo>
+                    <a:pt x="4062541" y="1051291"/>
+                  </a:lnTo>
+                  <a:lnTo>
+                    <a:pt x="4132885" y="1054215"/>
+                  </a:lnTo>
+                  <a:lnTo>
+                    <a:pt x="4203230" y="1057097"/>
+                  </a:lnTo>
+                  <a:lnTo>
+                    <a:pt x="4273574" y="1059939"/>
+                  </a:lnTo>
+                  <a:lnTo>
+                    <a:pt x="4343919" y="1062740"/>
+                  </a:lnTo>
+                  <a:lnTo>
+                    <a:pt x="4414263" y="1065501"/>
+                  </a:lnTo>
+                  <a:lnTo>
+                    <a:pt x="4484608" y="1068224"/>
+                  </a:lnTo>
+                  <a:lnTo>
+                    <a:pt x="4554952" y="1070907"/>
+                  </a:lnTo>
+                  <a:lnTo>
+                    <a:pt x="4625297" y="1073553"/>
+                  </a:lnTo>
+                  <a:lnTo>
+                    <a:pt x="4695641" y="1076160"/>
+                  </a:lnTo>
+                  <a:lnTo>
+                    <a:pt x="4765986" y="1078731"/>
+                  </a:lnTo>
+                  <a:lnTo>
+                    <a:pt x="4836330" y="1081266"/>
+                  </a:lnTo>
+                  <a:lnTo>
+                    <a:pt x="4906675" y="1083764"/>
+                  </a:lnTo>
+                  <a:lnTo>
+                    <a:pt x="4977019" y="1086227"/>
+                  </a:lnTo>
+                  <a:lnTo>
+                    <a:pt x="5047364" y="1088655"/>
+                  </a:lnTo>
+                  <a:lnTo>
+                    <a:pt x="5117708" y="1091048"/>
+                  </a:lnTo>
+                  <a:lnTo>
+                    <a:pt x="5188053" y="1093407"/>
+                  </a:lnTo>
+                  <a:lnTo>
+                    <a:pt x="5258397" y="1095733"/>
+                  </a:lnTo>
+                  <a:lnTo>
+                    <a:pt x="5328742" y="1098026"/>
+                  </a:lnTo>
+                  <a:lnTo>
+                    <a:pt x="5399086" y="1100286"/>
+                  </a:lnTo>
+                  <a:lnTo>
+                    <a:pt x="5469431" y="1102515"/>
+                  </a:lnTo>
+                  <a:lnTo>
+                    <a:pt x="5539775" y="1104711"/>
+                  </a:lnTo>
+                  <a:lnTo>
+                    <a:pt x="5610120" y="1106877"/>
+                  </a:lnTo>
+                  <a:lnTo>
+                    <a:pt x="5680464" y="1109011"/>
+                  </a:lnTo>
+                  <a:lnTo>
+                    <a:pt x="5750809" y="1111116"/>
+                  </a:lnTo>
+                  <a:lnTo>
+                    <a:pt x="5821153" y="1113190"/>
+                  </a:lnTo>
+                  <a:lnTo>
+                    <a:pt x="5891498" y="1115235"/>
+                  </a:lnTo>
+                </a:path>
+              </a:pathLst>
+            </a:custGeom>
+          </p:spPr>
+          <p:txBody>
+            <a:bodyPr/>
+            <a:lstStyle/>
+            <a:p/>
+          </p:txBody>
+        </p:sp>
+        <p:sp>
+          <p:nvSpPr>
+            <p:cNvPr id="69" name="pl69"/>
+            <p:cNvSpPr/>
+            <p:nvPr/>
+          </p:nvSpPr>
+          <p:spPr>
+            <a:xfrm>
+              <a:off x="1235312" y="5008762"/>
+              <a:ext cx="6964104" cy="556911"/>
+            </a:xfrm>
+            <a:custGeom>
+              <a:avLst/>
+              <a:pathLst>
+                <a:path w="6964104" h="556911">
+                  <a:moveTo>
+                    <a:pt x="6964104" y="556911"/>
+                  </a:moveTo>
+                  <a:lnTo>
+                    <a:pt x="6893760" y="555609"/>
+                  </a:lnTo>
+                  <a:lnTo>
+                    <a:pt x="6823415" y="554247"/>
+                  </a:lnTo>
+                  <a:lnTo>
+                    <a:pt x="6753071" y="552822"/>
+                  </a:lnTo>
+                  <a:lnTo>
+                    <a:pt x="6682726" y="551330"/>
+                  </a:lnTo>
+                  <a:lnTo>
+                    <a:pt x="6612382" y="549770"/>
+                  </a:lnTo>
+                  <a:lnTo>
+                    <a:pt x="6542037" y="548136"/>
+                  </a:lnTo>
+                  <a:lnTo>
+                    <a:pt x="6471693" y="546427"/>
+                  </a:lnTo>
+                  <a:lnTo>
+                    <a:pt x="6401348" y="544638"/>
+                  </a:lnTo>
+                  <a:lnTo>
+                    <a:pt x="6331004" y="542766"/>
+                  </a:lnTo>
+                  <a:lnTo>
+                    <a:pt x="6260659" y="540807"/>
+                  </a:lnTo>
+                  <a:lnTo>
+                    <a:pt x="6190315" y="538757"/>
+                  </a:lnTo>
+                  <a:lnTo>
+                    <a:pt x="6119970" y="536612"/>
+                  </a:lnTo>
+                  <a:lnTo>
+                    <a:pt x="6049626" y="534368"/>
+                  </a:lnTo>
+                  <a:lnTo>
+                    <a:pt x="5979281" y="532019"/>
+                  </a:lnTo>
+                  <a:lnTo>
+                    <a:pt x="5908937" y="529560"/>
+                  </a:lnTo>
+                  <a:lnTo>
+                    <a:pt x="5838592" y="526988"/>
+                  </a:lnTo>
+                  <a:lnTo>
+                    <a:pt x="5768248" y="524296"/>
+                  </a:lnTo>
+                  <a:lnTo>
+                    <a:pt x="5697903" y="521479"/>
+                  </a:lnTo>
+                  <a:lnTo>
+                    <a:pt x="5627559" y="518531"/>
+                  </a:lnTo>
+                  <a:lnTo>
+                    <a:pt x="5557214" y="515446"/>
+                  </a:lnTo>
+                  <a:lnTo>
+                    <a:pt x="5486870" y="512218"/>
+                  </a:lnTo>
+                  <a:lnTo>
+                    <a:pt x="5416525" y="508840"/>
+                  </a:lnTo>
+                  <a:lnTo>
+                    <a:pt x="5346181" y="505304"/>
+                  </a:lnTo>
+                  <a:lnTo>
+                    <a:pt x="5275836" y="501605"/>
+                  </a:lnTo>
+                  <a:lnTo>
+                    <a:pt x="5205492" y="497733"/>
+                  </a:lnTo>
+                  <a:lnTo>
+                    <a:pt x="5135147" y="493682"/>
+                  </a:lnTo>
+                  <a:lnTo>
+                    <a:pt x="5064803" y="489443"/>
+                  </a:lnTo>
+                  <a:lnTo>
+                    <a:pt x="4994458" y="485006"/>
+                  </a:lnTo>
+                  <a:lnTo>
+                    <a:pt x="4924114" y="480364"/>
+                  </a:lnTo>
+                  <a:lnTo>
+                    <a:pt x="4853769" y="475505"/>
+                  </a:lnTo>
+                  <a:lnTo>
+                    <a:pt x="4783425" y="470421"/>
+                  </a:lnTo>
+                  <a:lnTo>
+                    <a:pt x="4713080" y="465101"/>
+                  </a:lnTo>
+                  <a:lnTo>
+                    <a:pt x="4642736" y="459533"/>
+                  </a:lnTo>
+                  <a:lnTo>
+                    <a:pt x="4572391" y="453707"/>
+                  </a:lnTo>
+                  <a:lnTo>
+                    <a:pt x="4502047" y="447610"/>
+                  </a:lnTo>
+                  <a:lnTo>
+                    <a:pt x="4431702" y="441230"/>
+                  </a:lnTo>
+                  <a:lnTo>
+                    <a:pt x="4361358" y="434553"/>
+                  </a:lnTo>
+                  <a:lnTo>
+                    <a:pt x="4291013" y="427567"/>
+                  </a:lnTo>
+                  <a:lnTo>
+                    <a:pt x="4220669" y="420255"/>
+                  </a:lnTo>
+                  <a:lnTo>
+                    <a:pt x="4150324" y="412604"/>
+                  </a:lnTo>
+                  <a:lnTo>
+                    <a:pt x="4079980" y="404597"/>
+                  </a:lnTo>
+                  <a:lnTo>
+                    <a:pt x="4009635" y="396218"/>
+                  </a:lnTo>
+                  <a:lnTo>
+                    <a:pt x="3939291" y="387450"/>
+                  </a:lnTo>
+                  <a:lnTo>
+                    <a:pt x="3868946" y="378275"/>
+                  </a:lnTo>
+                  <a:lnTo>
+                    <a:pt x="3798602" y="368673"/>
+                  </a:lnTo>
+                  <a:lnTo>
+                    <a:pt x="3728257" y="358625"/>
+                  </a:lnTo>
+                  <a:lnTo>
+                    <a:pt x="3657913" y="348110"/>
+                  </a:lnTo>
+                  <a:lnTo>
+                    <a:pt x="3587569" y="337107"/>
+                  </a:lnTo>
+                  <a:lnTo>
+                    <a:pt x="3517224" y="325592"/>
+                  </a:lnTo>
+                  <a:lnTo>
+                    <a:pt x="3446880" y="313542"/>
+                  </a:lnTo>
+                  <a:lnTo>
+                    <a:pt x="3376535" y="300933"/>
+                  </a:lnTo>
+                  <a:lnTo>
+                    <a:pt x="3306191" y="287737"/>
+                  </a:lnTo>
+                  <a:lnTo>
+                    <a:pt x="3235846" y="281966"/>
+                  </a:lnTo>
+                  <a:lnTo>
+                    <a:pt x="3165502" y="277602"/>
+                  </a:lnTo>
+                  <a:lnTo>
+                    <a:pt x="3095157" y="273175"/>
+                  </a:lnTo>
+                  <a:lnTo>
+                    <a:pt x="3024813" y="268684"/>
+                  </a:lnTo>
+                  <a:lnTo>
+                    <a:pt x="2954468" y="264129"/>
+                  </a:lnTo>
+                  <a:lnTo>
+                    <a:pt x="2884124" y="259508"/>
+                  </a:lnTo>
+                  <a:lnTo>
+                    <a:pt x="2813779" y="254820"/>
+                  </a:lnTo>
+                  <a:lnTo>
+                    <a:pt x="2743435" y="250065"/>
+                  </a:lnTo>
+                  <a:lnTo>
+                    <a:pt x="2673090" y="245242"/>
+                  </a:lnTo>
+                  <a:lnTo>
+                    <a:pt x="2602746" y="240349"/>
+                  </a:lnTo>
+                  <a:lnTo>
+                    <a:pt x="2532401" y="235385"/>
+                  </a:lnTo>
+                  <a:lnTo>
+                    <a:pt x="2462057" y="230350"/>
+                  </a:lnTo>
+                  <a:lnTo>
+                    <a:pt x="2391712" y="225243"/>
+                  </a:lnTo>
+                  <a:lnTo>
+                    <a:pt x="2321368" y="220062"/>
+                  </a:lnTo>
+                  <a:lnTo>
+                    <a:pt x="2251023" y="214806"/>
+                  </a:lnTo>
+                  <a:lnTo>
+                    <a:pt x="2180679" y="209475"/>
+                  </a:lnTo>
+                  <a:lnTo>
+                    <a:pt x="2110334" y="204066"/>
+                  </a:lnTo>
+                  <a:lnTo>
+                    <a:pt x="2039990" y="198580"/>
+                  </a:lnTo>
+                  <a:lnTo>
+                    <a:pt x="1969645" y="193015"/>
+                  </a:lnTo>
+                  <a:lnTo>
+                    <a:pt x="1899301" y="187370"/>
+                  </a:lnTo>
+                  <a:lnTo>
+                    <a:pt x="1828956" y="181643"/>
+                  </a:lnTo>
+                  <a:lnTo>
+                    <a:pt x="1758612" y="175834"/>
+                  </a:lnTo>
+                  <a:lnTo>
+                    <a:pt x="1688267" y="169941"/>
+                  </a:lnTo>
+                  <a:lnTo>
+                    <a:pt x="1617923" y="163964"/>
+                  </a:lnTo>
+                  <a:lnTo>
+                    <a:pt x="1547578" y="157900"/>
+                  </a:lnTo>
+                  <a:lnTo>
+                    <a:pt x="1477234" y="151749"/>
+                  </a:lnTo>
+                  <a:lnTo>
+                    <a:pt x="1406889" y="145509"/>
+                  </a:lnTo>
+                  <a:lnTo>
+                    <a:pt x="1336545" y="139179"/>
+                  </a:lnTo>
+                  <a:lnTo>
+                    <a:pt x="1266200" y="132758"/>
+                  </a:lnTo>
+                  <a:lnTo>
+                    <a:pt x="1195856" y="126245"/>
+                  </a:lnTo>
+                  <a:lnTo>
+                    <a:pt x="1125511" y="119638"/>
+                  </a:lnTo>
+                  <a:lnTo>
+                    <a:pt x="1055167" y="112936"/>
+                  </a:lnTo>
+                  <a:lnTo>
+                    <a:pt x="984822" y="106137"/>
+                  </a:lnTo>
+                  <a:lnTo>
+                    <a:pt x="914478" y="99240"/>
+                  </a:lnTo>
+                  <a:lnTo>
+                    <a:pt x="844133" y="92244"/>
+                  </a:lnTo>
+                  <a:lnTo>
+                    <a:pt x="773789" y="85147"/>
+                  </a:lnTo>
+                  <a:lnTo>
+                    <a:pt x="703444" y="77948"/>
+                  </a:lnTo>
+                  <a:lnTo>
+                    <a:pt x="633100" y="70645"/>
+                  </a:lnTo>
+                  <a:lnTo>
+                    <a:pt x="562755" y="63237"/>
+                  </a:lnTo>
+                  <a:lnTo>
+                    <a:pt x="492411" y="55722"/>
+                  </a:lnTo>
+                  <a:lnTo>
+                    <a:pt x="422066" y="48099"/>
+                  </a:lnTo>
+                  <a:lnTo>
+                    <a:pt x="351722" y="40367"/>
+                  </a:lnTo>
+                  <a:lnTo>
+                    <a:pt x="281377" y="32523"/>
+                  </a:lnTo>
+                  <a:lnTo>
+                    <a:pt x="211033" y="24565"/>
+                  </a:lnTo>
+                  <a:lnTo>
+                    <a:pt x="140688" y="16494"/>
+                  </a:lnTo>
+                  <a:lnTo>
+                    <a:pt x="70344" y="8306"/>
+                  </a:lnTo>
+                  <a:lnTo>
+                    <a:pt x="0" y="0"/>
+                  </a:lnTo>
+                </a:path>
+              </a:pathLst>
+            </a:custGeom>
+          </p:spPr>
+          <p:txBody>
+            <a:bodyPr/>
+            <a:lstStyle/>
+            <a:p/>
+          </p:txBody>
+        </p:sp>
+        <p:sp>
+          <p:nvSpPr>
+            <p:cNvPr id="70" name="pl70"/>
+            <p:cNvSpPr/>
+            <p:nvPr/>
+          </p:nvSpPr>
+          <p:spPr>
+            <a:xfrm>
+              <a:off x="1235312" y="4381444"/>
+              <a:ext cx="6964104" cy="1149179"/>
+            </a:xfrm>
+            <a:custGeom>
+              <a:avLst/>
+              <a:pathLst>
+                <a:path w="6964104" h="1149179">
+                  <a:moveTo>
+                    <a:pt x="0" y="0"/>
+                  </a:moveTo>
+                  <a:lnTo>
+                    <a:pt x="70344" y="35661"/>
+                  </a:lnTo>
+                  <a:lnTo>
+                    <a:pt x="140688" y="70274"/>
+                  </a:lnTo>
+                  <a:lnTo>
+                    <a:pt x="211033" y="103869"/>
+                  </a:lnTo>
+                  <a:lnTo>
+                    <a:pt x="281377" y="136475"/>
+                  </a:lnTo>
+                  <a:lnTo>
+                    <a:pt x="351722" y="168122"/>
+                  </a:lnTo>
+                  <a:lnTo>
+                    <a:pt x="422066" y="198838"/>
+                  </a:lnTo>
+                  <a:lnTo>
+                    <a:pt x="492411" y="228651"/>
+                  </a:lnTo>
+                  <a:lnTo>
+                    <a:pt x="562755" y="257586"/>
+                  </a:lnTo>
+                  <a:lnTo>
+                    <a:pt x="633100" y="285671"/>
+                  </a:lnTo>
+                  <a:lnTo>
+                    <a:pt x="703444" y="312929"/>
+                  </a:lnTo>
+                  <a:lnTo>
+                    <a:pt x="773789" y="339385"/>
+                  </a:lnTo>
+                  <a:lnTo>
+                    <a:pt x="844133" y="365063"/>
+                  </a:lnTo>
+                  <a:lnTo>
+                    <a:pt x="914478" y="389985"/>
+                  </a:lnTo>
+                  <a:lnTo>
+                    <a:pt x="984822" y="414175"/>
+                  </a:lnTo>
+                  <a:lnTo>
+                    <a:pt x="1055167" y="437652"/>
+                  </a:lnTo>
+                  <a:lnTo>
+                    <a:pt x="1125511" y="460439"/>
+                  </a:lnTo>
+                  <a:lnTo>
+                    <a:pt x="1195856" y="482556"/>
+                  </a:lnTo>
+                  <a:lnTo>
+                    <a:pt x="1266200" y="504022"/>
+                  </a:lnTo>
+                  <a:lnTo>
+                    <a:pt x="1336545" y="524856"/>
+                  </a:lnTo>
+                  <a:lnTo>
+                    <a:pt x="1406889" y="545078"/>
+                  </a:lnTo>
+                  <a:lnTo>
+                    <a:pt x="1477234" y="564705"/>
+                  </a:lnTo>
+                  <a:lnTo>
+                    <a:pt x="1547578" y="583754"/>
+                  </a:lnTo>
+                  <a:lnTo>
+                    <a:pt x="1617923" y="602243"/>
+                  </a:lnTo>
+                  <a:lnTo>
+                    <a:pt x="1688267" y="620188"/>
+                  </a:lnTo>
+                  <a:lnTo>
+                    <a:pt x="1758612" y="637605"/>
+                  </a:lnTo>
+                  <a:lnTo>
+                    <a:pt x="1828956" y="654510"/>
+                  </a:lnTo>
+                  <a:lnTo>
+                    <a:pt x="1899301" y="670918"/>
+                  </a:lnTo>
+                  <a:lnTo>
+                    <a:pt x="1969645" y="686842"/>
+                  </a:lnTo>
+                  <a:lnTo>
+                    <a:pt x="2039990" y="702299"/>
+                  </a:lnTo>
+                  <a:lnTo>
+                    <a:pt x="2110334" y="717300"/>
+                  </a:lnTo>
+                  <a:lnTo>
+                    <a:pt x="2180679" y="731861"/>
+                  </a:lnTo>
+                  <a:lnTo>
+                    <a:pt x="2251023" y="745993"/>
+                  </a:lnTo>
+                  <a:lnTo>
+                    <a:pt x="2321368" y="759709"/>
+                  </a:lnTo>
+                  <a:lnTo>
+                    <a:pt x="2391712" y="773021"/>
+                  </a:lnTo>
+                  <a:lnTo>
+                    <a:pt x="2462057" y="785942"/>
+                  </a:lnTo>
+                  <a:lnTo>
+                    <a:pt x="2532401" y="798483"/>
+                  </a:lnTo>
+                  <a:lnTo>
+                    <a:pt x="2602746" y="810655"/>
+                  </a:lnTo>
+                  <a:lnTo>
+                    <a:pt x="2673090" y="822469"/>
+                  </a:lnTo>
+                  <a:lnTo>
+                    <a:pt x="2743435" y="833936"/>
+                  </a:lnTo>
+                  <a:lnTo>
+                    <a:pt x="2813779" y="845065"/>
+                  </a:lnTo>
+                  <a:lnTo>
+                    <a:pt x="2884124" y="855867"/>
+                  </a:lnTo>
+                  <a:lnTo>
+                    <a:pt x="2954468" y="866350"/>
+                  </a:lnTo>
+                  <a:lnTo>
+                    <a:pt x="3024813" y="876526"/>
+                  </a:lnTo>
+                  <a:lnTo>
+                    <a:pt x="3095157" y="886402"/>
+                  </a:lnTo>
+                  <a:lnTo>
+                    <a:pt x="3165502" y="895988"/>
+                  </a:lnTo>
+                  <a:lnTo>
+                    <a:pt x="3235846" y="905291"/>
+                  </a:lnTo>
+                  <a:lnTo>
+                    <a:pt x="3306191" y="914321"/>
+                  </a:lnTo>
+                  <a:lnTo>
+                    <a:pt x="3376535" y="923086"/>
+                  </a:lnTo>
+                  <a:lnTo>
+                    <a:pt x="3446880" y="931592"/>
+                  </a:lnTo>
+                  <a:lnTo>
+                    <a:pt x="3517224" y="939848"/>
+                  </a:lnTo>
+                  <a:lnTo>
+                    <a:pt x="3587569" y="947862"/>
+                  </a:lnTo>
+                  <a:lnTo>
+                    <a:pt x="3657913" y="955639"/>
+                  </a:lnTo>
+                  <a:lnTo>
+                    <a:pt x="3728257" y="963188"/>
+                  </a:lnTo>
+                  <a:lnTo>
+                    <a:pt x="3798602" y="970515"/>
+                  </a:lnTo>
+                  <a:lnTo>
+                    <a:pt x="3868946" y="977626"/>
+                  </a:lnTo>
+                  <a:lnTo>
+                    <a:pt x="3939291" y="984528"/>
+                  </a:lnTo>
+                  <a:lnTo>
+                    <a:pt x="4009635" y="991227"/>
+                  </a:lnTo>
+                  <a:lnTo>
+                    <a:pt x="4079980" y="997729"/>
+                  </a:lnTo>
+                  <a:lnTo>
+                    <a:pt x="4150324" y="1004039"/>
+                  </a:lnTo>
+                  <a:lnTo>
+                    <a:pt x="4220669" y="1010164"/>
+                  </a:lnTo>
+                  <a:lnTo>
+                    <a:pt x="4291013" y="1016109"/>
+                  </a:lnTo>
+                  <a:lnTo>
+                    <a:pt x="4361358" y="1021879"/>
+                  </a:lnTo>
+                  <a:lnTo>
+                    <a:pt x="4431702" y="1027479"/>
+                  </a:lnTo>
+                  <a:lnTo>
+                    <a:pt x="4502047" y="1032914"/>
+                  </a:lnTo>
+                  <a:lnTo>
+                    <a:pt x="4572391" y="1038190"/>
+                  </a:lnTo>
+                  <a:lnTo>
+                    <a:pt x="4642736" y="1043310"/>
+                  </a:lnTo>
+                  <a:lnTo>
+                    <a:pt x="4713080" y="1048280"/>
+                  </a:lnTo>
+                  <a:lnTo>
+                    <a:pt x="4783425" y="1053103"/>
+                  </a:lnTo>
+                  <a:lnTo>
+                    <a:pt x="4853769" y="1057785"/>
+                  </a:lnTo>
+                  <a:lnTo>
+                    <a:pt x="4924114" y="1062329"/>
+                  </a:lnTo>
+                  <a:lnTo>
+                    <a:pt x="4994458" y="1066739"/>
+                  </a:lnTo>
+                  <a:lnTo>
+                    <a:pt x="5064803" y="1071019"/>
+                  </a:lnTo>
+                  <a:lnTo>
+                    <a:pt x="5135147" y="1075174"/>
+                  </a:lnTo>
+                  <a:lnTo>
+                    <a:pt x="5205492" y="1079206"/>
+                  </a:lnTo>
+                  <a:lnTo>
+                    <a:pt x="5275836" y="1083120"/>
+                  </a:lnTo>
+                  <a:lnTo>
+                    <a:pt x="5346181" y="1086918"/>
+                  </a:lnTo>
+                  <a:lnTo>
+                    <a:pt x="5416525" y="1090605"/>
+                  </a:lnTo>
+                  <a:lnTo>
+                    <a:pt x="5486870" y="1094183"/>
+                  </a:lnTo>
+                  <a:lnTo>
+                    <a:pt x="5557214" y="1097656"/>
+                  </a:lnTo>
+                  <a:lnTo>
+                    <a:pt x="5627559" y="1101027"/>
+                  </a:lnTo>
+                  <a:lnTo>
+                    <a:pt x="5697903" y="1104299"/>
+                  </a:lnTo>
+                  <a:lnTo>
+                    <a:pt x="5768248" y="1107475"/>
+                  </a:lnTo>
+                  <a:lnTo>
+                    <a:pt x="5838592" y="1110557"/>
+                  </a:lnTo>
+                  <a:lnTo>
+                    <a:pt x="5908937" y="1113548"/>
+                  </a:lnTo>
+                  <a:lnTo>
+                    <a:pt x="5979281" y="1116451"/>
+                  </a:lnTo>
+                  <a:lnTo>
+                    <a:pt x="6049626" y="1119269"/>
+                  </a:lnTo>
+                  <a:lnTo>
+                    <a:pt x="6119970" y="1122004"/>
+                  </a:lnTo>
+                  <a:lnTo>
+                    <a:pt x="6190315" y="1124659"/>
+                  </a:lnTo>
+                  <a:lnTo>
+                    <a:pt x="6260659" y="1127236"/>
+                  </a:lnTo>
+                  <a:lnTo>
+                    <a:pt x="6331004" y="1129736"/>
+                  </a:lnTo>
+                  <a:lnTo>
+                    <a:pt x="6401348" y="1132163"/>
+                  </a:lnTo>
+                  <a:lnTo>
+                    <a:pt x="6471693" y="1134519"/>
+                  </a:lnTo>
+                  <a:lnTo>
+                    <a:pt x="6542037" y="1136806"/>
+                  </a:lnTo>
+                  <a:lnTo>
+                    <a:pt x="6612382" y="1139025"/>
+                  </a:lnTo>
+                  <a:lnTo>
+                    <a:pt x="6682726" y="1141179"/>
+                  </a:lnTo>
+                  <a:lnTo>
+                    <a:pt x="6753071" y="1143269"/>
+                  </a:lnTo>
+                  <a:lnTo>
+                    <a:pt x="6823415" y="1145298"/>
+                  </a:lnTo>
+                  <a:lnTo>
+                    <a:pt x="6893760" y="1147268"/>
+                  </a:lnTo>
+                  <a:lnTo>
+                    <a:pt x="6964104" y="1149179"/>
+                  </a:lnTo>
+                </a:path>
+              </a:pathLst>
+            </a:custGeom>
+            <a:ln w="27101" cap="flat">
+              <a:solidFill>
+                <a:srgbClr val="FF8C00">
+                  <a:alpha val="100000"/>
+                </a:srgbClr>
+              </a:solidFill>
+              <a:prstDash val="solid"/>
+              <a:round/>
+            </a:ln>
+          </p:spPr>
+          <p:txBody>
+            <a:bodyPr/>
+            <a:lstStyle/>
+            <a:p/>
+          </p:txBody>
+        </p:sp>
+        <p:sp>
+          <p:nvSpPr>
+            <p:cNvPr id="71" name="pl71"/>
+            <p:cNvSpPr/>
+            <p:nvPr/>
+          </p:nvSpPr>
+          <p:spPr>
+            <a:xfrm>
+              <a:off x="887106" y="5294352"/>
+              <a:ext cx="7660515" cy="0"/>
+            </a:xfrm>
+            <a:custGeom>
+              <a:avLst/>
+              <a:pathLst>
+                <a:path w="7660515" h="0">
+                  <a:moveTo>
+                    <a:pt x="0" y="0"/>
+                  </a:moveTo>
+                  <a:lnTo>
+                    <a:pt x="7660515" y="0"/>
+                  </a:lnTo>
+                  <a:lnTo>
+                    <a:pt x="7660515" y="0"/>
+                  </a:lnTo>
+                </a:path>
+              </a:pathLst>
+            </a:custGeom>
+            <a:ln w="13550" cap="flat">
+              <a:solidFill>
+                <a:srgbClr val="7F7F7F">
+                  <a:alpha val="100000"/>
+                </a:srgbClr>
+              </a:solidFill>
+              <a:prstDash val="dash"/>
+              <a:round/>
+            </a:ln>
+          </p:spPr>
+          <p:txBody>
+            <a:bodyPr/>
+            <a:lstStyle/>
+            <a:p/>
+          </p:txBody>
+        </p:sp>
+        <p:sp>
+          <p:nvSpPr>
+            <p:cNvPr id="72" name="pl72"/>
+            <p:cNvSpPr/>
+            <p:nvPr/>
+          </p:nvSpPr>
+          <p:spPr>
+            <a:xfrm>
+              <a:off x="4530353" y="4336484"/>
+              <a:ext cx="0" cy="1317069"/>
+            </a:xfrm>
+            <a:custGeom>
+              <a:avLst/>
+              <a:pathLst>
+                <a:path w="0" h="1317069">
+                  <a:moveTo>
+                    <a:pt x="0" y="1317069"/>
+                  </a:moveTo>
+                  <a:lnTo>
+                    <a:pt x="0" y="0"/>
+                  </a:lnTo>
+                  <a:lnTo>
+                    <a:pt x="0" y="0"/>
+                  </a:lnTo>
+                </a:path>
+              </a:pathLst>
+            </a:custGeom>
+            <a:ln w="13550" cap="flat">
+              <a:solidFill>
+                <a:srgbClr val="666666">
+                  <a:alpha val="100000"/>
+                </a:srgbClr>
+              </a:solidFill>
+              <a:prstDash val="dot"/>
+              <a:round/>
+            </a:ln>
+          </p:spPr>
+          <p:txBody>
+            <a:bodyPr/>
+            <a:lstStyle/>
+            <a:p/>
+          </p:txBody>
+        </p:sp>
+        <p:sp>
+          <p:nvSpPr>
+            <p:cNvPr id="73" name="tx73"/>
+            <p:cNvSpPr/>
+            <p:nvPr/>
+          </p:nvSpPr>
+          <p:spPr>
+            <a:xfrm>
+              <a:off x="762297" y="5553636"/>
+              <a:ext cx="62179" cy="80101"/>
+            </a:xfrm>
+            <a:prstGeom prst="rect">
+              <a:avLst/>
+            </a:prstGeom>
+            <a:noFill/>
+          </p:spPr>
+          <p:txBody>
+            <a:bodyPr lIns="0" rIns="0" tIns="0" bIns="0" anchorCtr="1" anchor="ctr" wrap="none"/>
+            <a:lstStyle/>
+            <a:p>
+              <a:pPr algn="l" marL="0" marR="0" indent="0">
+                <a:lnSpc>
+                  <a:spcPts val="880"/>
+                </a:lnSpc>
+                <a:spcBef>
+                  <a:spcPts val="0"/>
+                </a:spcBef>
+                <a:spcAft>
+                  <a:spcPts val="0"/>
+                </a:spcAft>
+              </a:pPr>
+              <a:r>
+                <a:rPr sz="880">
+                  <a:solidFill>
+                    <a:srgbClr val="4D4D4D">
+                      <a:alpha val="100000"/>
+                    </a:srgbClr>
+                  </a:solidFill>
+                  <a:latin typeface="Helvetica"/>
+                  <a:cs typeface="Helvetica"/>
+                </a:rPr>
+                <a:t>0</a:t>
+              </a:r>
+            </a:p>
+          </p:txBody>
+        </p:sp>
+        <p:sp>
+          <p:nvSpPr>
+            <p:cNvPr id="74" name="tx74"/>
+            <p:cNvSpPr/>
+            <p:nvPr/>
+          </p:nvSpPr>
+          <p:spPr>
+            <a:xfrm>
+              <a:off x="762297" y="5254302"/>
+              <a:ext cx="62179" cy="80101"/>
+            </a:xfrm>
+            <a:prstGeom prst="rect">
+              <a:avLst/>
+            </a:prstGeom>
+            <a:noFill/>
+          </p:spPr>
+          <p:txBody>
+            <a:bodyPr lIns="0" rIns="0" tIns="0" bIns="0" anchorCtr="1" anchor="ctr" wrap="none"/>
+            <a:lstStyle/>
+            <a:p>
+              <a:pPr algn="l" marL="0" marR="0" indent="0">
+                <a:lnSpc>
+                  <a:spcPts val="880"/>
+                </a:lnSpc>
+                <a:spcBef>
+                  <a:spcPts val="0"/>
+                </a:spcBef>
+                <a:spcAft>
+                  <a:spcPts val="0"/>
+                </a:spcAft>
+              </a:pPr>
+              <a:r>
+                <a:rPr sz="880">
+                  <a:solidFill>
+                    <a:srgbClr val="4D4D4D">
+                      <a:alpha val="100000"/>
+                    </a:srgbClr>
+                  </a:solidFill>
+                  <a:latin typeface="Helvetica"/>
+                  <a:cs typeface="Helvetica"/>
+                </a:rPr>
+                <a:t>1</a:t>
+              </a:r>
+            </a:p>
+          </p:txBody>
+        </p:sp>
+        <p:sp>
+          <p:nvSpPr>
+            <p:cNvPr id="75" name="tx75"/>
+            <p:cNvSpPr/>
+            <p:nvPr/>
+          </p:nvSpPr>
+          <p:spPr>
+            <a:xfrm>
+              <a:off x="762297" y="4954968"/>
+              <a:ext cx="62179" cy="80101"/>
+            </a:xfrm>
+            <a:prstGeom prst="rect">
+              <a:avLst/>
+            </a:prstGeom>
+            <a:noFill/>
+          </p:spPr>
+          <p:txBody>
+            <a:bodyPr lIns="0" rIns="0" tIns="0" bIns="0" anchorCtr="1" anchor="ctr" wrap="none"/>
+            <a:lstStyle/>
+            <a:p>
+              <a:pPr algn="l" marL="0" marR="0" indent="0">
+                <a:lnSpc>
+                  <a:spcPts val="880"/>
+                </a:lnSpc>
+                <a:spcBef>
+                  <a:spcPts val="0"/>
+                </a:spcBef>
+                <a:spcAft>
+                  <a:spcPts val="0"/>
+                </a:spcAft>
+              </a:pPr>
+              <a:r>
+                <a:rPr sz="880">
+                  <a:solidFill>
+                    <a:srgbClr val="4D4D4D">
+                      <a:alpha val="100000"/>
+                    </a:srgbClr>
+                  </a:solidFill>
+                  <a:latin typeface="Helvetica"/>
+                  <a:cs typeface="Helvetica"/>
+                </a:rPr>
+                <a:t>2</a:t>
+              </a:r>
+            </a:p>
+          </p:txBody>
+        </p:sp>
+        <p:sp>
+          <p:nvSpPr>
+            <p:cNvPr id="76" name="tx76"/>
+            <p:cNvSpPr/>
+            <p:nvPr/>
+          </p:nvSpPr>
+          <p:spPr>
+            <a:xfrm>
+              <a:off x="762297" y="4655634"/>
+              <a:ext cx="62179" cy="80101"/>
+            </a:xfrm>
+            <a:prstGeom prst="rect">
+              <a:avLst/>
+            </a:prstGeom>
+            <a:noFill/>
+          </p:spPr>
+          <p:txBody>
+            <a:bodyPr lIns="0" rIns="0" tIns="0" bIns="0" anchorCtr="1" anchor="ctr" wrap="none"/>
+            <a:lstStyle/>
+            <a:p>
+              <a:pPr algn="l" marL="0" marR="0" indent="0">
+                <a:lnSpc>
+                  <a:spcPts val="880"/>
+                </a:lnSpc>
+                <a:spcBef>
+                  <a:spcPts val="0"/>
+                </a:spcBef>
+                <a:spcAft>
+                  <a:spcPts val="0"/>
+                </a:spcAft>
+              </a:pPr>
+              <a:r>
+                <a:rPr sz="880">
+                  <a:solidFill>
+                    <a:srgbClr val="4D4D4D">
+                      <a:alpha val="100000"/>
+                    </a:srgbClr>
+                  </a:solidFill>
+                  <a:latin typeface="Helvetica"/>
+                  <a:cs typeface="Helvetica"/>
+                </a:rPr>
+                <a:t>3</a:t>
+              </a:r>
+            </a:p>
+          </p:txBody>
+        </p:sp>
+        <p:sp>
+          <p:nvSpPr>
+            <p:cNvPr id="77" name="tx77"/>
+            <p:cNvSpPr/>
+            <p:nvPr/>
+          </p:nvSpPr>
+          <p:spPr>
+            <a:xfrm>
+              <a:off x="762297" y="4356300"/>
+              <a:ext cx="62179" cy="80101"/>
+            </a:xfrm>
+            <a:prstGeom prst="rect">
+              <a:avLst/>
+            </a:prstGeom>
+            <a:noFill/>
+          </p:spPr>
+          <p:txBody>
+            <a:bodyPr lIns="0" rIns="0" tIns="0" bIns="0" anchorCtr="1" anchor="ctr" wrap="none"/>
+            <a:lstStyle/>
+            <a:p>
+              <a:pPr algn="l" marL="0" marR="0" indent="0">
+                <a:lnSpc>
+                  <a:spcPts val="880"/>
+                </a:lnSpc>
+                <a:spcBef>
+                  <a:spcPts val="0"/>
+                </a:spcBef>
+                <a:spcAft>
+                  <a:spcPts val="0"/>
+                </a:spcAft>
+              </a:pPr>
+              <a:r>
+                <a:rPr sz="880">
+                  <a:solidFill>
+                    <a:srgbClr val="4D4D4D">
+                      <a:alpha val="100000"/>
+                    </a:srgbClr>
+                  </a:solidFill>
+                  <a:latin typeface="Helvetica"/>
+                  <a:cs typeface="Helvetica"/>
+                </a:rPr>
+                <a:t>4</a:t>
+              </a:r>
+            </a:p>
+          </p:txBody>
+        </p:sp>
+        <p:sp>
+          <p:nvSpPr>
+            <p:cNvPr id="78" name="tx78"/>
+            <p:cNvSpPr/>
+            <p:nvPr/>
+          </p:nvSpPr>
+          <p:spPr>
+            <a:xfrm>
+              <a:off x="1241001" y="5716183"/>
+              <a:ext cx="161574" cy="80101"/>
+            </a:xfrm>
+            <a:prstGeom prst="rect">
+              <a:avLst/>
+            </a:prstGeom>
+            <a:noFill/>
+          </p:spPr>
+          <p:txBody>
+            <a:bodyPr lIns="0" rIns="0" tIns="0" bIns="0" anchorCtr="1" anchor="ctr" wrap="none"/>
+            <a:lstStyle/>
+            <a:p>
+              <a:pPr algn="l" marL="0" marR="0" indent="0">
+                <a:lnSpc>
+                  <a:spcPts val="880"/>
+                </a:lnSpc>
+                <a:spcBef>
+                  <a:spcPts val="0"/>
+                </a:spcBef>
+                <a:spcAft>
+                  <a:spcPts val="0"/>
+                </a:spcAft>
+              </a:pPr>
+              <a:r>
+                <a:rPr sz="880">
+                  <a:solidFill>
+                    <a:srgbClr val="4D4D4D">
+                      <a:alpha val="100000"/>
+                    </a:srgbClr>
+                  </a:solidFill>
+                  <a:latin typeface="Helvetica"/>
+                  <a:cs typeface="Helvetica"/>
+                </a:rPr>
+                <a:t>-40</a:t>
+              </a:r>
+            </a:p>
+          </p:txBody>
+        </p:sp>
+        <p:sp>
+          <p:nvSpPr>
+            <p:cNvPr id="79" name="tx79"/>
+            <p:cNvSpPr/>
+            <p:nvPr/>
+          </p:nvSpPr>
+          <p:spPr>
+            <a:xfrm>
+              <a:off x="2054602" y="5716183"/>
+              <a:ext cx="161574" cy="80101"/>
+            </a:xfrm>
+            <a:prstGeom prst="rect">
+              <a:avLst/>
+            </a:prstGeom>
+            <a:noFill/>
+          </p:spPr>
+          <p:txBody>
+            <a:bodyPr lIns="0" rIns="0" tIns="0" bIns="0" anchorCtr="1" anchor="ctr" wrap="none"/>
+            <a:lstStyle/>
+            <a:p>
+              <a:pPr algn="l" marL="0" marR="0" indent="0">
+                <a:lnSpc>
+                  <a:spcPts val="880"/>
+                </a:lnSpc>
+                <a:spcBef>
+                  <a:spcPts val="0"/>
+                </a:spcBef>
+                <a:spcAft>
+                  <a:spcPts val="0"/>
+                </a:spcAft>
+              </a:pPr>
+              <a:r>
+                <a:rPr sz="880">
+                  <a:solidFill>
+                    <a:srgbClr val="4D4D4D">
+                      <a:alpha val="100000"/>
+                    </a:srgbClr>
+                  </a:solidFill>
+                  <a:latin typeface="Helvetica"/>
+                  <a:cs typeface="Helvetica"/>
+                </a:rPr>
+                <a:t>-30</a:t>
+              </a:r>
+            </a:p>
+          </p:txBody>
+        </p:sp>
+        <p:sp>
+          <p:nvSpPr>
+            <p:cNvPr id="80" name="tx80"/>
+            <p:cNvSpPr/>
+            <p:nvPr/>
+          </p:nvSpPr>
+          <p:spPr>
+            <a:xfrm>
+              <a:off x="2868203" y="5716183"/>
+              <a:ext cx="161574" cy="80101"/>
+            </a:xfrm>
+            <a:prstGeom prst="rect">
+              <a:avLst/>
+            </a:prstGeom>
+            <a:noFill/>
+          </p:spPr>
+          <p:txBody>
+            <a:bodyPr lIns="0" rIns="0" tIns="0" bIns="0" anchorCtr="1" anchor="ctr" wrap="none"/>
+            <a:lstStyle/>
+            <a:p>
+              <a:pPr algn="l" marL="0" marR="0" indent="0">
+                <a:lnSpc>
+                  <a:spcPts val="880"/>
+                </a:lnSpc>
+                <a:spcBef>
+                  <a:spcPts val="0"/>
+                </a:spcBef>
+                <a:spcAft>
+                  <a:spcPts val="0"/>
+                </a:spcAft>
+              </a:pPr>
+              <a:r>
+                <a:rPr sz="880">
+                  <a:solidFill>
+                    <a:srgbClr val="4D4D4D">
+                      <a:alpha val="100000"/>
+                    </a:srgbClr>
+                  </a:solidFill>
+                  <a:latin typeface="Helvetica"/>
+                  <a:cs typeface="Helvetica"/>
+                </a:rPr>
+                <a:t>-20</a:t>
+              </a:r>
+            </a:p>
+          </p:txBody>
+        </p:sp>
+        <p:sp>
+          <p:nvSpPr>
+            <p:cNvPr id="81" name="tx81"/>
+            <p:cNvSpPr/>
+            <p:nvPr/>
+          </p:nvSpPr>
+          <p:spPr>
+            <a:xfrm>
+              <a:off x="3681805" y="5716183"/>
+              <a:ext cx="161574" cy="80101"/>
+            </a:xfrm>
+            <a:prstGeom prst="rect">
+              <a:avLst/>
+            </a:prstGeom>
+            <a:noFill/>
+          </p:spPr>
+          <p:txBody>
+            <a:bodyPr lIns="0" rIns="0" tIns="0" bIns="0" anchorCtr="1" anchor="ctr" wrap="none"/>
+            <a:lstStyle/>
+            <a:p>
+              <a:pPr algn="l" marL="0" marR="0" indent="0">
+                <a:lnSpc>
+                  <a:spcPts val="880"/>
+                </a:lnSpc>
+                <a:spcBef>
+                  <a:spcPts val="0"/>
+                </a:spcBef>
+                <a:spcAft>
+                  <a:spcPts val="0"/>
+                </a:spcAft>
+              </a:pPr>
+              <a:r>
+                <a:rPr sz="880">
+                  <a:solidFill>
+                    <a:srgbClr val="4D4D4D">
+                      <a:alpha val="100000"/>
+                    </a:srgbClr>
+                  </a:solidFill>
+                  <a:latin typeface="Helvetica"/>
+                  <a:cs typeface="Helvetica"/>
+                </a:rPr>
+                <a:t>-10</a:t>
+              </a:r>
+            </a:p>
+          </p:txBody>
+        </p:sp>
+        <p:sp>
+          <p:nvSpPr>
+            <p:cNvPr id="82" name="tx82"/>
+            <p:cNvSpPr/>
+            <p:nvPr/>
+          </p:nvSpPr>
+          <p:spPr>
+            <a:xfrm>
+              <a:off x="4545104" y="5716183"/>
+              <a:ext cx="62179" cy="80101"/>
+            </a:xfrm>
+            <a:prstGeom prst="rect">
+              <a:avLst/>
+            </a:prstGeom>
+            <a:noFill/>
+          </p:spPr>
+          <p:txBody>
+            <a:bodyPr lIns="0" rIns="0" tIns="0" bIns="0" anchorCtr="1" anchor="ctr" wrap="none"/>
+            <a:lstStyle/>
+            <a:p>
+              <a:pPr algn="l" marL="0" marR="0" indent="0">
+                <a:lnSpc>
+                  <a:spcPts val="880"/>
+                </a:lnSpc>
+                <a:spcBef>
+                  <a:spcPts val="0"/>
+                </a:spcBef>
+                <a:spcAft>
+                  <a:spcPts val="0"/>
+                </a:spcAft>
+              </a:pPr>
+              <a:r>
+                <a:rPr sz="880">
+                  <a:solidFill>
+                    <a:srgbClr val="4D4D4D">
+                      <a:alpha val="100000"/>
+                    </a:srgbClr>
+                  </a:solidFill>
+                  <a:latin typeface="Helvetica"/>
+                  <a:cs typeface="Helvetica"/>
+                </a:rPr>
+                <a:t>0</a:t>
+              </a:r>
+            </a:p>
+          </p:txBody>
+        </p:sp>
+        <p:sp>
+          <p:nvSpPr>
+            <p:cNvPr id="83" name="tx83"/>
+            <p:cNvSpPr/>
+            <p:nvPr/>
+          </p:nvSpPr>
+          <p:spPr>
+            <a:xfrm>
+              <a:off x="5327615" y="5716183"/>
+              <a:ext cx="124358" cy="80101"/>
+            </a:xfrm>
+            <a:prstGeom prst="rect">
+              <a:avLst/>
+            </a:prstGeom>
+            <a:noFill/>
+          </p:spPr>
+          <p:txBody>
+            <a:bodyPr lIns="0" rIns="0" tIns="0" bIns="0" anchorCtr="1" anchor="ctr" wrap="none"/>
+            <a:lstStyle/>
+            <a:p>
+              <a:pPr algn="l" marL="0" marR="0" indent="0">
+                <a:lnSpc>
+                  <a:spcPts val="880"/>
+                </a:lnSpc>
+                <a:spcBef>
+                  <a:spcPts val="0"/>
+                </a:spcBef>
+                <a:spcAft>
+                  <a:spcPts val="0"/>
+                </a:spcAft>
+              </a:pPr>
+              <a:r>
+                <a:rPr sz="880">
+                  <a:solidFill>
+                    <a:srgbClr val="4D4D4D">
+                      <a:alpha val="100000"/>
+                    </a:srgbClr>
+                  </a:solidFill>
+                  <a:latin typeface="Helvetica"/>
+                  <a:cs typeface="Helvetica"/>
+                </a:rPr>
+                <a:t>10</a:t>
+              </a:r>
+            </a:p>
+          </p:txBody>
+        </p:sp>
+        <p:sp>
+          <p:nvSpPr>
+            <p:cNvPr id="84" name="tx84"/>
+            <p:cNvSpPr/>
+            <p:nvPr/>
+          </p:nvSpPr>
+          <p:spPr>
+            <a:xfrm>
+              <a:off x="6141217" y="5716183"/>
+              <a:ext cx="124358" cy="80101"/>
+            </a:xfrm>
+            <a:prstGeom prst="rect">
+              <a:avLst/>
+            </a:prstGeom>
+            <a:noFill/>
+          </p:spPr>
+          <p:txBody>
+            <a:bodyPr lIns="0" rIns="0" tIns="0" bIns="0" anchorCtr="1" anchor="ctr" wrap="none"/>
+            <a:lstStyle/>
+            <a:p>
+              <a:pPr algn="l" marL="0" marR="0" indent="0">
+                <a:lnSpc>
+                  <a:spcPts val="880"/>
+                </a:lnSpc>
+                <a:spcBef>
+                  <a:spcPts val="0"/>
+                </a:spcBef>
+                <a:spcAft>
+                  <a:spcPts val="0"/>
+                </a:spcAft>
+              </a:pPr>
+              <a:r>
+                <a:rPr sz="880">
+                  <a:solidFill>
+                    <a:srgbClr val="4D4D4D">
+                      <a:alpha val="100000"/>
+                    </a:srgbClr>
+                  </a:solidFill>
+                  <a:latin typeface="Helvetica"/>
+                  <a:cs typeface="Helvetica"/>
+                </a:rPr>
+                <a:t>20</a:t>
+              </a:r>
+            </a:p>
+          </p:txBody>
+        </p:sp>
+        <p:sp>
+          <p:nvSpPr>
+            <p:cNvPr id="85" name="tx85"/>
+            <p:cNvSpPr/>
+            <p:nvPr/>
+          </p:nvSpPr>
+          <p:spPr>
+            <a:xfrm>
+              <a:off x="6954818" y="5716183"/>
+              <a:ext cx="124358" cy="80101"/>
+            </a:xfrm>
+            <a:prstGeom prst="rect">
+              <a:avLst/>
+            </a:prstGeom>
+            <a:noFill/>
+          </p:spPr>
+          <p:txBody>
+            <a:bodyPr lIns="0" rIns="0" tIns="0" bIns="0" anchorCtr="1" anchor="ctr" wrap="none"/>
+            <a:lstStyle/>
+            <a:p>
+              <a:pPr algn="l" marL="0" marR="0" indent="0">
+                <a:lnSpc>
+                  <a:spcPts val="880"/>
+                </a:lnSpc>
+                <a:spcBef>
+                  <a:spcPts val="0"/>
+                </a:spcBef>
+                <a:spcAft>
+                  <a:spcPts val="0"/>
+                </a:spcAft>
+              </a:pPr>
+              <a:r>
+                <a:rPr sz="880">
+                  <a:solidFill>
+                    <a:srgbClr val="4D4D4D">
+                      <a:alpha val="100000"/>
+                    </a:srgbClr>
+                  </a:solidFill>
+                  <a:latin typeface="Helvetica"/>
+                  <a:cs typeface="Helvetica"/>
+                </a:rPr>
+                <a:t>30</a:t>
+              </a:r>
+            </a:p>
+          </p:txBody>
+        </p:sp>
+        <p:sp>
+          <p:nvSpPr>
+            <p:cNvPr id="86" name="tx86"/>
+            <p:cNvSpPr/>
+            <p:nvPr/>
+          </p:nvSpPr>
+          <p:spPr>
+            <a:xfrm>
+              <a:off x="7768419" y="5716183"/>
+              <a:ext cx="124358" cy="80101"/>
+            </a:xfrm>
+            <a:prstGeom prst="rect">
+              <a:avLst/>
+            </a:prstGeom>
+            <a:noFill/>
+          </p:spPr>
+          <p:txBody>
+            <a:bodyPr lIns="0" rIns="0" tIns="0" bIns="0" anchorCtr="1" anchor="ctr" wrap="none"/>
+            <a:lstStyle/>
+            <a:p>
+              <a:pPr algn="l" marL="0" marR="0" indent="0">
+                <a:lnSpc>
+                  <a:spcPts val="880"/>
+                </a:lnSpc>
+                <a:spcBef>
+                  <a:spcPts val="0"/>
+                </a:spcBef>
+                <a:spcAft>
+                  <a:spcPts val="0"/>
+                </a:spcAft>
+              </a:pPr>
+              <a:r>
+                <a:rPr sz="880">
+                  <a:solidFill>
+                    <a:srgbClr val="4D4D4D">
+                      <a:alpha val="100000"/>
+                    </a:srgbClr>
+                  </a:solidFill>
+                  <a:latin typeface="Helvetica"/>
+                  <a:cs typeface="Helvetica"/>
+                </a:rPr>
+                <a:t>40</a:t>
+              </a:r>
+            </a:p>
+          </p:txBody>
+        </p:sp>
+        <p:sp>
+          <p:nvSpPr>
+            <p:cNvPr id="87" name="tx87"/>
+            <p:cNvSpPr/>
+            <p:nvPr/>
+          </p:nvSpPr>
+          <p:spPr>
+            <a:xfrm>
+              <a:off x="2928340" y="5855859"/>
+              <a:ext cx="3578047" cy="100218"/>
+            </a:xfrm>
+            <a:prstGeom prst="rect">
+              <a:avLst/>
+            </a:prstGeom>
+            <a:noFill/>
+          </p:spPr>
+          <p:txBody>
+            <a:bodyPr lIns="0" rIns="0" tIns="0" bIns="0" anchorCtr="1" anchor="ctr" wrap="none"/>
+            <a:lstStyle/>
+            <a:p>
+              <a:pPr algn="l" marL="0" marR="0" indent="0">
+                <a:lnSpc>
+                  <a:spcPts val="1100"/>
+                </a:lnSpc>
+                <a:spcBef>
+                  <a:spcPts val="0"/>
+                </a:spcBef>
+                <a:spcAft>
+                  <a:spcPts val="0"/>
+                </a:spcAft>
+              </a:pPr>
+              <a:r>
+                <a:rPr sz="1100">
+                  <a:solidFill>
+                    <a:srgbClr val="000000">
+                      <a:alpha val="100000"/>
+                    </a:srgbClr>
+                  </a:solidFill>
+                  <a:latin typeface="Helvetica"/>
+                  <a:cs typeface="Helvetica"/>
+                </a:rPr>
+                <a:t>eGFR difference (%): 100 × (CKD-EPI Cr-Cys − CG) / CG</a:t>
+              </a:r>
+            </a:p>
+          </p:txBody>
+        </p:sp>
+        <p:sp>
+          <p:nvSpPr>
+            <p:cNvPr id="88" name="tx88"/>
+            <p:cNvSpPr/>
+            <p:nvPr/>
+          </p:nvSpPr>
+          <p:spPr>
+            <a:xfrm rot="-5400000">
+              <a:off x="138035" y="4944909"/>
+              <a:ext cx="1016904" cy="100218"/>
+            </a:xfrm>
+            <a:prstGeom prst="rect">
+              <a:avLst/>
+            </a:prstGeom>
+            <a:noFill/>
+          </p:spPr>
+          <p:txBody>
+            <a:bodyPr lIns="0" rIns="0" tIns="0" bIns="0" anchorCtr="1" anchor="ctr" wrap="none"/>
+            <a:lstStyle/>
+            <a:p>
+              <a:pPr algn="l" marL="0" marR="0" indent="0">
+                <a:lnSpc>
+                  <a:spcPts val="1100"/>
+                </a:lnSpc>
+                <a:spcBef>
+                  <a:spcPts val="0"/>
+                </a:spcBef>
+                <a:spcAft>
+                  <a:spcPts val="0"/>
+                </a:spcAft>
+              </a:pPr>
+              <a:r>
+                <a:rPr sz="1100">
+                  <a:solidFill>
+                    <a:srgbClr val="000000">
+                      <a:alpha val="100000"/>
+                    </a:srgbClr>
+                  </a:solidFill>
+                  <a:latin typeface="Helvetica"/>
+                  <a:cs typeface="Helvetica"/>
+                </a:rPr>
+                <a:t>subHR (95% CI)</a:t>
+              </a:r>
+            </a:p>
+          </p:txBody>
+        </p:sp>
+        <p:sp>
+          <p:nvSpPr>
+            <p:cNvPr id="89" name="tx89"/>
+            <p:cNvSpPr/>
+            <p:nvPr/>
+          </p:nvSpPr>
+          <p:spPr>
+            <a:xfrm>
+              <a:off x="887106" y="4159544"/>
+              <a:ext cx="6388364" cy="82021"/>
+            </a:xfrm>
+            <a:prstGeom prst="rect">
+              <a:avLst/>
+            </a:prstGeom>
+            <a:noFill/>
+          </p:spPr>
+          <p:txBody>
+            <a:bodyPr lIns="0" rIns="0" tIns="0" bIns="0" anchorCtr="1" anchor="ctr" wrap="none"/>
+            <a:lstStyle/>
+            <a:p>
+              <a:pPr algn="l" marL="0" marR="0" indent="0">
+                <a:lnSpc>
+                  <a:spcPts val="900"/>
+                </a:lnSpc>
+                <a:spcBef>
+                  <a:spcPts val="0"/>
+                </a:spcBef>
+                <a:spcAft>
+                  <a:spcPts val="0"/>
+                </a:spcAft>
+              </a:pPr>
+              <a:r>
+                <a:rPr sz="900">
+                  <a:solidFill>
+                    <a:srgbClr val="404040">
+                      <a:alpha val="100000"/>
+                    </a:srgbClr>
+                  </a:solidFill>
+                  <a:latin typeface="Helvetica"/>
+                  <a:cs typeface="Helvetica"/>
+                </a:rPr>
+                <a:t>subHR per 10 % decline: 1.41 (1.18-1.69), p = &lt;0.001  |  per IQR decline (Δ = 29.9 %): 2.81 (1.64-4.81)  |  IQR: [-15.0, 14.9] %</a:t>
+              </a:r>
+            </a:p>
+          </p:txBody>
+        </p:sp>
+        <p:sp>
+          <p:nvSpPr>
+            <p:cNvPr id="90" name="tx90"/>
+            <p:cNvSpPr/>
+            <p:nvPr/>
+          </p:nvSpPr>
+          <p:spPr>
+            <a:xfrm>
+              <a:off x="887106" y="3932770"/>
               <a:ext cx="2197577" cy="120152"/>
             </a:xfrm>
             <a:prstGeom prst="rect">
